--- a/docs/public/course-assets/course-pptx/ov-004.pptx
+++ b/docs/public/course-assets/course-pptx/ov-004.pptx
@@ -2,26 +2,26 @@
 <file path=ppt/presentation.xml><?xml version="1.0" encoding="utf-8"?>
 <p:presentation xmlns:p="http://schemas.openxmlformats.org/presentationml/2006/main">
   <p:sldMasterIdLst>
-    <p:sldMasterId xmlns:r="http://schemas.openxmlformats.org/officeDocument/2006/relationships" id="2147483648" r:id="R42efcd2310c94f40"/>
+    <p:sldMasterId xmlns:r="http://schemas.openxmlformats.org/officeDocument/2006/relationships" id="2147483648" r:id="R36c77b8be7994fac"/>
   </p:sldMasterIdLst>
   <p:notesMasterIdLst>
-    <p:notesMasterId xmlns:r="http://schemas.openxmlformats.org/officeDocument/2006/relationships" r:id="R7f0bda1e40ec4fb7"/>
+    <p:notesMasterId xmlns:r="http://schemas.openxmlformats.org/officeDocument/2006/relationships" r:id="Rccbe95d83ce14627"/>
   </p:notesMasterIdLst>
   <p:sldIdLst>
-    <p:sldId xmlns:r="http://schemas.openxmlformats.org/officeDocument/2006/relationships" id="256" r:id="R5e8f53da2f354121"/>
-    <p:sldId xmlns:r="http://schemas.openxmlformats.org/officeDocument/2006/relationships" id="257" r:id="Rc056f532c5504e3b"/>
-    <p:sldId xmlns:r="http://schemas.openxmlformats.org/officeDocument/2006/relationships" id="258" r:id="R40ad21732cc04c23"/>
-    <p:sldId xmlns:r="http://schemas.openxmlformats.org/officeDocument/2006/relationships" id="259" r:id="R88e3abd1ef764363"/>
-    <p:sldId xmlns:r="http://schemas.openxmlformats.org/officeDocument/2006/relationships" id="260" r:id="Ra5fe23ce11db497d"/>
-    <p:sldId xmlns:r="http://schemas.openxmlformats.org/officeDocument/2006/relationships" id="261" r:id="Rf804175c946a4bd7"/>
-    <p:sldId xmlns:r="http://schemas.openxmlformats.org/officeDocument/2006/relationships" id="262" r:id="Re9d4e97436f045a0"/>
-    <p:sldId xmlns:r="http://schemas.openxmlformats.org/officeDocument/2006/relationships" id="263" r:id="Rd26c18add5be41b6"/>
-    <p:sldId xmlns:r="http://schemas.openxmlformats.org/officeDocument/2006/relationships" id="264" r:id="R70c46a7817af4618"/>
-    <p:sldId xmlns:r="http://schemas.openxmlformats.org/officeDocument/2006/relationships" id="265" r:id="R5cf8f7a0d3424024"/>
-    <p:sldId xmlns:r="http://schemas.openxmlformats.org/officeDocument/2006/relationships" id="266" r:id="R9d4a929965de471f"/>
-    <p:sldId xmlns:r="http://schemas.openxmlformats.org/officeDocument/2006/relationships" id="267" r:id="R5b5300ab908f4628"/>
-    <p:sldId xmlns:r="http://schemas.openxmlformats.org/officeDocument/2006/relationships" id="268" r:id="R5022e8eb88794d62"/>
-    <p:sldId xmlns:r="http://schemas.openxmlformats.org/officeDocument/2006/relationships" id="269" r:id="R9666670f81124f8b"/>
+    <p:sldId xmlns:r="http://schemas.openxmlformats.org/officeDocument/2006/relationships" id="256" r:id="R8b7129eea2c54cb9"/>
+    <p:sldId xmlns:r="http://schemas.openxmlformats.org/officeDocument/2006/relationships" id="257" r:id="Rdc3bc8cbd7254c37"/>
+    <p:sldId xmlns:r="http://schemas.openxmlformats.org/officeDocument/2006/relationships" id="258" r:id="R638934030d324634"/>
+    <p:sldId xmlns:r="http://schemas.openxmlformats.org/officeDocument/2006/relationships" id="259" r:id="Rb22a7033d98543a7"/>
+    <p:sldId xmlns:r="http://schemas.openxmlformats.org/officeDocument/2006/relationships" id="260" r:id="R93f18398494e423a"/>
+    <p:sldId xmlns:r="http://schemas.openxmlformats.org/officeDocument/2006/relationships" id="261" r:id="R117b481e4e5f4c6c"/>
+    <p:sldId xmlns:r="http://schemas.openxmlformats.org/officeDocument/2006/relationships" id="262" r:id="R8eb72f00d349435e"/>
+    <p:sldId xmlns:r="http://schemas.openxmlformats.org/officeDocument/2006/relationships" id="263" r:id="R50d0e658d82f48a5"/>
+    <p:sldId xmlns:r="http://schemas.openxmlformats.org/officeDocument/2006/relationships" id="264" r:id="Rfbcecc021e4d44ed"/>
+    <p:sldId xmlns:r="http://schemas.openxmlformats.org/officeDocument/2006/relationships" id="265" r:id="R55215e015276496b"/>
+    <p:sldId xmlns:r="http://schemas.openxmlformats.org/officeDocument/2006/relationships" id="266" r:id="Rfb8e589affe8414e"/>
+    <p:sldId xmlns:r="http://schemas.openxmlformats.org/officeDocument/2006/relationships" id="267" r:id="Re1fcdf5857b5405f"/>
+    <p:sldId xmlns:r="http://schemas.openxmlformats.org/officeDocument/2006/relationships" id="268" r:id="Rc6f8ad974eb04343"/>
+    <p:sldId xmlns:r="http://schemas.openxmlformats.org/officeDocument/2006/relationships" id="269" r:id="R88d4d807145b409a"/>
   </p:sldIdLst>
   <p:sldSz cx="12192000" cy="6858000"/>
   <p:notesSz cx="6858000" cy="9144000"/>
@@ -1472,7 +1472,7 @@
   </p:cSld>
   <p:clrMap bg1="lt1" tx1="dk1" bg2="lt2" tx2="dk2" accent1="accent1" accent2="accent2" accent3="accent3" accent4="accent4" accent5="accent5" accent6="accent6" hlink="hlink" folHlink="folHlink"/>
   <p:sldLayoutIdLst>
-    <p:sldLayoutId xmlns:r="http://schemas.openxmlformats.org/officeDocument/2006/relationships" id="2147483649" r:id="R45dc05998b6b4cdc"/>
+    <p:sldLayoutId xmlns:r="http://schemas.openxmlformats.org/officeDocument/2006/relationships" id="2147483649" r:id="Rbf60351e3f214e75"/>
   </p:sldLayoutIdLst>
   <p:txStyles>
     <p:titleStyle>
@@ -2023,7 +2023,7 @@
           <p:cNvPr id="1" name="cover-rule">
             <a:extLst xmlns:a="http://schemas.openxmlformats.org/drawingml/2006/main">
               <a:ext uri="{FF2B5EF4-FFF2-40B4-BE49-F238E27FC236}">
-                <a16:creationId xmlns:a16="http://schemas.microsoft.com/office/drawing/2014/main" id="{77259E55-BA91-4D4F-B9DB-20E6A14F738F}"/>
+                <a16:creationId xmlns:a16="http://schemas.microsoft.com/office/drawing/2014/main" id="{C7BC3E66-BDD2-4081-8CBB-5C834070A349}"/>
               </a:ext>
             </a:extLst>
           </p:cNvPr>
@@ -2056,7 +2056,7 @@
           <p:cNvPr id="2" name="cover-ring-1">
             <a:extLst xmlns:a="http://schemas.openxmlformats.org/drawingml/2006/main">
               <a:ext uri="{FF2B5EF4-FFF2-40B4-BE49-F238E27FC236}">
-                <a16:creationId xmlns:a16="http://schemas.microsoft.com/office/drawing/2014/main" id="{2D5EDA6A-C609-4B04-A162-F4637C8EFC1E}"/>
+                <a16:creationId xmlns:a16="http://schemas.microsoft.com/office/drawing/2014/main" id="{B9A03EAD-3841-41B5-A6B0-BC090E128F00}"/>
               </a:ext>
             </a:extLst>
           </p:cNvPr>
@@ -2087,7 +2087,7 @@
           <p:cNvPr id="3" name="cover-ring-2">
             <a:extLst xmlns:a="http://schemas.openxmlformats.org/drawingml/2006/main">
               <a:ext uri="{FF2B5EF4-FFF2-40B4-BE49-F238E27FC236}">
-                <a16:creationId xmlns:a16="http://schemas.microsoft.com/office/drawing/2014/main" id="{679C29A8-DFC9-476F-B79C-B0FADAB2D760}"/>
+                <a16:creationId xmlns:a16="http://schemas.microsoft.com/office/drawing/2014/main" id="{9FF87446-1E14-4088-B87C-71CE6D78C77C}"/>
               </a:ext>
             </a:extLst>
           </p:cNvPr>
@@ -2118,7 +2118,7 @@
           <p:cNvPr id="4" name="cover-core">
             <a:extLst xmlns:a="http://schemas.openxmlformats.org/drawingml/2006/main">
               <a:ext uri="{FF2B5EF4-FFF2-40B4-BE49-F238E27FC236}">
-                <a16:creationId xmlns:a16="http://schemas.microsoft.com/office/drawing/2014/main" id="{5993A643-CF1C-49AD-BE80-2D07F4EDDFD4}"/>
+                <a16:creationId xmlns:a16="http://schemas.microsoft.com/office/drawing/2014/main" id="{F9AC6FFB-537A-4609-B158-A7890BD03641}"/>
               </a:ext>
             </a:extLst>
           </p:cNvPr>
@@ -2151,7 +2151,7 @@
           <p:cNvPr id="5" name="cover-line-1">
             <a:extLst xmlns:a="http://schemas.openxmlformats.org/drawingml/2006/main">
               <a:ext uri="{FF2B5EF4-FFF2-40B4-BE49-F238E27FC236}">
-                <a16:creationId xmlns:a16="http://schemas.microsoft.com/office/drawing/2014/main" id="{ADF3884C-98F1-4946-8685-1EBD65FF22B8}"/>
+                <a16:creationId xmlns:a16="http://schemas.microsoft.com/office/drawing/2014/main" id="{42AB5617-5EAA-4F4A-BC60-2DEE2E0CB285}"/>
               </a:ext>
             </a:extLst>
           </p:cNvPr>
@@ -2182,7 +2182,7 @@
           <p:cNvPr id="6" name="cover-line-2">
             <a:extLst xmlns:a="http://schemas.openxmlformats.org/drawingml/2006/main">
               <a:ext uri="{FF2B5EF4-FFF2-40B4-BE49-F238E27FC236}">
-                <a16:creationId xmlns:a16="http://schemas.microsoft.com/office/drawing/2014/main" id="{8D12F1C3-06E7-4A6D-B00A-511F34648424}"/>
+                <a16:creationId xmlns:a16="http://schemas.microsoft.com/office/drawing/2014/main" id="{75693045-4762-4C54-84C4-5FEBED564713}"/>
               </a:ext>
             </a:extLst>
           </p:cNvPr>
@@ -2213,7 +2213,7 @@
           <p:cNvPr id="7" name="cover-eyebrow">
             <a:extLst xmlns:a="http://schemas.openxmlformats.org/drawingml/2006/main">
               <a:ext uri="{FF2B5EF4-FFF2-40B4-BE49-F238E27FC236}">
-                <a16:creationId xmlns:a16="http://schemas.microsoft.com/office/drawing/2014/main" id="{7EEAB374-2037-4523-BD73-4D889F404473}"/>
+                <a16:creationId xmlns:a16="http://schemas.microsoft.com/office/drawing/2014/main" id="{2EF834C6-9E9D-445E-824E-00215C51FB17}"/>
               </a:ext>
             </a:extLst>
           </p:cNvPr>
@@ -2271,7 +2271,7 @@
           <p:cNvPr id="8" name="cover-title">
             <a:extLst xmlns:a="http://schemas.openxmlformats.org/drawingml/2006/main">
               <a:ext uri="{FF2B5EF4-FFF2-40B4-BE49-F238E27FC236}">
-                <a16:creationId xmlns:a16="http://schemas.microsoft.com/office/drawing/2014/main" id="{54A3C955-910C-414C-8D84-F1295F32D9EC}"/>
+                <a16:creationId xmlns:a16="http://schemas.microsoft.com/office/drawing/2014/main" id="{FF14F037-18D8-4038-8131-D5E5F0EC8B53}"/>
               </a:ext>
             </a:extLst>
           </p:cNvPr>
@@ -2329,7 +2329,7 @@
           <p:cNvPr id="9" name="cover-subtitle">
             <a:extLst xmlns:a="http://schemas.openxmlformats.org/drawingml/2006/main">
               <a:ext uri="{FF2B5EF4-FFF2-40B4-BE49-F238E27FC236}">
-                <a16:creationId xmlns:a16="http://schemas.microsoft.com/office/drawing/2014/main" id="{BD7304A2-FF1F-4A36-A1A3-BEA1A7DB1C63}"/>
+                <a16:creationId xmlns:a16="http://schemas.microsoft.com/office/drawing/2014/main" id="{7CE74E68-CEDA-4643-B3B3-BCD079423BD5}"/>
               </a:ext>
             </a:extLst>
           </p:cNvPr>
@@ -2391,7 +2391,7 @@
           <p:cNvPr id="10" name="cover-lead">
             <a:extLst xmlns:a="http://schemas.openxmlformats.org/drawingml/2006/main">
               <a:ext uri="{FF2B5EF4-FFF2-40B4-BE49-F238E27FC236}">
-                <a16:creationId xmlns:a16="http://schemas.microsoft.com/office/drawing/2014/main" id="{DEFB4F95-AA25-40C0-BFB3-AE4411595B6A}"/>
+                <a16:creationId xmlns:a16="http://schemas.microsoft.com/office/drawing/2014/main" id="{E10608EB-E8C7-4F91-B21E-8C6E49E8B967}"/>
               </a:ext>
             </a:extLst>
           </p:cNvPr>
@@ -2439,7 +2439,7 @@
                 <a:ea typeface="PingFang SC"/>
                 <a:cs typeface="PingFang SC"/>
               </a:rPr>
-              <a:t>大模型不是一个孤立的新物种，而是机器学习、深度学习和预训练技术长期演进的结果。本节先把它放回 AI 技术谱系，再拆解 Transformer、训练与推理…</a:t>
+              <a:t>大模型不是一个孤立的新物种；而是机器学习、深度学习和预训练技术长期演进的结果；本节先把它放回 AI 技术谱系；再拆解 Transformer、训练与推理</a:t>
             </a:r>
           </a:p>
         </p:txBody>
@@ -2449,7 +2449,7 @@
           <p:cNvPr id="11" name="cover-course">
             <a:extLst xmlns:a="http://schemas.openxmlformats.org/drawingml/2006/main">
               <a:ext uri="{FF2B5EF4-FFF2-40B4-BE49-F238E27FC236}">
-                <a16:creationId xmlns:a16="http://schemas.microsoft.com/office/drawing/2014/main" id="{CC7A5610-A2C9-4640-9059-E61F014E19CD}"/>
+                <a16:creationId xmlns:a16="http://schemas.microsoft.com/office/drawing/2014/main" id="{E101D11F-1106-4B0A-BCE6-0D6A6BD582CD}"/>
               </a:ext>
             </a:extLst>
           </p:cNvPr>
@@ -2507,7 +2507,7 @@
           <p:cNvPr id="12" name="cover-id">
             <a:extLst xmlns:a="http://schemas.openxmlformats.org/drawingml/2006/main">
               <a:ext uri="{FF2B5EF4-FFF2-40B4-BE49-F238E27FC236}">
-                <a16:creationId xmlns:a16="http://schemas.microsoft.com/office/drawing/2014/main" id="{94F04D5F-A5F3-4B81-BFA2-FDD8E9DD5846}"/>
+                <a16:creationId xmlns:a16="http://schemas.microsoft.com/office/drawing/2014/main" id="{D138254C-2ED7-45AD-8DBB-0F6A7CF9C618}"/>
               </a:ext>
             </a:extLst>
           </p:cNvPr>
@@ -2563,7 +2563,7 @@
     </p:spTree>
     <p:extLst>
       <p:ext uri="{BB962C8B-B14F-4D97-AF65-F5344CB8AC3E}">
-        <p14:creationId xmlns:p14="http://schemas.microsoft.com/office/powerpoint/2010/main" val="680261815"/>
+        <p14:creationId xmlns:p14="http://schemas.microsoft.com/office/powerpoint/2010/main" val="1920289156"/>
       </p:ext>
     </p:extLst>
   </p:cSld>
@@ -2594,7 +2594,7 @@
           <p:cNvPr id="1" name="s10-rule">
             <a:extLst xmlns:a="http://schemas.openxmlformats.org/drawingml/2006/main">
               <a:ext uri="{FF2B5EF4-FFF2-40B4-BE49-F238E27FC236}">
-                <a16:creationId xmlns:a16="http://schemas.microsoft.com/office/drawing/2014/main" id="{62903AA1-7784-4313-B394-78B7D79FE4CA}"/>
+                <a16:creationId xmlns:a16="http://schemas.microsoft.com/office/drawing/2014/main" id="{57183205-CF2C-47A0-8789-47910564C911}"/>
               </a:ext>
             </a:extLst>
           </p:cNvPr>
@@ -2627,7 +2627,7 @@
           <p:cNvPr id="2" name="s10-eyebrow">
             <a:extLst xmlns:a="http://schemas.openxmlformats.org/drawingml/2006/main">
               <a:ext uri="{FF2B5EF4-FFF2-40B4-BE49-F238E27FC236}">
-                <a16:creationId xmlns:a16="http://schemas.microsoft.com/office/drawing/2014/main" id="{B4C8CACE-D649-40B0-BF2B-EF565AF0E02C}"/>
+                <a16:creationId xmlns:a16="http://schemas.microsoft.com/office/drawing/2014/main" id="{B527619B-08CD-4D6D-AF0A-D39B38CF9754}"/>
               </a:ext>
             </a:extLst>
           </p:cNvPr>
@@ -2685,7 +2685,7 @@
           <p:cNvPr id="3" name="s10-title">
             <a:extLst xmlns:a="http://schemas.openxmlformats.org/drawingml/2006/main">
               <a:ext uri="{FF2B5EF4-FFF2-40B4-BE49-F238E27FC236}">
-                <a16:creationId xmlns:a16="http://schemas.microsoft.com/office/drawing/2014/main" id="{FD71DA31-CA76-4E37-AC4B-287E4DDEAFEF}"/>
+                <a16:creationId xmlns:a16="http://schemas.microsoft.com/office/drawing/2014/main" id="{F3A45AB7-E056-4EAD-827B-814FD1765338}"/>
               </a:ext>
             </a:extLst>
           </p:cNvPr>
@@ -2743,7 +2743,7 @@
           <p:cNvPr id="4" name="s10-footer">
             <a:extLst xmlns:a="http://schemas.openxmlformats.org/drawingml/2006/main">
               <a:ext uri="{FF2B5EF4-FFF2-40B4-BE49-F238E27FC236}">
-                <a16:creationId xmlns:a16="http://schemas.microsoft.com/office/drawing/2014/main" id="{6816FFD2-EB29-4E37-9915-6C90D95DA280}"/>
+                <a16:creationId xmlns:a16="http://schemas.microsoft.com/office/drawing/2014/main" id="{6E1AA4E3-CC8E-463E-A0B4-DFA6CAB86A7A}"/>
               </a:ext>
             </a:extLst>
           </p:cNvPr>
@@ -2774,7 +2774,7 @@
           <p:cNvPr id="5" name="s10-identity">
             <a:extLst xmlns:a="http://schemas.openxmlformats.org/drawingml/2006/main">
               <a:ext uri="{FF2B5EF4-FFF2-40B4-BE49-F238E27FC236}">
-                <a16:creationId xmlns:a16="http://schemas.microsoft.com/office/drawing/2014/main" id="{65FBE763-6463-4137-B337-E086FB58CEE9}"/>
+                <a16:creationId xmlns:a16="http://schemas.microsoft.com/office/drawing/2014/main" id="{672A9EE5-9AF1-4058-8D84-B8BA156FFCDE}"/>
               </a:ext>
             </a:extLst>
           </p:cNvPr>
@@ -2832,7 +2832,7 @@
           <p:cNvPr id="6" name="case-title">
             <a:extLst xmlns:a="http://schemas.openxmlformats.org/drawingml/2006/main">
               <a:ext uri="{FF2B5EF4-FFF2-40B4-BE49-F238E27FC236}">
-                <a16:creationId xmlns:a16="http://schemas.microsoft.com/office/drawing/2014/main" id="{10DB917D-6C0A-495B-928A-0CFC6559E0DF}"/>
+                <a16:creationId xmlns:a16="http://schemas.microsoft.com/office/drawing/2014/main" id="{0A3C91C2-4B7F-4BB3-9E12-C7EB9C29ABB2}"/>
               </a:ext>
             </a:extLst>
           </p:cNvPr>
@@ -2896,23 +2896,23 @@
           <p:cNvPr id="7" name="case-row-0">
             <a:extLst xmlns:a="http://schemas.openxmlformats.org/drawingml/2006/main">
               <a:ext uri="{FF2B5EF4-FFF2-40B4-BE49-F238E27FC236}">
-                <a16:creationId xmlns:a16="http://schemas.microsoft.com/office/drawing/2014/main" id="{66C6BE58-AF03-444D-9E3C-C8FFFCBC4917}"/>
-              </a:ext>
-            </a:extLst>
-          </p:cNvPr>
-          <p:cNvSpPr>
-            <a:spLocks xmlns:a="http://schemas.openxmlformats.org/drawingml/2006/main" noGrp="1"/>
-          </p:cNvSpPr>
-          <p:nvPr/>
-        </p:nvSpPr>
-        <p:spPr>
-          <a:xfrm xmlns:a="http://schemas.openxmlformats.org/drawingml/2006/main">
-            <a:off x="4286250" y="2228850"/>
-            <a:ext cx="6534150" cy="1238250"/>
+                <a16:creationId xmlns:a16="http://schemas.microsoft.com/office/drawing/2014/main" id="{913334D5-2EEF-42D0-8822-9961033A7CCE}"/>
+              </a:ext>
+            </a:extLst>
+          </p:cNvPr>
+          <p:cNvSpPr>
+            <a:spLocks xmlns:a="http://schemas.openxmlformats.org/drawingml/2006/main" noGrp="1"/>
+          </p:cNvSpPr>
+          <p:nvPr/>
+        </p:nvSpPr>
+        <p:spPr>
+          <a:xfrm xmlns:a="http://schemas.openxmlformats.org/drawingml/2006/main">
+            <a:off x="4286250" y="2057400"/>
+            <a:ext cx="6534150" cy="838200"/>
           </a:xfrm>
           <a:prstGeom xmlns:a="http://schemas.openxmlformats.org/drawingml/2006/main" prst="roundRect">
             <a:avLst>
-              <a:gd name="adj" fmla="val 10000"/>
+              <a:gd name="adj" fmla="val 14773"/>
             </a:avLst>
           </a:prstGeom>
           <a:solidFill xmlns:a="http://schemas.openxmlformats.org/drawingml/2006/main">
@@ -2960,23 +2960,87 @@
           <p:cNvPr id="8" name="case-row-1">
             <a:extLst xmlns:a="http://schemas.openxmlformats.org/drawingml/2006/main">
               <a:ext uri="{FF2B5EF4-FFF2-40B4-BE49-F238E27FC236}">
-                <a16:creationId xmlns:a16="http://schemas.microsoft.com/office/drawing/2014/main" id="{85F0AB9C-8679-4011-8B90-B85451049909}"/>
-              </a:ext>
-            </a:extLst>
-          </p:cNvPr>
-          <p:cNvSpPr>
-            <a:spLocks xmlns:a="http://schemas.openxmlformats.org/drawingml/2006/main" noGrp="1"/>
-          </p:cNvSpPr>
-          <p:nvPr/>
-        </p:nvSpPr>
-        <p:spPr>
-          <a:xfrm xmlns:a="http://schemas.openxmlformats.org/drawingml/2006/main">
-            <a:off x="4286250" y="3714750"/>
-            <a:ext cx="6534150" cy="1238250"/>
+                <a16:creationId xmlns:a16="http://schemas.microsoft.com/office/drawing/2014/main" id="{B733417E-89E5-4F2C-A245-90799E2D7857}"/>
+              </a:ext>
+            </a:extLst>
+          </p:cNvPr>
+          <p:cNvSpPr>
+            <a:spLocks xmlns:a="http://schemas.openxmlformats.org/drawingml/2006/main" noGrp="1"/>
+          </p:cNvSpPr>
+          <p:nvPr/>
+        </p:nvSpPr>
+        <p:spPr>
+          <a:xfrm xmlns:a="http://schemas.openxmlformats.org/drawingml/2006/main">
+            <a:off x="4286250" y="3086100"/>
+            <a:ext cx="6534150" cy="838200"/>
           </a:xfrm>
           <a:prstGeom xmlns:a="http://schemas.openxmlformats.org/drawingml/2006/main" prst="roundRect">
             <a:avLst>
-              <a:gd name="adj" fmla="val 10000"/>
+              <a:gd name="adj" fmla="val 14773"/>
+            </a:avLst>
+          </a:prstGeom>
+          <a:solidFill xmlns:a="http://schemas.openxmlformats.org/drawingml/2006/main">
+            <a:srgbClr val="FFFFFF"/>
+          </a:solidFill>
+          <a:ln xmlns:a="http://schemas.openxmlformats.org/drawingml/2006/main" w="9525">
+            <a:solidFill>
+              <a:srgbClr val="D8E0E8"/>
+            </a:solidFill>
+            <a:prstDash val="solid"/>
+          </a:ln>
+        </p:spPr>
+        <p:txBody>
+          <a:bodyPr xmlns:a="http://schemas.openxmlformats.org/drawingml/2006/main" lIns="152400" tIns="133350" rIns="152400" bIns="133350" anchor="ctr">
+            <a:normAutofit fontScale="100000"/>
+          </a:bodyPr>
+          <a:lstStyle xmlns:a="http://schemas.openxmlformats.org/drawingml/2006/main"/>
+          <a:p xmlns:a="http://schemas.openxmlformats.org/drawingml/2006/main">
+            <a:pPr algn="l">
+              <a:defRPr sz="1575" b="0">
+                <a:solidFill>
+                  <a:srgbClr val="10233F"/>
+                </a:solidFill>
+                <a:latin typeface="PingFang SC"/>
+                <a:ea typeface="PingFang SC"/>
+                <a:cs typeface="PingFang SC"/>
+              </a:defRPr>
+            </a:pPr>
+            <a:r>
+              <a:rPr sz="1575" b="0">
+                <a:solidFill>
+                  <a:srgbClr val="10233F"/>
+                </a:solidFill>
+                <a:latin typeface="PingFang SC"/>
+                <a:ea typeface="PingFang SC"/>
+                <a:cs typeface="PingFang SC"/>
+              </a:rPr>
+              <a:t>现象｜高校中用 AI 辅助检索、提纲和论文起草已很普遍</a:t>
+            </a:r>
+          </a:p>
+        </p:txBody>
+      </p:sp>
+      <p:sp>
+        <p:nvSpPr>
+          <p:cNvPr id="9" name="case-row-2">
+            <a:extLst xmlns:a="http://schemas.openxmlformats.org/drawingml/2006/main">
+              <a:ext uri="{FF2B5EF4-FFF2-40B4-BE49-F238E27FC236}">
+                <a16:creationId xmlns:a16="http://schemas.microsoft.com/office/drawing/2014/main" id="{DF07162E-4A77-4039-9E85-83F82FE99523}"/>
+              </a:ext>
+            </a:extLst>
+          </p:cNvPr>
+          <p:cNvSpPr>
+            <a:spLocks xmlns:a="http://schemas.openxmlformats.org/drawingml/2006/main" noGrp="1"/>
+          </p:cNvSpPr>
+          <p:nvPr/>
+        </p:nvSpPr>
+        <p:spPr>
+          <a:xfrm xmlns:a="http://schemas.openxmlformats.org/drawingml/2006/main">
+            <a:off x="4286250" y="4114800"/>
+            <a:ext cx="6534150" cy="838200"/>
+          </a:xfrm>
+          <a:prstGeom xmlns:a="http://schemas.openxmlformats.org/drawingml/2006/main" prst="roundRect">
+            <a:avLst>
+              <a:gd name="adj" fmla="val 14773"/>
             </a:avLst>
           </a:prstGeom>
           <a:solidFill xmlns:a="http://schemas.openxmlformats.org/drawingml/2006/main">
@@ -2984,7 +3048,7 @@
           </a:solidFill>
           <a:ln xmlns:a="http://schemas.openxmlformats.org/drawingml/2006/main" w="9525">
             <a:solidFill>
-              <a:srgbClr val="D6A33A"/>
+              <a:srgbClr val="8A5A00"/>
             </a:solidFill>
             <a:prstDash val="solid"/>
           </a:ln>
@@ -3014,17 +3078,17 @@
                 <a:ea typeface="PingFang SC"/>
                 <a:cs typeface="PingFang SC"/>
               </a:rPr>
-              <a:t>验证｜验收“案例：学生对 AI 的过度依赖”时，要同时记录适用场景、证据来源、失败条件与人工责任</a:t>
-            </a:r>
-          </a:p>
-        </p:txBody>
-      </p:sp>
-      <p:sp>
-        <p:nvSpPr>
-          <p:cNvPr id="9" name="s10-takeaway-rule">
-            <a:extLst xmlns:a="http://schemas.openxmlformats.org/drawingml/2006/main">
-              <a:ext uri="{FF2B5EF4-FFF2-40B4-BE49-F238E27FC236}">
-                <a16:creationId xmlns:a16="http://schemas.microsoft.com/office/drawing/2014/main" id="{30FBF243-EA93-4083-9AB2-21F40B3D2FDA}"/>
+              <a:t>启发｜AI 应当是放大能力的杠杆，而不是替代思考的拐杖。把 AI 的输出当作草稿和对照，而非最终答案</a:t>
+            </a:r>
+          </a:p>
+        </p:txBody>
+      </p:sp>
+      <p:sp>
+        <p:nvSpPr>
+          <p:cNvPr id="10" name="s10-takeaway-rule">
+            <a:extLst xmlns:a="http://schemas.openxmlformats.org/drawingml/2006/main">
+              <a:ext uri="{FF2B5EF4-FFF2-40B4-BE49-F238E27FC236}">
+                <a16:creationId xmlns:a16="http://schemas.microsoft.com/office/drawing/2014/main" id="{BBE4E523-0C3D-4ADB-8F64-D4A14D8552E1}"/>
               </a:ext>
             </a:extLst>
           </p:cNvPr>
@@ -3054,10 +3118,10 @@
       </p:sp>
       <p:sp>
         <p:nvSpPr>
-          <p:cNvPr id="10" name="s10-takeaway">
-            <a:extLst xmlns:a="http://schemas.openxmlformats.org/drawingml/2006/main">
-              <a:ext uri="{FF2B5EF4-FFF2-40B4-BE49-F238E27FC236}">
-                <a16:creationId xmlns:a16="http://schemas.microsoft.com/office/drawing/2014/main" id="{CE6F9547-3A47-418D-8280-55AD75F5D029}"/>
+          <p:cNvPr id="11" name="s10-takeaway">
+            <a:extLst xmlns:a="http://schemas.openxmlformats.org/drawingml/2006/main">
+              <a:ext uri="{FF2B5EF4-FFF2-40B4-BE49-F238E27FC236}">
+                <a16:creationId xmlns:a16="http://schemas.microsoft.com/office/drawing/2014/main" id="{94544E58-AF31-45A5-84B5-7116B617F9B5}"/>
               </a:ext>
             </a:extLst>
           </p:cNvPr>
@@ -3113,7 +3177,7 @@
     </p:spTree>
     <p:extLst>
       <p:ext uri="{BB962C8B-B14F-4D97-AF65-F5344CB8AC3E}">
-        <p14:creationId xmlns:p14="http://schemas.microsoft.com/office/powerpoint/2010/main" val="1188215989"/>
+        <p14:creationId xmlns:p14="http://schemas.microsoft.com/office/powerpoint/2010/main" val="293056015"/>
       </p:ext>
     </p:extLst>
   </p:cSld>
@@ -3144,7 +3208,7 @@
           <p:cNvPr id="1" name="s11-rule">
             <a:extLst xmlns:a="http://schemas.openxmlformats.org/drawingml/2006/main">
               <a:ext uri="{FF2B5EF4-FFF2-40B4-BE49-F238E27FC236}">
-                <a16:creationId xmlns:a16="http://schemas.microsoft.com/office/drawing/2014/main" id="{E8AEFE5B-38A9-4E29-9BEC-9872DF16C028}"/>
+                <a16:creationId xmlns:a16="http://schemas.microsoft.com/office/drawing/2014/main" id="{0FC1B4EE-F972-4166-A0EF-07F278F2EBEA}"/>
               </a:ext>
             </a:extLst>
           </p:cNvPr>
@@ -3177,7 +3241,7 @@
           <p:cNvPr id="2" name="s11-eyebrow">
             <a:extLst xmlns:a="http://schemas.openxmlformats.org/drawingml/2006/main">
               <a:ext uri="{FF2B5EF4-FFF2-40B4-BE49-F238E27FC236}">
-                <a16:creationId xmlns:a16="http://schemas.microsoft.com/office/drawing/2014/main" id="{DF127184-1530-4742-B836-F5F36C21CCCE}"/>
+                <a16:creationId xmlns:a16="http://schemas.microsoft.com/office/drawing/2014/main" id="{B0160F57-A456-40C1-B887-B81E1063EAE2}"/>
               </a:ext>
             </a:extLst>
           </p:cNvPr>
@@ -3235,7 +3299,7 @@
           <p:cNvPr id="3" name="s11-title">
             <a:extLst xmlns:a="http://schemas.openxmlformats.org/drawingml/2006/main">
               <a:ext uri="{FF2B5EF4-FFF2-40B4-BE49-F238E27FC236}">
-                <a16:creationId xmlns:a16="http://schemas.microsoft.com/office/drawing/2014/main" id="{47064BCC-359B-4E29-8586-DC10A03C9344}"/>
+                <a16:creationId xmlns:a16="http://schemas.microsoft.com/office/drawing/2014/main" id="{4A4BC708-3EE0-4B47-A14A-0A0DA3A6EC9D}"/>
               </a:ext>
             </a:extLst>
           </p:cNvPr>
@@ -3260,7 +3324,7 @@
         </p:spPr>
         <p:txBody>
           <a:bodyPr xmlns:a="http://schemas.openxmlformats.org/drawingml/2006/main" lIns="0" tIns="0" rIns="0" bIns="0" anchor="ctr">
-            <a:normAutofit fontScale="76449"/>
+            <a:normAutofit fontScale="100000"/>
           </a:bodyPr>
           <a:lstStyle xmlns:a="http://schemas.openxmlformats.org/drawingml/2006/main"/>
           <a:p xmlns:a="http://schemas.openxmlformats.org/drawingml/2006/main">
@@ -3283,7 +3347,7 @@
                 <a:ea typeface="PingFang SC"/>
                 <a:cs typeface="PingFang SC"/>
               </a:rPr>
-              <a:t>健康、法律、财务和重大决策必须由合格人员复核，模型不能成为唯一依据</a:t>
+              <a:t>高风险建议必须由合格人员复核</a:t>
             </a:r>
           </a:p>
         </p:txBody>
@@ -3293,7 +3357,7 @@
           <p:cNvPr id="4" name="s11-footer">
             <a:extLst xmlns:a="http://schemas.openxmlformats.org/drawingml/2006/main">
               <a:ext uri="{FF2B5EF4-FFF2-40B4-BE49-F238E27FC236}">
-                <a16:creationId xmlns:a16="http://schemas.microsoft.com/office/drawing/2014/main" id="{70937690-6258-4D07-95D4-83DEB86865C0}"/>
+                <a16:creationId xmlns:a16="http://schemas.microsoft.com/office/drawing/2014/main" id="{DC5D7DF9-BE3A-409A-8AE9-58B54F06AC57}"/>
               </a:ext>
             </a:extLst>
           </p:cNvPr>
@@ -3324,7 +3388,7 @@
           <p:cNvPr id="5" name="s11-identity">
             <a:extLst xmlns:a="http://schemas.openxmlformats.org/drawingml/2006/main">
               <a:ext uri="{FF2B5EF4-FFF2-40B4-BE49-F238E27FC236}">
-                <a16:creationId xmlns:a16="http://schemas.microsoft.com/office/drawing/2014/main" id="{E1DFEBCE-80E5-4B56-B94F-0AD8A2148725}"/>
+                <a16:creationId xmlns:a16="http://schemas.microsoft.com/office/drawing/2014/main" id="{637DD53D-E6B7-48E2-BBBE-922D8888041D}"/>
               </a:ext>
             </a:extLst>
           </p:cNvPr>
@@ -3382,7 +3446,7 @@
           <p:cNvPr id="6" name="case-title">
             <a:extLst xmlns:a="http://schemas.openxmlformats.org/drawingml/2006/main">
               <a:ext uri="{FF2B5EF4-FFF2-40B4-BE49-F238E27FC236}">
-                <a16:creationId xmlns:a16="http://schemas.microsoft.com/office/drawing/2014/main" id="{0A2D1757-0485-419A-A5C4-AD0C61EBB30D}"/>
+                <a16:creationId xmlns:a16="http://schemas.microsoft.com/office/drawing/2014/main" id="{5F9ACF06-FE89-4B43-B461-48FD2EEB847C}"/>
               </a:ext>
             </a:extLst>
           </p:cNvPr>
@@ -3446,23 +3510,23 @@
           <p:cNvPr id="7" name="case-row-0">
             <a:extLst xmlns:a="http://schemas.openxmlformats.org/drawingml/2006/main">
               <a:ext uri="{FF2B5EF4-FFF2-40B4-BE49-F238E27FC236}">
-                <a16:creationId xmlns:a16="http://schemas.microsoft.com/office/drawing/2014/main" id="{52C3B587-1A0E-441F-84A7-2916C12A873D}"/>
-              </a:ext>
-            </a:extLst>
-          </p:cNvPr>
-          <p:cNvSpPr>
-            <a:spLocks xmlns:a="http://schemas.openxmlformats.org/drawingml/2006/main" noGrp="1"/>
-          </p:cNvSpPr>
-          <p:nvPr/>
-        </p:nvSpPr>
-        <p:spPr>
-          <a:xfrm xmlns:a="http://schemas.openxmlformats.org/drawingml/2006/main">
-            <a:off x="4286250" y="2228850"/>
-            <a:ext cx="6534150" cy="1238250"/>
+                <a16:creationId xmlns:a16="http://schemas.microsoft.com/office/drawing/2014/main" id="{99F97FC9-C8AB-4A14-A849-51E9A069E7CC}"/>
+              </a:ext>
+            </a:extLst>
+          </p:cNvPr>
+          <p:cNvSpPr>
+            <a:spLocks xmlns:a="http://schemas.openxmlformats.org/drawingml/2006/main" noGrp="1"/>
+          </p:cNvSpPr>
+          <p:nvPr/>
+        </p:nvSpPr>
+        <p:spPr>
+          <a:xfrm xmlns:a="http://schemas.openxmlformats.org/drawingml/2006/main">
+            <a:off x="4286250" y="2057400"/>
+            <a:ext cx="6534150" cy="838200"/>
           </a:xfrm>
           <a:prstGeom xmlns:a="http://schemas.openxmlformats.org/drawingml/2006/main" prst="roundRect">
             <a:avLst>
-              <a:gd name="adj" fmla="val 10000"/>
+              <a:gd name="adj" fmla="val 14773"/>
             </a:avLst>
           </a:prstGeom>
           <a:solidFill xmlns:a="http://schemas.openxmlformats.org/drawingml/2006/main">
@@ -3510,23 +3574,87 @@
           <p:cNvPr id="8" name="case-row-1">
             <a:extLst xmlns:a="http://schemas.openxmlformats.org/drawingml/2006/main">
               <a:ext uri="{FF2B5EF4-FFF2-40B4-BE49-F238E27FC236}">
-                <a16:creationId xmlns:a16="http://schemas.microsoft.com/office/drawing/2014/main" id="{DDFF9F6F-54B7-4663-8353-D97E8885BEC9}"/>
-              </a:ext>
-            </a:extLst>
-          </p:cNvPr>
-          <p:cNvSpPr>
-            <a:spLocks xmlns:a="http://schemas.openxmlformats.org/drawingml/2006/main" noGrp="1"/>
-          </p:cNvSpPr>
-          <p:nvPr/>
-        </p:nvSpPr>
-        <p:spPr>
-          <a:xfrm xmlns:a="http://schemas.openxmlformats.org/drawingml/2006/main">
-            <a:off x="4286250" y="3714750"/>
-            <a:ext cx="6534150" cy="1238250"/>
+                <a16:creationId xmlns:a16="http://schemas.microsoft.com/office/drawing/2014/main" id="{BF614C1B-2CA2-49A5-9D38-B7B292E1FFC9}"/>
+              </a:ext>
+            </a:extLst>
+          </p:cNvPr>
+          <p:cNvSpPr>
+            <a:spLocks xmlns:a="http://schemas.openxmlformats.org/drawingml/2006/main" noGrp="1"/>
+          </p:cNvSpPr>
+          <p:nvPr/>
+        </p:nvSpPr>
+        <p:spPr>
+          <a:xfrm xmlns:a="http://schemas.openxmlformats.org/drawingml/2006/main">
+            <a:off x="4286250" y="3086100"/>
+            <a:ext cx="6534150" cy="838200"/>
           </a:xfrm>
           <a:prstGeom xmlns:a="http://schemas.openxmlformats.org/drawingml/2006/main" prst="roundRect">
             <a:avLst>
-              <a:gd name="adj" fmla="val 10000"/>
+              <a:gd name="adj" fmla="val 14773"/>
+            </a:avLst>
+          </a:prstGeom>
+          <a:solidFill xmlns:a="http://schemas.openxmlformats.org/drawingml/2006/main">
+            <a:srgbClr val="FFFFFF"/>
+          </a:solidFill>
+          <a:ln xmlns:a="http://schemas.openxmlformats.org/drawingml/2006/main" w="9525">
+            <a:solidFill>
+              <a:srgbClr val="D8E0E8"/>
+            </a:solidFill>
+            <a:prstDash val="solid"/>
+          </a:ln>
+        </p:spPr>
+        <p:txBody>
+          <a:bodyPr xmlns:a="http://schemas.openxmlformats.org/drawingml/2006/main" lIns="152400" tIns="133350" rIns="152400" bIns="133350" anchor="ctr">
+            <a:normAutofit fontScale="100000"/>
+          </a:bodyPr>
+          <a:lstStyle xmlns:a="http://schemas.openxmlformats.org/drawingml/2006/main"/>
+          <a:p xmlns:a="http://schemas.openxmlformats.org/drawingml/2006/main">
+            <a:pPr algn="l">
+              <a:defRPr sz="1575" b="0">
+                <a:solidFill>
+                  <a:srgbClr val="10233F"/>
+                </a:solidFill>
+                <a:latin typeface="PingFang SC"/>
+                <a:ea typeface="PingFang SC"/>
+                <a:cs typeface="PingFang SC"/>
+              </a:defRPr>
+            </a:pPr>
+            <a:r>
+              <a:rPr sz="1575" b="0">
+                <a:solidFill>
+                  <a:srgbClr val="10233F"/>
+                </a:solidFill>
+                <a:latin typeface="PingFang SC"/>
+                <a:ea typeface="PingFang SC"/>
+                <a:cs typeface="PingFang SC"/>
+              </a:rPr>
+              <a:t>现象｜对话模型可能顺着用户已经形成的假设继续生成，而不会主动承担事实核查与后果责任</a:t>
+            </a:r>
+          </a:p>
+        </p:txBody>
+      </p:sp>
+      <p:sp>
+        <p:nvSpPr>
+          <p:cNvPr id="9" name="case-row-2">
+            <a:extLst xmlns:a="http://schemas.openxmlformats.org/drawingml/2006/main">
+              <a:ext uri="{FF2B5EF4-FFF2-40B4-BE49-F238E27FC236}">
+                <a16:creationId xmlns:a16="http://schemas.microsoft.com/office/drawing/2014/main" id="{EBE7662F-9681-4B19-8CA7-1D40702761D6}"/>
+              </a:ext>
+            </a:extLst>
+          </p:cNvPr>
+          <p:cNvSpPr>
+            <a:spLocks xmlns:a="http://schemas.openxmlformats.org/drawingml/2006/main" noGrp="1"/>
+          </p:cNvSpPr>
+          <p:nvPr/>
+        </p:nvSpPr>
+        <p:spPr>
+          <a:xfrm xmlns:a="http://schemas.openxmlformats.org/drawingml/2006/main">
+            <a:off x="4286250" y="4114800"/>
+            <a:ext cx="6534150" cy="838200"/>
+          </a:xfrm>
+          <a:prstGeom xmlns:a="http://schemas.openxmlformats.org/drawingml/2006/main" prst="roundRect">
+            <a:avLst>
+              <a:gd name="adj" fmla="val 14773"/>
             </a:avLst>
           </a:prstGeom>
           <a:solidFill xmlns:a="http://schemas.openxmlformats.org/drawingml/2006/main">
@@ -3534,7 +3662,7 @@
           </a:solidFill>
           <a:ln xmlns:a="http://schemas.openxmlformats.org/drawingml/2006/main" w="9525">
             <a:solidFill>
-              <a:srgbClr val="D6A33A"/>
+              <a:srgbClr val="8A5A00"/>
             </a:solidFill>
             <a:prstDash val="solid"/>
           </a:ln>
@@ -3564,17 +3692,17 @@
                 <a:ea typeface="PingFang SC"/>
                 <a:cs typeface="PingFang SC"/>
               </a:rPr>
-              <a:t>验证｜验收“案例：模型迎合与高风险建议”时，要同时记录适用场景、证据来源、失败条件与人工责任</a:t>
-            </a:r>
-          </a:p>
-        </p:txBody>
-      </p:sp>
-      <p:sp>
-        <p:nvSpPr>
-          <p:cNvPr id="9" name="s11-takeaway-rule">
-            <a:extLst xmlns:a="http://schemas.openxmlformats.org/drawingml/2006/main">
-              <a:ext uri="{FF2B5EF4-FFF2-40B4-BE49-F238E27FC236}">
-                <a16:creationId xmlns:a16="http://schemas.microsoft.com/office/drawing/2014/main" id="{FDE590D0-3656-45B2-8829-A0B374626FE1}"/>
+              <a:t>启发｜健康、法律、财务和重大决策必须由合格人员复核，模型不能成为唯一依据</a:t>
+            </a:r>
+          </a:p>
+        </p:txBody>
+      </p:sp>
+      <p:sp>
+        <p:nvSpPr>
+          <p:cNvPr id="10" name="s11-takeaway-rule">
+            <a:extLst xmlns:a="http://schemas.openxmlformats.org/drawingml/2006/main">
+              <a:ext uri="{FF2B5EF4-FFF2-40B4-BE49-F238E27FC236}">
+                <a16:creationId xmlns:a16="http://schemas.microsoft.com/office/drawing/2014/main" id="{32535FE1-EA22-4AD0-869A-AFE4E4ED29AA}"/>
               </a:ext>
             </a:extLst>
           </p:cNvPr>
@@ -3604,10 +3732,10 @@
       </p:sp>
       <p:sp>
         <p:nvSpPr>
-          <p:cNvPr id="10" name="s11-takeaway">
-            <a:extLst xmlns:a="http://schemas.openxmlformats.org/drawingml/2006/main">
-              <a:ext uri="{FF2B5EF4-FFF2-40B4-BE49-F238E27FC236}">
-                <a16:creationId xmlns:a16="http://schemas.microsoft.com/office/drawing/2014/main" id="{29167769-D4F1-401E-9020-9F0191609270}"/>
+          <p:cNvPr id="11" name="s11-takeaway">
+            <a:extLst xmlns:a="http://schemas.openxmlformats.org/drawingml/2006/main">
+              <a:ext uri="{FF2B5EF4-FFF2-40B4-BE49-F238E27FC236}">
+                <a16:creationId xmlns:a16="http://schemas.microsoft.com/office/drawing/2014/main" id="{A8889D54-4196-4A94-951F-142CC32C35A1}"/>
               </a:ext>
             </a:extLst>
           </p:cNvPr>
@@ -3655,7 +3783,7 @@
                 <a:ea typeface="PingFang SC"/>
                 <a:cs typeface="PingFang SC"/>
               </a:rPr>
-              <a:t>健康、法律、财务和重大决策必须由合格人员复核，模型不能成为唯一依据</a:t>
+              <a:t>高风险建议必须由合格人员复核</a:t>
             </a:r>
           </a:p>
         </p:txBody>
@@ -3663,7 +3791,7 @@
     </p:spTree>
     <p:extLst>
       <p:ext uri="{BB962C8B-B14F-4D97-AF65-F5344CB8AC3E}">
-        <p14:creationId xmlns:p14="http://schemas.microsoft.com/office/powerpoint/2010/main" val="108954870"/>
+        <p14:creationId xmlns:p14="http://schemas.microsoft.com/office/powerpoint/2010/main" val="1655847531"/>
       </p:ext>
     </p:extLst>
   </p:cSld>
@@ -3694,7 +3822,7 @@
           <p:cNvPr id="1" name="s12-rule">
             <a:extLst xmlns:a="http://schemas.openxmlformats.org/drawingml/2006/main">
               <a:ext uri="{FF2B5EF4-FFF2-40B4-BE49-F238E27FC236}">
-                <a16:creationId xmlns:a16="http://schemas.microsoft.com/office/drawing/2014/main" id="{85489E1A-0405-433C-96AB-3B3849C46F53}"/>
+                <a16:creationId xmlns:a16="http://schemas.microsoft.com/office/drawing/2014/main" id="{383C1050-6276-4F18-800D-80714941B8D2}"/>
               </a:ext>
             </a:extLst>
           </p:cNvPr>
@@ -3727,7 +3855,7 @@
           <p:cNvPr id="2" name="s12-eyebrow">
             <a:extLst xmlns:a="http://schemas.openxmlformats.org/drawingml/2006/main">
               <a:ext uri="{FF2B5EF4-FFF2-40B4-BE49-F238E27FC236}">
-                <a16:creationId xmlns:a16="http://schemas.microsoft.com/office/drawing/2014/main" id="{92702E1E-9D55-46EF-B7D4-19D319CC6BC7}"/>
+                <a16:creationId xmlns:a16="http://schemas.microsoft.com/office/drawing/2014/main" id="{8356FA2E-ECD6-4983-B343-D9604BF0CF9B}"/>
               </a:ext>
             </a:extLst>
           </p:cNvPr>
@@ -3785,7 +3913,7 @@
           <p:cNvPr id="3" name="s12-title">
             <a:extLst xmlns:a="http://schemas.openxmlformats.org/drawingml/2006/main">
               <a:ext uri="{FF2B5EF4-FFF2-40B4-BE49-F238E27FC236}">
-                <a16:creationId xmlns:a16="http://schemas.microsoft.com/office/drawing/2014/main" id="{F77A79C5-EB60-449D-933F-F6A82EB03527}"/>
+                <a16:creationId xmlns:a16="http://schemas.microsoft.com/office/drawing/2014/main" id="{3D709EAE-2C83-424E-91D2-E1B6F73D2C81}"/>
               </a:ext>
             </a:extLst>
           </p:cNvPr>
@@ -3833,7 +3961,7 @@
                 <a:ea typeface="PingFang SC"/>
                 <a:cs typeface="PingFang SC"/>
               </a:rPr>
-              <a:t>把方法落实为可验证的行动</a:t>
+              <a:t>大模型能力边界：一次可验收练习</a:t>
             </a:r>
           </a:p>
         </p:txBody>
@@ -3843,7 +3971,7 @@
           <p:cNvPr id="4" name="s12-footer">
             <a:extLst xmlns:a="http://schemas.openxmlformats.org/drawingml/2006/main">
               <a:ext uri="{FF2B5EF4-FFF2-40B4-BE49-F238E27FC236}">
-                <a16:creationId xmlns:a16="http://schemas.microsoft.com/office/drawing/2014/main" id="{F6CF10F8-E72F-4D26-89ED-444C07187099}"/>
+                <a16:creationId xmlns:a16="http://schemas.microsoft.com/office/drawing/2014/main" id="{90576F49-7065-4E21-AFA8-19C0242BE8E6}"/>
               </a:ext>
             </a:extLst>
           </p:cNvPr>
@@ -3874,7 +4002,7 @@
           <p:cNvPr id="5" name="s12-identity">
             <a:extLst xmlns:a="http://schemas.openxmlformats.org/drawingml/2006/main">
               <a:ext uri="{FF2B5EF4-FFF2-40B4-BE49-F238E27FC236}">
-                <a16:creationId xmlns:a16="http://schemas.microsoft.com/office/drawing/2014/main" id="{A6E5B69A-04FC-4691-BD2B-58A9ED237C84}"/>
+                <a16:creationId xmlns:a16="http://schemas.microsoft.com/office/drawing/2014/main" id="{6550CE52-1663-472E-BED2-A6BA8A4FC47A}"/>
               </a:ext>
             </a:extLst>
           </p:cNvPr>
@@ -3932,7 +4060,7 @@
           <p:cNvPr id="6" name="practice-circle-0">
             <a:extLst xmlns:a="http://schemas.openxmlformats.org/drawingml/2006/main">
               <a:ext uri="{FF2B5EF4-FFF2-40B4-BE49-F238E27FC236}">
-                <a16:creationId xmlns:a16="http://schemas.microsoft.com/office/drawing/2014/main" id="{2D797738-AD4B-4721-8A6C-0D2313231A9D}"/>
+                <a16:creationId xmlns:a16="http://schemas.microsoft.com/office/drawing/2014/main" id="{7D25BEEA-C1D2-41C6-A3E2-AC746FE066C5}"/>
               </a:ext>
             </a:extLst>
           </p:cNvPr>
@@ -3965,7 +4093,7 @@
           <p:cNvPr id="7" name="practice-number-0">
             <a:extLst xmlns:a="http://schemas.openxmlformats.org/drawingml/2006/main">
               <a:ext uri="{FF2B5EF4-FFF2-40B4-BE49-F238E27FC236}">
-                <a16:creationId xmlns:a16="http://schemas.microsoft.com/office/drawing/2014/main" id="{BC6B012B-8298-49B7-A81C-D7CB3DA88E9A}"/>
+                <a16:creationId xmlns:a16="http://schemas.microsoft.com/office/drawing/2014/main" id="{F7628E53-C055-4D9F-BF0D-AC5E520B96D9}"/>
               </a:ext>
             </a:extLst>
           </p:cNvPr>
@@ -4023,7 +4151,7 @@
           <p:cNvPr id="8" name="practice-item-0">
             <a:extLst xmlns:a="http://schemas.openxmlformats.org/drawingml/2006/main">
               <a:ext uri="{FF2B5EF4-FFF2-40B4-BE49-F238E27FC236}">
-                <a16:creationId xmlns:a16="http://schemas.microsoft.com/office/drawing/2014/main" id="{52F0097C-F88F-42C6-B3AC-139F1099B6DC}"/>
+                <a16:creationId xmlns:a16="http://schemas.microsoft.com/office/drawing/2014/main" id="{B37D397D-5885-4B80-B485-223BA65C0F59}"/>
               </a:ext>
             </a:extLst>
           </p:cNvPr>
@@ -4087,7 +4215,7 @@
           <p:cNvPr id="9" name="practice-connector-0">
             <a:extLst xmlns:a="http://schemas.openxmlformats.org/drawingml/2006/main">
               <a:ext uri="{FF2B5EF4-FFF2-40B4-BE49-F238E27FC236}">
-                <a16:creationId xmlns:a16="http://schemas.microsoft.com/office/drawing/2014/main" id="{22602040-5049-4434-888D-F71D499AF6D7}"/>
+                <a16:creationId xmlns:a16="http://schemas.microsoft.com/office/drawing/2014/main" id="{CFD620FA-44CC-4F61-AE80-239A7D9076F4}"/>
               </a:ext>
             </a:extLst>
           </p:cNvPr>
@@ -4107,7 +4235,7 @@
           <a:noFill xmlns:a="http://schemas.openxmlformats.org/drawingml/2006/main"/>
           <a:ln xmlns:a="http://schemas.openxmlformats.org/drawingml/2006/main" w="28575">
             <a:solidFill>
-              <a:srgbClr val="D6A33A"/>
+              <a:srgbClr val="8A5A00"/>
             </a:solidFill>
             <a:prstDash val="solid"/>
           </a:ln>
@@ -4118,7 +4246,7 @@
           <p:cNvPr id="10" name="practice-circle-1">
             <a:extLst xmlns:a="http://schemas.openxmlformats.org/drawingml/2006/main">
               <a:ext uri="{FF2B5EF4-FFF2-40B4-BE49-F238E27FC236}">
-                <a16:creationId xmlns:a16="http://schemas.microsoft.com/office/drawing/2014/main" id="{A10183AE-D53C-482D-A64A-BCB1D1EDACA7}"/>
+                <a16:creationId xmlns:a16="http://schemas.microsoft.com/office/drawing/2014/main" id="{F12A454F-93CB-45D2-88D1-08E2418C9ECE}"/>
               </a:ext>
             </a:extLst>
           </p:cNvPr>
@@ -4151,7 +4279,7 @@
           <p:cNvPr id="11" name="practice-number-1">
             <a:extLst xmlns:a="http://schemas.openxmlformats.org/drawingml/2006/main">
               <a:ext uri="{FF2B5EF4-FFF2-40B4-BE49-F238E27FC236}">
-                <a16:creationId xmlns:a16="http://schemas.microsoft.com/office/drawing/2014/main" id="{AF89A9C4-795B-4993-9C67-F79DCB15D97E}"/>
+                <a16:creationId xmlns:a16="http://schemas.microsoft.com/office/drawing/2014/main" id="{C0E8A371-2459-4042-AE94-C239E0B814D9}"/>
               </a:ext>
             </a:extLst>
           </p:cNvPr>
@@ -4209,7 +4337,7 @@
           <p:cNvPr id="12" name="practice-item-1">
             <a:extLst xmlns:a="http://schemas.openxmlformats.org/drawingml/2006/main">
               <a:ext uri="{FF2B5EF4-FFF2-40B4-BE49-F238E27FC236}">
-                <a16:creationId xmlns:a16="http://schemas.microsoft.com/office/drawing/2014/main" id="{4658EBA2-836F-4FC4-956F-3C134A81893E}"/>
+                <a16:creationId xmlns:a16="http://schemas.microsoft.com/office/drawing/2014/main" id="{015F4313-8812-4B26-A023-D38F950F36DE}"/>
               </a:ext>
             </a:extLst>
           </p:cNvPr>
@@ -4273,7 +4401,7 @@
           <p:cNvPr id="13" name="practice-connector-1">
             <a:extLst xmlns:a="http://schemas.openxmlformats.org/drawingml/2006/main">
               <a:ext uri="{FF2B5EF4-FFF2-40B4-BE49-F238E27FC236}">
-                <a16:creationId xmlns:a16="http://schemas.microsoft.com/office/drawing/2014/main" id="{0AB574A5-D649-44E4-9814-AAB0421F6CED}"/>
+                <a16:creationId xmlns:a16="http://schemas.microsoft.com/office/drawing/2014/main" id="{7F78121F-E692-4482-9774-00A6E60DCDFD}"/>
               </a:ext>
             </a:extLst>
           </p:cNvPr>
@@ -4293,7 +4421,7 @@
           <a:noFill xmlns:a="http://schemas.openxmlformats.org/drawingml/2006/main"/>
           <a:ln xmlns:a="http://schemas.openxmlformats.org/drawingml/2006/main" w="28575">
             <a:solidFill>
-              <a:srgbClr val="D6A33A"/>
+              <a:srgbClr val="8A5A00"/>
             </a:solidFill>
             <a:prstDash val="solid"/>
           </a:ln>
@@ -4304,7 +4432,7 @@
           <p:cNvPr id="14" name="practice-circle-2">
             <a:extLst xmlns:a="http://schemas.openxmlformats.org/drawingml/2006/main">
               <a:ext uri="{FF2B5EF4-FFF2-40B4-BE49-F238E27FC236}">
-                <a16:creationId xmlns:a16="http://schemas.microsoft.com/office/drawing/2014/main" id="{C1F90267-25BC-480D-A26C-84E3D4CC3D41}"/>
+                <a16:creationId xmlns:a16="http://schemas.microsoft.com/office/drawing/2014/main" id="{1DC69C5B-BE41-419B-AE36-383B01BCD434}"/>
               </a:ext>
             </a:extLst>
           </p:cNvPr>
@@ -4322,7 +4450,7 @@
             <a:avLst/>
           </a:prstGeom>
           <a:solidFill xmlns:a="http://schemas.openxmlformats.org/drawingml/2006/main">
-            <a:srgbClr val="D6A33A"/>
+            <a:srgbClr val="8A5A00"/>
           </a:solidFill>
           <a:ln xmlns:a="http://schemas.openxmlformats.org/drawingml/2006/main" w="28575">
             <a:solidFill>
@@ -4337,7 +4465,7 @@
           <p:cNvPr id="15" name="practice-number-2">
             <a:extLst xmlns:a="http://schemas.openxmlformats.org/drawingml/2006/main">
               <a:ext uri="{FF2B5EF4-FFF2-40B4-BE49-F238E27FC236}">
-                <a16:creationId xmlns:a16="http://schemas.microsoft.com/office/drawing/2014/main" id="{D1215928-1560-4E7E-87CB-3BF4F5156CB0}"/>
+                <a16:creationId xmlns:a16="http://schemas.microsoft.com/office/drawing/2014/main" id="{859ABDC9-2E53-42D3-B129-3E2BF22040B9}"/>
               </a:ext>
             </a:extLst>
           </p:cNvPr>
@@ -4395,7 +4523,7 @@
           <p:cNvPr id="16" name="practice-item-2">
             <a:extLst xmlns:a="http://schemas.openxmlformats.org/drawingml/2006/main">
               <a:ext uri="{FF2B5EF4-FFF2-40B4-BE49-F238E27FC236}">
-                <a16:creationId xmlns:a16="http://schemas.microsoft.com/office/drawing/2014/main" id="{65C2B26A-1C55-4E70-B1F6-A87A994A95EA}"/>
+                <a16:creationId xmlns:a16="http://schemas.microsoft.com/office/drawing/2014/main" id="{08AC3C0B-518B-4B33-AD5A-C297CDA7AFB6}"/>
               </a:ext>
             </a:extLst>
           </p:cNvPr>
@@ -4419,7 +4547,7 @@
           </a:solidFill>
           <a:ln xmlns:a="http://schemas.openxmlformats.org/drawingml/2006/main" w="19050">
             <a:solidFill>
-              <a:srgbClr val="D6A33A"/>
+              <a:srgbClr val="8A5A00"/>
             </a:solidFill>
             <a:prstDash val="solid"/>
           </a:ln>
@@ -4457,7 +4585,7 @@
     </p:spTree>
     <p:extLst>
       <p:ext uri="{BB962C8B-B14F-4D97-AF65-F5344CB8AC3E}">
-        <p14:creationId xmlns:p14="http://schemas.microsoft.com/office/powerpoint/2010/main" val="1640212409"/>
+        <p14:creationId xmlns:p14="http://schemas.microsoft.com/office/powerpoint/2010/main" val="351469447"/>
       </p:ext>
     </p:extLst>
   </p:cSld>
@@ -4488,7 +4616,7 @@
           <p:cNvPr id="1" name="s13-rule">
             <a:extLst xmlns:a="http://schemas.openxmlformats.org/drawingml/2006/main">
               <a:ext uri="{FF2B5EF4-FFF2-40B4-BE49-F238E27FC236}">
-                <a16:creationId xmlns:a16="http://schemas.microsoft.com/office/drawing/2014/main" id="{180D2A31-5B63-4FB5-9C06-BDD2FB78F478}"/>
+                <a16:creationId xmlns:a16="http://schemas.microsoft.com/office/drawing/2014/main" id="{BB635209-05C5-4FA6-9CFE-958D8965E976}"/>
               </a:ext>
             </a:extLst>
           </p:cNvPr>
@@ -4521,7 +4649,7 @@
           <p:cNvPr id="2" name="s13-eyebrow">
             <a:extLst xmlns:a="http://schemas.openxmlformats.org/drawingml/2006/main">
               <a:ext uri="{FF2B5EF4-FFF2-40B4-BE49-F238E27FC236}">
-                <a16:creationId xmlns:a16="http://schemas.microsoft.com/office/drawing/2014/main" id="{8221E91C-9744-4E79-8AC8-F2B02DADEA72}"/>
+                <a16:creationId xmlns:a16="http://schemas.microsoft.com/office/drawing/2014/main" id="{9C855BD1-C138-4C73-89DE-86FD1608D247}"/>
               </a:ext>
             </a:extLst>
           </p:cNvPr>
@@ -4579,7 +4707,7 @@
           <p:cNvPr id="3" name="s13-title">
             <a:extLst xmlns:a="http://schemas.openxmlformats.org/drawingml/2006/main">
               <a:ext uri="{FF2B5EF4-FFF2-40B4-BE49-F238E27FC236}">
-                <a16:creationId xmlns:a16="http://schemas.microsoft.com/office/drawing/2014/main" id="{91694780-573A-4CB2-94FA-3FE0CBE57536}"/>
+                <a16:creationId xmlns:a16="http://schemas.microsoft.com/office/drawing/2014/main" id="{66D1D4B7-8592-4D9F-9DB8-2B563460E4D8}"/>
               </a:ext>
             </a:extLst>
           </p:cNvPr>
@@ -4627,7 +4755,7 @@
                 <a:ea typeface="PingFang SC"/>
                 <a:cs typeface="PingFang SC"/>
               </a:rPr>
-              <a:t>带走三条可复用的判断原则</a:t>
+              <a:t>大模型能力边界：判断时先抓住三点</a:t>
             </a:r>
           </a:p>
         </p:txBody>
@@ -4637,7 +4765,7 @@
           <p:cNvPr id="4" name="s13-footer">
             <a:extLst xmlns:a="http://schemas.openxmlformats.org/drawingml/2006/main">
               <a:ext uri="{FF2B5EF4-FFF2-40B4-BE49-F238E27FC236}">
-                <a16:creationId xmlns:a16="http://schemas.microsoft.com/office/drawing/2014/main" id="{82E53772-B0C7-493A-9306-1DFD3537588C}"/>
+                <a16:creationId xmlns:a16="http://schemas.microsoft.com/office/drawing/2014/main" id="{7C7C2EE5-1C97-49AF-8ED8-99053E565F2B}"/>
               </a:ext>
             </a:extLst>
           </p:cNvPr>
@@ -4668,7 +4796,7 @@
           <p:cNvPr id="5" name="s13-identity">
             <a:extLst xmlns:a="http://schemas.openxmlformats.org/drawingml/2006/main">
               <a:ext uri="{FF2B5EF4-FFF2-40B4-BE49-F238E27FC236}">
-                <a16:creationId xmlns:a16="http://schemas.microsoft.com/office/drawing/2014/main" id="{D8635983-E9D4-4B32-B298-9590A5605046}"/>
+                <a16:creationId xmlns:a16="http://schemas.microsoft.com/office/drawing/2014/main" id="{FBAA0E20-DC56-4B4C-ABDC-8CA03EA5A4CA}"/>
               </a:ext>
             </a:extLst>
           </p:cNvPr>
@@ -4726,7 +4854,7 @@
           <p:cNvPr id="6" name="recap-circle-0">
             <a:extLst xmlns:a="http://schemas.openxmlformats.org/drawingml/2006/main">
               <a:ext uri="{FF2B5EF4-FFF2-40B4-BE49-F238E27FC236}">
-                <a16:creationId xmlns:a16="http://schemas.microsoft.com/office/drawing/2014/main" id="{DBE2E794-A1E1-4B4C-9D44-E269200EA189}"/>
+                <a16:creationId xmlns:a16="http://schemas.microsoft.com/office/drawing/2014/main" id="{288451A0-31C2-4716-B9D4-8A1121107DD9}"/>
               </a:ext>
             </a:extLst>
           </p:cNvPr>
@@ -4759,7 +4887,7 @@
           <p:cNvPr id="7" name="recap-number-0">
             <a:extLst xmlns:a="http://schemas.openxmlformats.org/drawingml/2006/main">
               <a:ext uri="{FF2B5EF4-FFF2-40B4-BE49-F238E27FC236}">
-                <a16:creationId xmlns:a16="http://schemas.microsoft.com/office/drawing/2014/main" id="{21CE186E-485E-46B9-8C54-299AB16788C7}"/>
+                <a16:creationId xmlns:a16="http://schemas.microsoft.com/office/drawing/2014/main" id="{2C1DED38-B315-41A9-9214-B7450137F7C4}"/>
               </a:ext>
             </a:extLst>
           </p:cNvPr>
@@ -4817,7 +4945,7 @@
           <p:cNvPr id="8" name="recap-item-0">
             <a:extLst xmlns:a="http://schemas.openxmlformats.org/drawingml/2006/main">
               <a:ext uri="{FF2B5EF4-FFF2-40B4-BE49-F238E27FC236}">
-                <a16:creationId xmlns:a16="http://schemas.microsoft.com/office/drawing/2014/main" id="{34339D44-CBF4-49BE-9343-BF77F0C1AA78}"/>
+                <a16:creationId xmlns:a16="http://schemas.microsoft.com/office/drawing/2014/main" id="{C92BB7C6-5D9E-4A16-954F-F5EBFB526A8F}"/>
               </a:ext>
             </a:extLst>
           </p:cNvPr>
@@ -4871,7 +4999,7 @@
                 <a:ea typeface="PingFang SC"/>
                 <a:cs typeface="PingFang SC"/>
               </a:rPr>
-              <a:t>"大模型"这个词经常和人工智能、机器学习、深度学习混在一起</a:t>
+              <a:t>大模型位于深度学习与预训练技术的延长线上</a:t>
             </a:r>
           </a:p>
         </p:txBody>
@@ -4881,7 +5009,7 @@
           <p:cNvPr id="9" name="recap-connector-0">
             <a:extLst xmlns:a="http://schemas.openxmlformats.org/drawingml/2006/main">
               <a:ext uri="{FF2B5EF4-FFF2-40B4-BE49-F238E27FC236}">
-                <a16:creationId xmlns:a16="http://schemas.microsoft.com/office/drawing/2014/main" id="{3DF507B0-B015-45AD-B873-2683778E9C04}"/>
+                <a16:creationId xmlns:a16="http://schemas.microsoft.com/office/drawing/2014/main" id="{27B90B42-9137-459A-81AC-7E42749F85DB}"/>
               </a:ext>
             </a:extLst>
           </p:cNvPr>
@@ -4901,7 +5029,7 @@
           <a:noFill xmlns:a="http://schemas.openxmlformats.org/drawingml/2006/main"/>
           <a:ln xmlns:a="http://schemas.openxmlformats.org/drawingml/2006/main" w="28575">
             <a:solidFill>
-              <a:srgbClr val="D6A33A"/>
+              <a:srgbClr val="8A5A00"/>
             </a:solidFill>
             <a:prstDash val="solid"/>
           </a:ln>
@@ -4912,7 +5040,7 @@
           <p:cNvPr id="10" name="recap-circle-1">
             <a:extLst xmlns:a="http://schemas.openxmlformats.org/drawingml/2006/main">
               <a:ext uri="{FF2B5EF4-FFF2-40B4-BE49-F238E27FC236}">
-                <a16:creationId xmlns:a16="http://schemas.microsoft.com/office/drawing/2014/main" id="{DA03B481-C90A-4EBE-9616-F1C1E4D5954B}"/>
+                <a16:creationId xmlns:a16="http://schemas.microsoft.com/office/drawing/2014/main" id="{C5D6B38A-2779-49B7-9EEC-4907CF9DE63B}"/>
               </a:ext>
             </a:extLst>
           </p:cNvPr>
@@ -4945,7 +5073,7 @@
           <p:cNvPr id="11" name="recap-number-1">
             <a:extLst xmlns:a="http://schemas.openxmlformats.org/drawingml/2006/main">
               <a:ext uri="{FF2B5EF4-FFF2-40B4-BE49-F238E27FC236}">
-                <a16:creationId xmlns:a16="http://schemas.microsoft.com/office/drawing/2014/main" id="{5960A22B-74CE-4BB9-98DB-7ADC3639F7E1}"/>
+                <a16:creationId xmlns:a16="http://schemas.microsoft.com/office/drawing/2014/main" id="{E268FDD7-5912-4F7A-B572-9745ED6F0E92}"/>
               </a:ext>
             </a:extLst>
           </p:cNvPr>
@@ -5003,7 +5131,7 @@
           <p:cNvPr id="12" name="recap-item-1">
             <a:extLst xmlns:a="http://schemas.openxmlformats.org/drawingml/2006/main">
               <a:ext uri="{FF2B5EF4-FFF2-40B4-BE49-F238E27FC236}">
-                <a16:creationId xmlns:a16="http://schemas.microsoft.com/office/drawing/2014/main" id="{478203D4-8037-4B98-A781-0E64B1CBE41C}"/>
+                <a16:creationId xmlns:a16="http://schemas.microsoft.com/office/drawing/2014/main" id="{C87B646E-31DE-4949-AEA7-21402F06FD9E}"/>
               </a:ext>
             </a:extLst>
           </p:cNvPr>
@@ -5067,7 +5195,7 @@
           <p:cNvPr id="13" name="recap-connector-1">
             <a:extLst xmlns:a="http://schemas.openxmlformats.org/drawingml/2006/main">
               <a:ext uri="{FF2B5EF4-FFF2-40B4-BE49-F238E27FC236}">
-                <a16:creationId xmlns:a16="http://schemas.microsoft.com/office/drawing/2014/main" id="{D8830A33-41A5-4F16-9C2B-A6D69E43009C}"/>
+                <a16:creationId xmlns:a16="http://schemas.microsoft.com/office/drawing/2014/main" id="{6C54C112-D0C8-43ED-AD80-DF6CD098FC29}"/>
               </a:ext>
             </a:extLst>
           </p:cNvPr>
@@ -5087,7 +5215,7 @@
           <a:noFill xmlns:a="http://schemas.openxmlformats.org/drawingml/2006/main"/>
           <a:ln xmlns:a="http://schemas.openxmlformats.org/drawingml/2006/main" w="28575">
             <a:solidFill>
-              <a:srgbClr val="D6A33A"/>
+              <a:srgbClr val="8A5A00"/>
             </a:solidFill>
             <a:prstDash val="solid"/>
           </a:ln>
@@ -5098,7 +5226,7 @@
           <p:cNvPr id="14" name="recap-circle-2">
             <a:extLst xmlns:a="http://schemas.openxmlformats.org/drawingml/2006/main">
               <a:ext uri="{FF2B5EF4-FFF2-40B4-BE49-F238E27FC236}">
-                <a16:creationId xmlns:a16="http://schemas.microsoft.com/office/drawing/2014/main" id="{624350B9-EC82-48B5-965A-8737F1E25274}"/>
+                <a16:creationId xmlns:a16="http://schemas.microsoft.com/office/drawing/2014/main" id="{1404D872-8470-482F-A55E-A98181D3CCCA}"/>
               </a:ext>
             </a:extLst>
           </p:cNvPr>
@@ -5116,7 +5244,7 @@
             <a:avLst/>
           </a:prstGeom>
           <a:solidFill xmlns:a="http://schemas.openxmlformats.org/drawingml/2006/main">
-            <a:srgbClr val="D6A33A"/>
+            <a:srgbClr val="8A5A00"/>
           </a:solidFill>
           <a:ln xmlns:a="http://schemas.openxmlformats.org/drawingml/2006/main" w="28575">
             <a:solidFill>
@@ -5131,7 +5259,7 @@
           <p:cNvPr id="15" name="recap-number-2">
             <a:extLst xmlns:a="http://schemas.openxmlformats.org/drawingml/2006/main">
               <a:ext uri="{FF2B5EF4-FFF2-40B4-BE49-F238E27FC236}">
-                <a16:creationId xmlns:a16="http://schemas.microsoft.com/office/drawing/2014/main" id="{92D9F800-86A7-44B4-AAAF-ACE85213867A}"/>
+                <a16:creationId xmlns:a16="http://schemas.microsoft.com/office/drawing/2014/main" id="{2A103CE3-098E-488E-AFEB-9BE00FF862DE}"/>
               </a:ext>
             </a:extLst>
           </p:cNvPr>
@@ -5189,7 +5317,7 @@
           <p:cNvPr id="16" name="recap-item-2">
             <a:extLst xmlns:a="http://schemas.openxmlformats.org/drawingml/2006/main">
               <a:ext uri="{FF2B5EF4-FFF2-40B4-BE49-F238E27FC236}">
-                <a16:creationId xmlns:a16="http://schemas.microsoft.com/office/drawing/2014/main" id="{5931F544-CCD4-48C3-B6F0-29AF345D091B}"/>
+                <a16:creationId xmlns:a16="http://schemas.microsoft.com/office/drawing/2014/main" id="{DE7F14B9-C68D-418F-A0D0-E4C8AE932709}"/>
               </a:ext>
             </a:extLst>
           </p:cNvPr>
@@ -5213,7 +5341,7 @@
           </a:solidFill>
           <a:ln xmlns:a="http://schemas.openxmlformats.org/drawingml/2006/main" w="19050">
             <a:solidFill>
-              <a:srgbClr val="D6A33A"/>
+              <a:srgbClr val="8A5A00"/>
             </a:solidFill>
             <a:prstDash val="solid"/>
           </a:ln>
@@ -5243,7 +5371,7 @@
                 <a:ea typeface="PingFang SC"/>
                 <a:cs typeface="PingFang SC"/>
               </a:rPr>
-              <a:t>与其给未来强行排出年份</a:t>
+              <a:t>判断趋势要看多模态、智能体与可靠性三条线</a:t>
             </a:r>
           </a:p>
         </p:txBody>
@@ -5251,7 +5379,7 @@
     </p:spTree>
     <p:extLst>
       <p:ext uri="{BB962C8B-B14F-4D97-AF65-F5344CB8AC3E}">
-        <p14:creationId xmlns:p14="http://schemas.microsoft.com/office/powerpoint/2010/main" val="1483913725"/>
+        <p14:creationId xmlns:p14="http://schemas.microsoft.com/office/powerpoint/2010/main" val="348575886"/>
       </p:ext>
     </p:extLst>
   </p:cSld>
@@ -5282,7 +5410,7 @@
           <p:cNvPr id="1" name="s14-rule">
             <a:extLst xmlns:a="http://schemas.openxmlformats.org/drawingml/2006/main">
               <a:ext uri="{FF2B5EF4-FFF2-40B4-BE49-F238E27FC236}">
-                <a16:creationId xmlns:a16="http://schemas.microsoft.com/office/drawing/2014/main" id="{6FD09F42-AE90-42C9-9ACA-8D1CF5AFE1D7}"/>
+                <a16:creationId xmlns:a16="http://schemas.microsoft.com/office/drawing/2014/main" id="{39DD38D7-CBA2-4564-93F6-3D51C62DB07C}"/>
               </a:ext>
             </a:extLst>
           </p:cNvPr>
@@ -5315,7 +5443,7 @@
           <p:cNvPr id="2" name="s14-eyebrow">
             <a:extLst xmlns:a="http://schemas.openxmlformats.org/drawingml/2006/main">
               <a:ext uri="{FF2B5EF4-FFF2-40B4-BE49-F238E27FC236}">
-                <a16:creationId xmlns:a16="http://schemas.microsoft.com/office/drawing/2014/main" id="{6A4EE8AF-9658-49DA-A870-2F3492979CCF}"/>
+                <a16:creationId xmlns:a16="http://schemas.microsoft.com/office/drawing/2014/main" id="{4F6EC0A1-468B-4DB6-9E88-5138D34CBEE3}"/>
               </a:ext>
             </a:extLst>
           </p:cNvPr>
@@ -5373,7 +5501,7 @@
           <p:cNvPr id="3" name="s14-title">
             <a:extLst xmlns:a="http://schemas.openxmlformats.org/drawingml/2006/main">
               <a:ext uri="{FF2B5EF4-FFF2-40B4-BE49-F238E27FC236}">
-                <a16:creationId xmlns:a16="http://schemas.microsoft.com/office/drawing/2014/main" id="{EDA979EB-AB5B-47AD-BBB1-DBA82973569D}"/>
+                <a16:creationId xmlns:a16="http://schemas.microsoft.com/office/drawing/2014/main" id="{23A78F08-9B90-4FF6-80DC-CC609BE7218B}"/>
               </a:ext>
             </a:extLst>
           </p:cNvPr>
@@ -5421,7 +5549,7 @@
                 <a:ea typeface="PingFang SC"/>
                 <a:cs typeface="PingFang SC"/>
               </a:rPr>
-              <a:t>从公开重制课件回到可核对的学习资料</a:t>
+              <a:t>大模型能力边界：依据、边界与延伸</a:t>
             </a:r>
           </a:p>
         </p:txBody>
@@ -5431,7 +5559,7 @@
           <p:cNvPr id="4" name="s14-footer">
             <a:extLst xmlns:a="http://schemas.openxmlformats.org/drawingml/2006/main">
               <a:ext uri="{FF2B5EF4-FFF2-40B4-BE49-F238E27FC236}">
-                <a16:creationId xmlns:a16="http://schemas.microsoft.com/office/drawing/2014/main" id="{F8476E93-3E5F-4889-BFC9-A8E04A27C9C6}"/>
+                <a16:creationId xmlns:a16="http://schemas.microsoft.com/office/drawing/2014/main" id="{BAE56ADC-BF1D-426D-8317-4D7A98F55B6E}"/>
               </a:ext>
             </a:extLst>
           </p:cNvPr>
@@ -5462,7 +5590,7 @@
           <p:cNvPr id="5" name="s14-identity">
             <a:extLst xmlns:a="http://schemas.openxmlformats.org/drawingml/2006/main">
               <a:ext uri="{FF2B5EF4-FFF2-40B4-BE49-F238E27FC236}">
-                <a16:creationId xmlns:a16="http://schemas.microsoft.com/office/drawing/2014/main" id="{03AE6107-F129-413C-8F11-96000772C206}"/>
+                <a16:creationId xmlns:a16="http://schemas.microsoft.com/office/drawing/2014/main" id="{BBECF336-0CF5-4DFC-B669-294D5C6A4D87}"/>
               </a:ext>
             </a:extLst>
           </p:cNvPr>
@@ -5520,7 +5648,7 @@
           <p:cNvPr id="6" name="source-0">
             <a:extLst xmlns:a="http://schemas.openxmlformats.org/drawingml/2006/main">
               <a:ext uri="{FF2B5EF4-FFF2-40B4-BE49-F238E27FC236}">
-                <a16:creationId xmlns:a16="http://schemas.microsoft.com/office/drawing/2014/main" id="{3F89B2D6-AC4B-4CB3-897F-5AA6B03CE021}"/>
+                <a16:creationId xmlns:a16="http://schemas.microsoft.com/office/drawing/2014/main" id="{2315FD4E-051C-402F-81AA-84570145F410}"/>
               </a:ext>
             </a:extLst>
           </p:cNvPr>
@@ -5544,7 +5672,7 @@
           </a:solidFill>
           <a:ln xmlns:a="http://schemas.openxmlformats.org/drawingml/2006/main" w="9525">
             <a:solidFill>
-              <a:srgbClr val="D6A33A"/>
+              <a:srgbClr val="8A5A00"/>
             </a:solidFill>
             <a:prstDash val="solid"/>
           </a:ln>
@@ -5584,7 +5712,7 @@
           <p:cNvPr id="7" name="source-1">
             <a:extLst xmlns:a="http://schemas.openxmlformats.org/drawingml/2006/main">
               <a:ext uri="{FF2B5EF4-FFF2-40B4-BE49-F238E27FC236}">
-                <a16:creationId xmlns:a16="http://schemas.microsoft.com/office/drawing/2014/main" id="{2A3C349E-8A55-457D-91A2-F5F8FF0AA052}"/>
+                <a16:creationId xmlns:a16="http://schemas.microsoft.com/office/drawing/2014/main" id="{B3316E6D-1C5C-4AB0-A586-B7E23833DDAB}"/>
               </a:ext>
             </a:extLst>
           </p:cNvPr>
@@ -5648,7 +5776,7 @@
           <p:cNvPr id="8" name="source-2">
             <a:extLst xmlns:a="http://schemas.openxmlformats.org/drawingml/2006/main">
               <a:ext uri="{FF2B5EF4-FFF2-40B4-BE49-F238E27FC236}">
-                <a16:creationId xmlns:a16="http://schemas.microsoft.com/office/drawing/2014/main" id="{623FD70C-AD1B-4118-BFDC-3DA5FDECE4C0}"/>
+                <a16:creationId xmlns:a16="http://schemas.microsoft.com/office/drawing/2014/main" id="{ECAF7ACD-6AEF-4BFC-ADAB-E5200E7EDAA5}"/>
               </a:ext>
             </a:extLst>
           </p:cNvPr>
@@ -5712,7 +5840,7 @@
           <p:cNvPr id="9" name="s14-takeaway-rule">
             <a:extLst xmlns:a="http://schemas.openxmlformats.org/drawingml/2006/main">
               <a:ext uri="{FF2B5EF4-FFF2-40B4-BE49-F238E27FC236}">
-                <a16:creationId xmlns:a16="http://schemas.microsoft.com/office/drawing/2014/main" id="{BA4811D4-5835-4456-B64D-DDC2EEA2470F}"/>
+                <a16:creationId xmlns:a16="http://schemas.microsoft.com/office/drawing/2014/main" id="{050CD0C8-A155-4FA5-89C6-13A8FBD2AE4E}"/>
               </a:ext>
             </a:extLst>
           </p:cNvPr>
@@ -5745,7 +5873,7 @@
           <p:cNvPr id="10" name="s14-takeaway">
             <a:extLst xmlns:a="http://schemas.openxmlformats.org/drawingml/2006/main">
               <a:ext uri="{FF2B5EF4-FFF2-40B4-BE49-F238E27FC236}">
-                <a16:creationId xmlns:a16="http://schemas.microsoft.com/office/drawing/2014/main" id="{EAA840C6-167D-4866-BC14-CF5B784F59B7}"/>
+                <a16:creationId xmlns:a16="http://schemas.microsoft.com/office/drawing/2014/main" id="{8071D634-9B0E-44AB-B687-ABF00F0B7811}"/>
               </a:ext>
             </a:extLst>
           </p:cNvPr>
@@ -5801,7 +5929,7 @@
     </p:spTree>
     <p:extLst>
       <p:ext uri="{BB962C8B-B14F-4D97-AF65-F5344CB8AC3E}">
-        <p14:creationId xmlns:p14="http://schemas.microsoft.com/office/powerpoint/2010/main" val="1277803946"/>
+        <p14:creationId xmlns:p14="http://schemas.microsoft.com/office/powerpoint/2010/main" val="1849008550"/>
       </p:ext>
     </p:extLst>
   </p:cSld>
@@ -5832,7 +5960,7 @@
           <p:cNvPr id="1" name="s2-rule">
             <a:extLst xmlns:a="http://schemas.openxmlformats.org/drawingml/2006/main">
               <a:ext uri="{FF2B5EF4-FFF2-40B4-BE49-F238E27FC236}">
-                <a16:creationId xmlns:a16="http://schemas.microsoft.com/office/drawing/2014/main" id="{A507AA5E-849A-47D5-945E-9146AAFE59A5}"/>
+                <a16:creationId xmlns:a16="http://schemas.microsoft.com/office/drawing/2014/main" id="{B5083960-08D1-42AC-A303-18CC035482D9}"/>
               </a:ext>
             </a:extLst>
           </p:cNvPr>
@@ -5865,7 +5993,7 @@
           <p:cNvPr id="2" name="s2-eyebrow">
             <a:extLst xmlns:a="http://schemas.openxmlformats.org/drawingml/2006/main">
               <a:ext uri="{FF2B5EF4-FFF2-40B4-BE49-F238E27FC236}">
-                <a16:creationId xmlns:a16="http://schemas.microsoft.com/office/drawing/2014/main" id="{0AD4425E-DEFF-4633-ADE9-B114D929F287}"/>
+                <a16:creationId xmlns:a16="http://schemas.microsoft.com/office/drawing/2014/main" id="{DE5BB453-131B-4C64-8F92-A94844184D62}"/>
               </a:ext>
             </a:extLst>
           </p:cNvPr>
@@ -5923,7 +6051,7 @@
           <p:cNvPr id="3" name="s2-title">
             <a:extLst xmlns:a="http://schemas.openxmlformats.org/drawingml/2006/main">
               <a:ext uri="{FF2B5EF4-FFF2-40B4-BE49-F238E27FC236}">
-                <a16:creationId xmlns:a16="http://schemas.microsoft.com/office/drawing/2014/main" id="{F8B3FC52-3180-4812-81A8-11ECD9140A6D}"/>
+                <a16:creationId xmlns:a16="http://schemas.microsoft.com/office/drawing/2014/main" id="{0C878D57-DCF7-453A-8E8A-FBA209277373}"/>
               </a:ext>
             </a:extLst>
           </p:cNvPr>
@@ -5971,7 +6099,7 @@
                 <a:ea typeface="PingFang SC"/>
                 <a:cs typeface="PingFang SC"/>
               </a:rPr>
-              <a:t>学完这一节，你能完成这些判断与行动</a:t>
+              <a:t>大模型能力边界：3项学习结果</a:t>
             </a:r>
           </a:p>
         </p:txBody>
@@ -5981,7 +6109,7 @@
           <p:cNvPr id="4" name="s2-footer">
             <a:extLst xmlns:a="http://schemas.openxmlformats.org/drawingml/2006/main">
               <a:ext uri="{FF2B5EF4-FFF2-40B4-BE49-F238E27FC236}">
-                <a16:creationId xmlns:a16="http://schemas.microsoft.com/office/drawing/2014/main" id="{151EBE54-142E-4ACD-ACC2-3C6A5D309F55}"/>
+                <a16:creationId xmlns:a16="http://schemas.microsoft.com/office/drawing/2014/main" id="{4C016771-20D8-46B3-AC38-7BBAA2D7B806}"/>
               </a:ext>
             </a:extLst>
           </p:cNvPr>
@@ -6012,7 +6140,7 @@
           <p:cNvPr id="5" name="s2-identity">
             <a:extLst xmlns:a="http://schemas.openxmlformats.org/drawingml/2006/main">
               <a:ext uri="{FF2B5EF4-FFF2-40B4-BE49-F238E27FC236}">
-                <a16:creationId xmlns:a16="http://schemas.microsoft.com/office/drawing/2014/main" id="{FAA1D97B-FD86-4C79-BF81-BFE8F634ECD3}"/>
+                <a16:creationId xmlns:a16="http://schemas.microsoft.com/office/drawing/2014/main" id="{B8620712-B84F-4349-8BE5-84AD4B85FDB1}"/>
               </a:ext>
             </a:extLst>
           </p:cNvPr>
@@ -6070,7 +6198,7 @@
           <p:cNvPr id="6" name="objective-1">
             <a:extLst xmlns:a="http://schemas.openxmlformats.org/drawingml/2006/main">
               <a:ext uri="{FF2B5EF4-FFF2-40B4-BE49-F238E27FC236}">
-                <a16:creationId xmlns:a16="http://schemas.microsoft.com/office/drawing/2014/main" id="{3931AC09-EC02-48A7-908B-F487B5C662DE}"/>
+                <a16:creationId xmlns:a16="http://schemas.microsoft.com/office/drawing/2014/main" id="{F68470CD-F089-42AF-A8AE-123F85147588}"/>
               </a:ext>
             </a:extLst>
           </p:cNvPr>
@@ -6157,7 +6285,7 @@
           <p:cNvPr id="7" name="objective-2">
             <a:extLst xmlns:a="http://schemas.openxmlformats.org/drawingml/2006/main">
               <a:ext uri="{FF2B5EF4-FFF2-40B4-BE49-F238E27FC236}">
-                <a16:creationId xmlns:a16="http://schemas.microsoft.com/office/drawing/2014/main" id="{82F733C9-286D-46D9-AEC3-30C24DC71A75}"/>
+                <a16:creationId xmlns:a16="http://schemas.microsoft.com/office/drawing/2014/main" id="{A7281FDB-DA49-4EAD-A6AA-7FD3D431C5BE}"/>
               </a:ext>
             </a:extLst>
           </p:cNvPr>
@@ -6244,7 +6372,7 @@
           <p:cNvPr id="8" name="objective-3">
             <a:extLst xmlns:a="http://schemas.openxmlformats.org/drawingml/2006/main">
               <a:ext uri="{FF2B5EF4-FFF2-40B4-BE49-F238E27FC236}">
-                <a16:creationId xmlns:a16="http://schemas.microsoft.com/office/drawing/2014/main" id="{D7859D83-0C78-4235-B7F7-3C614F547663}"/>
+                <a16:creationId xmlns:a16="http://schemas.microsoft.com/office/drawing/2014/main" id="{1D68F26C-3ED2-42E8-A424-B00BB0CFB688}"/>
               </a:ext>
             </a:extLst>
           </p:cNvPr>
@@ -6268,7 +6396,7 @@
           </a:solidFill>
           <a:ln xmlns:a="http://schemas.openxmlformats.org/drawingml/2006/main" w="19050">
             <a:solidFill>
-              <a:srgbClr val="D6A33A"/>
+              <a:srgbClr val="8A5A00"/>
             </a:solidFill>
             <a:prstDash val="solid"/>
           </a:ln>
@@ -6329,7 +6457,7 @@
     </p:spTree>
     <p:extLst>
       <p:ext uri="{BB962C8B-B14F-4D97-AF65-F5344CB8AC3E}">
-        <p14:creationId xmlns:p14="http://schemas.microsoft.com/office/powerpoint/2010/main" val="1120897041"/>
+        <p14:creationId xmlns:p14="http://schemas.microsoft.com/office/powerpoint/2010/main" val="557831640"/>
       </p:ext>
     </p:extLst>
   </p:cSld>
@@ -6360,7 +6488,7 @@
           <p:cNvPr id="1" name="s3-rule">
             <a:extLst xmlns:a="http://schemas.openxmlformats.org/drawingml/2006/main">
               <a:ext uri="{FF2B5EF4-FFF2-40B4-BE49-F238E27FC236}">
-                <a16:creationId xmlns:a16="http://schemas.microsoft.com/office/drawing/2014/main" id="{D9F217D9-00B6-4F30-A92B-9C91FCBD76DF}"/>
+                <a16:creationId xmlns:a16="http://schemas.microsoft.com/office/drawing/2014/main" id="{AE8C0882-1391-49BD-A50D-4CE0A70B418D}"/>
               </a:ext>
             </a:extLst>
           </p:cNvPr>
@@ -6393,7 +6521,7 @@
           <p:cNvPr id="2" name="s3-eyebrow">
             <a:extLst xmlns:a="http://schemas.openxmlformats.org/drawingml/2006/main">
               <a:ext uri="{FF2B5EF4-FFF2-40B4-BE49-F238E27FC236}">
-                <a16:creationId xmlns:a16="http://schemas.microsoft.com/office/drawing/2014/main" id="{2D11207B-D0E0-4594-B408-0597D4E8156B}"/>
+                <a16:creationId xmlns:a16="http://schemas.microsoft.com/office/drawing/2014/main" id="{9238D5C0-F18F-4891-97D4-E1688DE49D7E}"/>
               </a:ext>
             </a:extLst>
           </p:cNvPr>
@@ -6451,7 +6579,7 @@
           <p:cNvPr id="3" name="s3-title">
             <a:extLst xmlns:a="http://schemas.openxmlformats.org/drawingml/2006/main">
               <a:ext uri="{FF2B5EF4-FFF2-40B4-BE49-F238E27FC236}">
-                <a16:creationId xmlns:a16="http://schemas.microsoft.com/office/drawing/2014/main" id="{5A49A23B-1CA6-4537-8005-91374CB63F75}"/>
+                <a16:creationId xmlns:a16="http://schemas.microsoft.com/office/drawing/2014/main" id="{AAF9D8E0-6848-4DAC-859B-73C6E2B9CEFD}"/>
               </a:ext>
             </a:extLst>
           </p:cNvPr>
@@ -6476,7 +6604,7 @@
         </p:spPr>
         <p:txBody>
           <a:bodyPr xmlns:a="http://schemas.openxmlformats.org/drawingml/2006/main" lIns="0" tIns="0" rIns="0" bIns="0" anchor="ctr">
-            <a:normAutofit fontScale="90165"/>
+            <a:normAutofit fontScale="100000"/>
           </a:bodyPr>
           <a:lstStyle xmlns:a="http://schemas.openxmlformats.org/drawingml/2006/main"/>
           <a:p xmlns:a="http://schemas.openxmlformats.org/drawingml/2006/main">
@@ -6499,7 +6627,7 @@
                 <a:ea typeface="PingFang SC"/>
                 <a:cs typeface="PingFang SC"/>
               </a:rPr>
-              <a:t>"大模型"这个词经常和人工智能、机器学习、深度学习混在一起</a:t>
+              <a:t>大模型位于深度学习与预训练技术的延长线上</a:t>
             </a:r>
           </a:p>
         </p:txBody>
@@ -6509,7 +6637,7 @@
           <p:cNvPr id="4" name="s3-footer">
             <a:extLst xmlns:a="http://schemas.openxmlformats.org/drawingml/2006/main">
               <a:ext uri="{FF2B5EF4-FFF2-40B4-BE49-F238E27FC236}">
-                <a16:creationId xmlns:a16="http://schemas.microsoft.com/office/drawing/2014/main" id="{E43EAF68-759D-49DA-82EF-34650DE17B04}"/>
+                <a16:creationId xmlns:a16="http://schemas.microsoft.com/office/drawing/2014/main" id="{AE1303D5-D0FE-4E37-8F6A-9FB5015EDB50}"/>
               </a:ext>
             </a:extLst>
           </p:cNvPr>
@@ -6540,7 +6668,7 @@
           <p:cNvPr id="5" name="s3-identity">
             <a:extLst xmlns:a="http://schemas.openxmlformats.org/drawingml/2006/main">
               <a:ext uri="{FF2B5EF4-FFF2-40B4-BE49-F238E27FC236}">
-                <a16:creationId xmlns:a16="http://schemas.microsoft.com/office/drawing/2014/main" id="{51132AE7-FAFC-4605-B81D-1776B17832F8}"/>
+                <a16:creationId xmlns:a16="http://schemas.microsoft.com/office/drawing/2014/main" id="{7ADAA213-4BB6-4D56-8720-9F729DCDCDED}"/>
               </a:ext>
             </a:extLst>
           </p:cNvPr>
@@ -6598,7 +6726,7 @@
           <p:cNvPr id="6" name="core-no-0">
             <a:extLst xmlns:a="http://schemas.openxmlformats.org/drawingml/2006/main">
               <a:ext uri="{FF2B5EF4-FFF2-40B4-BE49-F238E27FC236}">
-                <a16:creationId xmlns:a16="http://schemas.microsoft.com/office/drawing/2014/main" id="{180CDDAC-A0F2-45AD-8928-55405D1FAFF6}"/>
+                <a16:creationId xmlns:a16="http://schemas.microsoft.com/office/drawing/2014/main" id="{E178E804-94B7-4741-9389-CA59CB7269E6}"/>
               </a:ext>
             </a:extLst>
           </p:cNvPr>
@@ -6630,7 +6758,7 @@
             <a:pPr algn="l">
               <a:defRPr sz="2250" b="1">
                 <a:solidFill>
-                  <a:srgbClr val="D6A33A"/>
+                  <a:srgbClr val="8A5A00"/>
                 </a:solidFill>
                 <a:latin typeface="PingFang SC"/>
                 <a:ea typeface="PingFang SC"/>
@@ -6640,7 +6768,7 @@
             <a:r>
               <a:rPr sz="2250" b="1">
                 <a:solidFill>
-                  <a:srgbClr val="D6A33A"/>
+                  <a:srgbClr val="8A5A00"/>
                 </a:solidFill>
                 <a:latin typeface="PingFang SC"/>
                 <a:ea typeface="PingFang SC"/>
@@ -6656,7 +6784,7 @@
           <p:cNvPr id="7" name="core-label-0">
             <a:extLst xmlns:a="http://schemas.openxmlformats.org/drawingml/2006/main">
               <a:ext uri="{FF2B5EF4-FFF2-40B4-BE49-F238E27FC236}">
-                <a16:creationId xmlns:a16="http://schemas.microsoft.com/office/drawing/2014/main" id="{10A64851-3E64-41B2-8837-CF4C205F8F5E}"/>
+                <a16:creationId xmlns:a16="http://schemas.microsoft.com/office/drawing/2014/main" id="{500AA9C0-4C77-4987-B0BF-84C4031DEDE1}"/>
               </a:ext>
             </a:extLst>
           </p:cNvPr>
@@ -6714,7 +6842,7 @@
           <p:cNvPr id="8" name="core-body-0">
             <a:extLst xmlns:a="http://schemas.openxmlformats.org/drawingml/2006/main">
               <a:ext uri="{FF2B5EF4-FFF2-40B4-BE49-F238E27FC236}">
-                <a16:creationId xmlns:a16="http://schemas.microsoft.com/office/drawing/2014/main" id="{75BED98F-71D1-4CA0-A3C3-9624ED9D06FC}"/>
+                <a16:creationId xmlns:a16="http://schemas.microsoft.com/office/drawing/2014/main" id="{D5D9D73A-0CC1-4773-9C47-07A45A29D0F3}"/>
               </a:ext>
             </a:extLst>
           </p:cNvPr>
@@ -6738,7 +6866,7 @@
           </a:solidFill>
           <a:ln xmlns:a="http://schemas.openxmlformats.org/drawingml/2006/main" w="19050">
             <a:solidFill>
-              <a:srgbClr val="D6A33A"/>
+              <a:srgbClr val="8A5A00"/>
             </a:solidFill>
             <a:prstDash val="solid"/>
           </a:ln>
@@ -6778,7 +6906,7 @@
           <p:cNvPr id="9" name="core-no-1">
             <a:extLst xmlns:a="http://schemas.openxmlformats.org/drawingml/2006/main">
               <a:ext uri="{FF2B5EF4-FFF2-40B4-BE49-F238E27FC236}">
-                <a16:creationId xmlns:a16="http://schemas.microsoft.com/office/drawing/2014/main" id="{EDB3AC88-5D6F-4513-B171-7E5622EDB5A8}"/>
+                <a16:creationId xmlns:a16="http://schemas.microsoft.com/office/drawing/2014/main" id="{D71952DE-7BB8-4A2D-B0CB-36ECA8871184}"/>
               </a:ext>
             </a:extLst>
           </p:cNvPr>
@@ -6810,7 +6938,7 @@
             <a:pPr algn="l">
               <a:defRPr sz="2250" b="1">
                 <a:solidFill>
-                  <a:srgbClr val="D6A33A"/>
+                  <a:srgbClr val="8A5A00"/>
                 </a:solidFill>
                 <a:latin typeface="PingFang SC"/>
                 <a:ea typeface="PingFang SC"/>
@@ -6820,7 +6948,7 @@
             <a:r>
               <a:rPr sz="2250" b="1">
                 <a:solidFill>
-                  <a:srgbClr val="D6A33A"/>
+                  <a:srgbClr val="8A5A00"/>
                 </a:solidFill>
                 <a:latin typeface="PingFang SC"/>
                 <a:ea typeface="PingFang SC"/>
@@ -6836,7 +6964,7 @@
           <p:cNvPr id="10" name="core-body-1">
             <a:extLst xmlns:a="http://schemas.openxmlformats.org/drawingml/2006/main">
               <a:ext uri="{FF2B5EF4-FFF2-40B4-BE49-F238E27FC236}">
-                <a16:creationId xmlns:a16="http://schemas.microsoft.com/office/drawing/2014/main" id="{83D2F4A3-983A-4CDB-82CC-9A8AEE35A0DB}"/>
+                <a16:creationId xmlns:a16="http://schemas.microsoft.com/office/drawing/2014/main" id="{91EC8AF0-58CE-4076-B35A-2BAB2948FE2B}"/>
               </a:ext>
             </a:extLst>
           </p:cNvPr>
@@ -6890,7 +7018,7 @@
                 <a:ea typeface="PingFang SC"/>
                 <a:cs typeface="PingFang SC"/>
               </a:rPr>
-              <a:t>人工智能 ⊃ 机器学习 ⊃ 深度学习 ⊃ 预训练模型 ⊃ 大模型 ⊃ 大语言模型（GPT、DeepSeek…）</a:t>
+              <a:t>人工智能 ⊃ 机器学习 ⊃ 深度学习 ⊃ 预训练模型 ⊃ 大模型 ⊃ 大语言模型（GPT、DeepSeek 等）</a:t>
             </a:r>
           </a:p>
         </p:txBody>
@@ -6900,7 +7028,7 @@
           <p:cNvPr id="11" name="core-no-2">
             <a:extLst xmlns:a="http://schemas.openxmlformats.org/drawingml/2006/main">
               <a:ext uri="{FF2B5EF4-FFF2-40B4-BE49-F238E27FC236}">
-                <a16:creationId xmlns:a16="http://schemas.microsoft.com/office/drawing/2014/main" id="{326954D6-D6FA-4E0F-84EF-33DDBD66B4F6}"/>
+                <a16:creationId xmlns:a16="http://schemas.microsoft.com/office/drawing/2014/main" id="{6532258A-3AE6-47B3-A42E-7E4C10E28918}"/>
               </a:ext>
             </a:extLst>
           </p:cNvPr>
@@ -6932,7 +7060,7 @@
             <a:pPr algn="l">
               <a:defRPr sz="2250" b="1">
                 <a:solidFill>
-                  <a:srgbClr val="D6A33A"/>
+                  <a:srgbClr val="8A5A00"/>
                 </a:solidFill>
                 <a:latin typeface="PingFang SC"/>
                 <a:ea typeface="PingFang SC"/>
@@ -6942,7 +7070,7 @@
             <a:r>
               <a:rPr sz="2250" b="1">
                 <a:solidFill>
-                  <a:srgbClr val="D6A33A"/>
+                  <a:srgbClr val="8A5A00"/>
                 </a:solidFill>
                 <a:latin typeface="PingFang SC"/>
                 <a:ea typeface="PingFang SC"/>
@@ -6958,7 +7086,7 @@
           <p:cNvPr id="12" name="core-body-2">
             <a:extLst xmlns:a="http://schemas.openxmlformats.org/drawingml/2006/main">
               <a:ext uri="{FF2B5EF4-FFF2-40B4-BE49-F238E27FC236}">
-                <a16:creationId xmlns:a16="http://schemas.microsoft.com/office/drawing/2014/main" id="{09520B9F-E60F-4EE4-A10B-97F352F7D932}"/>
+                <a16:creationId xmlns:a16="http://schemas.microsoft.com/office/drawing/2014/main" id="{C01DA4FA-7888-4362-8940-42B4384D7CDD}"/>
               </a:ext>
             </a:extLst>
           </p:cNvPr>
@@ -7012,7 +7140,7 @@
                 <a:ea typeface="PingFang SC"/>
                 <a:cs typeface="PingFang SC"/>
               </a:rPr>
-              <a:t>机器学习让机器从数据中找规律，其中的深度学习用多层神经网络学习复杂表示。深度学习里的 预训练模型 先在大规模数据上学到通用知识，再针对具体任务微调。预训练模型中参数规模巨大的那一类就是大模型…</a:t>
+              <a:t>机器学习让机器从数据中找规律；其中的深度学习用多层神经网络学习复杂表示；深度学习里的 预训练模型 先在大规模数据上学到通用知识；再针对具体任务微调；预训练模型中参数规模巨大的那一类就是大模型</a:t>
             </a:r>
           </a:p>
         </p:txBody>
@@ -7022,7 +7150,7 @@
           <p:cNvPr id="13" name="s3-takeaway-rule">
             <a:extLst xmlns:a="http://schemas.openxmlformats.org/drawingml/2006/main">
               <a:ext uri="{FF2B5EF4-FFF2-40B4-BE49-F238E27FC236}">
-                <a16:creationId xmlns:a16="http://schemas.microsoft.com/office/drawing/2014/main" id="{528C1E40-9D5A-4D00-8F3E-490B2C077126}"/>
+                <a16:creationId xmlns:a16="http://schemas.microsoft.com/office/drawing/2014/main" id="{EC8E33E4-D0E9-44E3-848A-7ECD08EC9424}"/>
               </a:ext>
             </a:extLst>
           </p:cNvPr>
@@ -7055,7 +7183,7 @@
           <p:cNvPr id="14" name="s3-takeaway">
             <a:extLst xmlns:a="http://schemas.openxmlformats.org/drawingml/2006/main">
               <a:ext uri="{FF2B5EF4-FFF2-40B4-BE49-F238E27FC236}">
-                <a16:creationId xmlns:a16="http://schemas.microsoft.com/office/drawing/2014/main" id="{9DF0C8D5-8876-4E58-9501-CB338E40858E}"/>
+                <a16:creationId xmlns:a16="http://schemas.microsoft.com/office/drawing/2014/main" id="{452D310F-C825-4431-9C4D-9BD4968B0A29}"/>
               </a:ext>
             </a:extLst>
           </p:cNvPr>
@@ -7103,7 +7231,7 @@
                 <a:ea typeface="PingFang SC"/>
                 <a:cs typeface="PingFang SC"/>
               </a:rPr>
-              <a:t>"大模型"这个词经常和人工智能、机器学习、深度学习混在一起</a:t>
+              <a:t>大模型位于深度学习与预训练技术的延长线上</a:t>
             </a:r>
           </a:p>
         </p:txBody>
@@ -7111,7 +7239,7 @@
     </p:spTree>
     <p:extLst>
       <p:ext uri="{BB962C8B-B14F-4D97-AF65-F5344CB8AC3E}">
-        <p14:creationId xmlns:p14="http://schemas.microsoft.com/office/powerpoint/2010/main" val="1076747178"/>
+        <p14:creationId xmlns:p14="http://schemas.microsoft.com/office/powerpoint/2010/main" val="1990120044"/>
       </p:ext>
     </p:extLst>
   </p:cSld>
@@ -7142,7 +7270,7 @@
           <p:cNvPr id="1" name="s4-rule">
             <a:extLst xmlns:a="http://schemas.openxmlformats.org/drawingml/2006/main">
               <a:ext uri="{FF2B5EF4-FFF2-40B4-BE49-F238E27FC236}">
-                <a16:creationId xmlns:a16="http://schemas.microsoft.com/office/drawing/2014/main" id="{818FD54E-36FE-499E-B51A-79E6C2349700}"/>
+                <a16:creationId xmlns:a16="http://schemas.microsoft.com/office/drawing/2014/main" id="{566932AD-C290-4FBA-B1A7-CC4FD48A0A5C}"/>
               </a:ext>
             </a:extLst>
           </p:cNvPr>
@@ -7175,7 +7303,7 @@
           <p:cNvPr id="2" name="s4-eyebrow">
             <a:extLst xmlns:a="http://schemas.openxmlformats.org/drawingml/2006/main">
               <a:ext uri="{FF2B5EF4-FFF2-40B4-BE49-F238E27FC236}">
-                <a16:creationId xmlns:a16="http://schemas.microsoft.com/office/drawing/2014/main" id="{4522B36C-21A0-4BD6-937E-BC6041975266}"/>
+                <a16:creationId xmlns:a16="http://schemas.microsoft.com/office/drawing/2014/main" id="{8A1F9718-8EF1-4EEA-B410-E7705E4AD27B}"/>
               </a:ext>
             </a:extLst>
           </p:cNvPr>
@@ -7233,7 +7361,7 @@
           <p:cNvPr id="3" name="s4-title">
             <a:extLst xmlns:a="http://schemas.openxmlformats.org/drawingml/2006/main">
               <a:ext uri="{FF2B5EF4-FFF2-40B4-BE49-F238E27FC236}">
-                <a16:creationId xmlns:a16="http://schemas.microsoft.com/office/drawing/2014/main" id="{B73D0D2B-FD2B-4037-A6B6-481ACB317172}"/>
+                <a16:creationId xmlns:a16="http://schemas.microsoft.com/office/drawing/2014/main" id="{3F6A7015-0D97-4351-9AF9-35015B33EC49}"/>
               </a:ext>
             </a:extLst>
           </p:cNvPr>
@@ -7291,7 +7419,7 @@
           <p:cNvPr id="4" name="s4-footer">
             <a:extLst xmlns:a="http://schemas.openxmlformats.org/drawingml/2006/main">
               <a:ext uri="{FF2B5EF4-FFF2-40B4-BE49-F238E27FC236}">
-                <a16:creationId xmlns:a16="http://schemas.microsoft.com/office/drawing/2014/main" id="{5A943281-7923-4E25-A483-4B71E6B2A7B4}"/>
+                <a16:creationId xmlns:a16="http://schemas.microsoft.com/office/drawing/2014/main" id="{06B2EDED-A0D3-4897-87A4-1C426448AB71}"/>
               </a:ext>
             </a:extLst>
           </p:cNvPr>
@@ -7322,7 +7450,7 @@
           <p:cNvPr id="5" name="s4-identity">
             <a:extLst xmlns:a="http://schemas.openxmlformats.org/drawingml/2006/main">
               <a:ext uri="{FF2B5EF4-FFF2-40B4-BE49-F238E27FC236}">
-                <a16:creationId xmlns:a16="http://schemas.microsoft.com/office/drawing/2014/main" id="{F2C648BE-AA0C-4093-A857-663576FEA792}"/>
+                <a16:creationId xmlns:a16="http://schemas.microsoft.com/office/drawing/2014/main" id="{9CC89C28-CC5D-498C-BAFB-AE6963D77EBF}"/>
               </a:ext>
             </a:extLst>
           </p:cNvPr>
@@ -7380,7 +7508,7 @@
           <p:cNvPr id="6" name="core-no-0">
             <a:extLst xmlns:a="http://schemas.openxmlformats.org/drawingml/2006/main">
               <a:ext uri="{FF2B5EF4-FFF2-40B4-BE49-F238E27FC236}">
-                <a16:creationId xmlns:a16="http://schemas.microsoft.com/office/drawing/2014/main" id="{D216EF8F-949A-469E-95F0-BC3710E8AB20}"/>
+                <a16:creationId xmlns:a16="http://schemas.microsoft.com/office/drawing/2014/main" id="{F46879CA-E2FE-4E6B-BD1D-9EA8DFAA9B2D}"/>
               </a:ext>
             </a:extLst>
           </p:cNvPr>
@@ -7412,7 +7540,7 @@
             <a:pPr algn="l">
               <a:defRPr sz="2250" b="1">
                 <a:solidFill>
-                  <a:srgbClr val="D6A33A"/>
+                  <a:srgbClr val="8A5A00"/>
                 </a:solidFill>
                 <a:latin typeface="PingFang SC"/>
                 <a:ea typeface="PingFang SC"/>
@@ -7422,7 +7550,7 @@
             <a:r>
               <a:rPr sz="2250" b="1">
                 <a:solidFill>
-                  <a:srgbClr val="D6A33A"/>
+                  <a:srgbClr val="8A5A00"/>
                 </a:solidFill>
                 <a:latin typeface="PingFang SC"/>
                 <a:ea typeface="PingFang SC"/>
@@ -7438,7 +7566,7 @@
           <p:cNvPr id="7" name="core-label-0">
             <a:extLst xmlns:a="http://schemas.openxmlformats.org/drawingml/2006/main">
               <a:ext uri="{FF2B5EF4-FFF2-40B4-BE49-F238E27FC236}">
-                <a16:creationId xmlns:a16="http://schemas.microsoft.com/office/drawing/2014/main" id="{D6D85C13-A77C-4848-8779-2B8D2C2B5E06}"/>
+                <a16:creationId xmlns:a16="http://schemas.microsoft.com/office/drawing/2014/main" id="{4C3B1A39-382D-4428-AFBD-B2B9935688C4}"/>
               </a:ext>
             </a:extLst>
           </p:cNvPr>
@@ -7496,7 +7624,7 @@
           <p:cNvPr id="8" name="core-body-0">
             <a:extLst xmlns:a="http://schemas.openxmlformats.org/drawingml/2006/main">
               <a:ext uri="{FF2B5EF4-FFF2-40B4-BE49-F238E27FC236}">
-                <a16:creationId xmlns:a16="http://schemas.microsoft.com/office/drawing/2014/main" id="{28AD920E-C0BB-4124-9127-84475EE1796C}"/>
+                <a16:creationId xmlns:a16="http://schemas.microsoft.com/office/drawing/2014/main" id="{1DC9E904-C3DD-4896-A89B-3447D31C3A1B}"/>
               </a:ext>
             </a:extLst>
           </p:cNvPr>
@@ -7520,14 +7648,14 @@
           </a:solidFill>
           <a:ln xmlns:a="http://schemas.openxmlformats.org/drawingml/2006/main" w="19050">
             <a:solidFill>
-              <a:srgbClr val="D6A33A"/>
+              <a:srgbClr val="8A5A00"/>
             </a:solidFill>
             <a:prstDash val="solid"/>
           </a:ln>
         </p:spPr>
         <p:txBody>
           <a:bodyPr xmlns:a="http://schemas.openxmlformats.org/drawingml/2006/main" lIns="152400" tIns="133350" rIns="152400" bIns="133350" anchor="ctr">
-            <a:normAutofit fontScale="92156"/>
+            <a:normAutofit fontScale="98233"/>
           </a:bodyPr>
           <a:lstStyle xmlns:a="http://schemas.openxmlformats.org/drawingml/2006/main"/>
           <a:p xmlns:a="http://schemas.openxmlformats.org/drawingml/2006/main">
@@ -7550,7 +7678,7 @@
                 <a:ea typeface="PingFang SC"/>
                 <a:cs typeface="PingFang SC"/>
               </a:rPr>
-              <a:t>大模型的“大”同时体现在参数、训练数据、计算量和工程系统。以公开论文为例，GPT-3 使用 1750 亿参数展示了规模化预训练与上下文学习的潜力；但参数多不等于一定更好，数据质量、训练目标…</a:t>
+              <a:t>大模型的“大”同时体现在参数、训练数据、计算量和工程系统；以公开论文为例，GPT-3 使用 1750 亿参数展示了规模化预训练与上下文学习的潜力；但参数多不等于一定更好</a:t>
             </a:r>
           </a:p>
         </p:txBody>
@@ -7560,7 +7688,7 @@
           <p:cNvPr id="9" name="core-no-1">
             <a:extLst xmlns:a="http://schemas.openxmlformats.org/drawingml/2006/main">
               <a:ext uri="{FF2B5EF4-FFF2-40B4-BE49-F238E27FC236}">
-                <a16:creationId xmlns:a16="http://schemas.microsoft.com/office/drawing/2014/main" id="{802E6592-8CF1-4B60-99A2-467B56C5B5EF}"/>
+                <a16:creationId xmlns:a16="http://schemas.microsoft.com/office/drawing/2014/main" id="{E2A2F019-70D4-4006-A6E3-2EBF28325E2B}"/>
               </a:ext>
             </a:extLst>
           </p:cNvPr>
@@ -7592,7 +7720,7 @@
             <a:pPr algn="l">
               <a:defRPr sz="2250" b="1">
                 <a:solidFill>
-                  <a:srgbClr val="D6A33A"/>
+                  <a:srgbClr val="8A5A00"/>
                 </a:solidFill>
                 <a:latin typeface="PingFang SC"/>
                 <a:ea typeface="PingFang SC"/>
@@ -7602,7 +7730,7 @@
             <a:r>
               <a:rPr sz="2250" b="1">
                 <a:solidFill>
-                  <a:srgbClr val="D6A33A"/>
+                  <a:srgbClr val="8A5A00"/>
                 </a:solidFill>
                 <a:latin typeface="PingFang SC"/>
                 <a:ea typeface="PingFang SC"/>
@@ -7618,7 +7746,7 @@
           <p:cNvPr id="10" name="core-body-1">
             <a:extLst xmlns:a="http://schemas.openxmlformats.org/drawingml/2006/main">
               <a:ext uri="{FF2B5EF4-FFF2-40B4-BE49-F238E27FC236}">
-                <a16:creationId xmlns:a16="http://schemas.microsoft.com/office/drawing/2014/main" id="{92BFFB1F-C580-4A9A-B2BF-3558690E3AE0}"/>
+                <a16:creationId xmlns:a16="http://schemas.microsoft.com/office/drawing/2014/main" id="{25F159E1-329B-490D-BA2B-9373255147C0}"/>
               </a:ext>
             </a:extLst>
           </p:cNvPr>
@@ -7682,7 +7810,7 @@
           <p:cNvPr id="11" name="s4-takeaway-rule">
             <a:extLst xmlns:a="http://schemas.openxmlformats.org/drawingml/2006/main">
               <a:ext uri="{FF2B5EF4-FFF2-40B4-BE49-F238E27FC236}">
-                <a16:creationId xmlns:a16="http://schemas.microsoft.com/office/drawing/2014/main" id="{AA63D922-6312-4C7B-829D-90806F106B13}"/>
+                <a16:creationId xmlns:a16="http://schemas.microsoft.com/office/drawing/2014/main" id="{10872941-A072-4AF8-AEF8-DF2978276F18}"/>
               </a:ext>
             </a:extLst>
           </p:cNvPr>
@@ -7715,7 +7843,7 @@
           <p:cNvPr id="12" name="s4-takeaway">
             <a:extLst xmlns:a="http://schemas.openxmlformats.org/drawingml/2006/main">
               <a:ext uri="{FF2B5EF4-FFF2-40B4-BE49-F238E27FC236}">
-                <a16:creationId xmlns:a16="http://schemas.microsoft.com/office/drawing/2014/main" id="{5A9DFE3A-2842-4D74-961D-4228E2D09F25}"/>
+                <a16:creationId xmlns:a16="http://schemas.microsoft.com/office/drawing/2014/main" id="{95023979-3F33-42F3-ADBF-6CE242EEC347}"/>
               </a:ext>
             </a:extLst>
           </p:cNvPr>
@@ -7771,7 +7899,7 @@
     </p:spTree>
     <p:extLst>
       <p:ext uri="{BB962C8B-B14F-4D97-AF65-F5344CB8AC3E}">
-        <p14:creationId xmlns:p14="http://schemas.microsoft.com/office/powerpoint/2010/main" val="1910311446"/>
+        <p14:creationId xmlns:p14="http://schemas.microsoft.com/office/powerpoint/2010/main" val="991495003"/>
       </p:ext>
     </p:extLst>
   </p:cSld>
@@ -7802,7 +7930,7 @@
           <p:cNvPr id="1" name="s5-rule">
             <a:extLst xmlns:a="http://schemas.openxmlformats.org/drawingml/2006/main">
               <a:ext uri="{FF2B5EF4-FFF2-40B4-BE49-F238E27FC236}">
-                <a16:creationId xmlns:a16="http://schemas.microsoft.com/office/drawing/2014/main" id="{86021316-48E1-4608-81B6-E97AC74DBFE6}"/>
+                <a16:creationId xmlns:a16="http://schemas.microsoft.com/office/drawing/2014/main" id="{89B9B52B-9671-4627-92EC-D000B8102A8F}"/>
               </a:ext>
             </a:extLst>
           </p:cNvPr>
@@ -7835,7 +7963,7 @@
           <p:cNvPr id="2" name="s5-eyebrow">
             <a:extLst xmlns:a="http://schemas.openxmlformats.org/drawingml/2006/main">
               <a:ext uri="{FF2B5EF4-FFF2-40B4-BE49-F238E27FC236}">
-                <a16:creationId xmlns:a16="http://schemas.microsoft.com/office/drawing/2014/main" id="{5E04BB4B-3A95-4882-BC40-B6F6A4BC4DB2}"/>
+                <a16:creationId xmlns:a16="http://schemas.microsoft.com/office/drawing/2014/main" id="{8CC09EE7-D997-4252-8D4B-4FC837581836}"/>
               </a:ext>
             </a:extLst>
           </p:cNvPr>
@@ -7893,7 +8021,7 @@
           <p:cNvPr id="3" name="s5-title">
             <a:extLst xmlns:a="http://schemas.openxmlformats.org/drawingml/2006/main">
               <a:ext uri="{FF2B5EF4-FFF2-40B4-BE49-F238E27FC236}">
-                <a16:creationId xmlns:a16="http://schemas.microsoft.com/office/drawing/2014/main" id="{7EA79CA3-96F3-4926-809F-92B2E1D7FA40}"/>
+                <a16:creationId xmlns:a16="http://schemas.microsoft.com/office/drawing/2014/main" id="{745E591B-ED55-4FA1-865B-0348F67EC226}"/>
               </a:ext>
             </a:extLst>
           </p:cNvPr>
@@ -7951,7 +8079,7 @@
           <p:cNvPr id="4" name="s5-footer">
             <a:extLst xmlns:a="http://schemas.openxmlformats.org/drawingml/2006/main">
               <a:ext uri="{FF2B5EF4-FFF2-40B4-BE49-F238E27FC236}">
-                <a16:creationId xmlns:a16="http://schemas.microsoft.com/office/drawing/2014/main" id="{4E9E4F8C-0D36-47D1-808A-0B5FD01776C2}"/>
+                <a16:creationId xmlns:a16="http://schemas.microsoft.com/office/drawing/2014/main" id="{A0B9A343-363C-4B0D-998F-6D973492289A}"/>
               </a:ext>
             </a:extLst>
           </p:cNvPr>
@@ -7982,7 +8110,7 @@
           <p:cNvPr id="5" name="s5-identity">
             <a:extLst xmlns:a="http://schemas.openxmlformats.org/drawingml/2006/main">
               <a:ext uri="{FF2B5EF4-FFF2-40B4-BE49-F238E27FC236}">
-                <a16:creationId xmlns:a16="http://schemas.microsoft.com/office/drawing/2014/main" id="{B7D6B841-9C2A-40F5-A2A3-8FCA1E31B47A}"/>
+                <a16:creationId xmlns:a16="http://schemas.microsoft.com/office/drawing/2014/main" id="{509B9DC8-EF00-428C-96C3-2CD2C86A5725}"/>
               </a:ext>
             </a:extLst>
           </p:cNvPr>
@@ -8040,7 +8168,7 @@
           <p:cNvPr id="6" name="core-no-0">
             <a:extLst xmlns:a="http://schemas.openxmlformats.org/drawingml/2006/main">
               <a:ext uri="{FF2B5EF4-FFF2-40B4-BE49-F238E27FC236}">
-                <a16:creationId xmlns:a16="http://schemas.microsoft.com/office/drawing/2014/main" id="{90B86834-B286-467C-BD01-855A44A5CF7C}"/>
+                <a16:creationId xmlns:a16="http://schemas.microsoft.com/office/drawing/2014/main" id="{320F5B52-AEBD-46CE-8B06-693DA0284CEC}"/>
               </a:ext>
             </a:extLst>
           </p:cNvPr>
@@ -8072,7 +8200,7 @@
             <a:pPr algn="l">
               <a:defRPr sz="2250" b="1">
                 <a:solidFill>
-                  <a:srgbClr val="D6A33A"/>
+                  <a:srgbClr val="8A5A00"/>
                 </a:solidFill>
                 <a:latin typeface="PingFang SC"/>
                 <a:ea typeface="PingFang SC"/>
@@ -8082,7 +8210,7 @@
             <a:r>
               <a:rPr sz="2250" b="1">
                 <a:solidFill>
-                  <a:srgbClr val="D6A33A"/>
+                  <a:srgbClr val="8A5A00"/>
                 </a:solidFill>
                 <a:latin typeface="PingFang SC"/>
                 <a:ea typeface="PingFang SC"/>
@@ -8098,7 +8226,7 @@
           <p:cNvPr id="7" name="core-label-0">
             <a:extLst xmlns:a="http://schemas.openxmlformats.org/drawingml/2006/main">
               <a:ext uri="{FF2B5EF4-FFF2-40B4-BE49-F238E27FC236}">
-                <a16:creationId xmlns:a16="http://schemas.microsoft.com/office/drawing/2014/main" id="{21886BBF-C280-451B-B84C-FCC1F522547B}"/>
+                <a16:creationId xmlns:a16="http://schemas.microsoft.com/office/drawing/2014/main" id="{22342469-9A19-4811-ADA3-3561FE35B5D7}"/>
               </a:ext>
             </a:extLst>
           </p:cNvPr>
@@ -8156,7 +8284,7 @@
           <p:cNvPr id="8" name="core-body-0">
             <a:extLst xmlns:a="http://schemas.openxmlformats.org/drawingml/2006/main">
               <a:ext uri="{FF2B5EF4-FFF2-40B4-BE49-F238E27FC236}">
-                <a16:creationId xmlns:a16="http://schemas.microsoft.com/office/drawing/2014/main" id="{ADC19279-98E7-4E8E-BAD7-311518B49874}"/>
+                <a16:creationId xmlns:a16="http://schemas.microsoft.com/office/drawing/2014/main" id="{A9074417-A876-43E1-83A3-D63D61BD3E8A}"/>
               </a:ext>
             </a:extLst>
           </p:cNvPr>
@@ -8180,7 +8308,7 @@
           </a:solidFill>
           <a:ln xmlns:a="http://schemas.openxmlformats.org/drawingml/2006/main" w="19050">
             <a:solidFill>
-              <a:srgbClr val="D6A33A"/>
+              <a:srgbClr val="8A5A00"/>
             </a:solidFill>
             <a:prstDash val="solid"/>
           </a:ln>
@@ -8210,7 +8338,7 @@
                 <a:ea typeface="PingFang SC"/>
                 <a:cs typeface="PingFang SC"/>
               </a:rPr>
-              <a:t>Transformer 把自注意力作为核心机制：处理某个 token 时，模型可以根据任务和上下文为其他 token 分配不同权重。多层注意力与前馈网络反复混合信息，使模型能学习语义关系…</a:t>
+              <a:t>Transformer 把自注意力作为核心机制；处理某个 token 时；模型可以根据任务和上下文为其他 token 分配不同权重；多层注意力与前馈网络反复混合信息</a:t>
             </a:r>
           </a:p>
         </p:txBody>
@@ -8220,7 +8348,7 @@
           <p:cNvPr id="9" name="core-no-1">
             <a:extLst xmlns:a="http://schemas.openxmlformats.org/drawingml/2006/main">
               <a:ext uri="{FF2B5EF4-FFF2-40B4-BE49-F238E27FC236}">
-                <a16:creationId xmlns:a16="http://schemas.microsoft.com/office/drawing/2014/main" id="{6B03B9AA-9C58-4C7B-923D-62893AE5D864}"/>
+                <a16:creationId xmlns:a16="http://schemas.microsoft.com/office/drawing/2014/main" id="{3A3D3C13-E86A-4CB6-B8DE-D1076A67AE9B}"/>
               </a:ext>
             </a:extLst>
           </p:cNvPr>
@@ -8252,7 +8380,7 @@
             <a:pPr algn="l">
               <a:defRPr sz="2250" b="1">
                 <a:solidFill>
-                  <a:srgbClr val="D6A33A"/>
+                  <a:srgbClr val="8A5A00"/>
                 </a:solidFill>
                 <a:latin typeface="PingFang SC"/>
                 <a:ea typeface="PingFang SC"/>
@@ -8262,7 +8390,7 @@
             <a:r>
               <a:rPr sz="2250" b="1">
                 <a:solidFill>
-                  <a:srgbClr val="D6A33A"/>
+                  <a:srgbClr val="8A5A00"/>
                 </a:solidFill>
                 <a:latin typeface="PingFang SC"/>
                 <a:ea typeface="PingFang SC"/>
@@ -8278,7 +8406,7 @@
           <p:cNvPr id="10" name="core-body-1">
             <a:extLst xmlns:a="http://schemas.openxmlformats.org/drawingml/2006/main">
               <a:ext uri="{FF2B5EF4-FFF2-40B4-BE49-F238E27FC236}">
-                <a16:creationId xmlns:a16="http://schemas.microsoft.com/office/drawing/2014/main" id="{CA4617AD-E6D8-4EBE-B3B9-DA2D60E89571}"/>
+                <a16:creationId xmlns:a16="http://schemas.microsoft.com/office/drawing/2014/main" id="{CCF9ADCE-5606-4CAA-B887-002DC76D9EA3}"/>
               </a:ext>
             </a:extLst>
           </p:cNvPr>
@@ -8342,7 +8470,7 @@
           <p:cNvPr id="11" name="s5-takeaway-rule">
             <a:extLst xmlns:a="http://schemas.openxmlformats.org/drawingml/2006/main">
               <a:ext uri="{FF2B5EF4-FFF2-40B4-BE49-F238E27FC236}">
-                <a16:creationId xmlns:a16="http://schemas.microsoft.com/office/drawing/2014/main" id="{EB0B73F5-5058-4564-9FDC-9EAD9252FAE6}"/>
+                <a16:creationId xmlns:a16="http://schemas.microsoft.com/office/drawing/2014/main" id="{A0BB671B-BF51-44E9-8990-7269919C356F}"/>
               </a:ext>
             </a:extLst>
           </p:cNvPr>
@@ -8375,7 +8503,7 @@
           <p:cNvPr id="12" name="s5-takeaway">
             <a:extLst xmlns:a="http://schemas.openxmlformats.org/drawingml/2006/main">
               <a:ext uri="{FF2B5EF4-FFF2-40B4-BE49-F238E27FC236}">
-                <a16:creationId xmlns:a16="http://schemas.microsoft.com/office/drawing/2014/main" id="{48A1F7CD-AB65-4488-9121-03783EB92882}"/>
+                <a16:creationId xmlns:a16="http://schemas.microsoft.com/office/drawing/2014/main" id="{9C6A5262-5750-4AE0-8D28-3E92FF6DFFA9}"/>
               </a:ext>
             </a:extLst>
           </p:cNvPr>
@@ -8431,7 +8559,7 @@
     </p:spTree>
     <p:extLst>
       <p:ext uri="{BB962C8B-B14F-4D97-AF65-F5344CB8AC3E}">
-        <p14:creationId xmlns:p14="http://schemas.microsoft.com/office/powerpoint/2010/main" val="1624213601"/>
+        <p14:creationId xmlns:p14="http://schemas.microsoft.com/office/powerpoint/2010/main" val="361840226"/>
       </p:ext>
     </p:extLst>
   </p:cSld>
@@ -8462,7 +8590,7 @@
           <p:cNvPr id="1" name="s6-rule">
             <a:extLst xmlns:a="http://schemas.openxmlformats.org/drawingml/2006/main">
               <a:ext uri="{FF2B5EF4-FFF2-40B4-BE49-F238E27FC236}">
-                <a16:creationId xmlns:a16="http://schemas.microsoft.com/office/drawing/2014/main" id="{DFE80639-813B-4194-9844-6D7F375FC58B}"/>
+                <a16:creationId xmlns:a16="http://schemas.microsoft.com/office/drawing/2014/main" id="{7CC19BF9-3971-4EEE-B0D4-0C6CBB567FDF}"/>
               </a:ext>
             </a:extLst>
           </p:cNvPr>
@@ -8495,7 +8623,7 @@
           <p:cNvPr id="2" name="s6-eyebrow">
             <a:extLst xmlns:a="http://schemas.openxmlformats.org/drawingml/2006/main">
               <a:ext uri="{FF2B5EF4-FFF2-40B4-BE49-F238E27FC236}">
-                <a16:creationId xmlns:a16="http://schemas.microsoft.com/office/drawing/2014/main" id="{DFDC4FC1-BA21-4779-861E-83980FB9334A}"/>
+                <a16:creationId xmlns:a16="http://schemas.microsoft.com/office/drawing/2014/main" id="{6EFA5C3D-9991-45B2-BD78-6950D4B3B540}"/>
               </a:ext>
             </a:extLst>
           </p:cNvPr>
@@ -8553,7 +8681,7 @@
           <p:cNvPr id="3" name="s6-title">
             <a:extLst xmlns:a="http://schemas.openxmlformats.org/drawingml/2006/main">
               <a:ext uri="{FF2B5EF4-FFF2-40B4-BE49-F238E27FC236}">
-                <a16:creationId xmlns:a16="http://schemas.microsoft.com/office/drawing/2014/main" id="{7B7AF6DD-E939-43D5-812F-334D7E1579BF}"/>
+                <a16:creationId xmlns:a16="http://schemas.microsoft.com/office/drawing/2014/main" id="{079A3811-F4F4-4081-87FD-BA5DF7713A75}"/>
               </a:ext>
             </a:extLst>
           </p:cNvPr>
@@ -8611,7 +8739,7 @@
           <p:cNvPr id="4" name="s6-footer">
             <a:extLst xmlns:a="http://schemas.openxmlformats.org/drawingml/2006/main">
               <a:ext uri="{FF2B5EF4-FFF2-40B4-BE49-F238E27FC236}">
-                <a16:creationId xmlns:a16="http://schemas.microsoft.com/office/drawing/2014/main" id="{74D463EC-6DC2-439B-B50E-67A90D2B5928}"/>
+                <a16:creationId xmlns:a16="http://schemas.microsoft.com/office/drawing/2014/main" id="{FD0EDB4A-4557-425B-8ACC-F52495D0094F}"/>
               </a:ext>
             </a:extLst>
           </p:cNvPr>
@@ -8642,7 +8770,7 @@
           <p:cNvPr id="5" name="s6-identity">
             <a:extLst xmlns:a="http://schemas.openxmlformats.org/drawingml/2006/main">
               <a:ext uri="{FF2B5EF4-FFF2-40B4-BE49-F238E27FC236}">
-                <a16:creationId xmlns:a16="http://schemas.microsoft.com/office/drawing/2014/main" id="{D7644E82-89FA-4153-8A0D-F4F0F4BA4832}"/>
+                <a16:creationId xmlns:a16="http://schemas.microsoft.com/office/drawing/2014/main" id="{A1A18A4C-5CEE-4DEA-B7E2-05C1DEAB0332}"/>
               </a:ext>
             </a:extLst>
           </p:cNvPr>
@@ -8700,7 +8828,7 @@
           <p:cNvPr id="6" name="core-no-0">
             <a:extLst xmlns:a="http://schemas.openxmlformats.org/drawingml/2006/main">
               <a:ext uri="{FF2B5EF4-FFF2-40B4-BE49-F238E27FC236}">
-                <a16:creationId xmlns:a16="http://schemas.microsoft.com/office/drawing/2014/main" id="{44484100-D317-4583-8C43-E0369924BCA4}"/>
+                <a16:creationId xmlns:a16="http://schemas.microsoft.com/office/drawing/2014/main" id="{2A31D047-8172-4E31-B861-5BE083075BAE}"/>
               </a:ext>
             </a:extLst>
           </p:cNvPr>
@@ -8732,7 +8860,7 @@
             <a:pPr algn="l">
               <a:defRPr sz="2250" b="1">
                 <a:solidFill>
-                  <a:srgbClr val="D6A33A"/>
+                  <a:srgbClr val="8A5A00"/>
                 </a:solidFill>
                 <a:latin typeface="PingFang SC"/>
                 <a:ea typeface="PingFang SC"/>
@@ -8742,7 +8870,7 @@
             <a:r>
               <a:rPr sz="2250" b="1">
                 <a:solidFill>
-                  <a:srgbClr val="D6A33A"/>
+                  <a:srgbClr val="8A5A00"/>
                 </a:solidFill>
                 <a:latin typeface="PingFang SC"/>
                 <a:ea typeface="PingFang SC"/>
@@ -8758,7 +8886,7 @@
           <p:cNvPr id="7" name="core-label-0">
             <a:extLst xmlns:a="http://schemas.openxmlformats.org/drawingml/2006/main">
               <a:ext uri="{FF2B5EF4-FFF2-40B4-BE49-F238E27FC236}">
-                <a16:creationId xmlns:a16="http://schemas.microsoft.com/office/drawing/2014/main" id="{84709B17-2EFD-4BF8-8C0D-675BF2A2CDCB}"/>
+                <a16:creationId xmlns:a16="http://schemas.microsoft.com/office/drawing/2014/main" id="{0C2F4FAC-C506-4C20-B94C-A8A4A57D479F}"/>
               </a:ext>
             </a:extLst>
           </p:cNvPr>
@@ -8816,7 +8944,7 @@
           <p:cNvPr id="8" name="core-body-0">
             <a:extLst xmlns:a="http://schemas.openxmlformats.org/drawingml/2006/main">
               <a:ext uri="{FF2B5EF4-FFF2-40B4-BE49-F238E27FC236}">
-                <a16:creationId xmlns:a16="http://schemas.microsoft.com/office/drawing/2014/main" id="{63269E3B-BF32-492C-BD2A-1A280B5BD2D3}"/>
+                <a16:creationId xmlns:a16="http://schemas.microsoft.com/office/drawing/2014/main" id="{353C6E3A-7CD3-4201-905C-B2CD6A1BE932}"/>
               </a:ext>
             </a:extLst>
           </p:cNvPr>
@@ -8840,7 +8968,7 @@
           </a:solidFill>
           <a:ln xmlns:a="http://schemas.openxmlformats.org/drawingml/2006/main" w="19050">
             <a:solidFill>
-              <a:srgbClr val="D6A33A"/>
+              <a:srgbClr val="8A5A00"/>
             </a:solidFill>
             <a:prstDash val="solid"/>
           </a:ln>
@@ -8880,7 +9008,7 @@
           <p:cNvPr id="9" name="core-no-1">
             <a:extLst xmlns:a="http://schemas.openxmlformats.org/drawingml/2006/main">
               <a:ext uri="{FF2B5EF4-FFF2-40B4-BE49-F238E27FC236}">
-                <a16:creationId xmlns:a16="http://schemas.microsoft.com/office/drawing/2014/main" id="{9C376B9B-92B5-4114-8058-7B713B7D1D04}"/>
+                <a16:creationId xmlns:a16="http://schemas.microsoft.com/office/drawing/2014/main" id="{9D38C8F9-476B-404C-ADD6-1298E362939E}"/>
               </a:ext>
             </a:extLst>
           </p:cNvPr>
@@ -8912,7 +9040,7 @@
             <a:pPr algn="l">
               <a:defRPr sz="2250" b="1">
                 <a:solidFill>
-                  <a:srgbClr val="D6A33A"/>
+                  <a:srgbClr val="8A5A00"/>
                 </a:solidFill>
                 <a:latin typeface="PingFang SC"/>
                 <a:ea typeface="PingFang SC"/>
@@ -8922,7 +9050,7 @@
             <a:r>
               <a:rPr sz="2250" b="1">
                 <a:solidFill>
-                  <a:srgbClr val="D6A33A"/>
+                  <a:srgbClr val="8A5A00"/>
                 </a:solidFill>
                 <a:latin typeface="PingFang SC"/>
                 <a:ea typeface="PingFang SC"/>
@@ -8938,7 +9066,7 @@
           <p:cNvPr id="10" name="core-body-1">
             <a:extLst xmlns:a="http://schemas.openxmlformats.org/drawingml/2006/main">
               <a:ext uri="{FF2B5EF4-FFF2-40B4-BE49-F238E27FC236}">
-                <a16:creationId xmlns:a16="http://schemas.microsoft.com/office/drawing/2014/main" id="{3B492BEB-C328-4046-8DFB-241BECDDF1CF}"/>
+                <a16:creationId xmlns:a16="http://schemas.microsoft.com/office/drawing/2014/main" id="{B0C675A9-3358-4496-BC01-0F8A579B2C50}"/>
               </a:ext>
             </a:extLst>
           </p:cNvPr>
@@ -9002,7 +9130,7 @@
           <p:cNvPr id="11" name="core-no-2">
             <a:extLst xmlns:a="http://schemas.openxmlformats.org/drawingml/2006/main">
               <a:ext uri="{FF2B5EF4-FFF2-40B4-BE49-F238E27FC236}">
-                <a16:creationId xmlns:a16="http://schemas.microsoft.com/office/drawing/2014/main" id="{48BE3EEC-AEE7-4520-A4B7-DFE859BC05FF}"/>
+                <a16:creationId xmlns:a16="http://schemas.microsoft.com/office/drawing/2014/main" id="{A55EB842-AA42-4969-8583-199DAFB57A9D}"/>
               </a:ext>
             </a:extLst>
           </p:cNvPr>
@@ -9034,7 +9162,7 @@
             <a:pPr algn="l">
               <a:defRPr sz="2250" b="1">
                 <a:solidFill>
-                  <a:srgbClr val="D6A33A"/>
+                  <a:srgbClr val="8A5A00"/>
                 </a:solidFill>
                 <a:latin typeface="PingFang SC"/>
                 <a:ea typeface="PingFang SC"/>
@@ -9044,7 +9172,7 @@
             <a:r>
               <a:rPr sz="2250" b="1">
                 <a:solidFill>
-                  <a:srgbClr val="D6A33A"/>
+                  <a:srgbClr val="8A5A00"/>
                 </a:solidFill>
                 <a:latin typeface="PingFang SC"/>
                 <a:ea typeface="PingFang SC"/>
@@ -9060,7 +9188,7 @@
           <p:cNvPr id="12" name="core-body-2">
             <a:extLst xmlns:a="http://schemas.openxmlformats.org/drawingml/2006/main">
               <a:ext uri="{FF2B5EF4-FFF2-40B4-BE49-F238E27FC236}">
-                <a16:creationId xmlns:a16="http://schemas.microsoft.com/office/drawing/2014/main" id="{859C8FD3-A935-40B5-90C8-7FDC9B636386}"/>
+                <a16:creationId xmlns:a16="http://schemas.microsoft.com/office/drawing/2014/main" id="{C93C7E0E-D650-4DAE-A1E3-B139F488ED54}"/>
               </a:ext>
             </a:extLst>
           </p:cNvPr>
@@ -9124,7 +9252,7 @@
           <p:cNvPr id="13" name="s6-takeaway-rule">
             <a:extLst xmlns:a="http://schemas.openxmlformats.org/drawingml/2006/main">
               <a:ext uri="{FF2B5EF4-FFF2-40B4-BE49-F238E27FC236}">
-                <a16:creationId xmlns:a16="http://schemas.microsoft.com/office/drawing/2014/main" id="{A470577F-22D3-4F97-80DD-EF209E75496A}"/>
+                <a16:creationId xmlns:a16="http://schemas.microsoft.com/office/drawing/2014/main" id="{17879A4E-9DF5-4F83-9921-C1C6FBE52DBD}"/>
               </a:ext>
             </a:extLst>
           </p:cNvPr>
@@ -9157,7 +9285,7 @@
           <p:cNvPr id="14" name="s6-takeaway">
             <a:extLst xmlns:a="http://schemas.openxmlformats.org/drawingml/2006/main">
               <a:ext uri="{FF2B5EF4-FFF2-40B4-BE49-F238E27FC236}">
-                <a16:creationId xmlns:a16="http://schemas.microsoft.com/office/drawing/2014/main" id="{868DB969-95C4-46D5-9084-DCE5F6223536}"/>
+                <a16:creationId xmlns:a16="http://schemas.microsoft.com/office/drawing/2014/main" id="{04A9BBC7-4C1C-4E69-8FBD-DE43EFCA9870}"/>
               </a:ext>
             </a:extLst>
           </p:cNvPr>
@@ -9213,7 +9341,7 @@
     </p:spTree>
     <p:extLst>
       <p:ext uri="{BB962C8B-B14F-4D97-AF65-F5344CB8AC3E}">
-        <p14:creationId xmlns:p14="http://schemas.microsoft.com/office/powerpoint/2010/main" val="1424716731"/>
+        <p14:creationId xmlns:p14="http://schemas.microsoft.com/office/powerpoint/2010/main" val="717645984"/>
       </p:ext>
     </p:extLst>
   </p:cSld>
@@ -9244,7 +9372,7 @@
           <p:cNvPr id="1" name="s7-rule">
             <a:extLst xmlns:a="http://schemas.openxmlformats.org/drawingml/2006/main">
               <a:ext uri="{FF2B5EF4-FFF2-40B4-BE49-F238E27FC236}">
-                <a16:creationId xmlns:a16="http://schemas.microsoft.com/office/drawing/2014/main" id="{09154ED7-7DB4-446A-BFF0-A2AB01064F8B}"/>
+                <a16:creationId xmlns:a16="http://schemas.microsoft.com/office/drawing/2014/main" id="{9D0B3422-D763-419C-A3D9-01F72893D8A4}"/>
               </a:ext>
             </a:extLst>
           </p:cNvPr>
@@ -9277,7 +9405,7 @@
           <p:cNvPr id="2" name="s7-eyebrow">
             <a:extLst xmlns:a="http://schemas.openxmlformats.org/drawingml/2006/main">
               <a:ext uri="{FF2B5EF4-FFF2-40B4-BE49-F238E27FC236}">
-                <a16:creationId xmlns:a16="http://schemas.microsoft.com/office/drawing/2014/main" id="{AA0777ED-E578-48EB-89F3-6C0B67034742}"/>
+                <a16:creationId xmlns:a16="http://schemas.microsoft.com/office/drawing/2014/main" id="{FF644D5A-B3EA-4752-888B-BCC7713D434B}"/>
               </a:ext>
             </a:extLst>
           </p:cNvPr>
@@ -9335,7 +9463,7 @@
           <p:cNvPr id="3" name="s7-title">
             <a:extLst xmlns:a="http://schemas.openxmlformats.org/drawingml/2006/main">
               <a:ext uri="{FF2B5EF4-FFF2-40B4-BE49-F238E27FC236}">
-                <a16:creationId xmlns:a16="http://schemas.microsoft.com/office/drawing/2014/main" id="{44558311-5FF9-418C-9A5F-600FD7360E52}"/>
+                <a16:creationId xmlns:a16="http://schemas.microsoft.com/office/drawing/2014/main" id="{464AA627-5CC4-4174-8D0C-749F7361B391}"/>
               </a:ext>
             </a:extLst>
           </p:cNvPr>
@@ -9393,7 +9521,7 @@
           <p:cNvPr id="4" name="s7-footer">
             <a:extLst xmlns:a="http://schemas.openxmlformats.org/drawingml/2006/main">
               <a:ext uri="{FF2B5EF4-FFF2-40B4-BE49-F238E27FC236}">
-                <a16:creationId xmlns:a16="http://schemas.microsoft.com/office/drawing/2014/main" id="{38FD199D-AC0D-4B06-993D-18E853FFEE1F}"/>
+                <a16:creationId xmlns:a16="http://schemas.microsoft.com/office/drawing/2014/main" id="{AF30C001-6595-4E8B-8BBF-472E144DDB2C}"/>
               </a:ext>
             </a:extLst>
           </p:cNvPr>
@@ -9424,7 +9552,7 @@
           <p:cNvPr id="5" name="s7-identity">
             <a:extLst xmlns:a="http://schemas.openxmlformats.org/drawingml/2006/main">
               <a:ext uri="{FF2B5EF4-FFF2-40B4-BE49-F238E27FC236}">
-                <a16:creationId xmlns:a16="http://schemas.microsoft.com/office/drawing/2014/main" id="{0F95B616-A6E2-4F77-9836-6A7FE529A6AF}"/>
+                <a16:creationId xmlns:a16="http://schemas.microsoft.com/office/drawing/2014/main" id="{B16FA864-3377-4CBD-AF85-E32F20D04087}"/>
               </a:ext>
             </a:extLst>
           </p:cNvPr>
@@ -9482,7 +9610,7 @@
           <p:cNvPr id="6" name="core-no-0">
             <a:extLst xmlns:a="http://schemas.openxmlformats.org/drawingml/2006/main">
               <a:ext uri="{FF2B5EF4-FFF2-40B4-BE49-F238E27FC236}">
-                <a16:creationId xmlns:a16="http://schemas.microsoft.com/office/drawing/2014/main" id="{07135831-4A6D-41F2-BC97-AFCD78B90FD8}"/>
+                <a16:creationId xmlns:a16="http://schemas.microsoft.com/office/drawing/2014/main" id="{FF175E71-A0F1-4861-97DC-7DF13F51A9A5}"/>
               </a:ext>
             </a:extLst>
           </p:cNvPr>
@@ -9514,7 +9642,7 @@
             <a:pPr algn="l">
               <a:defRPr sz="2250" b="1">
                 <a:solidFill>
-                  <a:srgbClr val="D6A33A"/>
+                  <a:srgbClr val="8A5A00"/>
                 </a:solidFill>
                 <a:latin typeface="PingFang SC"/>
                 <a:ea typeface="PingFang SC"/>
@@ -9524,7 +9652,7 @@
             <a:r>
               <a:rPr sz="2250" b="1">
                 <a:solidFill>
-                  <a:srgbClr val="D6A33A"/>
+                  <a:srgbClr val="8A5A00"/>
                 </a:solidFill>
                 <a:latin typeface="PingFang SC"/>
                 <a:ea typeface="PingFang SC"/>
@@ -9540,7 +9668,7 @@
           <p:cNvPr id="7" name="core-label-0">
             <a:extLst xmlns:a="http://schemas.openxmlformats.org/drawingml/2006/main">
               <a:ext uri="{FF2B5EF4-FFF2-40B4-BE49-F238E27FC236}">
-                <a16:creationId xmlns:a16="http://schemas.microsoft.com/office/drawing/2014/main" id="{8CB2195D-CF0F-431B-9D4B-0161DC906FC1}"/>
+                <a16:creationId xmlns:a16="http://schemas.microsoft.com/office/drawing/2014/main" id="{A61F1AA9-F4E3-490C-ADBF-74F763E1B920}"/>
               </a:ext>
             </a:extLst>
           </p:cNvPr>
@@ -9598,7 +9726,7 @@
           <p:cNvPr id="8" name="core-body-0">
             <a:extLst xmlns:a="http://schemas.openxmlformats.org/drawingml/2006/main">
               <a:ext uri="{FF2B5EF4-FFF2-40B4-BE49-F238E27FC236}">
-                <a16:creationId xmlns:a16="http://schemas.microsoft.com/office/drawing/2014/main" id="{AC220498-964A-4C2B-8D5C-A406F50603A5}"/>
+                <a16:creationId xmlns:a16="http://schemas.microsoft.com/office/drawing/2014/main" id="{B52E3996-7E81-4B4F-9751-639786D5FAD4}"/>
               </a:ext>
             </a:extLst>
           </p:cNvPr>
@@ -9622,7 +9750,7 @@
           </a:solidFill>
           <a:ln xmlns:a="http://schemas.openxmlformats.org/drawingml/2006/main" w="19050">
             <a:solidFill>
-              <a:srgbClr val="D6A33A"/>
+              <a:srgbClr val="8A5A00"/>
             </a:solidFill>
             <a:prstDash val="solid"/>
           </a:ln>
@@ -9652,7 +9780,7 @@
                 <a:ea typeface="PingFang SC"/>
                 <a:cs typeface="PingFang SC"/>
               </a:rPr>
-              <a:t>具体产品会快速变化，更稳定的判断方式是看能力组合：通用对话、联网检索、代码执行、文本与图像理解、音视频生成、行业知识和工具调用。多模态模型能在同一任务中处理多种信息，但每种模态仍有不同的数据…</a:t>
+              <a:t>具体产品会快速变化；更稳定的判断方式是看能力组合；通用对话、联网检索、代码执行、文本与图像理解、音视频生成、行业知识和工具调用；多模态模型能在同一任务中处理多种信息</a:t>
             </a:r>
           </a:p>
         </p:txBody>
@@ -9662,7 +9790,7 @@
           <p:cNvPr id="9" name="s7-takeaway-rule">
             <a:extLst xmlns:a="http://schemas.openxmlformats.org/drawingml/2006/main">
               <a:ext uri="{FF2B5EF4-FFF2-40B4-BE49-F238E27FC236}">
-                <a16:creationId xmlns:a16="http://schemas.microsoft.com/office/drawing/2014/main" id="{7C20B427-9092-4968-88AB-6ECE2C53D5A6}"/>
+                <a16:creationId xmlns:a16="http://schemas.microsoft.com/office/drawing/2014/main" id="{D873537A-3B5F-41E3-A7B3-B70D13703EFF}"/>
               </a:ext>
             </a:extLst>
           </p:cNvPr>
@@ -9695,7 +9823,7 @@
           <p:cNvPr id="10" name="s7-takeaway">
             <a:extLst xmlns:a="http://schemas.openxmlformats.org/drawingml/2006/main">
               <a:ext uri="{FF2B5EF4-FFF2-40B4-BE49-F238E27FC236}">
-                <a16:creationId xmlns:a16="http://schemas.microsoft.com/office/drawing/2014/main" id="{F3D45906-1E60-43A1-92D9-DF3EE29A4BBF}"/>
+                <a16:creationId xmlns:a16="http://schemas.microsoft.com/office/drawing/2014/main" id="{6385FC2F-6458-464D-AF31-8E4135028BE9}"/>
               </a:ext>
             </a:extLst>
           </p:cNvPr>
@@ -9751,7 +9879,7 @@
     </p:spTree>
     <p:extLst>
       <p:ext uri="{BB962C8B-B14F-4D97-AF65-F5344CB8AC3E}">
-        <p14:creationId xmlns:p14="http://schemas.microsoft.com/office/powerpoint/2010/main" val="1470899140"/>
+        <p14:creationId xmlns:p14="http://schemas.microsoft.com/office/powerpoint/2010/main" val="376124162"/>
       </p:ext>
     </p:extLst>
   </p:cSld>
@@ -9782,7 +9910,7 @@
           <p:cNvPr id="1" name="s8-rule">
             <a:extLst xmlns:a="http://schemas.openxmlformats.org/drawingml/2006/main">
               <a:ext uri="{FF2B5EF4-FFF2-40B4-BE49-F238E27FC236}">
-                <a16:creationId xmlns:a16="http://schemas.microsoft.com/office/drawing/2014/main" id="{A1922703-371D-4A58-8140-7C470AD9F7D7}"/>
+                <a16:creationId xmlns:a16="http://schemas.microsoft.com/office/drawing/2014/main" id="{44C3EEE4-0272-4438-8EC1-024E5B5ACB65}"/>
               </a:ext>
             </a:extLst>
           </p:cNvPr>
@@ -9815,7 +9943,7 @@
           <p:cNvPr id="2" name="s8-eyebrow">
             <a:extLst xmlns:a="http://schemas.openxmlformats.org/drawingml/2006/main">
               <a:ext uri="{FF2B5EF4-FFF2-40B4-BE49-F238E27FC236}">
-                <a16:creationId xmlns:a16="http://schemas.microsoft.com/office/drawing/2014/main" id="{F704A892-6CAB-4640-BE78-E9046F11F3A1}"/>
+                <a16:creationId xmlns:a16="http://schemas.microsoft.com/office/drawing/2014/main" id="{25DFFBDA-A9D1-44A9-BDEB-111C11221E79}"/>
               </a:ext>
             </a:extLst>
           </p:cNvPr>
@@ -9873,7 +10001,7 @@
           <p:cNvPr id="3" name="s8-title">
             <a:extLst xmlns:a="http://schemas.openxmlformats.org/drawingml/2006/main">
               <a:ext uri="{FF2B5EF4-FFF2-40B4-BE49-F238E27FC236}">
-                <a16:creationId xmlns:a16="http://schemas.microsoft.com/office/drawing/2014/main" id="{EF7B904A-1360-46B2-9ABA-85B18F45FE59}"/>
+                <a16:creationId xmlns:a16="http://schemas.microsoft.com/office/drawing/2014/main" id="{20BA5F18-51F7-444D-ACE7-61092381B14E}"/>
               </a:ext>
             </a:extLst>
           </p:cNvPr>
@@ -9931,7 +10059,7 @@
           <p:cNvPr id="4" name="s8-footer">
             <a:extLst xmlns:a="http://schemas.openxmlformats.org/drawingml/2006/main">
               <a:ext uri="{FF2B5EF4-FFF2-40B4-BE49-F238E27FC236}">
-                <a16:creationId xmlns:a16="http://schemas.microsoft.com/office/drawing/2014/main" id="{4F9D277D-618F-45D7-9E30-D17C96E57C06}"/>
+                <a16:creationId xmlns:a16="http://schemas.microsoft.com/office/drawing/2014/main" id="{F73351B7-EBFB-4844-9947-D63F20C261F9}"/>
               </a:ext>
             </a:extLst>
           </p:cNvPr>
@@ -9962,7 +10090,7 @@
           <p:cNvPr id="5" name="s8-identity">
             <a:extLst xmlns:a="http://schemas.openxmlformats.org/drawingml/2006/main">
               <a:ext uri="{FF2B5EF4-FFF2-40B4-BE49-F238E27FC236}">
-                <a16:creationId xmlns:a16="http://schemas.microsoft.com/office/drawing/2014/main" id="{E9432BFF-71C9-4116-A1ED-DFBE156C2723}"/>
+                <a16:creationId xmlns:a16="http://schemas.microsoft.com/office/drawing/2014/main" id="{2428CF66-C120-440F-94D3-910816134164}"/>
               </a:ext>
             </a:extLst>
           </p:cNvPr>
@@ -10020,7 +10148,7 @@
           <p:cNvPr id="6" name="core-no-0">
             <a:extLst xmlns:a="http://schemas.openxmlformats.org/drawingml/2006/main">
               <a:ext uri="{FF2B5EF4-FFF2-40B4-BE49-F238E27FC236}">
-                <a16:creationId xmlns:a16="http://schemas.microsoft.com/office/drawing/2014/main" id="{C40C6425-8648-48B4-97F0-BCAFF83E0318}"/>
+                <a16:creationId xmlns:a16="http://schemas.microsoft.com/office/drawing/2014/main" id="{78A584F0-2A18-4004-8740-D9AE3CD0AC93}"/>
               </a:ext>
             </a:extLst>
           </p:cNvPr>
@@ -10052,7 +10180,7 @@
             <a:pPr algn="l">
               <a:defRPr sz="2250" b="1">
                 <a:solidFill>
-                  <a:srgbClr val="D6A33A"/>
+                  <a:srgbClr val="8A5A00"/>
                 </a:solidFill>
                 <a:latin typeface="PingFang SC"/>
                 <a:ea typeface="PingFang SC"/>
@@ -10062,7 +10190,7 @@
             <a:r>
               <a:rPr sz="2250" b="1">
                 <a:solidFill>
-                  <a:srgbClr val="D6A33A"/>
+                  <a:srgbClr val="8A5A00"/>
                 </a:solidFill>
                 <a:latin typeface="PingFang SC"/>
                 <a:ea typeface="PingFang SC"/>
@@ -10078,7 +10206,7 @@
           <p:cNvPr id="7" name="core-label-0">
             <a:extLst xmlns:a="http://schemas.openxmlformats.org/drawingml/2006/main">
               <a:ext uri="{FF2B5EF4-FFF2-40B4-BE49-F238E27FC236}">
-                <a16:creationId xmlns:a16="http://schemas.microsoft.com/office/drawing/2014/main" id="{25DF0BC5-E56F-4D38-B0AC-2677E7C530D9}"/>
+                <a16:creationId xmlns:a16="http://schemas.microsoft.com/office/drawing/2014/main" id="{2F3BBFE5-AFDB-489E-98E7-AA48EFF7D86D}"/>
               </a:ext>
             </a:extLst>
           </p:cNvPr>
@@ -10136,7 +10264,7 @@
           <p:cNvPr id="8" name="core-body-0">
             <a:extLst xmlns:a="http://schemas.openxmlformats.org/drawingml/2006/main">
               <a:ext uri="{FF2B5EF4-FFF2-40B4-BE49-F238E27FC236}">
-                <a16:creationId xmlns:a16="http://schemas.microsoft.com/office/drawing/2014/main" id="{A73DA68D-F1F4-427A-8079-E64D5D2236D9}"/>
+                <a16:creationId xmlns:a16="http://schemas.microsoft.com/office/drawing/2014/main" id="{8AB19FF3-0BA2-49C7-BCAD-E5882AFBE1F3}"/>
               </a:ext>
             </a:extLst>
           </p:cNvPr>
@@ -10160,7 +10288,7 @@
           </a:solidFill>
           <a:ln xmlns:a="http://schemas.openxmlformats.org/drawingml/2006/main" w="19050">
             <a:solidFill>
-              <a:srgbClr val="D6A33A"/>
+              <a:srgbClr val="8A5A00"/>
             </a:solidFill>
             <a:prstDash val="solid"/>
           </a:ln>
@@ -10200,7 +10328,7 @@
           <p:cNvPr id="9" name="core-no-1">
             <a:extLst xmlns:a="http://schemas.openxmlformats.org/drawingml/2006/main">
               <a:ext uri="{FF2B5EF4-FFF2-40B4-BE49-F238E27FC236}">
-                <a16:creationId xmlns:a16="http://schemas.microsoft.com/office/drawing/2014/main" id="{18C7006A-B782-4C52-8361-2D564C697AF6}"/>
+                <a16:creationId xmlns:a16="http://schemas.microsoft.com/office/drawing/2014/main" id="{F3279AB8-617B-45AB-80D2-AC1F7446ADEE}"/>
               </a:ext>
             </a:extLst>
           </p:cNvPr>
@@ -10232,7 +10360,7 @@
             <a:pPr algn="l">
               <a:defRPr sz="2250" b="1">
                 <a:solidFill>
-                  <a:srgbClr val="D6A33A"/>
+                  <a:srgbClr val="8A5A00"/>
                 </a:solidFill>
                 <a:latin typeface="PingFang SC"/>
                 <a:ea typeface="PingFang SC"/>
@@ -10242,7 +10370,7 @@
             <a:r>
               <a:rPr sz="2250" b="1">
                 <a:solidFill>
-                  <a:srgbClr val="D6A33A"/>
+                  <a:srgbClr val="8A5A00"/>
                 </a:solidFill>
                 <a:latin typeface="PingFang SC"/>
                 <a:ea typeface="PingFang SC"/>
@@ -10258,7 +10386,7 @@
           <p:cNvPr id="10" name="core-body-1">
             <a:extLst xmlns:a="http://schemas.openxmlformats.org/drawingml/2006/main">
               <a:ext uri="{FF2B5EF4-FFF2-40B4-BE49-F238E27FC236}">
-                <a16:creationId xmlns:a16="http://schemas.microsoft.com/office/drawing/2014/main" id="{9F607753-0115-4F38-8A99-4E9801BCECC0}"/>
+                <a16:creationId xmlns:a16="http://schemas.microsoft.com/office/drawing/2014/main" id="{EEE0BFE9-F750-4AF0-BC2C-86C2FB454BFD}"/>
               </a:ext>
             </a:extLst>
           </p:cNvPr>
@@ -10322,7 +10450,7 @@
           <p:cNvPr id="11" name="s8-takeaway-rule">
             <a:extLst xmlns:a="http://schemas.openxmlformats.org/drawingml/2006/main">
               <a:ext uri="{FF2B5EF4-FFF2-40B4-BE49-F238E27FC236}">
-                <a16:creationId xmlns:a16="http://schemas.microsoft.com/office/drawing/2014/main" id="{8596EC2D-51BA-46A4-9D11-151059D78237}"/>
+                <a16:creationId xmlns:a16="http://schemas.microsoft.com/office/drawing/2014/main" id="{CBCD5F61-52F2-4709-AA26-05DA5E698B15}"/>
               </a:ext>
             </a:extLst>
           </p:cNvPr>
@@ -10355,7 +10483,7 @@
           <p:cNvPr id="12" name="s8-takeaway">
             <a:extLst xmlns:a="http://schemas.openxmlformats.org/drawingml/2006/main">
               <a:ext uri="{FF2B5EF4-FFF2-40B4-BE49-F238E27FC236}">
-                <a16:creationId xmlns:a16="http://schemas.microsoft.com/office/drawing/2014/main" id="{EE29F1A2-1795-4C6A-BAD8-F0E455D63C3A}"/>
+                <a16:creationId xmlns:a16="http://schemas.microsoft.com/office/drawing/2014/main" id="{6BCD7D42-5917-4A3D-9247-661036A9B031}"/>
               </a:ext>
             </a:extLst>
           </p:cNvPr>
@@ -10411,7 +10539,7 @@
     </p:spTree>
     <p:extLst>
       <p:ext uri="{BB962C8B-B14F-4D97-AF65-F5344CB8AC3E}">
-        <p14:creationId xmlns:p14="http://schemas.microsoft.com/office/powerpoint/2010/main" val="107824215"/>
+        <p14:creationId xmlns:p14="http://schemas.microsoft.com/office/powerpoint/2010/main" val="1584012258"/>
       </p:ext>
     </p:extLst>
   </p:cSld>
@@ -10442,7 +10570,7 @@
           <p:cNvPr id="1" name="s9-rule">
             <a:extLst xmlns:a="http://schemas.openxmlformats.org/drawingml/2006/main">
               <a:ext uri="{FF2B5EF4-FFF2-40B4-BE49-F238E27FC236}">
-                <a16:creationId xmlns:a16="http://schemas.microsoft.com/office/drawing/2014/main" id="{23ABC50D-A0A7-4CF4-853A-83A9B8D36B18}"/>
+                <a16:creationId xmlns:a16="http://schemas.microsoft.com/office/drawing/2014/main" id="{4D420463-54BE-4520-AF8B-D236BCB7E179}"/>
               </a:ext>
             </a:extLst>
           </p:cNvPr>
@@ -10475,7 +10603,7 @@
           <p:cNvPr id="2" name="s9-eyebrow">
             <a:extLst xmlns:a="http://schemas.openxmlformats.org/drawingml/2006/main">
               <a:ext uri="{FF2B5EF4-FFF2-40B4-BE49-F238E27FC236}">
-                <a16:creationId xmlns:a16="http://schemas.microsoft.com/office/drawing/2014/main" id="{C35028DB-80E7-4A43-B16E-641343C5803A}"/>
+                <a16:creationId xmlns:a16="http://schemas.microsoft.com/office/drawing/2014/main" id="{F7CF7312-F5FB-4BB6-B0B4-7B58F7924C7B}"/>
               </a:ext>
             </a:extLst>
           </p:cNvPr>
@@ -10533,7 +10661,7 @@
           <p:cNvPr id="3" name="s9-title">
             <a:extLst xmlns:a="http://schemas.openxmlformats.org/drawingml/2006/main">
               <a:ext uri="{FF2B5EF4-FFF2-40B4-BE49-F238E27FC236}">
-                <a16:creationId xmlns:a16="http://schemas.microsoft.com/office/drawing/2014/main" id="{AD805E9E-8E11-453C-BDE1-EDEE576231BA}"/>
+                <a16:creationId xmlns:a16="http://schemas.microsoft.com/office/drawing/2014/main" id="{C48EB89E-8FF2-413F-BF1E-72E4B54E08FF}"/>
               </a:ext>
             </a:extLst>
           </p:cNvPr>
@@ -10581,7 +10709,7 @@
                 <a:ea typeface="PingFang SC"/>
                 <a:cs typeface="PingFang SC"/>
               </a:rPr>
-              <a:t>与其给未来强行排出年份</a:t>
+              <a:t>判断趋势要看多模态、智能体与可靠性三条线</a:t>
             </a:r>
           </a:p>
         </p:txBody>
@@ -10591,7 +10719,7 @@
           <p:cNvPr id="4" name="s9-footer">
             <a:extLst xmlns:a="http://schemas.openxmlformats.org/drawingml/2006/main">
               <a:ext uri="{FF2B5EF4-FFF2-40B4-BE49-F238E27FC236}">
-                <a16:creationId xmlns:a16="http://schemas.microsoft.com/office/drawing/2014/main" id="{CACE6848-607A-440A-AD6E-EA4F5D9B19FD}"/>
+                <a16:creationId xmlns:a16="http://schemas.microsoft.com/office/drawing/2014/main" id="{0F44EAA2-F4F8-4CB1-A2B4-67927792CC2F}"/>
               </a:ext>
             </a:extLst>
           </p:cNvPr>
@@ -10622,7 +10750,7 @@
           <p:cNvPr id="5" name="s9-identity">
             <a:extLst xmlns:a="http://schemas.openxmlformats.org/drawingml/2006/main">
               <a:ext uri="{FF2B5EF4-FFF2-40B4-BE49-F238E27FC236}">
-                <a16:creationId xmlns:a16="http://schemas.microsoft.com/office/drawing/2014/main" id="{12FD1748-914F-4542-8228-FF1C31B7E02B}"/>
+                <a16:creationId xmlns:a16="http://schemas.microsoft.com/office/drawing/2014/main" id="{D0CFB2CF-164A-40F9-A4DA-642254A86CE7}"/>
               </a:ext>
             </a:extLst>
           </p:cNvPr>
@@ -10680,7 +10808,7 @@
           <p:cNvPr id="6" name="core-no-0">
             <a:extLst xmlns:a="http://schemas.openxmlformats.org/drawingml/2006/main">
               <a:ext uri="{FF2B5EF4-FFF2-40B4-BE49-F238E27FC236}">
-                <a16:creationId xmlns:a16="http://schemas.microsoft.com/office/drawing/2014/main" id="{9AD10CCE-9BAC-4FC6-AF68-3A539082E048}"/>
+                <a16:creationId xmlns:a16="http://schemas.microsoft.com/office/drawing/2014/main" id="{29B3BB6D-48EC-4FA3-9D28-11EEE682B6D0}"/>
               </a:ext>
             </a:extLst>
           </p:cNvPr>
@@ -10712,7 +10840,7 @@
             <a:pPr algn="l">
               <a:defRPr sz="2250" b="1">
                 <a:solidFill>
-                  <a:srgbClr val="D6A33A"/>
+                  <a:srgbClr val="8A5A00"/>
                 </a:solidFill>
                 <a:latin typeface="PingFang SC"/>
                 <a:ea typeface="PingFang SC"/>
@@ -10722,7 +10850,7 @@
             <a:r>
               <a:rPr sz="2250" b="1">
                 <a:solidFill>
-                  <a:srgbClr val="D6A33A"/>
+                  <a:srgbClr val="8A5A00"/>
                 </a:solidFill>
                 <a:latin typeface="PingFang SC"/>
                 <a:ea typeface="PingFang SC"/>
@@ -10738,7 +10866,7 @@
           <p:cNvPr id="7" name="core-label-0">
             <a:extLst xmlns:a="http://schemas.openxmlformats.org/drawingml/2006/main">
               <a:ext uri="{FF2B5EF4-FFF2-40B4-BE49-F238E27FC236}">
-                <a16:creationId xmlns:a16="http://schemas.microsoft.com/office/drawing/2014/main" id="{55A53937-0296-4E20-9E95-AEE5BF967AFA}"/>
+                <a16:creationId xmlns:a16="http://schemas.microsoft.com/office/drawing/2014/main" id="{C3DB68E2-4B4F-4338-A4A0-1735B53C408E}"/>
               </a:ext>
             </a:extLst>
           </p:cNvPr>
@@ -10796,7 +10924,7 @@
           <p:cNvPr id="8" name="core-body-0">
             <a:extLst xmlns:a="http://schemas.openxmlformats.org/drawingml/2006/main">
               <a:ext uri="{FF2B5EF4-FFF2-40B4-BE49-F238E27FC236}">
-                <a16:creationId xmlns:a16="http://schemas.microsoft.com/office/drawing/2014/main" id="{B478525F-136B-4BCA-941C-25C032B74B73}"/>
+                <a16:creationId xmlns:a16="http://schemas.microsoft.com/office/drawing/2014/main" id="{DF1ECDA9-0C0D-4A91-BDC5-0B11E038D3AA}"/>
               </a:ext>
             </a:extLst>
           </p:cNvPr>
@@ -10820,7 +10948,7 @@
           </a:solidFill>
           <a:ln xmlns:a="http://schemas.openxmlformats.org/drawingml/2006/main" w="19050">
             <a:solidFill>
-              <a:srgbClr val="D6A33A"/>
+              <a:srgbClr val="8A5A00"/>
             </a:solidFill>
             <a:prstDash val="solid"/>
           </a:ln>
@@ -10850,7 +10978,7 @@
                 <a:ea typeface="PingFang SC"/>
                 <a:cs typeface="PingFang SC"/>
               </a:rPr>
-              <a:t>与其给未来强行排出年份，更可靠的是观察三条方向：模型从单一文本走向多模态，从单次问答走向工具与智能体，从只追求能力走向同时衡量成本、可靠性、安全与治理…</a:t>
+              <a:t>与其给未来强行排出年份；更可靠的是观察三条方向；模型从单一文本走向多模态；从单次问答走向工具与智能体；从只追求能力走向同时衡量成本、可靠性、安全与治理</a:t>
             </a:r>
           </a:p>
         </p:txBody>
@@ -10860,7 +10988,7 @@
           <p:cNvPr id="9" name="s9-takeaway-rule">
             <a:extLst xmlns:a="http://schemas.openxmlformats.org/drawingml/2006/main">
               <a:ext uri="{FF2B5EF4-FFF2-40B4-BE49-F238E27FC236}">
-                <a16:creationId xmlns:a16="http://schemas.microsoft.com/office/drawing/2014/main" id="{F99B7990-93E7-4F79-A667-081C94EB5DEE}"/>
+                <a16:creationId xmlns:a16="http://schemas.microsoft.com/office/drawing/2014/main" id="{19CC8599-9F27-4579-BB99-A2940D57E5F2}"/>
               </a:ext>
             </a:extLst>
           </p:cNvPr>
@@ -10893,7 +11021,7 @@
           <p:cNvPr id="10" name="s9-takeaway">
             <a:extLst xmlns:a="http://schemas.openxmlformats.org/drawingml/2006/main">
               <a:ext uri="{FF2B5EF4-FFF2-40B4-BE49-F238E27FC236}">
-                <a16:creationId xmlns:a16="http://schemas.microsoft.com/office/drawing/2014/main" id="{877D4BEF-5F1D-42D6-99F6-FEEF4D8E02B9}"/>
+                <a16:creationId xmlns:a16="http://schemas.microsoft.com/office/drawing/2014/main" id="{B8E3A96F-519F-4BF2-9AC1-722BFBF641B1}"/>
               </a:ext>
             </a:extLst>
           </p:cNvPr>
@@ -10941,7 +11069,7 @@
                 <a:ea typeface="PingFang SC"/>
                 <a:cs typeface="PingFang SC"/>
               </a:rPr>
-              <a:t>与其给未来强行排出年份</a:t>
+              <a:t>判断趋势要看多模态、智能体与可靠性三条线</a:t>
             </a:r>
           </a:p>
         </p:txBody>
@@ -10949,7 +11077,7 @@
     </p:spTree>
     <p:extLst>
       <p:ext uri="{BB962C8B-B14F-4D97-AF65-F5344CB8AC3E}">
-        <p14:creationId xmlns:p14="http://schemas.microsoft.com/office/powerpoint/2010/main" val="931069205"/>
+        <p14:creationId xmlns:p14="http://schemas.microsoft.com/office/powerpoint/2010/main" val="1736991552"/>
       </p:ext>
     </p:extLst>
   </p:cSld>

--- a/docs/public/course-assets/course-pptx/ov-004.pptx
+++ b/docs/public/course-assets/course-pptx/ov-004.pptx
@@ -2,26 +2,26 @@
 <file path=ppt/presentation.xml><?xml version="1.0" encoding="utf-8"?>
 <p:presentation xmlns:p="http://schemas.openxmlformats.org/presentationml/2006/main">
   <p:sldMasterIdLst>
-    <p:sldMasterId xmlns:r="http://schemas.openxmlformats.org/officeDocument/2006/relationships" id="2147483648" r:id="R36c77b8be7994fac"/>
+    <p:sldMasterId xmlns:r="http://schemas.openxmlformats.org/officeDocument/2006/relationships" id="2147483648" r:id="R38c90f88361546ea"/>
   </p:sldMasterIdLst>
   <p:notesMasterIdLst>
-    <p:notesMasterId xmlns:r="http://schemas.openxmlformats.org/officeDocument/2006/relationships" r:id="Rccbe95d83ce14627"/>
+    <p:notesMasterId xmlns:r="http://schemas.openxmlformats.org/officeDocument/2006/relationships" r:id="Rd757a1c7374f40af"/>
   </p:notesMasterIdLst>
   <p:sldIdLst>
-    <p:sldId xmlns:r="http://schemas.openxmlformats.org/officeDocument/2006/relationships" id="256" r:id="R8b7129eea2c54cb9"/>
-    <p:sldId xmlns:r="http://schemas.openxmlformats.org/officeDocument/2006/relationships" id="257" r:id="Rdc3bc8cbd7254c37"/>
-    <p:sldId xmlns:r="http://schemas.openxmlformats.org/officeDocument/2006/relationships" id="258" r:id="R638934030d324634"/>
-    <p:sldId xmlns:r="http://schemas.openxmlformats.org/officeDocument/2006/relationships" id="259" r:id="Rb22a7033d98543a7"/>
-    <p:sldId xmlns:r="http://schemas.openxmlformats.org/officeDocument/2006/relationships" id="260" r:id="R93f18398494e423a"/>
-    <p:sldId xmlns:r="http://schemas.openxmlformats.org/officeDocument/2006/relationships" id="261" r:id="R117b481e4e5f4c6c"/>
-    <p:sldId xmlns:r="http://schemas.openxmlformats.org/officeDocument/2006/relationships" id="262" r:id="R8eb72f00d349435e"/>
-    <p:sldId xmlns:r="http://schemas.openxmlformats.org/officeDocument/2006/relationships" id="263" r:id="R50d0e658d82f48a5"/>
-    <p:sldId xmlns:r="http://schemas.openxmlformats.org/officeDocument/2006/relationships" id="264" r:id="Rfbcecc021e4d44ed"/>
-    <p:sldId xmlns:r="http://schemas.openxmlformats.org/officeDocument/2006/relationships" id="265" r:id="R55215e015276496b"/>
-    <p:sldId xmlns:r="http://schemas.openxmlformats.org/officeDocument/2006/relationships" id="266" r:id="Rfb8e589affe8414e"/>
-    <p:sldId xmlns:r="http://schemas.openxmlformats.org/officeDocument/2006/relationships" id="267" r:id="Re1fcdf5857b5405f"/>
-    <p:sldId xmlns:r="http://schemas.openxmlformats.org/officeDocument/2006/relationships" id="268" r:id="Rc6f8ad974eb04343"/>
-    <p:sldId xmlns:r="http://schemas.openxmlformats.org/officeDocument/2006/relationships" id="269" r:id="R88d4d807145b409a"/>
+    <p:sldId xmlns:r="http://schemas.openxmlformats.org/officeDocument/2006/relationships" id="256" r:id="Rc7133c531e7143d6"/>
+    <p:sldId xmlns:r="http://schemas.openxmlformats.org/officeDocument/2006/relationships" id="257" r:id="R39dae4c868d54783"/>
+    <p:sldId xmlns:r="http://schemas.openxmlformats.org/officeDocument/2006/relationships" id="258" r:id="Ree2c909c0dd94e01"/>
+    <p:sldId xmlns:r="http://schemas.openxmlformats.org/officeDocument/2006/relationships" id="259" r:id="R07b60a9596494bd5"/>
+    <p:sldId xmlns:r="http://schemas.openxmlformats.org/officeDocument/2006/relationships" id="260" r:id="R7484ceaefbda450a"/>
+    <p:sldId xmlns:r="http://schemas.openxmlformats.org/officeDocument/2006/relationships" id="261" r:id="Re139d2d8c6cb4824"/>
+    <p:sldId xmlns:r="http://schemas.openxmlformats.org/officeDocument/2006/relationships" id="262" r:id="R9745392ac9e147c0"/>
+    <p:sldId xmlns:r="http://schemas.openxmlformats.org/officeDocument/2006/relationships" id="263" r:id="R9fc38a6c02d942cb"/>
+    <p:sldId xmlns:r="http://schemas.openxmlformats.org/officeDocument/2006/relationships" id="264" r:id="R303b3d279f8d41d2"/>
+    <p:sldId xmlns:r="http://schemas.openxmlformats.org/officeDocument/2006/relationships" id="265" r:id="R10b097ee5ebd4498"/>
+    <p:sldId xmlns:r="http://schemas.openxmlformats.org/officeDocument/2006/relationships" id="266" r:id="Rb9d05a86d58d4fa4"/>
+    <p:sldId xmlns:r="http://schemas.openxmlformats.org/officeDocument/2006/relationships" id="267" r:id="Rfef00074d0124246"/>
+    <p:sldId xmlns:r="http://schemas.openxmlformats.org/officeDocument/2006/relationships" id="268" r:id="R9cd39accd89747bc"/>
+    <p:sldId xmlns:r="http://schemas.openxmlformats.org/officeDocument/2006/relationships" id="269" r:id="R8418bf9fdbf24487"/>
   </p:sldIdLst>
   <p:sldSz cx="12192000" cy="6858000"/>
   <p:notesSz cx="6858000" cy="9144000"/>
@@ -1472,7 +1472,7 @@
   </p:cSld>
   <p:clrMap bg1="lt1" tx1="dk1" bg2="lt2" tx2="dk2" accent1="accent1" accent2="accent2" accent3="accent3" accent4="accent4" accent5="accent5" accent6="accent6" hlink="hlink" folHlink="folHlink"/>
   <p:sldLayoutIdLst>
-    <p:sldLayoutId xmlns:r="http://schemas.openxmlformats.org/officeDocument/2006/relationships" id="2147483649" r:id="Rbf60351e3f214e75"/>
+    <p:sldLayoutId xmlns:r="http://schemas.openxmlformats.org/officeDocument/2006/relationships" id="2147483649" r:id="R7ad198c99ac043c7"/>
   </p:sldLayoutIdLst>
   <p:txStyles>
     <p:titleStyle>
@@ -2023,7 +2023,7 @@
           <p:cNvPr id="1" name="cover-rule">
             <a:extLst xmlns:a="http://schemas.openxmlformats.org/drawingml/2006/main">
               <a:ext uri="{FF2B5EF4-FFF2-40B4-BE49-F238E27FC236}">
-                <a16:creationId xmlns:a16="http://schemas.microsoft.com/office/drawing/2014/main" id="{C7BC3E66-BDD2-4081-8CBB-5C834070A349}"/>
+                <a16:creationId xmlns:a16="http://schemas.microsoft.com/office/drawing/2014/main" id="{062D3E4D-7961-4D48-841A-943527C513A9}"/>
               </a:ext>
             </a:extLst>
           </p:cNvPr>
@@ -2056,7 +2056,7 @@
           <p:cNvPr id="2" name="cover-ring-1">
             <a:extLst xmlns:a="http://schemas.openxmlformats.org/drawingml/2006/main">
               <a:ext uri="{FF2B5EF4-FFF2-40B4-BE49-F238E27FC236}">
-                <a16:creationId xmlns:a16="http://schemas.microsoft.com/office/drawing/2014/main" id="{B9A03EAD-3841-41B5-A6B0-BC090E128F00}"/>
+                <a16:creationId xmlns:a16="http://schemas.microsoft.com/office/drawing/2014/main" id="{40F15A51-69E1-4ED9-A2E6-3C25C8BE9B86}"/>
               </a:ext>
             </a:extLst>
           </p:cNvPr>
@@ -2087,7 +2087,7 @@
           <p:cNvPr id="3" name="cover-ring-2">
             <a:extLst xmlns:a="http://schemas.openxmlformats.org/drawingml/2006/main">
               <a:ext uri="{FF2B5EF4-FFF2-40B4-BE49-F238E27FC236}">
-                <a16:creationId xmlns:a16="http://schemas.microsoft.com/office/drawing/2014/main" id="{9FF87446-1E14-4088-B87C-71CE6D78C77C}"/>
+                <a16:creationId xmlns:a16="http://schemas.microsoft.com/office/drawing/2014/main" id="{434E435E-04FF-4B86-9E3A-979AD55D9C50}"/>
               </a:ext>
             </a:extLst>
           </p:cNvPr>
@@ -2118,7 +2118,7 @@
           <p:cNvPr id="4" name="cover-core">
             <a:extLst xmlns:a="http://schemas.openxmlformats.org/drawingml/2006/main">
               <a:ext uri="{FF2B5EF4-FFF2-40B4-BE49-F238E27FC236}">
-                <a16:creationId xmlns:a16="http://schemas.microsoft.com/office/drawing/2014/main" id="{F9AC6FFB-537A-4609-B158-A7890BD03641}"/>
+                <a16:creationId xmlns:a16="http://schemas.microsoft.com/office/drawing/2014/main" id="{6E8C3C3D-374A-4D89-BFCA-68C956B6AE4E}"/>
               </a:ext>
             </a:extLst>
           </p:cNvPr>
@@ -2151,7 +2151,7 @@
           <p:cNvPr id="5" name="cover-line-1">
             <a:extLst xmlns:a="http://schemas.openxmlformats.org/drawingml/2006/main">
               <a:ext uri="{FF2B5EF4-FFF2-40B4-BE49-F238E27FC236}">
-                <a16:creationId xmlns:a16="http://schemas.microsoft.com/office/drawing/2014/main" id="{42AB5617-5EAA-4F4A-BC60-2DEE2E0CB285}"/>
+                <a16:creationId xmlns:a16="http://schemas.microsoft.com/office/drawing/2014/main" id="{2755CD2D-B07A-4539-BE25-37DD001C10B7}"/>
               </a:ext>
             </a:extLst>
           </p:cNvPr>
@@ -2182,7 +2182,7 @@
           <p:cNvPr id="6" name="cover-line-2">
             <a:extLst xmlns:a="http://schemas.openxmlformats.org/drawingml/2006/main">
               <a:ext uri="{FF2B5EF4-FFF2-40B4-BE49-F238E27FC236}">
-                <a16:creationId xmlns:a16="http://schemas.microsoft.com/office/drawing/2014/main" id="{75693045-4762-4C54-84C4-5FEBED564713}"/>
+                <a16:creationId xmlns:a16="http://schemas.microsoft.com/office/drawing/2014/main" id="{4F999E4D-4931-4262-9742-3635D08C9285}"/>
               </a:ext>
             </a:extLst>
           </p:cNvPr>
@@ -2213,7 +2213,7 @@
           <p:cNvPr id="7" name="cover-eyebrow">
             <a:extLst xmlns:a="http://schemas.openxmlformats.org/drawingml/2006/main">
               <a:ext uri="{FF2B5EF4-FFF2-40B4-BE49-F238E27FC236}">
-                <a16:creationId xmlns:a16="http://schemas.microsoft.com/office/drawing/2014/main" id="{2EF834C6-9E9D-445E-824E-00215C51FB17}"/>
+                <a16:creationId xmlns:a16="http://schemas.microsoft.com/office/drawing/2014/main" id="{B89B6FD7-5E8C-4077-8693-0F0902E03E4A}"/>
               </a:ext>
             </a:extLst>
           </p:cNvPr>
@@ -2271,7 +2271,7 @@
           <p:cNvPr id="8" name="cover-title">
             <a:extLst xmlns:a="http://schemas.openxmlformats.org/drawingml/2006/main">
               <a:ext uri="{FF2B5EF4-FFF2-40B4-BE49-F238E27FC236}">
-                <a16:creationId xmlns:a16="http://schemas.microsoft.com/office/drawing/2014/main" id="{FF14F037-18D8-4038-8131-D5E5F0EC8B53}"/>
+                <a16:creationId xmlns:a16="http://schemas.microsoft.com/office/drawing/2014/main" id="{9979F851-1613-4A27-B417-6C74EF9E2662}"/>
               </a:ext>
             </a:extLst>
           </p:cNvPr>
@@ -2329,7 +2329,7 @@
           <p:cNvPr id="9" name="cover-subtitle">
             <a:extLst xmlns:a="http://schemas.openxmlformats.org/drawingml/2006/main">
               <a:ext uri="{FF2B5EF4-FFF2-40B4-BE49-F238E27FC236}">
-                <a16:creationId xmlns:a16="http://schemas.microsoft.com/office/drawing/2014/main" id="{7CE74E68-CEDA-4643-B3B3-BCD079423BD5}"/>
+                <a16:creationId xmlns:a16="http://schemas.microsoft.com/office/drawing/2014/main" id="{065EC8DB-A6DF-443A-9CB2-07D5684B227B}"/>
               </a:ext>
             </a:extLst>
           </p:cNvPr>
@@ -2391,7 +2391,7 @@
           <p:cNvPr id="10" name="cover-lead">
             <a:extLst xmlns:a="http://schemas.openxmlformats.org/drawingml/2006/main">
               <a:ext uri="{FF2B5EF4-FFF2-40B4-BE49-F238E27FC236}">
-                <a16:creationId xmlns:a16="http://schemas.microsoft.com/office/drawing/2014/main" id="{E10608EB-E8C7-4F91-B21E-8C6E49E8B967}"/>
+                <a16:creationId xmlns:a16="http://schemas.microsoft.com/office/drawing/2014/main" id="{D8F7359A-CFDC-4399-B414-90495D998159}"/>
               </a:ext>
             </a:extLst>
           </p:cNvPr>
@@ -2449,7 +2449,7 @@
           <p:cNvPr id="11" name="cover-course">
             <a:extLst xmlns:a="http://schemas.openxmlformats.org/drawingml/2006/main">
               <a:ext uri="{FF2B5EF4-FFF2-40B4-BE49-F238E27FC236}">
-                <a16:creationId xmlns:a16="http://schemas.microsoft.com/office/drawing/2014/main" id="{E101D11F-1106-4B0A-BCE6-0D6A6BD582CD}"/>
+                <a16:creationId xmlns:a16="http://schemas.microsoft.com/office/drawing/2014/main" id="{8749B7C8-7ECB-4DD3-AB04-29D987AC9D3D}"/>
               </a:ext>
             </a:extLst>
           </p:cNvPr>
@@ -2507,7 +2507,7 @@
           <p:cNvPr id="12" name="cover-id">
             <a:extLst xmlns:a="http://schemas.openxmlformats.org/drawingml/2006/main">
               <a:ext uri="{FF2B5EF4-FFF2-40B4-BE49-F238E27FC236}">
-                <a16:creationId xmlns:a16="http://schemas.microsoft.com/office/drawing/2014/main" id="{D138254C-2ED7-45AD-8DBB-0F6A7CF9C618}"/>
+                <a16:creationId xmlns:a16="http://schemas.microsoft.com/office/drawing/2014/main" id="{301C1A4A-5347-4C79-BFD9-C75ADC7D03F1}"/>
               </a:ext>
             </a:extLst>
           </p:cNvPr>
@@ -2563,7 +2563,7 @@
     </p:spTree>
     <p:extLst>
       <p:ext uri="{BB962C8B-B14F-4D97-AF65-F5344CB8AC3E}">
-        <p14:creationId xmlns:p14="http://schemas.microsoft.com/office/powerpoint/2010/main" val="1920289156"/>
+        <p14:creationId xmlns:p14="http://schemas.microsoft.com/office/powerpoint/2010/main" val="887683249"/>
       </p:ext>
     </p:extLst>
   </p:cSld>
@@ -2594,7 +2594,7 @@
           <p:cNvPr id="1" name="s10-rule">
             <a:extLst xmlns:a="http://schemas.openxmlformats.org/drawingml/2006/main">
               <a:ext uri="{FF2B5EF4-FFF2-40B4-BE49-F238E27FC236}">
-                <a16:creationId xmlns:a16="http://schemas.microsoft.com/office/drawing/2014/main" id="{57183205-CF2C-47A0-8789-47910564C911}"/>
+                <a16:creationId xmlns:a16="http://schemas.microsoft.com/office/drawing/2014/main" id="{37378CE5-8A6C-4352-AD6F-EFEE9028A45E}"/>
               </a:ext>
             </a:extLst>
           </p:cNvPr>
@@ -2627,7 +2627,7 @@
           <p:cNvPr id="2" name="s10-eyebrow">
             <a:extLst xmlns:a="http://schemas.openxmlformats.org/drawingml/2006/main">
               <a:ext uri="{FF2B5EF4-FFF2-40B4-BE49-F238E27FC236}">
-                <a16:creationId xmlns:a16="http://schemas.microsoft.com/office/drawing/2014/main" id="{B527619B-08CD-4D6D-AF0A-D39B38CF9754}"/>
+                <a16:creationId xmlns:a16="http://schemas.microsoft.com/office/drawing/2014/main" id="{BB5B9D27-6ABB-4C80-A742-BAB71E87A9DA}"/>
               </a:ext>
             </a:extLst>
           </p:cNvPr>
@@ -2685,7 +2685,7 @@
           <p:cNvPr id="3" name="s10-title">
             <a:extLst xmlns:a="http://schemas.openxmlformats.org/drawingml/2006/main">
               <a:ext uri="{FF2B5EF4-FFF2-40B4-BE49-F238E27FC236}">
-                <a16:creationId xmlns:a16="http://schemas.microsoft.com/office/drawing/2014/main" id="{F3A45AB7-E056-4EAD-827B-814FD1765338}"/>
+                <a16:creationId xmlns:a16="http://schemas.microsoft.com/office/drawing/2014/main" id="{73703BBC-A849-4D4F-963A-C4B37B6FDDDA}"/>
               </a:ext>
             </a:extLst>
           </p:cNvPr>
@@ -2743,7 +2743,7 @@
           <p:cNvPr id="4" name="s10-footer">
             <a:extLst xmlns:a="http://schemas.openxmlformats.org/drawingml/2006/main">
               <a:ext uri="{FF2B5EF4-FFF2-40B4-BE49-F238E27FC236}">
-                <a16:creationId xmlns:a16="http://schemas.microsoft.com/office/drawing/2014/main" id="{6E1AA4E3-CC8E-463E-A0B4-DFA6CAB86A7A}"/>
+                <a16:creationId xmlns:a16="http://schemas.microsoft.com/office/drawing/2014/main" id="{81C6B446-9406-4807-A046-DBEEA940CD38}"/>
               </a:ext>
             </a:extLst>
           </p:cNvPr>
@@ -2774,7 +2774,7 @@
           <p:cNvPr id="5" name="s10-identity">
             <a:extLst xmlns:a="http://schemas.openxmlformats.org/drawingml/2006/main">
               <a:ext uri="{FF2B5EF4-FFF2-40B4-BE49-F238E27FC236}">
-                <a16:creationId xmlns:a16="http://schemas.microsoft.com/office/drawing/2014/main" id="{672A9EE5-9AF1-4058-8D84-B8BA156FFCDE}"/>
+                <a16:creationId xmlns:a16="http://schemas.microsoft.com/office/drawing/2014/main" id="{DBA5C029-E0F5-4809-95A3-F0C8A79D6794}"/>
               </a:ext>
             </a:extLst>
           </p:cNvPr>
@@ -2832,7 +2832,7 @@
           <p:cNvPr id="6" name="case-title">
             <a:extLst xmlns:a="http://schemas.openxmlformats.org/drawingml/2006/main">
               <a:ext uri="{FF2B5EF4-FFF2-40B4-BE49-F238E27FC236}">
-                <a16:creationId xmlns:a16="http://schemas.microsoft.com/office/drawing/2014/main" id="{0A3C91C2-4B7F-4BB3-9E12-C7EB9C29ABB2}"/>
+                <a16:creationId xmlns:a16="http://schemas.microsoft.com/office/drawing/2014/main" id="{6A517798-215D-4690-8B97-D038AD2AD91D}"/>
               </a:ext>
             </a:extLst>
           </p:cNvPr>
@@ -2896,7 +2896,7 @@
           <p:cNvPr id="7" name="case-row-0">
             <a:extLst xmlns:a="http://schemas.openxmlformats.org/drawingml/2006/main">
               <a:ext uri="{FF2B5EF4-FFF2-40B4-BE49-F238E27FC236}">
-                <a16:creationId xmlns:a16="http://schemas.microsoft.com/office/drawing/2014/main" id="{913334D5-2EEF-42D0-8822-9961033A7CCE}"/>
+                <a16:creationId xmlns:a16="http://schemas.microsoft.com/office/drawing/2014/main" id="{0680F779-881C-4943-A5D1-D4B27C85BACB}"/>
               </a:ext>
             </a:extLst>
           </p:cNvPr>
@@ -2960,7 +2960,7 @@
           <p:cNvPr id="8" name="case-row-1">
             <a:extLst xmlns:a="http://schemas.openxmlformats.org/drawingml/2006/main">
               <a:ext uri="{FF2B5EF4-FFF2-40B4-BE49-F238E27FC236}">
-                <a16:creationId xmlns:a16="http://schemas.microsoft.com/office/drawing/2014/main" id="{B733417E-89E5-4F2C-A245-90799E2D7857}"/>
+                <a16:creationId xmlns:a16="http://schemas.microsoft.com/office/drawing/2014/main" id="{5F374E86-AC51-4150-B669-A4365849F558}"/>
               </a:ext>
             </a:extLst>
           </p:cNvPr>
@@ -3024,7 +3024,7 @@
           <p:cNvPr id="9" name="case-row-2">
             <a:extLst xmlns:a="http://schemas.openxmlformats.org/drawingml/2006/main">
               <a:ext uri="{FF2B5EF4-FFF2-40B4-BE49-F238E27FC236}">
-                <a16:creationId xmlns:a16="http://schemas.microsoft.com/office/drawing/2014/main" id="{DF07162E-4A77-4039-9E85-83F82FE99523}"/>
+                <a16:creationId xmlns:a16="http://schemas.microsoft.com/office/drawing/2014/main" id="{F018538F-550D-495F-B051-2249448101F4}"/>
               </a:ext>
             </a:extLst>
           </p:cNvPr>
@@ -3088,7 +3088,7 @@
           <p:cNvPr id="10" name="s10-takeaway-rule">
             <a:extLst xmlns:a="http://schemas.openxmlformats.org/drawingml/2006/main">
               <a:ext uri="{FF2B5EF4-FFF2-40B4-BE49-F238E27FC236}">
-                <a16:creationId xmlns:a16="http://schemas.microsoft.com/office/drawing/2014/main" id="{BBE4E523-0C3D-4ADB-8F64-D4A14D8552E1}"/>
+                <a16:creationId xmlns:a16="http://schemas.microsoft.com/office/drawing/2014/main" id="{49428E74-1EE3-4BB1-95EF-5909389478A8}"/>
               </a:ext>
             </a:extLst>
           </p:cNvPr>
@@ -3121,7 +3121,7 @@
           <p:cNvPr id="11" name="s10-takeaway">
             <a:extLst xmlns:a="http://schemas.openxmlformats.org/drawingml/2006/main">
               <a:ext uri="{FF2B5EF4-FFF2-40B4-BE49-F238E27FC236}">
-                <a16:creationId xmlns:a16="http://schemas.microsoft.com/office/drawing/2014/main" id="{94544E58-AF31-45A5-84B5-7116B617F9B5}"/>
+                <a16:creationId xmlns:a16="http://schemas.microsoft.com/office/drawing/2014/main" id="{F4969993-CC34-4FD3-BFB6-91D654F3D968}"/>
               </a:ext>
             </a:extLst>
           </p:cNvPr>
@@ -3177,7 +3177,7 @@
     </p:spTree>
     <p:extLst>
       <p:ext uri="{BB962C8B-B14F-4D97-AF65-F5344CB8AC3E}">
-        <p14:creationId xmlns:p14="http://schemas.microsoft.com/office/powerpoint/2010/main" val="293056015"/>
+        <p14:creationId xmlns:p14="http://schemas.microsoft.com/office/powerpoint/2010/main" val="1883366860"/>
       </p:ext>
     </p:extLst>
   </p:cSld>
@@ -3208,7 +3208,7 @@
           <p:cNvPr id="1" name="s11-rule">
             <a:extLst xmlns:a="http://schemas.openxmlformats.org/drawingml/2006/main">
               <a:ext uri="{FF2B5EF4-FFF2-40B4-BE49-F238E27FC236}">
-                <a16:creationId xmlns:a16="http://schemas.microsoft.com/office/drawing/2014/main" id="{0FC1B4EE-F972-4166-A0EF-07F278F2EBEA}"/>
+                <a16:creationId xmlns:a16="http://schemas.microsoft.com/office/drawing/2014/main" id="{05D4BAFA-6805-4516-8AC5-5B9D40A2E89E}"/>
               </a:ext>
             </a:extLst>
           </p:cNvPr>
@@ -3241,7 +3241,7 @@
           <p:cNvPr id="2" name="s11-eyebrow">
             <a:extLst xmlns:a="http://schemas.openxmlformats.org/drawingml/2006/main">
               <a:ext uri="{FF2B5EF4-FFF2-40B4-BE49-F238E27FC236}">
-                <a16:creationId xmlns:a16="http://schemas.microsoft.com/office/drawing/2014/main" id="{B0160F57-A456-40C1-B887-B81E1063EAE2}"/>
+                <a16:creationId xmlns:a16="http://schemas.microsoft.com/office/drawing/2014/main" id="{E352E787-6670-46B6-852D-55E9C6C0484C}"/>
               </a:ext>
             </a:extLst>
           </p:cNvPr>
@@ -3299,7 +3299,7 @@
           <p:cNvPr id="3" name="s11-title">
             <a:extLst xmlns:a="http://schemas.openxmlformats.org/drawingml/2006/main">
               <a:ext uri="{FF2B5EF4-FFF2-40B4-BE49-F238E27FC236}">
-                <a16:creationId xmlns:a16="http://schemas.microsoft.com/office/drawing/2014/main" id="{4A4BC708-3EE0-4B47-A14A-0A0DA3A6EC9D}"/>
+                <a16:creationId xmlns:a16="http://schemas.microsoft.com/office/drawing/2014/main" id="{99C01A41-5AE8-474E-B35F-08875DF90745}"/>
               </a:ext>
             </a:extLst>
           </p:cNvPr>
@@ -3357,7 +3357,7 @@
           <p:cNvPr id="4" name="s11-footer">
             <a:extLst xmlns:a="http://schemas.openxmlformats.org/drawingml/2006/main">
               <a:ext uri="{FF2B5EF4-FFF2-40B4-BE49-F238E27FC236}">
-                <a16:creationId xmlns:a16="http://schemas.microsoft.com/office/drawing/2014/main" id="{DC5D7DF9-BE3A-409A-8AE9-58B54F06AC57}"/>
+                <a16:creationId xmlns:a16="http://schemas.microsoft.com/office/drawing/2014/main" id="{9E77E7C6-E249-49C1-A72D-2DEC1F5BE459}"/>
               </a:ext>
             </a:extLst>
           </p:cNvPr>
@@ -3388,7 +3388,7 @@
           <p:cNvPr id="5" name="s11-identity">
             <a:extLst xmlns:a="http://schemas.openxmlformats.org/drawingml/2006/main">
               <a:ext uri="{FF2B5EF4-FFF2-40B4-BE49-F238E27FC236}">
-                <a16:creationId xmlns:a16="http://schemas.microsoft.com/office/drawing/2014/main" id="{637DD53D-E6B7-48E2-BBBE-922D8888041D}"/>
+                <a16:creationId xmlns:a16="http://schemas.microsoft.com/office/drawing/2014/main" id="{1BA88E9B-7B5F-4F19-B78F-C8DEC7F2C617}"/>
               </a:ext>
             </a:extLst>
           </p:cNvPr>
@@ -3446,7 +3446,7 @@
           <p:cNvPr id="6" name="case-title">
             <a:extLst xmlns:a="http://schemas.openxmlformats.org/drawingml/2006/main">
               <a:ext uri="{FF2B5EF4-FFF2-40B4-BE49-F238E27FC236}">
-                <a16:creationId xmlns:a16="http://schemas.microsoft.com/office/drawing/2014/main" id="{5F9ACF06-FE89-4B43-B461-48FD2EEB847C}"/>
+                <a16:creationId xmlns:a16="http://schemas.microsoft.com/office/drawing/2014/main" id="{213475C8-7949-4E19-8B9C-93AA0B02C164}"/>
               </a:ext>
             </a:extLst>
           </p:cNvPr>
@@ -3510,7 +3510,7 @@
           <p:cNvPr id="7" name="case-row-0">
             <a:extLst xmlns:a="http://schemas.openxmlformats.org/drawingml/2006/main">
               <a:ext uri="{FF2B5EF4-FFF2-40B4-BE49-F238E27FC236}">
-                <a16:creationId xmlns:a16="http://schemas.microsoft.com/office/drawing/2014/main" id="{99F97FC9-C8AB-4A14-A849-51E9A069E7CC}"/>
+                <a16:creationId xmlns:a16="http://schemas.microsoft.com/office/drawing/2014/main" id="{00C725D5-B791-4FFF-8C60-D8621DD45C28}"/>
               </a:ext>
             </a:extLst>
           </p:cNvPr>
@@ -3574,7 +3574,7 @@
           <p:cNvPr id="8" name="case-row-1">
             <a:extLst xmlns:a="http://schemas.openxmlformats.org/drawingml/2006/main">
               <a:ext uri="{FF2B5EF4-FFF2-40B4-BE49-F238E27FC236}">
-                <a16:creationId xmlns:a16="http://schemas.microsoft.com/office/drawing/2014/main" id="{BF614C1B-2CA2-49A5-9D38-B7B292E1FFC9}"/>
+                <a16:creationId xmlns:a16="http://schemas.microsoft.com/office/drawing/2014/main" id="{B8A6DCE2-53EF-4853-BA2E-C961081C7215}"/>
               </a:ext>
             </a:extLst>
           </p:cNvPr>
@@ -3638,7 +3638,7 @@
           <p:cNvPr id="9" name="case-row-2">
             <a:extLst xmlns:a="http://schemas.openxmlformats.org/drawingml/2006/main">
               <a:ext uri="{FF2B5EF4-FFF2-40B4-BE49-F238E27FC236}">
-                <a16:creationId xmlns:a16="http://schemas.microsoft.com/office/drawing/2014/main" id="{EBE7662F-9681-4B19-8CA7-1D40702761D6}"/>
+                <a16:creationId xmlns:a16="http://schemas.microsoft.com/office/drawing/2014/main" id="{6B7258BE-778C-4D0D-A320-9DA006E310EC}"/>
               </a:ext>
             </a:extLst>
           </p:cNvPr>
@@ -3702,7 +3702,7 @@
           <p:cNvPr id="10" name="s11-takeaway-rule">
             <a:extLst xmlns:a="http://schemas.openxmlformats.org/drawingml/2006/main">
               <a:ext uri="{FF2B5EF4-FFF2-40B4-BE49-F238E27FC236}">
-                <a16:creationId xmlns:a16="http://schemas.microsoft.com/office/drawing/2014/main" id="{32535FE1-EA22-4AD0-869A-AFE4E4ED29AA}"/>
+                <a16:creationId xmlns:a16="http://schemas.microsoft.com/office/drawing/2014/main" id="{F262346E-B9AE-452E-AA61-A9920F46B989}"/>
               </a:ext>
             </a:extLst>
           </p:cNvPr>
@@ -3735,7 +3735,7 @@
           <p:cNvPr id="11" name="s11-takeaway">
             <a:extLst xmlns:a="http://schemas.openxmlformats.org/drawingml/2006/main">
               <a:ext uri="{FF2B5EF4-FFF2-40B4-BE49-F238E27FC236}">
-                <a16:creationId xmlns:a16="http://schemas.microsoft.com/office/drawing/2014/main" id="{A8889D54-4196-4A94-951F-142CC32C35A1}"/>
+                <a16:creationId xmlns:a16="http://schemas.microsoft.com/office/drawing/2014/main" id="{FCFF960B-BCAC-4E4F-B80A-D389F4FC89A0}"/>
               </a:ext>
             </a:extLst>
           </p:cNvPr>
@@ -3791,7 +3791,7 @@
     </p:spTree>
     <p:extLst>
       <p:ext uri="{BB962C8B-B14F-4D97-AF65-F5344CB8AC3E}">
-        <p14:creationId xmlns:p14="http://schemas.microsoft.com/office/powerpoint/2010/main" val="1655847531"/>
+        <p14:creationId xmlns:p14="http://schemas.microsoft.com/office/powerpoint/2010/main" val="1275484573"/>
       </p:ext>
     </p:extLst>
   </p:cSld>
@@ -3822,7 +3822,7 @@
           <p:cNvPr id="1" name="s12-rule">
             <a:extLst xmlns:a="http://schemas.openxmlformats.org/drawingml/2006/main">
               <a:ext uri="{FF2B5EF4-FFF2-40B4-BE49-F238E27FC236}">
-                <a16:creationId xmlns:a16="http://schemas.microsoft.com/office/drawing/2014/main" id="{383C1050-6276-4F18-800D-80714941B8D2}"/>
+                <a16:creationId xmlns:a16="http://schemas.microsoft.com/office/drawing/2014/main" id="{5C5A8807-9329-49C2-B753-B5757C5D1BF4}"/>
               </a:ext>
             </a:extLst>
           </p:cNvPr>
@@ -3855,7 +3855,7 @@
           <p:cNvPr id="2" name="s12-eyebrow">
             <a:extLst xmlns:a="http://schemas.openxmlformats.org/drawingml/2006/main">
               <a:ext uri="{FF2B5EF4-FFF2-40B4-BE49-F238E27FC236}">
-                <a16:creationId xmlns:a16="http://schemas.microsoft.com/office/drawing/2014/main" id="{8356FA2E-ECD6-4983-B343-D9604BF0CF9B}"/>
+                <a16:creationId xmlns:a16="http://schemas.microsoft.com/office/drawing/2014/main" id="{7E858A64-1464-4C54-AD6E-E20F25743A7E}"/>
               </a:ext>
             </a:extLst>
           </p:cNvPr>
@@ -3913,7 +3913,7 @@
           <p:cNvPr id="3" name="s12-title">
             <a:extLst xmlns:a="http://schemas.openxmlformats.org/drawingml/2006/main">
               <a:ext uri="{FF2B5EF4-FFF2-40B4-BE49-F238E27FC236}">
-                <a16:creationId xmlns:a16="http://schemas.microsoft.com/office/drawing/2014/main" id="{3D709EAE-2C83-424E-91D2-E1B6F73D2C81}"/>
+                <a16:creationId xmlns:a16="http://schemas.microsoft.com/office/drawing/2014/main" id="{BBA1DF6E-BD34-4653-9FC5-EA1066C7FD71}"/>
               </a:ext>
             </a:extLst>
           </p:cNvPr>
@@ -3971,7 +3971,7 @@
           <p:cNvPr id="4" name="s12-footer">
             <a:extLst xmlns:a="http://schemas.openxmlformats.org/drawingml/2006/main">
               <a:ext uri="{FF2B5EF4-FFF2-40B4-BE49-F238E27FC236}">
-                <a16:creationId xmlns:a16="http://schemas.microsoft.com/office/drawing/2014/main" id="{90576F49-7065-4E21-AFA8-19C0242BE8E6}"/>
+                <a16:creationId xmlns:a16="http://schemas.microsoft.com/office/drawing/2014/main" id="{084BE912-5F08-48BD-A1BF-4DB700A37634}"/>
               </a:ext>
             </a:extLst>
           </p:cNvPr>
@@ -4002,7 +4002,7 @@
           <p:cNvPr id="5" name="s12-identity">
             <a:extLst xmlns:a="http://schemas.openxmlformats.org/drawingml/2006/main">
               <a:ext uri="{FF2B5EF4-FFF2-40B4-BE49-F238E27FC236}">
-                <a16:creationId xmlns:a16="http://schemas.microsoft.com/office/drawing/2014/main" id="{6550CE52-1663-472E-BED2-A6BA8A4FC47A}"/>
+                <a16:creationId xmlns:a16="http://schemas.microsoft.com/office/drawing/2014/main" id="{B0F833C5-B179-4DDE-B965-C2A4E552A1D1}"/>
               </a:ext>
             </a:extLst>
           </p:cNvPr>
@@ -4060,7 +4060,7 @@
           <p:cNvPr id="6" name="practice-circle-0">
             <a:extLst xmlns:a="http://schemas.openxmlformats.org/drawingml/2006/main">
               <a:ext uri="{FF2B5EF4-FFF2-40B4-BE49-F238E27FC236}">
-                <a16:creationId xmlns:a16="http://schemas.microsoft.com/office/drawing/2014/main" id="{7D25BEEA-C1D2-41C6-A3E2-AC746FE066C5}"/>
+                <a16:creationId xmlns:a16="http://schemas.microsoft.com/office/drawing/2014/main" id="{C2EA66CE-DA69-4369-9B98-DD4BAE9F2758}"/>
               </a:ext>
             </a:extLst>
           </p:cNvPr>
@@ -4093,7 +4093,7 @@
           <p:cNvPr id="7" name="practice-number-0">
             <a:extLst xmlns:a="http://schemas.openxmlformats.org/drawingml/2006/main">
               <a:ext uri="{FF2B5EF4-FFF2-40B4-BE49-F238E27FC236}">
-                <a16:creationId xmlns:a16="http://schemas.microsoft.com/office/drawing/2014/main" id="{F7628E53-C055-4D9F-BF0D-AC5E520B96D9}"/>
+                <a16:creationId xmlns:a16="http://schemas.microsoft.com/office/drawing/2014/main" id="{05F1AE4C-D811-480F-851C-BD0B3E6856FD}"/>
               </a:ext>
             </a:extLst>
           </p:cNvPr>
@@ -4151,7 +4151,7 @@
           <p:cNvPr id="8" name="practice-item-0">
             <a:extLst xmlns:a="http://schemas.openxmlformats.org/drawingml/2006/main">
               <a:ext uri="{FF2B5EF4-FFF2-40B4-BE49-F238E27FC236}">
-                <a16:creationId xmlns:a16="http://schemas.microsoft.com/office/drawing/2014/main" id="{B37D397D-5885-4B80-B485-223BA65C0F59}"/>
+                <a16:creationId xmlns:a16="http://schemas.microsoft.com/office/drawing/2014/main" id="{DE8F4EDC-49DA-4698-B129-30CD64627F93}"/>
               </a:ext>
             </a:extLst>
           </p:cNvPr>
@@ -4215,7 +4215,7 @@
           <p:cNvPr id="9" name="practice-connector-0">
             <a:extLst xmlns:a="http://schemas.openxmlformats.org/drawingml/2006/main">
               <a:ext uri="{FF2B5EF4-FFF2-40B4-BE49-F238E27FC236}">
-                <a16:creationId xmlns:a16="http://schemas.microsoft.com/office/drawing/2014/main" id="{CFD620FA-44CC-4F61-AE80-239A7D9076F4}"/>
+                <a16:creationId xmlns:a16="http://schemas.microsoft.com/office/drawing/2014/main" id="{F90E345B-6476-4EBB-BF82-1B40348D141F}"/>
               </a:ext>
             </a:extLst>
           </p:cNvPr>
@@ -4246,7 +4246,7 @@
           <p:cNvPr id="10" name="practice-circle-1">
             <a:extLst xmlns:a="http://schemas.openxmlformats.org/drawingml/2006/main">
               <a:ext uri="{FF2B5EF4-FFF2-40B4-BE49-F238E27FC236}">
-                <a16:creationId xmlns:a16="http://schemas.microsoft.com/office/drawing/2014/main" id="{F12A454F-93CB-45D2-88D1-08E2418C9ECE}"/>
+                <a16:creationId xmlns:a16="http://schemas.microsoft.com/office/drawing/2014/main" id="{0CF5CCFC-CCB8-4415-8CDD-A39A852F9718}"/>
               </a:ext>
             </a:extLst>
           </p:cNvPr>
@@ -4279,7 +4279,7 @@
           <p:cNvPr id="11" name="practice-number-1">
             <a:extLst xmlns:a="http://schemas.openxmlformats.org/drawingml/2006/main">
               <a:ext uri="{FF2B5EF4-FFF2-40B4-BE49-F238E27FC236}">
-                <a16:creationId xmlns:a16="http://schemas.microsoft.com/office/drawing/2014/main" id="{C0E8A371-2459-4042-AE94-C239E0B814D9}"/>
+                <a16:creationId xmlns:a16="http://schemas.microsoft.com/office/drawing/2014/main" id="{A6DE4E98-88DA-4CB5-8A2A-FA4591C42014}"/>
               </a:ext>
             </a:extLst>
           </p:cNvPr>
@@ -4337,7 +4337,7 @@
           <p:cNvPr id="12" name="practice-item-1">
             <a:extLst xmlns:a="http://schemas.openxmlformats.org/drawingml/2006/main">
               <a:ext uri="{FF2B5EF4-FFF2-40B4-BE49-F238E27FC236}">
-                <a16:creationId xmlns:a16="http://schemas.microsoft.com/office/drawing/2014/main" id="{015F4313-8812-4B26-A023-D38F950F36DE}"/>
+                <a16:creationId xmlns:a16="http://schemas.microsoft.com/office/drawing/2014/main" id="{6A44FB8C-4959-4A0E-8766-A49D8550142E}"/>
               </a:ext>
             </a:extLst>
           </p:cNvPr>
@@ -4401,7 +4401,7 @@
           <p:cNvPr id="13" name="practice-connector-1">
             <a:extLst xmlns:a="http://schemas.openxmlformats.org/drawingml/2006/main">
               <a:ext uri="{FF2B5EF4-FFF2-40B4-BE49-F238E27FC236}">
-                <a16:creationId xmlns:a16="http://schemas.microsoft.com/office/drawing/2014/main" id="{7F78121F-E692-4482-9774-00A6E60DCDFD}"/>
+                <a16:creationId xmlns:a16="http://schemas.microsoft.com/office/drawing/2014/main" id="{453BBB18-B1F6-40C4-8A45-44631D76EA01}"/>
               </a:ext>
             </a:extLst>
           </p:cNvPr>
@@ -4432,7 +4432,7 @@
           <p:cNvPr id="14" name="practice-circle-2">
             <a:extLst xmlns:a="http://schemas.openxmlformats.org/drawingml/2006/main">
               <a:ext uri="{FF2B5EF4-FFF2-40B4-BE49-F238E27FC236}">
-                <a16:creationId xmlns:a16="http://schemas.microsoft.com/office/drawing/2014/main" id="{1DC69C5B-BE41-419B-AE36-383B01BCD434}"/>
+                <a16:creationId xmlns:a16="http://schemas.microsoft.com/office/drawing/2014/main" id="{8D2F648F-FE59-48FC-9303-8BDD9B8C51A0}"/>
               </a:ext>
             </a:extLst>
           </p:cNvPr>
@@ -4465,7 +4465,7 @@
           <p:cNvPr id="15" name="practice-number-2">
             <a:extLst xmlns:a="http://schemas.openxmlformats.org/drawingml/2006/main">
               <a:ext uri="{FF2B5EF4-FFF2-40B4-BE49-F238E27FC236}">
-                <a16:creationId xmlns:a16="http://schemas.microsoft.com/office/drawing/2014/main" id="{859ABDC9-2E53-42D3-B129-3E2BF22040B9}"/>
+                <a16:creationId xmlns:a16="http://schemas.microsoft.com/office/drawing/2014/main" id="{F8A3D285-7723-4056-9FEF-851398C12F4E}"/>
               </a:ext>
             </a:extLst>
           </p:cNvPr>
@@ -4523,7 +4523,7 @@
           <p:cNvPr id="16" name="practice-item-2">
             <a:extLst xmlns:a="http://schemas.openxmlformats.org/drawingml/2006/main">
               <a:ext uri="{FF2B5EF4-FFF2-40B4-BE49-F238E27FC236}">
-                <a16:creationId xmlns:a16="http://schemas.microsoft.com/office/drawing/2014/main" id="{08AC3C0B-518B-4B33-AD5A-C297CDA7AFB6}"/>
+                <a16:creationId xmlns:a16="http://schemas.microsoft.com/office/drawing/2014/main" id="{0BA8C7FB-459F-49F2-931B-4EAF9AAF9EBF}"/>
               </a:ext>
             </a:extLst>
           </p:cNvPr>
@@ -4585,7 +4585,7 @@
     </p:spTree>
     <p:extLst>
       <p:ext uri="{BB962C8B-B14F-4D97-AF65-F5344CB8AC3E}">
-        <p14:creationId xmlns:p14="http://schemas.microsoft.com/office/powerpoint/2010/main" val="351469447"/>
+        <p14:creationId xmlns:p14="http://schemas.microsoft.com/office/powerpoint/2010/main" val="489342588"/>
       </p:ext>
     </p:extLst>
   </p:cSld>
@@ -4616,7 +4616,7 @@
           <p:cNvPr id="1" name="s13-rule">
             <a:extLst xmlns:a="http://schemas.openxmlformats.org/drawingml/2006/main">
               <a:ext uri="{FF2B5EF4-FFF2-40B4-BE49-F238E27FC236}">
-                <a16:creationId xmlns:a16="http://schemas.microsoft.com/office/drawing/2014/main" id="{BB635209-05C5-4FA6-9CFE-958D8965E976}"/>
+                <a16:creationId xmlns:a16="http://schemas.microsoft.com/office/drawing/2014/main" id="{B67C0E12-B7A6-491F-A4C5-1D8374CAC007}"/>
               </a:ext>
             </a:extLst>
           </p:cNvPr>
@@ -4649,7 +4649,7 @@
           <p:cNvPr id="2" name="s13-eyebrow">
             <a:extLst xmlns:a="http://schemas.openxmlformats.org/drawingml/2006/main">
               <a:ext uri="{FF2B5EF4-FFF2-40B4-BE49-F238E27FC236}">
-                <a16:creationId xmlns:a16="http://schemas.microsoft.com/office/drawing/2014/main" id="{9C855BD1-C138-4C73-89DE-86FD1608D247}"/>
+                <a16:creationId xmlns:a16="http://schemas.microsoft.com/office/drawing/2014/main" id="{8D3A56FD-A2C5-4CDC-80D9-1DFF97CDAF64}"/>
               </a:ext>
             </a:extLst>
           </p:cNvPr>
@@ -4707,7 +4707,7 @@
           <p:cNvPr id="3" name="s13-title">
             <a:extLst xmlns:a="http://schemas.openxmlformats.org/drawingml/2006/main">
               <a:ext uri="{FF2B5EF4-FFF2-40B4-BE49-F238E27FC236}">
-                <a16:creationId xmlns:a16="http://schemas.microsoft.com/office/drawing/2014/main" id="{66D1D4B7-8592-4D9F-9DB8-2B563460E4D8}"/>
+                <a16:creationId xmlns:a16="http://schemas.microsoft.com/office/drawing/2014/main" id="{2FE80738-3224-4AFC-AB3B-05F1BE98185D}"/>
               </a:ext>
             </a:extLst>
           </p:cNvPr>
@@ -4765,7 +4765,7 @@
           <p:cNvPr id="4" name="s13-footer">
             <a:extLst xmlns:a="http://schemas.openxmlformats.org/drawingml/2006/main">
               <a:ext uri="{FF2B5EF4-FFF2-40B4-BE49-F238E27FC236}">
-                <a16:creationId xmlns:a16="http://schemas.microsoft.com/office/drawing/2014/main" id="{7C7C2EE5-1C97-49AF-8ED8-99053E565F2B}"/>
+                <a16:creationId xmlns:a16="http://schemas.microsoft.com/office/drawing/2014/main" id="{410B3B24-BE9C-4D93-B0E4-FB8CE72F35C4}"/>
               </a:ext>
             </a:extLst>
           </p:cNvPr>
@@ -4796,7 +4796,7 @@
           <p:cNvPr id="5" name="s13-identity">
             <a:extLst xmlns:a="http://schemas.openxmlformats.org/drawingml/2006/main">
               <a:ext uri="{FF2B5EF4-FFF2-40B4-BE49-F238E27FC236}">
-                <a16:creationId xmlns:a16="http://schemas.microsoft.com/office/drawing/2014/main" id="{FBAA0E20-DC56-4B4C-ABDC-8CA03EA5A4CA}"/>
+                <a16:creationId xmlns:a16="http://schemas.microsoft.com/office/drawing/2014/main" id="{7F08BB73-30CF-4A82-8B7B-E5B598883D81}"/>
               </a:ext>
             </a:extLst>
           </p:cNvPr>
@@ -4854,7 +4854,7 @@
           <p:cNvPr id="6" name="recap-circle-0">
             <a:extLst xmlns:a="http://schemas.openxmlformats.org/drawingml/2006/main">
               <a:ext uri="{FF2B5EF4-FFF2-40B4-BE49-F238E27FC236}">
-                <a16:creationId xmlns:a16="http://schemas.microsoft.com/office/drawing/2014/main" id="{288451A0-31C2-4716-B9D4-8A1121107DD9}"/>
+                <a16:creationId xmlns:a16="http://schemas.microsoft.com/office/drawing/2014/main" id="{E57D66CB-A04B-45EB-B241-2D624FC812EB}"/>
               </a:ext>
             </a:extLst>
           </p:cNvPr>
@@ -4887,7 +4887,7 @@
           <p:cNvPr id="7" name="recap-number-0">
             <a:extLst xmlns:a="http://schemas.openxmlformats.org/drawingml/2006/main">
               <a:ext uri="{FF2B5EF4-FFF2-40B4-BE49-F238E27FC236}">
-                <a16:creationId xmlns:a16="http://schemas.microsoft.com/office/drawing/2014/main" id="{2C1DED38-B315-41A9-9214-B7450137F7C4}"/>
+                <a16:creationId xmlns:a16="http://schemas.microsoft.com/office/drawing/2014/main" id="{0B9D5635-7B0E-4929-BF0C-1C56F4704556}"/>
               </a:ext>
             </a:extLst>
           </p:cNvPr>
@@ -4945,7 +4945,7 @@
           <p:cNvPr id="8" name="recap-item-0">
             <a:extLst xmlns:a="http://schemas.openxmlformats.org/drawingml/2006/main">
               <a:ext uri="{FF2B5EF4-FFF2-40B4-BE49-F238E27FC236}">
-                <a16:creationId xmlns:a16="http://schemas.microsoft.com/office/drawing/2014/main" id="{C92BB7C6-5D9E-4A16-954F-F5EBFB526A8F}"/>
+                <a16:creationId xmlns:a16="http://schemas.microsoft.com/office/drawing/2014/main" id="{5FAA98DF-79B6-4A3A-81CC-53C1C91EEBFE}"/>
               </a:ext>
             </a:extLst>
           </p:cNvPr>
@@ -5009,7 +5009,7 @@
           <p:cNvPr id="9" name="recap-connector-0">
             <a:extLst xmlns:a="http://schemas.openxmlformats.org/drawingml/2006/main">
               <a:ext uri="{FF2B5EF4-FFF2-40B4-BE49-F238E27FC236}">
-                <a16:creationId xmlns:a16="http://schemas.microsoft.com/office/drawing/2014/main" id="{27B90B42-9137-459A-81AC-7E42749F85DB}"/>
+                <a16:creationId xmlns:a16="http://schemas.microsoft.com/office/drawing/2014/main" id="{8352A2A5-07DD-4549-A342-E3EB0FECD516}"/>
               </a:ext>
             </a:extLst>
           </p:cNvPr>
@@ -5040,7 +5040,7 @@
           <p:cNvPr id="10" name="recap-circle-1">
             <a:extLst xmlns:a="http://schemas.openxmlformats.org/drawingml/2006/main">
               <a:ext uri="{FF2B5EF4-FFF2-40B4-BE49-F238E27FC236}">
-                <a16:creationId xmlns:a16="http://schemas.microsoft.com/office/drawing/2014/main" id="{C5D6B38A-2779-49B7-9EEC-4907CF9DE63B}"/>
+                <a16:creationId xmlns:a16="http://schemas.microsoft.com/office/drawing/2014/main" id="{03FD7CFB-DC9F-43B5-8FA7-1B1BF762F269}"/>
               </a:ext>
             </a:extLst>
           </p:cNvPr>
@@ -5073,7 +5073,7 @@
           <p:cNvPr id="11" name="recap-number-1">
             <a:extLst xmlns:a="http://schemas.openxmlformats.org/drawingml/2006/main">
               <a:ext uri="{FF2B5EF4-FFF2-40B4-BE49-F238E27FC236}">
-                <a16:creationId xmlns:a16="http://schemas.microsoft.com/office/drawing/2014/main" id="{E268FDD7-5912-4F7A-B572-9745ED6F0E92}"/>
+                <a16:creationId xmlns:a16="http://schemas.microsoft.com/office/drawing/2014/main" id="{B62049D1-DBBA-41EC-AF44-005BC51C664C}"/>
               </a:ext>
             </a:extLst>
           </p:cNvPr>
@@ -5131,7 +5131,7 @@
           <p:cNvPr id="12" name="recap-item-1">
             <a:extLst xmlns:a="http://schemas.openxmlformats.org/drawingml/2006/main">
               <a:ext uri="{FF2B5EF4-FFF2-40B4-BE49-F238E27FC236}">
-                <a16:creationId xmlns:a16="http://schemas.microsoft.com/office/drawing/2014/main" id="{C87B646E-31DE-4949-AEA7-21402F06FD9E}"/>
+                <a16:creationId xmlns:a16="http://schemas.microsoft.com/office/drawing/2014/main" id="{7145DF55-1C3E-43D1-9540-6728EF110FAE}"/>
               </a:ext>
             </a:extLst>
           </p:cNvPr>
@@ -5195,7 +5195,7 @@
           <p:cNvPr id="13" name="recap-connector-1">
             <a:extLst xmlns:a="http://schemas.openxmlformats.org/drawingml/2006/main">
               <a:ext uri="{FF2B5EF4-FFF2-40B4-BE49-F238E27FC236}">
-                <a16:creationId xmlns:a16="http://schemas.microsoft.com/office/drawing/2014/main" id="{6C54C112-D0C8-43ED-AD80-DF6CD098FC29}"/>
+                <a16:creationId xmlns:a16="http://schemas.microsoft.com/office/drawing/2014/main" id="{4E558298-AB1E-459C-BCA1-9D61A2C9B3E0}"/>
               </a:ext>
             </a:extLst>
           </p:cNvPr>
@@ -5226,7 +5226,7 @@
           <p:cNvPr id="14" name="recap-circle-2">
             <a:extLst xmlns:a="http://schemas.openxmlformats.org/drawingml/2006/main">
               <a:ext uri="{FF2B5EF4-FFF2-40B4-BE49-F238E27FC236}">
-                <a16:creationId xmlns:a16="http://schemas.microsoft.com/office/drawing/2014/main" id="{1404D872-8470-482F-A55E-A98181D3CCCA}"/>
+                <a16:creationId xmlns:a16="http://schemas.microsoft.com/office/drawing/2014/main" id="{395ECAA2-8429-49D9-9293-C6C7E81449F6}"/>
               </a:ext>
             </a:extLst>
           </p:cNvPr>
@@ -5259,7 +5259,7 @@
           <p:cNvPr id="15" name="recap-number-2">
             <a:extLst xmlns:a="http://schemas.openxmlformats.org/drawingml/2006/main">
               <a:ext uri="{FF2B5EF4-FFF2-40B4-BE49-F238E27FC236}">
-                <a16:creationId xmlns:a16="http://schemas.microsoft.com/office/drawing/2014/main" id="{2A103CE3-098E-488E-AFEB-9BE00FF862DE}"/>
+                <a16:creationId xmlns:a16="http://schemas.microsoft.com/office/drawing/2014/main" id="{8C908E7A-E0B2-4E8C-9381-5120010B3F3A}"/>
               </a:ext>
             </a:extLst>
           </p:cNvPr>
@@ -5317,7 +5317,7 @@
           <p:cNvPr id="16" name="recap-item-2">
             <a:extLst xmlns:a="http://schemas.openxmlformats.org/drawingml/2006/main">
               <a:ext uri="{FF2B5EF4-FFF2-40B4-BE49-F238E27FC236}">
-                <a16:creationId xmlns:a16="http://schemas.microsoft.com/office/drawing/2014/main" id="{DE7F14B9-C68D-418F-A0D0-E4C8AE932709}"/>
+                <a16:creationId xmlns:a16="http://schemas.microsoft.com/office/drawing/2014/main" id="{F1BF39A4-B9FE-4B12-BBE2-58D721F0A45E}"/>
               </a:ext>
             </a:extLst>
           </p:cNvPr>
@@ -5379,7 +5379,7 @@
     </p:spTree>
     <p:extLst>
       <p:ext uri="{BB962C8B-B14F-4D97-AF65-F5344CB8AC3E}">
-        <p14:creationId xmlns:p14="http://schemas.microsoft.com/office/powerpoint/2010/main" val="348575886"/>
+        <p14:creationId xmlns:p14="http://schemas.microsoft.com/office/powerpoint/2010/main" val="2135509521"/>
       </p:ext>
     </p:extLst>
   </p:cSld>
@@ -5410,7 +5410,7 @@
           <p:cNvPr id="1" name="s14-rule">
             <a:extLst xmlns:a="http://schemas.openxmlformats.org/drawingml/2006/main">
               <a:ext uri="{FF2B5EF4-FFF2-40B4-BE49-F238E27FC236}">
-                <a16:creationId xmlns:a16="http://schemas.microsoft.com/office/drawing/2014/main" id="{39DD38D7-CBA2-4564-93F6-3D51C62DB07C}"/>
+                <a16:creationId xmlns:a16="http://schemas.microsoft.com/office/drawing/2014/main" id="{04DDD69F-A0CA-4D08-B04F-8346F4BF6EF6}"/>
               </a:ext>
             </a:extLst>
           </p:cNvPr>
@@ -5443,7 +5443,7 @@
           <p:cNvPr id="2" name="s14-eyebrow">
             <a:extLst xmlns:a="http://schemas.openxmlformats.org/drawingml/2006/main">
               <a:ext uri="{FF2B5EF4-FFF2-40B4-BE49-F238E27FC236}">
-                <a16:creationId xmlns:a16="http://schemas.microsoft.com/office/drawing/2014/main" id="{4F6EC0A1-468B-4DB6-9E88-5138D34CBEE3}"/>
+                <a16:creationId xmlns:a16="http://schemas.microsoft.com/office/drawing/2014/main" id="{F8B24A82-2F1B-446C-83F5-90E1A20B3825}"/>
               </a:ext>
             </a:extLst>
           </p:cNvPr>
@@ -5501,7 +5501,7 @@
           <p:cNvPr id="3" name="s14-title">
             <a:extLst xmlns:a="http://schemas.openxmlformats.org/drawingml/2006/main">
               <a:ext uri="{FF2B5EF4-FFF2-40B4-BE49-F238E27FC236}">
-                <a16:creationId xmlns:a16="http://schemas.microsoft.com/office/drawing/2014/main" id="{23A78F08-9B90-4FF6-80DC-CC609BE7218B}"/>
+                <a16:creationId xmlns:a16="http://schemas.microsoft.com/office/drawing/2014/main" id="{1CD6551A-1A26-465D-8AF2-2B5DA1DD4D58}"/>
               </a:ext>
             </a:extLst>
           </p:cNvPr>
@@ -5559,7 +5559,7 @@
           <p:cNvPr id="4" name="s14-footer">
             <a:extLst xmlns:a="http://schemas.openxmlformats.org/drawingml/2006/main">
               <a:ext uri="{FF2B5EF4-FFF2-40B4-BE49-F238E27FC236}">
-                <a16:creationId xmlns:a16="http://schemas.microsoft.com/office/drawing/2014/main" id="{BAE56ADC-BF1D-426D-8317-4D7A98F55B6E}"/>
+                <a16:creationId xmlns:a16="http://schemas.microsoft.com/office/drawing/2014/main" id="{0F5B71D6-6954-4307-8BE5-C5A81BF98276}"/>
               </a:ext>
             </a:extLst>
           </p:cNvPr>
@@ -5590,7 +5590,7 @@
           <p:cNvPr id="5" name="s14-identity">
             <a:extLst xmlns:a="http://schemas.openxmlformats.org/drawingml/2006/main">
               <a:ext uri="{FF2B5EF4-FFF2-40B4-BE49-F238E27FC236}">
-                <a16:creationId xmlns:a16="http://schemas.microsoft.com/office/drawing/2014/main" id="{BBECF336-0CF5-4DFC-B669-294D5C6A4D87}"/>
+                <a16:creationId xmlns:a16="http://schemas.microsoft.com/office/drawing/2014/main" id="{5DBF5D0B-8CA4-43A7-A7EF-535A13445490}"/>
               </a:ext>
             </a:extLst>
           </p:cNvPr>
@@ -5648,7 +5648,7 @@
           <p:cNvPr id="6" name="source-0">
             <a:extLst xmlns:a="http://schemas.openxmlformats.org/drawingml/2006/main">
               <a:ext uri="{FF2B5EF4-FFF2-40B4-BE49-F238E27FC236}">
-                <a16:creationId xmlns:a16="http://schemas.microsoft.com/office/drawing/2014/main" id="{2315FD4E-051C-402F-81AA-84570145F410}"/>
+                <a16:creationId xmlns:a16="http://schemas.microsoft.com/office/drawing/2014/main" id="{6748E5AF-C698-4804-BAC0-144801F0A9D8}"/>
               </a:ext>
             </a:extLst>
           </p:cNvPr>
@@ -5712,7 +5712,7 @@
           <p:cNvPr id="7" name="source-1">
             <a:extLst xmlns:a="http://schemas.openxmlformats.org/drawingml/2006/main">
               <a:ext uri="{FF2B5EF4-FFF2-40B4-BE49-F238E27FC236}">
-                <a16:creationId xmlns:a16="http://schemas.microsoft.com/office/drawing/2014/main" id="{B3316E6D-1C5C-4AB0-A586-B7E23833DDAB}"/>
+                <a16:creationId xmlns:a16="http://schemas.microsoft.com/office/drawing/2014/main" id="{64949502-9852-490B-B0DD-8C8DA85838F7}"/>
               </a:ext>
             </a:extLst>
           </p:cNvPr>
@@ -5776,7 +5776,7 @@
           <p:cNvPr id="8" name="source-2">
             <a:extLst xmlns:a="http://schemas.openxmlformats.org/drawingml/2006/main">
               <a:ext uri="{FF2B5EF4-FFF2-40B4-BE49-F238E27FC236}">
-                <a16:creationId xmlns:a16="http://schemas.microsoft.com/office/drawing/2014/main" id="{ECAF7ACD-6AEF-4BFC-ADAB-E5200E7EDAA5}"/>
+                <a16:creationId xmlns:a16="http://schemas.microsoft.com/office/drawing/2014/main" id="{6A8C7D78-74A4-4661-ABC7-33B95DCBF233}"/>
               </a:ext>
             </a:extLst>
           </p:cNvPr>
@@ -5840,7 +5840,7 @@
           <p:cNvPr id="9" name="s14-takeaway-rule">
             <a:extLst xmlns:a="http://schemas.openxmlformats.org/drawingml/2006/main">
               <a:ext uri="{FF2B5EF4-FFF2-40B4-BE49-F238E27FC236}">
-                <a16:creationId xmlns:a16="http://schemas.microsoft.com/office/drawing/2014/main" id="{050CD0C8-A155-4FA5-89C6-13A8FBD2AE4E}"/>
+                <a16:creationId xmlns:a16="http://schemas.microsoft.com/office/drawing/2014/main" id="{CE063D60-FA28-498F-873D-993B22C72B55}"/>
               </a:ext>
             </a:extLst>
           </p:cNvPr>
@@ -5873,7 +5873,7 @@
           <p:cNvPr id="10" name="s14-takeaway">
             <a:extLst xmlns:a="http://schemas.openxmlformats.org/drawingml/2006/main">
               <a:ext uri="{FF2B5EF4-FFF2-40B4-BE49-F238E27FC236}">
-                <a16:creationId xmlns:a16="http://schemas.microsoft.com/office/drawing/2014/main" id="{8071D634-9B0E-44AB-B687-ABF00F0B7811}"/>
+                <a16:creationId xmlns:a16="http://schemas.microsoft.com/office/drawing/2014/main" id="{0AE2BDEB-5645-420A-A87B-714D898A0E64}"/>
               </a:ext>
             </a:extLst>
           </p:cNvPr>
@@ -5898,7 +5898,7 @@
         </p:spPr>
         <p:txBody>
           <a:bodyPr xmlns:a="http://schemas.openxmlformats.org/drawingml/2006/main" lIns="0" tIns="0" rIns="0" bIns="0" anchor="ctr">
-            <a:normAutofit fontScale="100000"/>
+            <a:normAutofit fontScale="95911"/>
           </a:bodyPr>
           <a:lstStyle xmlns:a="http://schemas.openxmlformats.org/drawingml/2006/main"/>
           <a:p xmlns:a="http://schemas.openxmlformats.org/drawingml/2006/main">
@@ -5921,7 +5921,7 @@
                 <a:ea typeface="PingFang SC"/>
                 <a:cs typeface="PingFang SC"/>
               </a:rPr>
-              <a:t>公开幻灯片只使用课程原创文字与原生图形；完整论证、链接和事实边界请见本节讲义。</a:t>
+              <a:t>课程精编页用于讲授主线；播放器中的“原课件”模式保留团队 PowerPoint 精选页、真实图片和可播放视频。</a:t>
             </a:r>
           </a:p>
         </p:txBody>
@@ -5929,7 +5929,7 @@
     </p:spTree>
     <p:extLst>
       <p:ext uri="{BB962C8B-B14F-4D97-AF65-F5344CB8AC3E}">
-        <p14:creationId xmlns:p14="http://schemas.microsoft.com/office/powerpoint/2010/main" val="1849008550"/>
+        <p14:creationId xmlns:p14="http://schemas.microsoft.com/office/powerpoint/2010/main" val="1466803208"/>
       </p:ext>
     </p:extLst>
   </p:cSld>
@@ -5960,7 +5960,7 @@
           <p:cNvPr id="1" name="s2-rule">
             <a:extLst xmlns:a="http://schemas.openxmlformats.org/drawingml/2006/main">
               <a:ext uri="{FF2B5EF4-FFF2-40B4-BE49-F238E27FC236}">
-                <a16:creationId xmlns:a16="http://schemas.microsoft.com/office/drawing/2014/main" id="{B5083960-08D1-42AC-A303-18CC035482D9}"/>
+                <a16:creationId xmlns:a16="http://schemas.microsoft.com/office/drawing/2014/main" id="{B5C33ADF-5062-4053-8405-DD9067A4C7F9}"/>
               </a:ext>
             </a:extLst>
           </p:cNvPr>
@@ -5993,7 +5993,7 @@
           <p:cNvPr id="2" name="s2-eyebrow">
             <a:extLst xmlns:a="http://schemas.openxmlformats.org/drawingml/2006/main">
               <a:ext uri="{FF2B5EF4-FFF2-40B4-BE49-F238E27FC236}">
-                <a16:creationId xmlns:a16="http://schemas.microsoft.com/office/drawing/2014/main" id="{DE5BB453-131B-4C64-8F92-A94844184D62}"/>
+                <a16:creationId xmlns:a16="http://schemas.microsoft.com/office/drawing/2014/main" id="{297929BB-0430-47A6-A87F-915834DB0FCA}"/>
               </a:ext>
             </a:extLst>
           </p:cNvPr>
@@ -6051,7 +6051,7 @@
           <p:cNvPr id="3" name="s2-title">
             <a:extLst xmlns:a="http://schemas.openxmlformats.org/drawingml/2006/main">
               <a:ext uri="{FF2B5EF4-FFF2-40B4-BE49-F238E27FC236}">
-                <a16:creationId xmlns:a16="http://schemas.microsoft.com/office/drawing/2014/main" id="{0C878D57-DCF7-453A-8E8A-FBA209277373}"/>
+                <a16:creationId xmlns:a16="http://schemas.microsoft.com/office/drawing/2014/main" id="{F0E8F7D3-BA51-4D9D-9C8F-3241549EBE52}"/>
               </a:ext>
             </a:extLst>
           </p:cNvPr>
@@ -6109,7 +6109,7 @@
           <p:cNvPr id="4" name="s2-footer">
             <a:extLst xmlns:a="http://schemas.openxmlformats.org/drawingml/2006/main">
               <a:ext uri="{FF2B5EF4-FFF2-40B4-BE49-F238E27FC236}">
-                <a16:creationId xmlns:a16="http://schemas.microsoft.com/office/drawing/2014/main" id="{4C016771-20D8-46B3-AC38-7BBAA2D7B806}"/>
+                <a16:creationId xmlns:a16="http://schemas.microsoft.com/office/drawing/2014/main" id="{67884F81-E1BB-4D34-B57A-DF4ED71F6620}"/>
               </a:ext>
             </a:extLst>
           </p:cNvPr>
@@ -6140,7 +6140,7 @@
           <p:cNvPr id="5" name="s2-identity">
             <a:extLst xmlns:a="http://schemas.openxmlformats.org/drawingml/2006/main">
               <a:ext uri="{FF2B5EF4-FFF2-40B4-BE49-F238E27FC236}">
-                <a16:creationId xmlns:a16="http://schemas.microsoft.com/office/drawing/2014/main" id="{B8620712-B84F-4349-8BE5-84AD4B85FDB1}"/>
+                <a16:creationId xmlns:a16="http://schemas.microsoft.com/office/drawing/2014/main" id="{A4AEA6D2-2B78-47E7-857A-D6D5D84D8D57}"/>
               </a:ext>
             </a:extLst>
           </p:cNvPr>
@@ -6198,7 +6198,7 @@
           <p:cNvPr id="6" name="objective-1">
             <a:extLst xmlns:a="http://schemas.openxmlformats.org/drawingml/2006/main">
               <a:ext uri="{FF2B5EF4-FFF2-40B4-BE49-F238E27FC236}">
-                <a16:creationId xmlns:a16="http://schemas.microsoft.com/office/drawing/2014/main" id="{F68470CD-F089-42AF-A8AE-123F85147588}"/>
+                <a16:creationId xmlns:a16="http://schemas.microsoft.com/office/drawing/2014/main" id="{E8595B12-BA17-47AB-9597-A7A43F344F84}"/>
               </a:ext>
             </a:extLst>
           </p:cNvPr>
@@ -6285,7 +6285,7 @@
           <p:cNvPr id="7" name="objective-2">
             <a:extLst xmlns:a="http://schemas.openxmlformats.org/drawingml/2006/main">
               <a:ext uri="{FF2B5EF4-FFF2-40B4-BE49-F238E27FC236}">
-                <a16:creationId xmlns:a16="http://schemas.microsoft.com/office/drawing/2014/main" id="{A7281FDB-DA49-4EAD-A6AA-7FD3D431C5BE}"/>
+                <a16:creationId xmlns:a16="http://schemas.microsoft.com/office/drawing/2014/main" id="{98B8760A-D96B-4130-9DF4-22E38B5202B5}"/>
               </a:ext>
             </a:extLst>
           </p:cNvPr>
@@ -6372,7 +6372,7 @@
           <p:cNvPr id="8" name="objective-3">
             <a:extLst xmlns:a="http://schemas.openxmlformats.org/drawingml/2006/main">
               <a:ext uri="{FF2B5EF4-FFF2-40B4-BE49-F238E27FC236}">
-                <a16:creationId xmlns:a16="http://schemas.microsoft.com/office/drawing/2014/main" id="{1D68F26C-3ED2-42E8-A424-B00BB0CFB688}"/>
+                <a16:creationId xmlns:a16="http://schemas.microsoft.com/office/drawing/2014/main" id="{70F638C7-44B9-49C3-B58F-313CF53AC46B}"/>
               </a:ext>
             </a:extLst>
           </p:cNvPr>
@@ -6457,7 +6457,7 @@
     </p:spTree>
     <p:extLst>
       <p:ext uri="{BB962C8B-B14F-4D97-AF65-F5344CB8AC3E}">
-        <p14:creationId xmlns:p14="http://schemas.microsoft.com/office/powerpoint/2010/main" val="557831640"/>
+        <p14:creationId xmlns:p14="http://schemas.microsoft.com/office/powerpoint/2010/main" val="159831749"/>
       </p:ext>
     </p:extLst>
   </p:cSld>
@@ -6488,7 +6488,7 @@
           <p:cNvPr id="1" name="s3-rule">
             <a:extLst xmlns:a="http://schemas.openxmlformats.org/drawingml/2006/main">
               <a:ext uri="{FF2B5EF4-FFF2-40B4-BE49-F238E27FC236}">
-                <a16:creationId xmlns:a16="http://schemas.microsoft.com/office/drawing/2014/main" id="{AE8C0882-1391-49BD-A50D-4CE0A70B418D}"/>
+                <a16:creationId xmlns:a16="http://schemas.microsoft.com/office/drawing/2014/main" id="{3C672C6B-ABB7-4953-BF07-707CCF2578AB}"/>
               </a:ext>
             </a:extLst>
           </p:cNvPr>
@@ -6521,7 +6521,7 @@
           <p:cNvPr id="2" name="s3-eyebrow">
             <a:extLst xmlns:a="http://schemas.openxmlformats.org/drawingml/2006/main">
               <a:ext uri="{FF2B5EF4-FFF2-40B4-BE49-F238E27FC236}">
-                <a16:creationId xmlns:a16="http://schemas.microsoft.com/office/drawing/2014/main" id="{9238D5C0-F18F-4891-97D4-E1688DE49D7E}"/>
+                <a16:creationId xmlns:a16="http://schemas.microsoft.com/office/drawing/2014/main" id="{DC33DFAB-D202-481B-A84F-2D1BD6B806C1}"/>
               </a:ext>
             </a:extLst>
           </p:cNvPr>
@@ -6579,7 +6579,7 @@
           <p:cNvPr id="3" name="s3-title">
             <a:extLst xmlns:a="http://schemas.openxmlformats.org/drawingml/2006/main">
               <a:ext uri="{FF2B5EF4-FFF2-40B4-BE49-F238E27FC236}">
-                <a16:creationId xmlns:a16="http://schemas.microsoft.com/office/drawing/2014/main" id="{AAF9D8E0-6848-4DAC-859B-73C6E2B9CEFD}"/>
+                <a16:creationId xmlns:a16="http://schemas.microsoft.com/office/drawing/2014/main" id="{436CA3B4-9B7E-45EE-96A6-7D371A7DA8DD}"/>
               </a:ext>
             </a:extLst>
           </p:cNvPr>
@@ -6637,7 +6637,7 @@
           <p:cNvPr id="4" name="s3-footer">
             <a:extLst xmlns:a="http://schemas.openxmlformats.org/drawingml/2006/main">
               <a:ext uri="{FF2B5EF4-FFF2-40B4-BE49-F238E27FC236}">
-                <a16:creationId xmlns:a16="http://schemas.microsoft.com/office/drawing/2014/main" id="{AE1303D5-D0FE-4E37-8F6A-9FB5015EDB50}"/>
+                <a16:creationId xmlns:a16="http://schemas.microsoft.com/office/drawing/2014/main" id="{DE84AA64-F70A-4886-A3C6-C1E8E711A27D}"/>
               </a:ext>
             </a:extLst>
           </p:cNvPr>
@@ -6668,7 +6668,7 @@
           <p:cNvPr id="5" name="s3-identity">
             <a:extLst xmlns:a="http://schemas.openxmlformats.org/drawingml/2006/main">
               <a:ext uri="{FF2B5EF4-FFF2-40B4-BE49-F238E27FC236}">
-                <a16:creationId xmlns:a16="http://schemas.microsoft.com/office/drawing/2014/main" id="{7ADAA213-4BB6-4D56-8720-9F729DCDCDED}"/>
+                <a16:creationId xmlns:a16="http://schemas.microsoft.com/office/drawing/2014/main" id="{D656F491-2D2F-47DC-A5B6-D3538B7D3FFD}"/>
               </a:ext>
             </a:extLst>
           </p:cNvPr>
@@ -6726,7 +6726,7 @@
           <p:cNvPr id="6" name="core-no-0">
             <a:extLst xmlns:a="http://schemas.openxmlformats.org/drawingml/2006/main">
               <a:ext uri="{FF2B5EF4-FFF2-40B4-BE49-F238E27FC236}">
-                <a16:creationId xmlns:a16="http://schemas.microsoft.com/office/drawing/2014/main" id="{E178E804-94B7-4741-9389-CA59CB7269E6}"/>
+                <a16:creationId xmlns:a16="http://schemas.microsoft.com/office/drawing/2014/main" id="{966B7E7F-A001-4EAD-A312-3D643D196A66}"/>
               </a:ext>
             </a:extLst>
           </p:cNvPr>
@@ -6784,7 +6784,7 @@
           <p:cNvPr id="7" name="core-label-0">
             <a:extLst xmlns:a="http://schemas.openxmlformats.org/drawingml/2006/main">
               <a:ext uri="{FF2B5EF4-FFF2-40B4-BE49-F238E27FC236}">
-                <a16:creationId xmlns:a16="http://schemas.microsoft.com/office/drawing/2014/main" id="{500AA9C0-4C77-4987-B0BF-84C4031DEDE1}"/>
+                <a16:creationId xmlns:a16="http://schemas.microsoft.com/office/drawing/2014/main" id="{C2CDDE83-B42D-4133-9995-66FA848E881E}"/>
               </a:ext>
             </a:extLst>
           </p:cNvPr>
@@ -6842,7 +6842,7 @@
           <p:cNvPr id="8" name="core-body-0">
             <a:extLst xmlns:a="http://schemas.openxmlformats.org/drawingml/2006/main">
               <a:ext uri="{FF2B5EF4-FFF2-40B4-BE49-F238E27FC236}">
-                <a16:creationId xmlns:a16="http://schemas.microsoft.com/office/drawing/2014/main" id="{D5D9D73A-0CC1-4773-9C47-07A45A29D0F3}"/>
+                <a16:creationId xmlns:a16="http://schemas.microsoft.com/office/drawing/2014/main" id="{6A638F8B-08AA-49AD-8072-9593DEB16C5F}"/>
               </a:ext>
             </a:extLst>
           </p:cNvPr>
@@ -6906,7 +6906,7 @@
           <p:cNvPr id="9" name="core-no-1">
             <a:extLst xmlns:a="http://schemas.openxmlformats.org/drawingml/2006/main">
               <a:ext uri="{FF2B5EF4-FFF2-40B4-BE49-F238E27FC236}">
-                <a16:creationId xmlns:a16="http://schemas.microsoft.com/office/drawing/2014/main" id="{D71952DE-7BB8-4A2D-B0CB-36ECA8871184}"/>
+                <a16:creationId xmlns:a16="http://schemas.microsoft.com/office/drawing/2014/main" id="{2FAA817E-8B44-42F7-AA7E-0D71EF919483}"/>
               </a:ext>
             </a:extLst>
           </p:cNvPr>
@@ -6964,7 +6964,7 @@
           <p:cNvPr id="10" name="core-body-1">
             <a:extLst xmlns:a="http://schemas.openxmlformats.org/drawingml/2006/main">
               <a:ext uri="{FF2B5EF4-FFF2-40B4-BE49-F238E27FC236}">
-                <a16:creationId xmlns:a16="http://schemas.microsoft.com/office/drawing/2014/main" id="{91EC8AF0-58CE-4076-B35A-2BAB2948FE2B}"/>
+                <a16:creationId xmlns:a16="http://schemas.microsoft.com/office/drawing/2014/main" id="{FD877425-D12A-4A2C-BCEF-7FA1465693D6}"/>
               </a:ext>
             </a:extLst>
           </p:cNvPr>
@@ -7028,7 +7028,7 @@
           <p:cNvPr id="11" name="core-no-2">
             <a:extLst xmlns:a="http://schemas.openxmlformats.org/drawingml/2006/main">
               <a:ext uri="{FF2B5EF4-FFF2-40B4-BE49-F238E27FC236}">
-                <a16:creationId xmlns:a16="http://schemas.microsoft.com/office/drawing/2014/main" id="{6532258A-3AE6-47B3-A42E-7E4C10E28918}"/>
+                <a16:creationId xmlns:a16="http://schemas.microsoft.com/office/drawing/2014/main" id="{5D14E6AC-7375-45CF-AF2F-C9706BC06449}"/>
               </a:ext>
             </a:extLst>
           </p:cNvPr>
@@ -7086,7 +7086,7 @@
           <p:cNvPr id="12" name="core-body-2">
             <a:extLst xmlns:a="http://schemas.openxmlformats.org/drawingml/2006/main">
               <a:ext uri="{FF2B5EF4-FFF2-40B4-BE49-F238E27FC236}">
-                <a16:creationId xmlns:a16="http://schemas.microsoft.com/office/drawing/2014/main" id="{C01DA4FA-7888-4362-8940-42B4384D7CDD}"/>
+                <a16:creationId xmlns:a16="http://schemas.microsoft.com/office/drawing/2014/main" id="{861A5374-378B-4231-90BE-6126CD8C5063}"/>
               </a:ext>
             </a:extLst>
           </p:cNvPr>
@@ -7150,7 +7150,7 @@
           <p:cNvPr id="13" name="s3-takeaway-rule">
             <a:extLst xmlns:a="http://schemas.openxmlformats.org/drawingml/2006/main">
               <a:ext uri="{FF2B5EF4-FFF2-40B4-BE49-F238E27FC236}">
-                <a16:creationId xmlns:a16="http://schemas.microsoft.com/office/drawing/2014/main" id="{EC8E33E4-D0E9-44E3-848A-7ECD08EC9424}"/>
+                <a16:creationId xmlns:a16="http://schemas.microsoft.com/office/drawing/2014/main" id="{81B1228D-3406-403E-86CD-5C256ED161B4}"/>
               </a:ext>
             </a:extLst>
           </p:cNvPr>
@@ -7183,7 +7183,7 @@
           <p:cNvPr id="14" name="s3-takeaway">
             <a:extLst xmlns:a="http://schemas.openxmlformats.org/drawingml/2006/main">
               <a:ext uri="{FF2B5EF4-FFF2-40B4-BE49-F238E27FC236}">
-                <a16:creationId xmlns:a16="http://schemas.microsoft.com/office/drawing/2014/main" id="{452D310F-C825-4431-9C4D-9BD4968B0A29}"/>
+                <a16:creationId xmlns:a16="http://schemas.microsoft.com/office/drawing/2014/main" id="{4F595A21-7083-4BE2-9D4C-B444974C61EB}"/>
               </a:ext>
             </a:extLst>
           </p:cNvPr>
@@ -7239,7 +7239,7 @@
     </p:spTree>
     <p:extLst>
       <p:ext uri="{BB962C8B-B14F-4D97-AF65-F5344CB8AC3E}">
-        <p14:creationId xmlns:p14="http://schemas.microsoft.com/office/powerpoint/2010/main" val="1990120044"/>
+        <p14:creationId xmlns:p14="http://schemas.microsoft.com/office/powerpoint/2010/main" val="577170828"/>
       </p:ext>
     </p:extLst>
   </p:cSld>
@@ -7270,7 +7270,7 @@
           <p:cNvPr id="1" name="s4-rule">
             <a:extLst xmlns:a="http://schemas.openxmlformats.org/drawingml/2006/main">
               <a:ext uri="{FF2B5EF4-FFF2-40B4-BE49-F238E27FC236}">
-                <a16:creationId xmlns:a16="http://schemas.microsoft.com/office/drawing/2014/main" id="{566932AD-C290-4FBA-B1A7-CC4FD48A0A5C}"/>
+                <a16:creationId xmlns:a16="http://schemas.microsoft.com/office/drawing/2014/main" id="{0737893F-5A87-49D9-A948-ED21903B4BFE}"/>
               </a:ext>
             </a:extLst>
           </p:cNvPr>
@@ -7303,7 +7303,7 @@
           <p:cNvPr id="2" name="s4-eyebrow">
             <a:extLst xmlns:a="http://schemas.openxmlformats.org/drawingml/2006/main">
               <a:ext uri="{FF2B5EF4-FFF2-40B4-BE49-F238E27FC236}">
-                <a16:creationId xmlns:a16="http://schemas.microsoft.com/office/drawing/2014/main" id="{8A1F9718-8EF1-4EEA-B410-E7705E4AD27B}"/>
+                <a16:creationId xmlns:a16="http://schemas.microsoft.com/office/drawing/2014/main" id="{05A4B020-3621-4E0B-A95C-C5D9F7D8C37D}"/>
               </a:ext>
             </a:extLst>
           </p:cNvPr>
@@ -7361,7 +7361,7 @@
           <p:cNvPr id="3" name="s4-title">
             <a:extLst xmlns:a="http://schemas.openxmlformats.org/drawingml/2006/main">
               <a:ext uri="{FF2B5EF4-FFF2-40B4-BE49-F238E27FC236}">
-                <a16:creationId xmlns:a16="http://schemas.microsoft.com/office/drawing/2014/main" id="{3F6A7015-0D97-4351-9AF9-35015B33EC49}"/>
+                <a16:creationId xmlns:a16="http://schemas.microsoft.com/office/drawing/2014/main" id="{48D7307B-2BDD-44B8-80F6-98F52616DBA2}"/>
               </a:ext>
             </a:extLst>
           </p:cNvPr>
@@ -7419,7 +7419,7 @@
           <p:cNvPr id="4" name="s4-footer">
             <a:extLst xmlns:a="http://schemas.openxmlformats.org/drawingml/2006/main">
               <a:ext uri="{FF2B5EF4-FFF2-40B4-BE49-F238E27FC236}">
-                <a16:creationId xmlns:a16="http://schemas.microsoft.com/office/drawing/2014/main" id="{06B2EDED-A0D3-4897-87A4-1C426448AB71}"/>
+                <a16:creationId xmlns:a16="http://schemas.microsoft.com/office/drawing/2014/main" id="{4719E1F1-B74E-4C06-AB21-D479A407147A}"/>
               </a:ext>
             </a:extLst>
           </p:cNvPr>
@@ -7450,7 +7450,7 @@
           <p:cNvPr id="5" name="s4-identity">
             <a:extLst xmlns:a="http://schemas.openxmlformats.org/drawingml/2006/main">
               <a:ext uri="{FF2B5EF4-FFF2-40B4-BE49-F238E27FC236}">
-                <a16:creationId xmlns:a16="http://schemas.microsoft.com/office/drawing/2014/main" id="{9CC89C28-CC5D-498C-BAFB-AE6963D77EBF}"/>
+                <a16:creationId xmlns:a16="http://schemas.microsoft.com/office/drawing/2014/main" id="{6708D2F3-EA48-43DB-BC4A-3FCDE8181711}"/>
               </a:ext>
             </a:extLst>
           </p:cNvPr>
@@ -7508,7 +7508,7 @@
           <p:cNvPr id="6" name="core-no-0">
             <a:extLst xmlns:a="http://schemas.openxmlformats.org/drawingml/2006/main">
               <a:ext uri="{FF2B5EF4-FFF2-40B4-BE49-F238E27FC236}">
-                <a16:creationId xmlns:a16="http://schemas.microsoft.com/office/drawing/2014/main" id="{F46879CA-E2FE-4E6B-BD1D-9EA8DFAA9B2D}"/>
+                <a16:creationId xmlns:a16="http://schemas.microsoft.com/office/drawing/2014/main" id="{AAB43ABF-C2B9-481B-B249-9F1A2653E088}"/>
               </a:ext>
             </a:extLst>
           </p:cNvPr>
@@ -7566,7 +7566,7 @@
           <p:cNvPr id="7" name="core-label-0">
             <a:extLst xmlns:a="http://schemas.openxmlformats.org/drawingml/2006/main">
               <a:ext uri="{FF2B5EF4-FFF2-40B4-BE49-F238E27FC236}">
-                <a16:creationId xmlns:a16="http://schemas.microsoft.com/office/drawing/2014/main" id="{4C3B1A39-382D-4428-AFBD-B2B9935688C4}"/>
+                <a16:creationId xmlns:a16="http://schemas.microsoft.com/office/drawing/2014/main" id="{5B1DCC8E-1914-49EF-8706-3C6BCCEEBEF0}"/>
               </a:ext>
             </a:extLst>
           </p:cNvPr>
@@ -7624,7 +7624,7 @@
           <p:cNvPr id="8" name="core-body-0">
             <a:extLst xmlns:a="http://schemas.openxmlformats.org/drawingml/2006/main">
               <a:ext uri="{FF2B5EF4-FFF2-40B4-BE49-F238E27FC236}">
-                <a16:creationId xmlns:a16="http://schemas.microsoft.com/office/drawing/2014/main" id="{1DC9E904-C3DD-4896-A89B-3447D31C3A1B}"/>
+                <a16:creationId xmlns:a16="http://schemas.microsoft.com/office/drawing/2014/main" id="{F3E4F6D3-F084-4262-A63C-7C6A4F5615A6}"/>
               </a:ext>
             </a:extLst>
           </p:cNvPr>
@@ -7688,7 +7688,7 @@
           <p:cNvPr id="9" name="core-no-1">
             <a:extLst xmlns:a="http://schemas.openxmlformats.org/drawingml/2006/main">
               <a:ext uri="{FF2B5EF4-FFF2-40B4-BE49-F238E27FC236}">
-                <a16:creationId xmlns:a16="http://schemas.microsoft.com/office/drawing/2014/main" id="{E2A2F019-70D4-4006-A6E3-2EBF28325E2B}"/>
+                <a16:creationId xmlns:a16="http://schemas.microsoft.com/office/drawing/2014/main" id="{6A89F401-A772-48FB-95CE-2B8451F30F7F}"/>
               </a:ext>
             </a:extLst>
           </p:cNvPr>
@@ -7746,7 +7746,7 @@
           <p:cNvPr id="10" name="core-body-1">
             <a:extLst xmlns:a="http://schemas.openxmlformats.org/drawingml/2006/main">
               <a:ext uri="{FF2B5EF4-FFF2-40B4-BE49-F238E27FC236}">
-                <a16:creationId xmlns:a16="http://schemas.microsoft.com/office/drawing/2014/main" id="{25F159E1-329B-490D-BA2B-9373255147C0}"/>
+                <a16:creationId xmlns:a16="http://schemas.microsoft.com/office/drawing/2014/main" id="{9998F8B8-DEDD-4939-AFAC-044EC40CCF4B}"/>
               </a:ext>
             </a:extLst>
           </p:cNvPr>
@@ -7810,7 +7810,7 @@
           <p:cNvPr id="11" name="s4-takeaway-rule">
             <a:extLst xmlns:a="http://schemas.openxmlformats.org/drawingml/2006/main">
               <a:ext uri="{FF2B5EF4-FFF2-40B4-BE49-F238E27FC236}">
-                <a16:creationId xmlns:a16="http://schemas.microsoft.com/office/drawing/2014/main" id="{10872941-A072-4AF8-AEF8-DF2978276F18}"/>
+                <a16:creationId xmlns:a16="http://schemas.microsoft.com/office/drawing/2014/main" id="{A28C394A-DFDE-4EE6-9204-19E24090DB03}"/>
               </a:ext>
             </a:extLst>
           </p:cNvPr>
@@ -7843,7 +7843,7 @@
           <p:cNvPr id="12" name="s4-takeaway">
             <a:extLst xmlns:a="http://schemas.openxmlformats.org/drawingml/2006/main">
               <a:ext uri="{FF2B5EF4-FFF2-40B4-BE49-F238E27FC236}">
-                <a16:creationId xmlns:a16="http://schemas.microsoft.com/office/drawing/2014/main" id="{95023979-3F33-42F3-ADBF-6CE242EEC347}"/>
+                <a16:creationId xmlns:a16="http://schemas.microsoft.com/office/drawing/2014/main" id="{8ED94E85-B9C9-49F2-BC69-32F2CF21A443}"/>
               </a:ext>
             </a:extLst>
           </p:cNvPr>
@@ -7899,7 +7899,7 @@
     </p:spTree>
     <p:extLst>
       <p:ext uri="{BB962C8B-B14F-4D97-AF65-F5344CB8AC3E}">
-        <p14:creationId xmlns:p14="http://schemas.microsoft.com/office/powerpoint/2010/main" val="991495003"/>
+        <p14:creationId xmlns:p14="http://schemas.microsoft.com/office/powerpoint/2010/main" val="932085324"/>
       </p:ext>
     </p:extLst>
   </p:cSld>
@@ -7930,7 +7930,7 @@
           <p:cNvPr id="1" name="s5-rule">
             <a:extLst xmlns:a="http://schemas.openxmlformats.org/drawingml/2006/main">
               <a:ext uri="{FF2B5EF4-FFF2-40B4-BE49-F238E27FC236}">
-                <a16:creationId xmlns:a16="http://schemas.microsoft.com/office/drawing/2014/main" id="{89B9B52B-9671-4627-92EC-D000B8102A8F}"/>
+                <a16:creationId xmlns:a16="http://schemas.microsoft.com/office/drawing/2014/main" id="{00B97421-7EEF-49D0-B400-701D79601182}"/>
               </a:ext>
             </a:extLst>
           </p:cNvPr>
@@ -7963,7 +7963,7 @@
           <p:cNvPr id="2" name="s5-eyebrow">
             <a:extLst xmlns:a="http://schemas.openxmlformats.org/drawingml/2006/main">
               <a:ext uri="{FF2B5EF4-FFF2-40B4-BE49-F238E27FC236}">
-                <a16:creationId xmlns:a16="http://schemas.microsoft.com/office/drawing/2014/main" id="{8CC09EE7-D997-4252-8D4B-4FC837581836}"/>
+                <a16:creationId xmlns:a16="http://schemas.microsoft.com/office/drawing/2014/main" id="{E57C863B-86FB-4057-AB52-40FBFB8444D3}"/>
               </a:ext>
             </a:extLst>
           </p:cNvPr>
@@ -8021,7 +8021,7 @@
           <p:cNvPr id="3" name="s5-title">
             <a:extLst xmlns:a="http://schemas.openxmlformats.org/drawingml/2006/main">
               <a:ext uri="{FF2B5EF4-FFF2-40B4-BE49-F238E27FC236}">
-                <a16:creationId xmlns:a16="http://schemas.microsoft.com/office/drawing/2014/main" id="{745E591B-ED55-4FA1-865B-0348F67EC226}"/>
+                <a16:creationId xmlns:a16="http://schemas.microsoft.com/office/drawing/2014/main" id="{FAE69209-4375-4E0B-9306-2421DD032258}"/>
               </a:ext>
             </a:extLst>
           </p:cNvPr>
@@ -8079,7 +8079,7 @@
           <p:cNvPr id="4" name="s5-footer">
             <a:extLst xmlns:a="http://schemas.openxmlformats.org/drawingml/2006/main">
               <a:ext uri="{FF2B5EF4-FFF2-40B4-BE49-F238E27FC236}">
-                <a16:creationId xmlns:a16="http://schemas.microsoft.com/office/drawing/2014/main" id="{A0B9A343-363C-4B0D-998F-6D973492289A}"/>
+                <a16:creationId xmlns:a16="http://schemas.microsoft.com/office/drawing/2014/main" id="{0A901F7C-3600-42CA-AEE5-3BB6B8F164D6}"/>
               </a:ext>
             </a:extLst>
           </p:cNvPr>
@@ -8110,7 +8110,7 @@
           <p:cNvPr id="5" name="s5-identity">
             <a:extLst xmlns:a="http://schemas.openxmlformats.org/drawingml/2006/main">
               <a:ext uri="{FF2B5EF4-FFF2-40B4-BE49-F238E27FC236}">
-                <a16:creationId xmlns:a16="http://schemas.microsoft.com/office/drawing/2014/main" id="{509B9DC8-EF00-428C-96C3-2CD2C86A5725}"/>
+                <a16:creationId xmlns:a16="http://schemas.microsoft.com/office/drawing/2014/main" id="{C0A3D60B-E4D6-4150-9088-FE0BEA1523B1}"/>
               </a:ext>
             </a:extLst>
           </p:cNvPr>
@@ -8168,7 +8168,7 @@
           <p:cNvPr id="6" name="core-no-0">
             <a:extLst xmlns:a="http://schemas.openxmlformats.org/drawingml/2006/main">
               <a:ext uri="{FF2B5EF4-FFF2-40B4-BE49-F238E27FC236}">
-                <a16:creationId xmlns:a16="http://schemas.microsoft.com/office/drawing/2014/main" id="{320F5B52-AEBD-46CE-8B06-693DA0284CEC}"/>
+                <a16:creationId xmlns:a16="http://schemas.microsoft.com/office/drawing/2014/main" id="{40F1EDE3-E17B-4D36-9225-3D76D4CB133D}"/>
               </a:ext>
             </a:extLst>
           </p:cNvPr>
@@ -8226,7 +8226,7 @@
           <p:cNvPr id="7" name="core-label-0">
             <a:extLst xmlns:a="http://schemas.openxmlformats.org/drawingml/2006/main">
               <a:ext uri="{FF2B5EF4-FFF2-40B4-BE49-F238E27FC236}">
-                <a16:creationId xmlns:a16="http://schemas.microsoft.com/office/drawing/2014/main" id="{22342469-9A19-4811-ADA3-3561FE35B5D7}"/>
+                <a16:creationId xmlns:a16="http://schemas.microsoft.com/office/drawing/2014/main" id="{A6C935A1-3DD1-4CA2-BA57-82D2442B3FFC}"/>
               </a:ext>
             </a:extLst>
           </p:cNvPr>
@@ -8284,7 +8284,7 @@
           <p:cNvPr id="8" name="core-body-0">
             <a:extLst xmlns:a="http://schemas.openxmlformats.org/drawingml/2006/main">
               <a:ext uri="{FF2B5EF4-FFF2-40B4-BE49-F238E27FC236}">
-                <a16:creationId xmlns:a16="http://schemas.microsoft.com/office/drawing/2014/main" id="{A9074417-A876-43E1-83A3-D63D61BD3E8A}"/>
+                <a16:creationId xmlns:a16="http://schemas.microsoft.com/office/drawing/2014/main" id="{A3699388-30B5-4C33-ABEB-D02EED036A7D}"/>
               </a:ext>
             </a:extLst>
           </p:cNvPr>
@@ -8348,7 +8348,7 @@
           <p:cNvPr id="9" name="core-no-1">
             <a:extLst xmlns:a="http://schemas.openxmlformats.org/drawingml/2006/main">
               <a:ext uri="{FF2B5EF4-FFF2-40B4-BE49-F238E27FC236}">
-                <a16:creationId xmlns:a16="http://schemas.microsoft.com/office/drawing/2014/main" id="{3A3D3C13-E86A-4CB6-B8DE-D1076A67AE9B}"/>
+                <a16:creationId xmlns:a16="http://schemas.microsoft.com/office/drawing/2014/main" id="{56C53CC3-17FC-4B56-B85E-7E1726CEBC36}"/>
               </a:ext>
             </a:extLst>
           </p:cNvPr>
@@ -8406,7 +8406,7 @@
           <p:cNvPr id="10" name="core-body-1">
             <a:extLst xmlns:a="http://schemas.openxmlformats.org/drawingml/2006/main">
               <a:ext uri="{FF2B5EF4-FFF2-40B4-BE49-F238E27FC236}">
-                <a16:creationId xmlns:a16="http://schemas.microsoft.com/office/drawing/2014/main" id="{CCF9ADCE-5606-4CAA-B887-002DC76D9EA3}"/>
+                <a16:creationId xmlns:a16="http://schemas.microsoft.com/office/drawing/2014/main" id="{3EB94EDE-609D-4FDD-AF4F-086A6B3A6065}"/>
               </a:ext>
             </a:extLst>
           </p:cNvPr>
@@ -8470,7 +8470,7 @@
           <p:cNvPr id="11" name="s5-takeaway-rule">
             <a:extLst xmlns:a="http://schemas.openxmlformats.org/drawingml/2006/main">
               <a:ext uri="{FF2B5EF4-FFF2-40B4-BE49-F238E27FC236}">
-                <a16:creationId xmlns:a16="http://schemas.microsoft.com/office/drawing/2014/main" id="{A0BB671B-BF51-44E9-8990-7269919C356F}"/>
+                <a16:creationId xmlns:a16="http://schemas.microsoft.com/office/drawing/2014/main" id="{0DCB6C72-4DE2-4AB4-8C89-FF8DCFE09C13}"/>
               </a:ext>
             </a:extLst>
           </p:cNvPr>
@@ -8503,7 +8503,7 @@
           <p:cNvPr id="12" name="s5-takeaway">
             <a:extLst xmlns:a="http://schemas.openxmlformats.org/drawingml/2006/main">
               <a:ext uri="{FF2B5EF4-FFF2-40B4-BE49-F238E27FC236}">
-                <a16:creationId xmlns:a16="http://schemas.microsoft.com/office/drawing/2014/main" id="{9C6A5262-5750-4AE0-8D28-3E92FF6DFFA9}"/>
+                <a16:creationId xmlns:a16="http://schemas.microsoft.com/office/drawing/2014/main" id="{98495613-904A-4081-8A4F-A0B92847EB82}"/>
               </a:ext>
             </a:extLst>
           </p:cNvPr>
@@ -8559,7 +8559,7 @@
     </p:spTree>
     <p:extLst>
       <p:ext uri="{BB962C8B-B14F-4D97-AF65-F5344CB8AC3E}">
-        <p14:creationId xmlns:p14="http://schemas.microsoft.com/office/powerpoint/2010/main" val="361840226"/>
+        <p14:creationId xmlns:p14="http://schemas.microsoft.com/office/powerpoint/2010/main" val="1521412010"/>
       </p:ext>
     </p:extLst>
   </p:cSld>
@@ -8590,7 +8590,7 @@
           <p:cNvPr id="1" name="s6-rule">
             <a:extLst xmlns:a="http://schemas.openxmlformats.org/drawingml/2006/main">
               <a:ext uri="{FF2B5EF4-FFF2-40B4-BE49-F238E27FC236}">
-                <a16:creationId xmlns:a16="http://schemas.microsoft.com/office/drawing/2014/main" id="{7CC19BF9-3971-4EEE-B0D4-0C6CBB567FDF}"/>
+                <a16:creationId xmlns:a16="http://schemas.microsoft.com/office/drawing/2014/main" id="{755A8744-8435-451F-BAEA-393C2DD52925}"/>
               </a:ext>
             </a:extLst>
           </p:cNvPr>
@@ -8623,7 +8623,7 @@
           <p:cNvPr id="2" name="s6-eyebrow">
             <a:extLst xmlns:a="http://schemas.openxmlformats.org/drawingml/2006/main">
               <a:ext uri="{FF2B5EF4-FFF2-40B4-BE49-F238E27FC236}">
-                <a16:creationId xmlns:a16="http://schemas.microsoft.com/office/drawing/2014/main" id="{6EFA5C3D-9991-45B2-BD78-6950D4B3B540}"/>
+                <a16:creationId xmlns:a16="http://schemas.microsoft.com/office/drawing/2014/main" id="{E6784C18-96D7-4ADA-B262-F012EE5EFF1B}"/>
               </a:ext>
             </a:extLst>
           </p:cNvPr>
@@ -8681,7 +8681,7 @@
           <p:cNvPr id="3" name="s6-title">
             <a:extLst xmlns:a="http://schemas.openxmlformats.org/drawingml/2006/main">
               <a:ext uri="{FF2B5EF4-FFF2-40B4-BE49-F238E27FC236}">
-                <a16:creationId xmlns:a16="http://schemas.microsoft.com/office/drawing/2014/main" id="{079A3811-F4F4-4081-87FD-BA5DF7713A75}"/>
+                <a16:creationId xmlns:a16="http://schemas.microsoft.com/office/drawing/2014/main" id="{9C2B2E7C-46DD-49C1-96E3-D4F0ADBEE692}"/>
               </a:ext>
             </a:extLst>
           </p:cNvPr>
@@ -8739,7 +8739,7 @@
           <p:cNvPr id="4" name="s6-footer">
             <a:extLst xmlns:a="http://schemas.openxmlformats.org/drawingml/2006/main">
               <a:ext uri="{FF2B5EF4-FFF2-40B4-BE49-F238E27FC236}">
-                <a16:creationId xmlns:a16="http://schemas.microsoft.com/office/drawing/2014/main" id="{FD0EDB4A-4557-425B-8ACC-F52495D0094F}"/>
+                <a16:creationId xmlns:a16="http://schemas.microsoft.com/office/drawing/2014/main" id="{BE6C2C19-9802-4D92-80A1-3926D83C4AAE}"/>
               </a:ext>
             </a:extLst>
           </p:cNvPr>
@@ -8770,7 +8770,7 @@
           <p:cNvPr id="5" name="s6-identity">
             <a:extLst xmlns:a="http://schemas.openxmlformats.org/drawingml/2006/main">
               <a:ext uri="{FF2B5EF4-FFF2-40B4-BE49-F238E27FC236}">
-                <a16:creationId xmlns:a16="http://schemas.microsoft.com/office/drawing/2014/main" id="{A1A18A4C-5CEE-4DEA-B7E2-05C1DEAB0332}"/>
+                <a16:creationId xmlns:a16="http://schemas.microsoft.com/office/drawing/2014/main" id="{E854D841-5BCD-43D0-ACEF-AB4B7FAE8E50}"/>
               </a:ext>
             </a:extLst>
           </p:cNvPr>
@@ -8828,7 +8828,7 @@
           <p:cNvPr id="6" name="core-no-0">
             <a:extLst xmlns:a="http://schemas.openxmlformats.org/drawingml/2006/main">
               <a:ext uri="{FF2B5EF4-FFF2-40B4-BE49-F238E27FC236}">
-                <a16:creationId xmlns:a16="http://schemas.microsoft.com/office/drawing/2014/main" id="{2A31D047-8172-4E31-B861-5BE083075BAE}"/>
+                <a16:creationId xmlns:a16="http://schemas.microsoft.com/office/drawing/2014/main" id="{D93AA7F6-787C-4BDB-BD0A-3EED3CA7904B}"/>
               </a:ext>
             </a:extLst>
           </p:cNvPr>
@@ -8886,7 +8886,7 @@
           <p:cNvPr id="7" name="core-label-0">
             <a:extLst xmlns:a="http://schemas.openxmlformats.org/drawingml/2006/main">
               <a:ext uri="{FF2B5EF4-FFF2-40B4-BE49-F238E27FC236}">
-                <a16:creationId xmlns:a16="http://schemas.microsoft.com/office/drawing/2014/main" id="{0C2F4FAC-C506-4C20-B94C-A8A4A57D479F}"/>
+                <a16:creationId xmlns:a16="http://schemas.microsoft.com/office/drawing/2014/main" id="{7BAAC68B-3567-4D7D-A8C3-319913690C02}"/>
               </a:ext>
             </a:extLst>
           </p:cNvPr>
@@ -8944,7 +8944,7 @@
           <p:cNvPr id="8" name="core-body-0">
             <a:extLst xmlns:a="http://schemas.openxmlformats.org/drawingml/2006/main">
               <a:ext uri="{FF2B5EF4-FFF2-40B4-BE49-F238E27FC236}">
-                <a16:creationId xmlns:a16="http://schemas.microsoft.com/office/drawing/2014/main" id="{353C6E3A-7CD3-4201-905C-B2CD6A1BE932}"/>
+                <a16:creationId xmlns:a16="http://schemas.microsoft.com/office/drawing/2014/main" id="{9EDD99A6-4F03-46A5-90A4-B00C09D1DA98}"/>
               </a:ext>
             </a:extLst>
           </p:cNvPr>
@@ -9008,7 +9008,7 @@
           <p:cNvPr id="9" name="core-no-1">
             <a:extLst xmlns:a="http://schemas.openxmlformats.org/drawingml/2006/main">
               <a:ext uri="{FF2B5EF4-FFF2-40B4-BE49-F238E27FC236}">
-                <a16:creationId xmlns:a16="http://schemas.microsoft.com/office/drawing/2014/main" id="{9D38C8F9-476B-404C-ADD6-1298E362939E}"/>
+                <a16:creationId xmlns:a16="http://schemas.microsoft.com/office/drawing/2014/main" id="{56AAF2A3-E844-4792-B56C-7F80F42C8CF1}"/>
               </a:ext>
             </a:extLst>
           </p:cNvPr>
@@ -9066,7 +9066,7 @@
           <p:cNvPr id="10" name="core-body-1">
             <a:extLst xmlns:a="http://schemas.openxmlformats.org/drawingml/2006/main">
               <a:ext uri="{FF2B5EF4-FFF2-40B4-BE49-F238E27FC236}">
-                <a16:creationId xmlns:a16="http://schemas.microsoft.com/office/drawing/2014/main" id="{B0C675A9-3358-4496-BC01-0F8A579B2C50}"/>
+                <a16:creationId xmlns:a16="http://schemas.microsoft.com/office/drawing/2014/main" id="{D7C6BB8E-10BA-420C-8B92-466DEC6B3A68}"/>
               </a:ext>
             </a:extLst>
           </p:cNvPr>
@@ -9130,7 +9130,7 @@
           <p:cNvPr id="11" name="core-no-2">
             <a:extLst xmlns:a="http://schemas.openxmlformats.org/drawingml/2006/main">
               <a:ext uri="{FF2B5EF4-FFF2-40B4-BE49-F238E27FC236}">
-                <a16:creationId xmlns:a16="http://schemas.microsoft.com/office/drawing/2014/main" id="{A55EB842-AA42-4969-8583-199DAFB57A9D}"/>
+                <a16:creationId xmlns:a16="http://schemas.microsoft.com/office/drawing/2014/main" id="{51D04044-C3A8-4346-9052-1DFD7C08CEBE}"/>
               </a:ext>
             </a:extLst>
           </p:cNvPr>
@@ -9188,7 +9188,7 @@
           <p:cNvPr id="12" name="core-body-2">
             <a:extLst xmlns:a="http://schemas.openxmlformats.org/drawingml/2006/main">
               <a:ext uri="{FF2B5EF4-FFF2-40B4-BE49-F238E27FC236}">
-                <a16:creationId xmlns:a16="http://schemas.microsoft.com/office/drawing/2014/main" id="{C93C7E0E-D650-4DAE-A1E3-B139F488ED54}"/>
+                <a16:creationId xmlns:a16="http://schemas.microsoft.com/office/drawing/2014/main" id="{D186E3F3-67DB-4185-87F0-190C6897897A}"/>
               </a:ext>
             </a:extLst>
           </p:cNvPr>
@@ -9252,7 +9252,7 @@
           <p:cNvPr id="13" name="s6-takeaway-rule">
             <a:extLst xmlns:a="http://schemas.openxmlformats.org/drawingml/2006/main">
               <a:ext uri="{FF2B5EF4-FFF2-40B4-BE49-F238E27FC236}">
-                <a16:creationId xmlns:a16="http://schemas.microsoft.com/office/drawing/2014/main" id="{17879A4E-9DF5-4F83-9921-C1C6FBE52DBD}"/>
+                <a16:creationId xmlns:a16="http://schemas.microsoft.com/office/drawing/2014/main" id="{6293B82A-220E-49D2-8C37-6F6A182D536A}"/>
               </a:ext>
             </a:extLst>
           </p:cNvPr>
@@ -9285,7 +9285,7 @@
           <p:cNvPr id="14" name="s6-takeaway">
             <a:extLst xmlns:a="http://schemas.openxmlformats.org/drawingml/2006/main">
               <a:ext uri="{FF2B5EF4-FFF2-40B4-BE49-F238E27FC236}">
-                <a16:creationId xmlns:a16="http://schemas.microsoft.com/office/drawing/2014/main" id="{04A9BBC7-4C1C-4E69-8FBD-DE43EFCA9870}"/>
+                <a16:creationId xmlns:a16="http://schemas.microsoft.com/office/drawing/2014/main" id="{4FABBDBA-A74E-43A0-A427-0E837C07C1C9}"/>
               </a:ext>
             </a:extLst>
           </p:cNvPr>
@@ -9341,7 +9341,7 @@
     </p:spTree>
     <p:extLst>
       <p:ext uri="{BB962C8B-B14F-4D97-AF65-F5344CB8AC3E}">
-        <p14:creationId xmlns:p14="http://schemas.microsoft.com/office/powerpoint/2010/main" val="717645984"/>
+        <p14:creationId xmlns:p14="http://schemas.microsoft.com/office/powerpoint/2010/main" val="582536619"/>
       </p:ext>
     </p:extLst>
   </p:cSld>
@@ -9372,7 +9372,7 @@
           <p:cNvPr id="1" name="s7-rule">
             <a:extLst xmlns:a="http://schemas.openxmlformats.org/drawingml/2006/main">
               <a:ext uri="{FF2B5EF4-FFF2-40B4-BE49-F238E27FC236}">
-                <a16:creationId xmlns:a16="http://schemas.microsoft.com/office/drawing/2014/main" id="{9D0B3422-D763-419C-A3D9-01F72893D8A4}"/>
+                <a16:creationId xmlns:a16="http://schemas.microsoft.com/office/drawing/2014/main" id="{66E888D2-C592-4834-BFEB-9BE6BFDF3B17}"/>
               </a:ext>
             </a:extLst>
           </p:cNvPr>
@@ -9405,7 +9405,7 @@
           <p:cNvPr id="2" name="s7-eyebrow">
             <a:extLst xmlns:a="http://schemas.openxmlformats.org/drawingml/2006/main">
               <a:ext uri="{FF2B5EF4-FFF2-40B4-BE49-F238E27FC236}">
-                <a16:creationId xmlns:a16="http://schemas.microsoft.com/office/drawing/2014/main" id="{FF644D5A-B3EA-4752-888B-BCC7713D434B}"/>
+                <a16:creationId xmlns:a16="http://schemas.microsoft.com/office/drawing/2014/main" id="{118749B2-2793-49C1-8924-46562BFB22FE}"/>
               </a:ext>
             </a:extLst>
           </p:cNvPr>
@@ -9463,7 +9463,7 @@
           <p:cNvPr id="3" name="s7-title">
             <a:extLst xmlns:a="http://schemas.openxmlformats.org/drawingml/2006/main">
               <a:ext uri="{FF2B5EF4-FFF2-40B4-BE49-F238E27FC236}">
-                <a16:creationId xmlns:a16="http://schemas.microsoft.com/office/drawing/2014/main" id="{464AA627-5CC4-4174-8D0C-749F7361B391}"/>
+                <a16:creationId xmlns:a16="http://schemas.microsoft.com/office/drawing/2014/main" id="{25CAA764-BC8A-4C1D-B1B9-C60D9011CB21}"/>
               </a:ext>
             </a:extLst>
           </p:cNvPr>
@@ -9521,7 +9521,7 @@
           <p:cNvPr id="4" name="s7-footer">
             <a:extLst xmlns:a="http://schemas.openxmlformats.org/drawingml/2006/main">
               <a:ext uri="{FF2B5EF4-FFF2-40B4-BE49-F238E27FC236}">
-                <a16:creationId xmlns:a16="http://schemas.microsoft.com/office/drawing/2014/main" id="{AF30C001-6595-4E8B-8BBF-472E144DDB2C}"/>
+                <a16:creationId xmlns:a16="http://schemas.microsoft.com/office/drawing/2014/main" id="{E7A8785A-EC4B-4648-8933-5C4807A213A9}"/>
               </a:ext>
             </a:extLst>
           </p:cNvPr>
@@ -9552,7 +9552,7 @@
           <p:cNvPr id="5" name="s7-identity">
             <a:extLst xmlns:a="http://schemas.openxmlformats.org/drawingml/2006/main">
               <a:ext uri="{FF2B5EF4-FFF2-40B4-BE49-F238E27FC236}">
-                <a16:creationId xmlns:a16="http://schemas.microsoft.com/office/drawing/2014/main" id="{B16FA864-3377-4CBD-AF85-E32F20D04087}"/>
+                <a16:creationId xmlns:a16="http://schemas.microsoft.com/office/drawing/2014/main" id="{CC39B944-A0ED-4E25-B762-034B0068AFB4}"/>
               </a:ext>
             </a:extLst>
           </p:cNvPr>
@@ -9610,7 +9610,7 @@
           <p:cNvPr id="6" name="core-no-0">
             <a:extLst xmlns:a="http://schemas.openxmlformats.org/drawingml/2006/main">
               <a:ext uri="{FF2B5EF4-FFF2-40B4-BE49-F238E27FC236}">
-                <a16:creationId xmlns:a16="http://schemas.microsoft.com/office/drawing/2014/main" id="{FF175E71-A0F1-4861-97DC-7DF13F51A9A5}"/>
+                <a16:creationId xmlns:a16="http://schemas.microsoft.com/office/drawing/2014/main" id="{BE472A70-243B-43A9-8C22-619E6A6FB8F9}"/>
               </a:ext>
             </a:extLst>
           </p:cNvPr>
@@ -9668,7 +9668,7 @@
           <p:cNvPr id="7" name="core-label-0">
             <a:extLst xmlns:a="http://schemas.openxmlformats.org/drawingml/2006/main">
               <a:ext uri="{FF2B5EF4-FFF2-40B4-BE49-F238E27FC236}">
-                <a16:creationId xmlns:a16="http://schemas.microsoft.com/office/drawing/2014/main" id="{A61F1AA9-F4E3-490C-ADBF-74F763E1B920}"/>
+                <a16:creationId xmlns:a16="http://schemas.microsoft.com/office/drawing/2014/main" id="{A9F4DB4E-669D-4432-AF75-F255926EAB07}"/>
               </a:ext>
             </a:extLst>
           </p:cNvPr>
@@ -9726,7 +9726,7 @@
           <p:cNvPr id="8" name="core-body-0">
             <a:extLst xmlns:a="http://schemas.openxmlformats.org/drawingml/2006/main">
               <a:ext uri="{FF2B5EF4-FFF2-40B4-BE49-F238E27FC236}">
-                <a16:creationId xmlns:a16="http://schemas.microsoft.com/office/drawing/2014/main" id="{B52E3996-7E81-4B4F-9751-639786D5FAD4}"/>
+                <a16:creationId xmlns:a16="http://schemas.microsoft.com/office/drawing/2014/main" id="{E0149E21-CE4A-43C3-983A-0358E5ABEB21}"/>
               </a:ext>
             </a:extLst>
           </p:cNvPr>
@@ -9790,7 +9790,7 @@
           <p:cNvPr id="9" name="s7-takeaway-rule">
             <a:extLst xmlns:a="http://schemas.openxmlformats.org/drawingml/2006/main">
               <a:ext uri="{FF2B5EF4-FFF2-40B4-BE49-F238E27FC236}">
-                <a16:creationId xmlns:a16="http://schemas.microsoft.com/office/drawing/2014/main" id="{D873537A-3B5F-41E3-A7B3-B70D13703EFF}"/>
+                <a16:creationId xmlns:a16="http://schemas.microsoft.com/office/drawing/2014/main" id="{7699BC5C-2269-4A3F-89EF-6A3413F63FB8}"/>
               </a:ext>
             </a:extLst>
           </p:cNvPr>
@@ -9823,7 +9823,7 @@
           <p:cNvPr id="10" name="s7-takeaway">
             <a:extLst xmlns:a="http://schemas.openxmlformats.org/drawingml/2006/main">
               <a:ext uri="{FF2B5EF4-FFF2-40B4-BE49-F238E27FC236}">
-                <a16:creationId xmlns:a16="http://schemas.microsoft.com/office/drawing/2014/main" id="{6385FC2F-6458-464D-AF31-8E4135028BE9}"/>
+                <a16:creationId xmlns:a16="http://schemas.microsoft.com/office/drawing/2014/main" id="{B690B7E7-8AC1-4F38-A048-1D035C0B8340}"/>
               </a:ext>
             </a:extLst>
           </p:cNvPr>
@@ -9879,7 +9879,7 @@
     </p:spTree>
     <p:extLst>
       <p:ext uri="{BB962C8B-B14F-4D97-AF65-F5344CB8AC3E}">
-        <p14:creationId xmlns:p14="http://schemas.microsoft.com/office/powerpoint/2010/main" val="376124162"/>
+        <p14:creationId xmlns:p14="http://schemas.microsoft.com/office/powerpoint/2010/main" val="1600926682"/>
       </p:ext>
     </p:extLst>
   </p:cSld>
@@ -9910,7 +9910,7 @@
           <p:cNvPr id="1" name="s8-rule">
             <a:extLst xmlns:a="http://schemas.openxmlformats.org/drawingml/2006/main">
               <a:ext uri="{FF2B5EF4-FFF2-40B4-BE49-F238E27FC236}">
-                <a16:creationId xmlns:a16="http://schemas.microsoft.com/office/drawing/2014/main" id="{44C3EEE4-0272-4438-8EC1-024E5B5ACB65}"/>
+                <a16:creationId xmlns:a16="http://schemas.microsoft.com/office/drawing/2014/main" id="{B58CAD5C-227B-452F-B831-738929606D1A}"/>
               </a:ext>
             </a:extLst>
           </p:cNvPr>
@@ -9943,7 +9943,7 @@
           <p:cNvPr id="2" name="s8-eyebrow">
             <a:extLst xmlns:a="http://schemas.openxmlformats.org/drawingml/2006/main">
               <a:ext uri="{FF2B5EF4-FFF2-40B4-BE49-F238E27FC236}">
-                <a16:creationId xmlns:a16="http://schemas.microsoft.com/office/drawing/2014/main" id="{25DFFBDA-A9D1-44A9-BDEB-111C11221E79}"/>
+                <a16:creationId xmlns:a16="http://schemas.microsoft.com/office/drawing/2014/main" id="{FD960A2A-FE3D-4FD5-BB97-811920406125}"/>
               </a:ext>
             </a:extLst>
           </p:cNvPr>
@@ -10001,7 +10001,7 @@
           <p:cNvPr id="3" name="s8-title">
             <a:extLst xmlns:a="http://schemas.openxmlformats.org/drawingml/2006/main">
               <a:ext uri="{FF2B5EF4-FFF2-40B4-BE49-F238E27FC236}">
-                <a16:creationId xmlns:a16="http://schemas.microsoft.com/office/drawing/2014/main" id="{20BA5F18-51F7-444D-ACE7-61092381B14E}"/>
+                <a16:creationId xmlns:a16="http://schemas.microsoft.com/office/drawing/2014/main" id="{913C5C20-FE58-4EEA-9DED-BD5ED69E9698}"/>
               </a:ext>
             </a:extLst>
           </p:cNvPr>
@@ -10059,7 +10059,7 @@
           <p:cNvPr id="4" name="s8-footer">
             <a:extLst xmlns:a="http://schemas.openxmlformats.org/drawingml/2006/main">
               <a:ext uri="{FF2B5EF4-FFF2-40B4-BE49-F238E27FC236}">
-                <a16:creationId xmlns:a16="http://schemas.microsoft.com/office/drawing/2014/main" id="{F73351B7-EBFB-4844-9947-D63F20C261F9}"/>
+                <a16:creationId xmlns:a16="http://schemas.microsoft.com/office/drawing/2014/main" id="{B0B050CC-0722-4414-B262-E3F8097136B7}"/>
               </a:ext>
             </a:extLst>
           </p:cNvPr>
@@ -10090,7 +10090,7 @@
           <p:cNvPr id="5" name="s8-identity">
             <a:extLst xmlns:a="http://schemas.openxmlformats.org/drawingml/2006/main">
               <a:ext uri="{FF2B5EF4-FFF2-40B4-BE49-F238E27FC236}">
-                <a16:creationId xmlns:a16="http://schemas.microsoft.com/office/drawing/2014/main" id="{2428CF66-C120-440F-94D3-910816134164}"/>
+                <a16:creationId xmlns:a16="http://schemas.microsoft.com/office/drawing/2014/main" id="{0C9AE0E9-4AAD-454A-9E28-D049B51D7A90}"/>
               </a:ext>
             </a:extLst>
           </p:cNvPr>
@@ -10148,7 +10148,7 @@
           <p:cNvPr id="6" name="core-no-0">
             <a:extLst xmlns:a="http://schemas.openxmlformats.org/drawingml/2006/main">
               <a:ext uri="{FF2B5EF4-FFF2-40B4-BE49-F238E27FC236}">
-                <a16:creationId xmlns:a16="http://schemas.microsoft.com/office/drawing/2014/main" id="{78A584F0-2A18-4004-8740-D9AE3CD0AC93}"/>
+                <a16:creationId xmlns:a16="http://schemas.microsoft.com/office/drawing/2014/main" id="{6D493F50-E226-413A-9EDB-2E802D0AB9F1}"/>
               </a:ext>
             </a:extLst>
           </p:cNvPr>
@@ -10206,7 +10206,7 @@
           <p:cNvPr id="7" name="core-label-0">
             <a:extLst xmlns:a="http://schemas.openxmlformats.org/drawingml/2006/main">
               <a:ext uri="{FF2B5EF4-FFF2-40B4-BE49-F238E27FC236}">
-                <a16:creationId xmlns:a16="http://schemas.microsoft.com/office/drawing/2014/main" id="{2F3BBFE5-AFDB-489E-98E7-AA48EFF7D86D}"/>
+                <a16:creationId xmlns:a16="http://schemas.microsoft.com/office/drawing/2014/main" id="{B89F005E-ABE3-43E3-B38B-597D2E03C43B}"/>
               </a:ext>
             </a:extLst>
           </p:cNvPr>
@@ -10264,7 +10264,7 @@
           <p:cNvPr id="8" name="core-body-0">
             <a:extLst xmlns:a="http://schemas.openxmlformats.org/drawingml/2006/main">
               <a:ext uri="{FF2B5EF4-FFF2-40B4-BE49-F238E27FC236}">
-                <a16:creationId xmlns:a16="http://schemas.microsoft.com/office/drawing/2014/main" id="{8AB19FF3-0BA2-49C7-BCAD-E5882AFBE1F3}"/>
+                <a16:creationId xmlns:a16="http://schemas.microsoft.com/office/drawing/2014/main" id="{D040D97A-71A4-41FF-8038-C955129BC4DF}"/>
               </a:ext>
             </a:extLst>
           </p:cNvPr>
@@ -10328,7 +10328,7 @@
           <p:cNvPr id="9" name="core-no-1">
             <a:extLst xmlns:a="http://schemas.openxmlformats.org/drawingml/2006/main">
               <a:ext uri="{FF2B5EF4-FFF2-40B4-BE49-F238E27FC236}">
-                <a16:creationId xmlns:a16="http://schemas.microsoft.com/office/drawing/2014/main" id="{F3279AB8-617B-45AB-80D2-AC1F7446ADEE}"/>
+                <a16:creationId xmlns:a16="http://schemas.microsoft.com/office/drawing/2014/main" id="{076F6DF3-A5CE-4455-87F9-CAA949DC6734}"/>
               </a:ext>
             </a:extLst>
           </p:cNvPr>
@@ -10386,7 +10386,7 @@
           <p:cNvPr id="10" name="core-body-1">
             <a:extLst xmlns:a="http://schemas.openxmlformats.org/drawingml/2006/main">
               <a:ext uri="{FF2B5EF4-FFF2-40B4-BE49-F238E27FC236}">
-                <a16:creationId xmlns:a16="http://schemas.microsoft.com/office/drawing/2014/main" id="{EEE0BFE9-F750-4AF0-BC2C-86C2FB454BFD}"/>
+                <a16:creationId xmlns:a16="http://schemas.microsoft.com/office/drawing/2014/main" id="{3BEDE154-A826-4E6B-982F-83B7050862BC}"/>
               </a:ext>
             </a:extLst>
           </p:cNvPr>
@@ -10450,7 +10450,7 @@
           <p:cNvPr id="11" name="s8-takeaway-rule">
             <a:extLst xmlns:a="http://schemas.openxmlformats.org/drawingml/2006/main">
               <a:ext uri="{FF2B5EF4-FFF2-40B4-BE49-F238E27FC236}">
-                <a16:creationId xmlns:a16="http://schemas.microsoft.com/office/drawing/2014/main" id="{CBCD5F61-52F2-4709-AA26-05DA5E698B15}"/>
+                <a16:creationId xmlns:a16="http://schemas.microsoft.com/office/drawing/2014/main" id="{BB5E5FD4-F702-441C-904A-35F7582FCEF5}"/>
               </a:ext>
             </a:extLst>
           </p:cNvPr>
@@ -10483,7 +10483,7 @@
           <p:cNvPr id="12" name="s8-takeaway">
             <a:extLst xmlns:a="http://schemas.openxmlformats.org/drawingml/2006/main">
               <a:ext uri="{FF2B5EF4-FFF2-40B4-BE49-F238E27FC236}">
-                <a16:creationId xmlns:a16="http://schemas.microsoft.com/office/drawing/2014/main" id="{6BCD7D42-5917-4A3D-9247-661036A9B031}"/>
+                <a16:creationId xmlns:a16="http://schemas.microsoft.com/office/drawing/2014/main" id="{5EB24002-ED3A-4BEB-9DC8-E162D9CE9D1A}"/>
               </a:ext>
             </a:extLst>
           </p:cNvPr>
@@ -10539,7 +10539,7 @@
     </p:spTree>
     <p:extLst>
       <p:ext uri="{BB962C8B-B14F-4D97-AF65-F5344CB8AC3E}">
-        <p14:creationId xmlns:p14="http://schemas.microsoft.com/office/powerpoint/2010/main" val="1584012258"/>
+        <p14:creationId xmlns:p14="http://schemas.microsoft.com/office/powerpoint/2010/main" val="2137213315"/>
       </p:ext>
     </p:extLst>
   </p:cSld>
@@ -10570,7 +10570,7 @@
           <p:cNvPr id="1" name="s9-rule">
             <a:extLst xmlns:a="http://schemas.openxmlformats.org/drawingml/2006/main">
               <a:ext uri="{FF2B5EF4-FFF2-40B4-BE49-F238E27FC236}">
-                <a16:creationId xmlns:a16="http://schemas.microsoft.com/office/drawing/2014/main" id="{4D420463-54BE-4520-AF8B-D236BCB7E179}"/>
+                <a16:creationId xmlns:a16="http://schemas.microsoft.com/office/drawing/2014/main" id="{4F5DF39B-5F07-492C-8AD4-10CF1B873C28}"/>
               </a:ext>
             </a:extLst>
           </p:cNvPr>
@@ -10603,7 +10603,7 @@
           <p:cNvPr id="2" name="s9-eyebrow">
             <a:extLst xmlns:a="http://schemas.openxmlformats.org/drawingml/2006/main">
               <a:ext uri="{FF2B5EF4-FFF2-40B4-BE49-F238E27FC236}">
-                <a16:creationId xmlns:a16="http://schemas.microsoft.com/office/drawing/2014/main" id="{F7CF7312-F5FB-4BB6-B0B4-7B58F7924C7B}"/>
+                <a16:creationId xmlns:a16="http://schemas.microsoft.com/office/drawing/2014/main" id="{0EFE127C-023F-4D20-9BD1-CE8B6A826C24}"/>
               </a:ext>
             </a:extLst>
           </p:cNvPr>
@@ -10661,7 +10661,7 @@
           <p:cNvPr id="3" name="s9-title">
             <a:extLst xmlns:a="http://schemas.openxmlformats.org/drawingml/2006/main">
               <a:ext uri="{FF2B5EF4-FFF2-40B4-BE49-F238E27FC236}">
-                <a16:creationId xmlns:a16="http://schemas.microsoft.com/office/drawing/2014/main" id="{C48EB89E-8FF2-413F-BF1E-72E4B54E08FF}"/>
+                <a16:creationId xmlns:a16="http://schemas.microsoft.com/office/drawing/2014/main" id="{F6BE5B32-4EF4-4246-B549-39865C03ED40}"/>
               </a:ext>
             </a:extLst>
           </p:cNvPr>
@@ -10719,7 +10719,7 @@
           <p:cNvPr id="4" name="s9-footer">
             <a:extLst xmlns:a="http://schemas.openxmlformats.org/drawingml/2006/main">
               <a:ext uri="{FF2B5EF4-FFF2-40B4-BE49-F238E27FC236}">
-                <a16:creationId xmlns:a16="http://schemas.microsoft.com/office/drawing/2014/main" id="{0F44EAA2-F4F8-4CB1-A2B4-67927792CC2F}"/>
+                <a16:creationId xmlns:a16="http://schemas.microsoft.com/office/drawing/2014/main" id="{06F12793-829C-4549-B87C-F9D69E3ED56B}"/>
               </a:ext>
             </a:extLst>
           </p:cNvPr>
@@ -10750,7 +10750,7 @@
           <p:cNvPr id="5" name="s9-identity">
             <a:extLst xmlns:a="http://schemas.openxmlformats.org/drawingml/2006/main">
               <a:ext uri="{FF2B5EF4-FFF2-40B4-BE49-F238E27FC236}">
-                <a16:creationId xmlns:a16="http://schemas.microsoft.com/office/drawing/2014/main" id="{D0CFB2CF-164A-40F9-A4DA-642254A86CE7}"/>
+                <a16:creationId xmlns:a16="http://schemas.microsoft.com/office/drawing/2014/main" id="{1DCAADD3-1359-46DB-9D2F-E12A8A9F9144}"/>
               </a:ext>
             </a:extLst>
           </p:cNvPr>
@@ -10808,7 +10808,7 @@
           <p:cNvPr id="6" name="core-no-0">
             <a:extLst xmlns:a="http://schemas.openxmlformats.org/drawingml/2006/main">
               <a:ext uri="{FF2B5EF4-FFF2-40B4-BE49-F238E27FC236}">
-                <a16:creationId xmlns:a16="http://schemas.microsoft.com/office/drawing/2014/main" id="{29B3BB6D-48EC-4FA3-9D28-11EEE682B6D0}"/>
+                <a16:creationId xmlns:a16="http://schemas.microsoft.com/office/drawing/2014/main" id="{E0E7EA11-11D5-4F2F-BC62-685B27E20E17}"/>
               </a:ext>
             </a:extLst>
           </p:cNvPr>
@@ -10866,7 +10866,7 @@
           <p:cNvPr id="7" name="core-label-0">
             <a:extLst xmlns:a="http://schemas.openxmlformats.org/drawingml/2006/main">
               <a:ext uri="{FF2B5EF4-FFF2-40B4-BE49-F238E27FC236}">
-                <a16:creationId xmlns:a16="http://schemas.microsoft.com/office/drawing/2014/main" id="{C3DB68E2-4B4F-4338-A4A0-1735B53C408E}"/>
+                <a16:creationId xmlns:a16="http://schemas.microsoft.com/office/drawing/2014/main" id="{2BD8A11A-2DD4-4238-ADE5-6FD162862EED}"/>
               </a:ext>
             </a:extLst>
           </p:cNvPr>
@@ -10924,7 +10924,7 @@
           <p:cNvPr id="8" name="core-body-0">
             <a:extLst xmlns:a="http://schemas.openxmlformats.org/drawingml/2006/main">
               <a:ext uri="{FF2B5EF4-FFF2-40B4-BE49-F238E27FC236}">
-                <a16:creationId xmlns:a16="http://schemas.microsoft.com/office/drawing/2014/main" id="{DF1ECDA9-0C0D-4A91-BDC5-0B11E038D3AA}"/>
+                <a16:creationId xmlns:a16="http://schemas.microsoft.com/office/drawing/2014/main" id="{DF1DD74B-EDA0-4BBB-A111-79D7F31691F6}"/>
               </a:ext>
             </a:extLst>
           </p:cNvPr>
@@ -10988,7 +10988,7 @@
           <p:cNvPr id="9" name="s9-takeaway-rule">
             <a:extLst xmlns:a="http://schemas.openxmlformats.org/drawingml/2006/main">
               <a:ext uri="{FF2B5EF4-FFF2-40B4-BE49-F238E27FC236}">
-                <a16:creationId xmlns:a16="http://schemas.microsoft.com/office/drawing/2014/main" id="{19CC8599-9F27-4579-BB99-A2940D57E5F2}"/>
+                <a16:creationId xmlns:a16="http://schemas.microsoft.com/office/drawing/2014/main" id="{5F6332E6-E638-49AD-A6DD-BCA2F71A622B}"/>
               </a:ext>
             </a:extLst>
           </p:cNvPr>
@@ -11021,7 +11021,7 @@
           <p:cNvPr id="10" name="s9-takeaway">
             <a:extLst xmlns:a="http://schemas.openxmlformats.org/drawingml/2006/main">
               <a:ext uri="{FF2B5EF4-FFF2-40B4-BE49-F238E27FC236}">
-                <a16:creationId xmlns:a16="http://schemas.microsoft.com/office/drawing/2014/main" id="{B8E3A96F-519F-4BF2-9AC1-722BFBF641B1}"/>
+                <a16:creationId xmlns:a16="http://schemas.microsoft.com/office/drawing/2014/main" id="{B21566BA-CA7F-47DE-A114-5BC5DDE96FBE}"/>
               </a:ext>
             </a:extLst>
           </p:cNvPr>
@@ -11077,7 +11077,7 @@
     </p:spTree>
     <p:extLst>
       <p:ext uri="{BB962C8B-B14F-4D97-AF65-F5344CB8AC3E}">
-        <p14:creationId xmlns:p14="http://schemas.microsoft.com/office/powerpoint/2010/main" val="1736991552"/>
+        <p14:creationId xmlns:p14="http://schemas.microsoft.com/office/powerpoint/2010/main" val="1971170730"/>
       </p:ext>
     </p:extLst>
   </p:cSld>

--- a/docs/public/course-assets/course-pptx/ov-004.pptx
+++ b/docs/public/course-assets/course-pptx/ov-004.pptx
@@ -2,26 +2,26 @@
 <file path=ppt/presentation.xml><?xml version="1.0" encoding="utf-8"?>
 <p:presentation xmlns:p="http://schemas.openxmlformats.org/presentationml/2006/main">
   <p:sldMasterIdLst>
-    <p:sldMasterId xmlns:r="http://schemas.openxmlformats.org/officeDocument/2006/relationships" id="2147483648" r:id="R38c90f88361546ea"/>
+    <p:sldMasterId xmlns:r="http://schemas.openxmlformats.org/officeDocument/2006/relationships" id="2147483648" r:id="R4201c1354ed346de"/>
   </p:sldMasterIdLst>
   <p:notesMasterIdLst>
-    <p:notesMasterId xmlns:r="http://schemas.openxmlformats.org/officeDocument/2006/relationships" r:id="Rd757a1c7374f40af"/>
+    <p:notesMasterId xmlns:r="http://schemas.openxmlformats.org/officeDocument/2006/relationships" r:id="R1b7f8142e3a44cf1"/>
   </p:notesMasterIdLst>
   <p:sldIdLst>
-    <p:sldId xmlns:r="http://schemas.openxmlformats.org/officeDocument/2006/relationships" id="256" r:id="Rc7133c531e7143d6"/>
-    <p:sldId xmlns:r="http://schemas.openxmlformats.org/officeDocument/2006/relationships" id="257" r:id="R39dae4c868d54783"/>
-    <p:sldId xmlns:r="http://schemas.openxmlformats.org/officeDocument/2006/relationships" id="258" r:id="Ree2c909c0dd94e01"/>
-    <p:sldId xmlns:r="http://schemas.openxmlformats.org/officeDocument/2006/relationships" id="259" r:id="R07b60a9596494bd5"/>
-    <p:sldId xmlns:r="http://schemas.openxmlformats.org/officeDocument/2006/relationships" id="260" r:id="R7484ceaefbda450a"/>
-    <p:sldId xmlns:r="http://schemas.openxmlformats.org/officeDocument/2006/relationships" id="261" r:id="Re139d2d8c6cb4824"/>
-    <p:sldId xmlns:r="http://schemas.openxmlformats.org/officeDocument/2006/relationships" id="262" r:id="R9745392ac9e147c0"/>
-    <p:sldId xmlns:r="http://schemas.openxmlformats.org/officeDocument/2006/relationships" id="263" r:id="R9fc38a6c02d942cb"/>
-    <p:sldId xmlns:r="http://schemas.openxmlformats.org/officeDocument/2006/relationships" id="264" r:id="R303b3d279f8d41d2"/>
-    <p:sldId xmlns:r="http://schemas.openxmlformats.org/officeDocument/2006/relationships" id="265" r:id="R10b097ee5ebd4498"/>
-    <p:sldId xmlns:r="http://schemas.openxmlformats.org/officeDocument/2006/relationships" id="266" r:id="Rb9d05a86d58d4fa4"/>
-    <p:sldId xmlns:r="http://schemas.openxmlformats.org/officeDocument/2006/relationships" id="267" r:id="Rfef00074d0124246"/>
-    <p:sldId xmlns:r="http://schemas.openxmlformats.org/officeDocument/2006/relationships" id="268" r:id="R9cd39accd89747bc"/>
-    <p:sldId xmlns:r="http://schemas.openxmlformats.org/officeDocument/2006/relationships" id="269" r:id="R8418bf9fdbf24487"/>
+    <p:sldId xmlns:r="http://schemas.openxmlformats.org/officeDocument/2006/relationships" id="256" r:id="R5dfe4e18902a460d"/>
+    <p:sldId xmlns:r="http://schemas.openxmlformats.org/officeDocument/2006/relationships" id="257" r:id="R58413f325faa45bf"/>
+    <p:sldId xmlns:r="http://schemas.openxmlformats.org/officeDocument/2006/relationships" id="258" r:id="R83a41edaca254f0a"/>
+    <p:sldId xmlns:r="http://schemas.openxmlformats.org/officeDocument/2006/relationships" id="259" r:id="R0d717e3b3b994385"/>
+    <p:sldId xmlns:r="http://schemas.openxmlformats.org/officeDocument/2006/relationships" id="260" r:id="Ra6b71a6a879e40bc"/>
+    <p:sldId xmlns:r="http://schemas.openxmlformats.org/officeDocument/2006/relationships" id="261" r:id="Re0d50671b9ea4a15"/>
+    <p:sldId xmlns:r="http://schemas.openxmlformats.org/officeDocument/2006/relationships" id="262" r:id="R1ca5f238e84f4142"/>
+    <p:sldId xmlns:r="http://schemas.openxmlformats.org/officeDocument/2006/relationships" id="263" r:id="R597877b316f7413d"/>
+    <p:sldId xmlns:r="http://schemas.openxmlformats.org/officeDocument/2006/relationships" id="264" r:id="R2b089b1afc434a95"/>
+    <p:sldId xmlns:r="http://schemas.openxmlformats.org/officeDocument/2006/relationships" id="265" r:id="R27d9dcf773194b58"/>
+    <p:sldId xmlns:r="http://schemas.openxmlformats.org/officeDocument/2006/relationships" id="266" r:id="R8905b14ce7994852"/>
+    <p:sldId xmlns:r="http://schemas.openxmlformats.org/officeDocument/2006/relationships" id="267" r:id="R7ce19b57848e45f2"/>
+    <p:sldId xmlns:r="http://schemas.openxmlformats.org/officeDocument/2006/relationships" id="268" r:id="R297f0e6f0adb4c58"/>
+    <p:sldId xmlns:r="http://schemas.openxmlformats.org/officeDocument/2006/relationships" id="269" r:id="R34b96e7d5ba84c11"/>
   </p:sldIdLst>
   <p:sldSz cx="12192000" cy="6858000"/>
   <p:notesSz cx="6858000" cy="9144000"/>
@@ -1472,7 +1472,7 @@
   </p:cSld>
   <p:clrMap bg1="lt1" tx1="dk1" bg2="lt2" tx2="dk2" accent1="accent1" accent2="accent2" accent3="accent3" accent4="accent4" accent5="accent5" accent6="accent6" hlink="hlink" folHlink="folHlink"/>
   <p:sldLayoutIdLst>
-    <p:sldLayoutId xmlns:r="http://schemas.openxmlformats.org/officeDocument/2006/relationships" id="2147483649" r:id="R7ad198c99ac043c7"/>
+    <p:sldLayoutId xmlns:r="http://schemas.openxmlformats.org/officeDocument/2006/relationships" id="2147483649" r:id="R83330438a54c4960"/>
   </p:sldLayoutIdLst>
   <p:txStyles>
     <p:titleStyle>
@@ -2023,7 +2023,7 @@
           <p:cNvPr id="1" name="cover-rule">
             <a:extLst xmlns:a="http://schemas.openxmlformats.org/drawingml/2006/main">
               <a:ext uri="{FF2B5EF4-FFF2-40B4-BE49-F238E27FC236}">
-                <a16:creationId xmlns:a16="http://schemas.microsoft.com/office/drawing/2014/main" id="{062D3E4D-7961-4D48-841A-943527C513A9}"/>
+                <a16:creationId xmlns:a16="http://schemas.microsoft.com/office/drawing/2014/main" id="{3EA93DE2-C698-46A7-A085-FC734E3A1239}"/>
               </a:ext>
             </a:extLst>
           </p:cNvPr>
@@ -2056,7 +2056,7 @@
           <p:cNvPr id="2" name="cover-ring-1">
             <a:extLst xmlns:a="http://schemas.openxmlformats.org/drawingml/2006/main">
               <a:ext uri="{FF2B5EF4-FFF2-40B4-BE49-F238E27FC236}">
-                <a16:creationId xmlns:a16="http://schemas.microsoft.com/office/drawing/2014/main" id="{40F15A51-69E1-4ED9-A2E6-3C25C8BE9B86}"/>
+                <a16:creationId xmlns:a16="http://schemas.microsoft.com/office/drawing/2014/main" id="{21056F92-14C2-4439-96BB-52AC389CA860}"/>
               </a:ext>
             </a:extLst>
           </p:cNvPr>
@@ -2087,7 +2087,7 @@
           <p:cNvPr id="3" name="cover-ring-2">
             <a:extLst xmlns:a="http://schemas.openxmlformats.org/drawingml/2006/main">
               <a:ext uri="{FF2B5EF4-FFF2-40B4-BE49-F238E27FC236}">
-                <a16:creationId xmlns:a16="http://schemas.microsoft.com/office/drawing/2014/main" id="{434E435E-04FF-4B86-9E3A-979AD55D9C50}"/>
+                <a16:creationId xmlns:a16="http://schemas.microsoft.com/office/drawing/2014/main" id="{B1F6D48F-1423-4291-BE9B-F8E98A01396B}"/>
               </a:ext>
             </a:extLst>
           </p:cNvPr>
@@ -2118,7 +2118,7 @@
           <p:cNvPr id="4" name="cover-core">
             <a:extLst xmlns:a="http://schemas.openxmlformats.org/drawingml/2006/main">
               <a:ext uri="{FF2B5EF4-FFF2-40B4-BE49-F238E27FC236}">
-                <a16:creationId xmlns:a16="http://schemas.microsoft.com/office/drawing/2014/main" id="{6E8C3C3D-374A-4D89-BFCA-68C956B6AE4E}"/>
+                <a16:creationId xmlns:a16="http://schemas.microsoft.com/office/drawing/2014/main" id="{47C39D81-C9D7-415F-9767-F860247F6D4A}"/>
               </a:ext>
             </a:extLst>
           </p:cNvPr>
@@ -2151,7 +2151,7 @@
           <p:cNvPr id="5" name="cover-line-1">
             <a:extLst xmlns:a="http://schemas.openxmlformats.org/drawingml/2006/main">
               <a:ext uri="{FF2B5EF4-FFF2-40B4-BE49-F238E27FC236}">
-                <a16:creationId xmlns:a16="http://schemas.microsoft.com/office/drawing/2014/main" id="{2755CD2D-B07A-4539-BE25-37DD001C10B7}"/>
+                <a16:creationId xmlns:a16="http://schemas.microsoft.com/office/drawing/2014/main" id="{82EA790F-96A6-4A1A-815E-A28D260F621B}"/>
               </a:ext>
             </a:extLst>
           </p:cNvPr>
@@ -2182,7 +2182,7 @@
           <p:cNvPr id="6" name="cover-line-2">
             <a:extLst xmlns:a="http://schemas.openxmlformats.org/drawingml/2006/main">
               <a:ext uri="{FF2B5EF4-FFF2-40B4-BE49-F238E27FC236}">
-                <a16:creationId xmlns:a16="http://schemas.microsoft.com/office/drawing/2014/main" id="{4F999E4D-4931-4262-9742-3635D08C9285}"/>
+                <a16:creationId xmlns:a16="http://schemas.microsoft.com/office/drawing/2014/main" id="{24D59344-4B33-45DE-964C-54E3690EA877}"/>
               </a:ext>
             </a:extLst>
           </p:cNvPr>
@@ -2213,7 +2213,7 @@
           <p:cNvPr id="7" name="cover-eyebrow">
             <a:extLst xmlns:a="http://schemas.openxmlformats.org/drawingml/2006/main">
               <a:ext uri="{FF2B5EF4-FFF2-40B4-BE49-F238E27FC236}">
-                <a16:creationId xmlns:a16="http://schemas.microsoft.com/office/drawing/2014/main" id="{B89B6FD7-5E8C-4077-8693-0F0902E03E4A}"/>
+                <a16:creationId xmlns:a16="http://schemas.microsoft.com/office/drawing/2014/main" id="{143C46D5-6AC1-4472-ADB7-E8C9BFA0F31B}"/>
               </a:ext>
             </a:extLst>
           </p:cNvPr>
@@ -2271,7 +2271,7 @@
           <p:cNvPr id="8" name="cover-title">
             <a:extLst xmlns:a="http://schemas.openxmlformats.org/drawingml/2006/main">
               <a:ext uri="{FF2B5EF4-FFF2-40B4-BE49-F238E27FC236}">
-                <a16:creationId xmlns:a16="http://schemas.microsoft.com/office/drawing/2014/main" id="{9979F851-1613-4A27-B417-6C74EF9E2662}"/>
+                <a16:creationId xmlns:a16="http://schemas.microsoft.com/office/drawing/2014/main" id="{80BC4BC8-85C6-4B4A-AFA1-FDBA268ED2A6}"/>
               </a:ext>
             </a:extLst>
           </p:cNvPr>
@@ -2329,7 +2329,7 @@
           <p:cNvPr id="9" name="cover-subtitle">
             <a:extLst xmlns:a="http://schemas.openxmlformats.org/drawingml/2006/main">
               <a:ext uri="{FF2B5EF4-FFF2-40B4-BE49-F238E27FC236}">
-                <a16:creationId xmlns:a16="http://schemas.microsoft.com/office/drawing/2014/main" id="{065EC8DB-A6DF-443A-9CB2-07D5684B227B}"/>
+                <a16:creationId xmlns:a16="http://schemas.microsoft.com/office/drawing/2014/main" id="{A1997410-002F-479C-94B7-E3832AD31674}"/>
               </a:ext>
             </a:extLst>
           </p:cNvPr>
@@ -2391,7 +2391,7 @@
           <p:cNvPr id="10" name="cover-lead">
             <a:extLst xmlns:a="http://schemas.openxmlformats.org/drawingml/2006/main">
               <a:ext uri="{FF2B5EF4-FFF2-40B4-BE49-F238E27FC236}">
-                <a16:creationId xmlns:a16="http://schemas.microsoft.com/office/drawing/2014/main" id="{D8F7359A-CFDC-4399-B414-90495D998159}"/>
+                <a16:creationId xmlns:a16="http://schemas.microsoft.com/office/drawing/2014/main" id="{97AB1123-6A63-4D2B-9C8A-3365621DB5DB}"/>
               </a:ext>
             </a:extLst>
           </p:cNvPr>
@@ -2449,7 +2449,7 @@
           <p:cNvPr id="11" name="cover-course">
             <a:extLst xmlns:a="http://schemas.openxmlformats.org/drawingml/2006/main">
               <a:ext uri="{FF2B5EF4-FFF2-40B4-BE49-F238E27FC236}">
-                <a16:creationId xmlns:a16="http://schemas.microsoft.com/office/drawing/2014/main" id="{8749B7C8-7ECB-4DD3-AB04-29D987AC9D3D}"/>
+                <a16:creationId xmlns:a16="http://schemas.microsoft.com/office/drawing/2014/main" id="{0FB96EE0-8E3B-4485-93EF-1662621A57F9}"/>
               </a:ext>
             </a:extLst>
           </p:cNvPr>
@@ -2507,7 +2507,7 @@
           <p:cNvPr id="12" name="cover-id">
             <a:extLst xmlns:a="http://schemas.openxmlformats.org/drawingml/2006/main">
               <a:ext uri="{FF2B5EF4-FFF2-40B4-BE49-F238E27FC236}">
-                <a16:creationId xmlns:a16="http://schemas.microsoft.com/office/drawing/2014/main" id="{301C1A4A-5347-4C79-BFD9-C75ADC7D03F1}"/>
+                <a16:creationId xmlns:a16="http://schemas.microsoft.com/office/drawing/2014/main" id="{981E38C7-1520-4CD6-92A3-0A0392B10BFF}"/>
               </a:ext>
             </a:extLst>
           </p:cNvPr>
@@ -2563,7 +2563,7 @@
     </p:spTree>
     <p:extLst>
       <p:ext uri="{BB962C8B-B14F-4D97-AF65-F5344CB8AC3E}">
-        <p14:creationId xmlns:p14="http://schemas.microsoft.com/office/powerpoint/2010/main" val="887683249"/>
+        <p14:creationId xmlns:p14="http://schemas.microsoft.com/office/powerpoint/2010/main" val="1949579046"/>
       </p:ext>
     </p:extLst>
   </p:cSld>
@@ -2594,7 +2594,7 @@
           <p:cNvPr id="1" name="s10-rule">
             <a:extLst xmlns:a="http://schemas.openxmlformats.org/drawingml/2006/main">
               <a:ext uri="{FF2B5EF4-FFF2-40B4-BE49-F238E27FC236}">
-                <a16:creationId xmlns:a16="http://schemas.microsoft.com/office/drawing/2014/main" id="{37378CE5-8A6C-4352-AD6F-EFEE9028A45E}"/>
+                <a16:creationId xmlns:a16="http://schemas.microsoft.com/office/drawing/2014/main" id="{D716F8E2-629B-4E9E-9085-9E2420101429}"/>
               </a:ext>
             </a:extLst>
           </p:cNvPr>
@@ -2627,7 +2627,7 @@
           <p:cNvPr id="2" name="s10-eyebrow">
             <a:extLst xmlns:a="http://schemas.openxmlformats.org/drawingml/2006/main">
               <a:ext uri="{FF2B5EF4-FFF2-40B4-BE49-F238E27FC236}">
-                <a16:creationId xmlns:a16="http://schemas.microsoft.com/office/drawing/2014/main" id="{BB5B9D27-6ABB-4C80-A742-BAB71E87A9DA}"/>
+                <a16:creationId xmlns:a16="http://schemas.microsoft.com/office/drawing/2014/main" id="{CB219194-7689-4F17-882F-B888B7602BBA}"/>
               </a:ext>
             </a:extLst>
           </p:cNvPr>
@@ -2685,7 +2685,7 @@
           <p:cNvPr id="3" name="s10-title">
             <a:extLst xmlns:a="http://schemas.openxmlformats.org/drawingml/2006/main">
               <a:ext uri="{FF2B5EF4-FFF2-40B4-BE49-F238E27FC236}">
-                <a16:creationId xmlns:a16="http://schemas.microsoft.com/office/drawing/2014/main" id="{73703BBC-A849-4D4F-963A-C4B37B6FDDDA}"/>
+                <a16:creationId xmlns:a16="http://schemas.microsoft.com/office/drawing/2014/main" id="{A5213EDC-DF8E-4C4C-A57F-729300EC5FEB}"/>
               </a:ext>
             </a:extLst>
           </p:cNvPr>
@@ -2743,7 +2743,7 @@
           <p:cNvPr id="4" name="s10-footer">
             <a:extLst xmlns:a="http://schemas.openxmlformats.org/drawingml/2006/main">
               <a:ext uri="{FF2B5EF4-FFF2-40B4-BE49-F238E27FC236}">
-                <a16:creationId xmlns:a16="http://schemas.microsoft.com/office/drawing/2014/main" id="{81C6B446-9406-4807-A046-DBEEA940CD38}"/>
+                <a16:creationId xmlns:a16="http://schemas.microsoft.com/office/drawing/2014/main" id="{F67C0F16-C2E4-47A3-9DBF-674CAFA2CFED}"/>
               </a:ext>
             </a:extLst>
           </p:cNvPr>
@@ -2774,7 +2774,7 @@
           <p:cNvPr id="5" name="s10-identity">
             <a:extLst xmlns:a="http://schemas.openxmlformats.org/drawingml/2006/main">
               <a:ext uri="{FF2B5EF4-FFF2-40B4-BE49-F238E27FC236}">
-                <a16:creationId xmlns:a16="http://schemas.microsoft.com/office/drawing/2014/main" id="{DBA5C029-E0F5-4809-95A3-F0C8A79D6794}"/>
+                <a16:creationId xmlns:a16="http://schemas.microsoft.com/office/drawing/2014/main" id="{A86FB45F-9D42-419A-8ECF-396935CAE21C}"/>
               </a:ext>
             </a:extLst>
           </p:cNvPr>
@@ -2832,7 +2832,7 @@
           <p:cNvPr id="6" name="case-title">
             <a:extLst xmlns:a="http://schemas.openxmlformats.org/drawingml/2006/main">
               <a:ext uri="{FF2B5EF4-FFF2-40B4-BE49-F238E27FC236}">
-                <a16:creationId xmlns:a16="http://schemas.microsoft.com/office/drawing/2014/main" id="{6A517798-215D-4690-8B97-D038AD2AD91D}"/>
+                <a16:creationId xmlns:a16="http://schemas.microsoft.com/office/drawing/2014/main" id="{6FE52268-321D-44BF-ADC7-D0BA5F0E62B4}"/>
               </a:ext>
             </a:extLst>
           </p:cNvPr>
@@ -2896,7 +2896,7 @@
           <p:cNvPr id="7" name="case-row-0">
             <a:extLst xmlns:a="http://schemas.openxmlformats.org/drawingml/2006/main">
               <a:ext uri="{FF2B5EF4-FFF2-40B4-BE49-F238E27FC236}">
-                <a16:creationId xmlns:a16="http://schemas.microsoft.com/office/drawing/2014/main" id="{0680F779-881C-4943-A5D1-D4B27C85BACB}"/>
+                <a16:creationId xmlns:a16="http://schemas.microsoft.com/office/drawing/2014/main" id="{D4CC23C8-E4BB-4B7A-B278-8FF17670A2A7}"/>
               </a:ext>
             </a:extLst>
           </p:cNvPr>
@@ -2960,7 +2960,7 @@
           <p:cNvPr id="8" name="case-row-1">
             <a:extLst xmlns:a="http://schemas.openxmlformats.org/drawingml/2006/main">
               <a:ext uri="{FF2B5EF4-FFF2-40B4-BE49-F238E27FC236}">
-                <a16:creationId xmlns:a16="http://schemas.microsoft.com/office/drawing/2014/main" id="{5F374E86-AC51-4150-B669-A4365849F558}"/>
+                <a16:creationId xmlns:a16="http://schemas.microsoft.com/office/drawing/2014/main" id="{1187C18F-CE71-4B48-97F8-513EA9B63F26}"/>
               </a:ext>
             </a:extLst>
           </p:cNvPr>
@@ -3024,7 +3024,7 @@
           <p:cNvPr id="9" name="case-row-2">
             <a:extLst xmlns:a="http://schemas.openxmlformats.org/drawingml/2006/main">
               <a:ext uri="{FF2B5EF4-FFF2-40B4-BE49-F238E27FC236}">
-                <a16:creationId xmlns:a16="http://schemas.microsoft.com/office/drawing/2014/main" id="{F018538F-550D-495F-B051-2249448101F4}"/>
+                <a16:creationId xmlns:a16="http://schemas.microsoft.com/office/drawing/2014/main" id="{F7CDF247-957D-4317-9AC4-019A64F44674}"/>
               </a:ext>
             </a:extLst>
           </p:cNvPr>
@@ -3088,7 +3088,7 @@
           <p:cNvPr id="10" name="s10-takeaway-rule">
             <a:extLst xmlns:a="http://schemas.openxmlformats.org/drawingml/2006/main">
               <a:ext uri="{FF2B5EF4-FFF2-40B4-BE49-F238E27FC236}">
-                <a16:creationId xmlns:a16="http://schemas.microsoft.com/office/drawing/2014/main" id="{49428E74-1EE3-4BB1-95EF-5909389478A8}"/>
+                <a16:creationId xmlns:a16="http://schemas.microsoft.com/office/drawing/2014/main" id="{96F7019C-9265-4B82-AE19-A1BDA67469BF}"/>
               </a:ext>
             </a:extLst>
           </p:cNvPr>
@@ -3121,7 +3121,7 @@
           <p:cNvPr id="11" name="s10-takeaway">
             <a:extLst xmlns:a="http://schemas.openxmlformats.org/drawingml/2006/main">
               <a:ext uri="{FF2B5EF4-FFF2-40B4-BE49-F238E27FC236}">
-                <a16:creationId xmlns:a16="http://schemas.microsoft.com/office/drawing/2014/main" id="{F4969993-CC34-4FD3-BFB6-91D654F3D968}"/>
+                <a16:creationId xmlns:a16="http://schemas.microsoft.com/office/drawing/2014/main" id="{37F26B13-61E7-4F87-8549-FFF0C31CB64A}"/>
               </a:ext>
             </a:extLst>
           </p:cNvPr>
@@ -3177,7 +3177,7 @@
     </p:spTree>
     <p:extLst>
       <p:ext uri="{BB962C8B-B14F-4D97-AF65-F5344CB8AC3E}">
-        <p14:creationId xmlns:p14="http://schemas.microsoft.com/office/powerpoint/2010/main" val="1883366860"/>
+        <p14:creationId xmlns:p14="http://schemas.microsoft.com/office/powerpoint/2010/main" val="1199586412"/>
       </p:ext>
     </p:extLst>
   </p:cSld>
@@ -3208,7 +3208,7 @@
           <p:cNvPr id="1" name="s11-rule">
             <a:extLst xmlns:a="http://schemas.openxmlformats.org/drawingml/2006/main">
               <a:ext uri="{FF2B5EF4-FFF2-40B4-BE49-F238E27FC236}">
-                <a16:creationId xmlns:a16="http://schemas.microsoft.com/office/drawing/2014/main" id="{05D4BAFA-6805-4516-8AC5-5B9D40A2E89E}"/>
+                <a16:creationId xmlns:a16="http://schemas.microsoft.com/office/drawing/2014/main" id="{971E62CB-FE10-443A-AFA0-B62AACABFBA0}"/>
               </a:ext>
             </a:extLst>
           </p:cNvPr>
@@ -3241,7 +3241,7 @@
           <p:cNvPr id="2" name="s11-eyebrow">
             <a:extLst xmlns:a="http://schemas.openxmlformats.org/drawingml/2006/main">
               <a:ext uri="{FF2B5EF4-FFF2-40B4-BE49-F238E27FC236}">
-                <a16:creationId xmlns:a16="http://schemas.microsoft.com/office/drawing/2014/main" id="{E352E787-6670-46B6-852D-55E9C6C0484C}"/>
+                <a16:creationId xmlns:a16="http://schemas.microsoft.com/office/drawing/2014/main" id="{28922E3C-13EB-47F6-AA02-0310A92366F9}"/>
               </a:ext>
             </a:extLst>
           </p:cNvPr>
@@ -3299,7 +3299,7 @@
           <p:cNvPr id="3" name="s11-title">
             <a:extLst xmlns:a="http://schemas.openxmlformats.org/drawingml/2006/main">
               <a:ext uri="{FF2B5EF4-FFF2-40B4-BE49-F238E27FC236}">
-                <a16:creationId xmlns:a16="http://schemas.microsoft.com/office/drawing/2014/main" id="{99C01A41-5AE8-474E-B35F-08875DF90745}"/>
+                <a16:creationId xmlns:a16="http://schemas.microsoft.com/office/drawing/2014/main" id="{BE113174-B324-431A-8512-2E3EBB0CC45D}"/>
               </a:ext>
             </a:extLst>
           </p:cNvPr>
@@ -3357,7 +3357,7 @@
           <p:cNvPr id="4" name="s11-footer">
             <a:extLst xmlns:a="http://schemas.openxmlformats.org/drawingml/2006/main">
               <a:ext uri="{FF2B5EF4-FFF2-40B4-BE49-F238E27FC236}">
-                <a16:creationId xmlns:a16="http://schemas.microsoft.com/office/drawing/2014/main" id="{9E77E7C6-E249-49C1-A72D-2DEC1F5BE459}"/>
+                <a16:creationId xmlns:a16="http://schemas.microsoft.com/office/drawing/2014/main" id="{52C99A20-AA5C-4FCC-87C6-377177B96B7A}"/>
               </a:ext>
             </a:extLst>
           </p:cNvPr>
@@ -3388,7 +3388,7 @@
           <p:cNvPr id="5" name="s11-identity">
             <a:extLst xmlns:a="http://schemas.openxmlformats.org/drawingml/2006/main">
               <a:ext uri="{FF2B5EF4-FFF2-40B4-BE49-F238E27FC236}">
-                <a16:creationId xmlns:a16="http://schemas.microsoft.com/office/drawing/2014/main" id="{1BA88E9B-7B5F-4F19-B78F-C8DEC7F2C617}"/>
+                <a16:creationId xmlns:a16="http://schemas.microsoft.com/office/drawing/2014/main" id="{F3710B5C-3057-4346-901C-0A5A0D8A8B58}"/>
               </a:ext>
             </a:extLst>
           </p:cNvPr>
@@ -3446,7 +3446,7 @@
           <p:cNvPr id="6" name="case-title">
             <a:extLst xmlns:a="http://schemas.openxmlformats.org/drawingml/2006/main">
               <a:ext uri="{FF2B5EF4-FFF2-40B4-BE49-F238E27FC236}">
-                <a16:creationId xmlns:a16="http://schemas.microsoft.com/office/drawing/2014/main" id="{213475C8-7949-4E19-8B9C-93AA0B02C164}"/>
+                <a16:creationId xmlns:a16="http://schemas.microsoft.com/office/drawing/2014/main" id="{23CCA72E-1C2B-45C4-9DD5-CEEC17597043}"/>
               </a:ext>
             </a:extLst>
           </p:cNvPr>
@@ -3510,7 +3510,7 @@
           <p:cNvPr id="7" name="case-row-0">
             <a:extLst xmlns:a="http://schemas.openxmlformats.org/drawingml/2006/main">
               <a:ext uri="{FF2B5EF4-FFF2-40B4-BE49-F238E27FC236}">
-                <a16:creationId xmlns:a16="http://schemas.microsoft.com/office/drawing/2014/main" id="{00C725D5-B791-4FFF-8C60-D8621DD45C28}"/>
+                <a16:creationId xmlns:a16="http://schemas.microsoft.com/office/drawing/2014/main" id="{CEC8D438-598B-4A2D-88C2-6910C5066C30}"/>
               </a:ext>
             </a:extLst>
           </p:cNvPr>
@@ -3574,7 +3574,7 @@
           <p:cNvPr id="8" name="case-row-1">
             <a:extLst xmlns:a="http://schemas.openxmlformats.org/drawingml/2006/main">
               <a:ext uri="{FF2B5EF4-FFF2-40B4-BE49-F238E27FC236}">
-                <a16:creationId xmlns:a16="http://schemas.microsoft.com/office/drawing/2014/main" id="{B8A6DCE2-53EF-4853-BA2E-C961081C7215}"/>
+                <a16:creationId xmlns:a16="http://schemas.microsoft.com/office/drawing/2014/main" id="{D856A2C3-4191-4C6A-A0F2-BE531D91FF97}"/>
               </a:ext>
             </a:extLst>
           </p:cNvPr>
@@ -3638,7 +3638,7 @@
           <p:cNvPr id="9" name="case-row-2">
             <a:extLst xmlns:a="http://schemas.openxmlformats.org/drawingml/2006/main">
               <a:ext uri="{FF2B5EF4-FFF2-40B4-BE49-F238E27FC236}">
-                <a16:creationId xmlns:a16="http://schemas.microsoft.com/office/drawing/2014/main" id="{6B7258BE-778C-4D0D-A320-9DA006E310EC}"/>
+                <a16:creationId xmlns:a16="http://schemas.microsoft.com/office/drawing/2014/main" id="{617252DA-998D-4760-B175-F57CB028D665}"/>
               </a:ext>
             </a:extLst>
           </p:cNvPr>
@@ -3702,7 +3702,7 @@
           <p:cNvPr id="10" name="s11-takeaway-rule">
             <a:extLst xmlns:a="http://schemas.openxmlformats.org/drawingml/2006/main">
               <a:ext uri="{FF2B5EF4-FFF2-40B4-BE49-F238E27FC236}">
-                <a16:creationId xmlns:a16="http://schemas.microsoft.com/office/drawing/2014/main" id="{F262346E-B9AE-452E-AA61-A9920F46B989}"/>
+                <a16:creationId xmlns:a16="http://schemas.microsoft.com/office/drawing/2014/main" id="{14CE1B0B-783D-423A-96C1-3AA4FBF5BA69}"/>
               </a:ext>
             </a:extLst>
           </p:cNvPr>
@@ -3735,7 +3735,7 @@
           <p:cNvPr id="11" name="s11-takeaway">
             <a:extLst xmlns:a="http://schemas.openxmlformats.org/drawingml/2006/main">
               <a:ext uri="{FF2B5EF4-FFF2-40B4-BE49-F238E27FC236}">
-                <a16:creationId xmlns:a16="http://schemas.microsoft.com/office/drawing/2014/main" id="{FCFF960B-BCAC-4E4F-B80A-D389F4FC89A0}"/>
+                <a16:creationId xmlns:a16="http://schemas.microsoft.com/office/drawing/2014/main" id="{1451853F-8EA2-44B4-A0B1-68BDB02075E1}"/>
               </a:ext>
             </a:extLst>
           </p:cNvPr>
@@ -3791,7 +3791,7 @@
     </p:spTree>
     <p:extLst>
       <p:ext uri="{BB962C8B-B14F-4D97-AF65-F5344CB8AC3E}">
-        <p14:creationId xmlns:p14="http://schemas.microsoft.com/office/powerpoint/2010/main" val="1275484573"/>
+        <p14:creationId xmlns:p14="http://schemas.microsoft.com/office/powerpoint/2010/main" val="1593839754"/>
       </p:ext>
     </p:extLst>
   </p:cSld>
@@ -3822,7 +3822,7 @@
           <p:cNvPr id="1" name="s12-rule">
             <a:extLst xmlns:a="http://schemas.openxmlformats.org/drawingml/2006/main">
               <a:ext uri="{FF2B5EF4-FFF2-40B4-BE49-F238E27FC236}">
-                <a16:creationId xmlns:a16="http://schemas.microsoft.com/office/drawing/2014/main" id="{5C5A8807-9329-49C2-B753-B5757C5D1BF4}"/>
+                <a16:creationId xmlns:a16="http://schemas.microsoft.com/office/drawing/2014/main" id="{072FDF3D-6920-49EF-9892-12AF190FC598}"/>
               </a:ext>
             </a:extLst>
           </p:cNvPr>
@@ -3855,7 +3855,7 @@
           <p:cNvPr id="2" name="s12-eyebrow">
             <a:extLst xmlns:a="http://schemas.openxmlformats.org/drawingml/2006/main">
               <a:ext uri="{FF2B5EF4-FFF2-40B4-BE49-F238E27FC236}">
-                <a16:creationId xmlns:a16="http://schemas.microsoft.com/office/drawing/2014/main" id="{7E858A64-1464-4C54-AD6E-E20F25743A7E}"/>
+                <a16:creationId xmlns:a16="http://schemas.microsoft.com/office/drawing/2014/main" id="{B61D5246-FA70-4058-AE92-EA186AA488FB}"/>
               </a:ext>
             </a:extLst>
           </p:cNvPr>
@@ -3913,7 +3913,7 @@
           <p:cNvPr id="3" name="s12-title">
             <a:extLst xmlns:a="http://schemas.openxmlformats.org/drawingml/2006/main">
               <a:ext uri="{FF2B5EF4-FFF2-40B4-BE49-F238E27FC236}">
-                <a16:creationId xmlns:a16="http://schemas.microsoft.com/office/drawing/2014/main" id="{BBA1DF6E-BD34-4653-9FC5-EA1066C7FD71}"/>
+                <a16:creationId xmlns:a16="http://schemas.microsoft.com/office/drawing/2014/main" id="{FF783292-AA6D-4A25-ACBF-FE3B94E35238}"/>
               </a:ext>
             </a:extLst>
           </p:cNvPr>
@@ -3971,7 +3971,7 @@
           <p:cNvPr id="4" name="s12-footer">
             <a:extLst xmlns:a="http://schemas.openxmlformats.org/drawingml/2006/main">
               <a:ext uri="{FF2B5EF4-FFF2-40B4-BE49-F238E27FC236}">
-                <a16:creationId xmlns:a16="http://schemas.microsoft.com/office/drawing/2014/main" id="{084BE912-5F08-48BD-A1BF-4DB700A37634}"/>
+                <a16:creationId xmlns:a16="http://schemas.microsoft.com/office/drawing/2014/main" id="{0D751ABE-5910-4D89-B443-0BFE2BCA28F1}"/>
               </a:ext>
             </a:extLst>
           </p:cNvPr>
@@ -4002,7 +4002,7 @@
           <p:cNvPr id="5" name="s12-identity">
             <a:extLst xmlns:a="http://schemas.openxmlformats.org/drawingml/2006/main">
               <a:ext uri="{FF2B5EF4-FFF2-40B4-BE49-F238E27FC236}">
-                <a16:creationId xmlns:a16="http://schemas.microsoft.com/office/drawing/2014/main" id="{B0F833C5-B179-4DDE-B965-C2A4E552A1D1}"/>
+                <a16:creationId xmlns:a16="http://schemas.microsoft.com/office/drawing/2014/main" id="{96F8D5DB-844E-455A-8195-02E5C011D212}"/>
               </a:ext>
             </a:extLst>
           </p:cNvPr>
@@ -4060,7 +4060,7 @@
           <p:cNvPr id="6" name="practice-circle-0">
             <a:extLst xmlns:a="http://schemas.openxmlformats.org/drawingml/2006/main">
               <a:ext uri="{FF2B5EF4-FFF2-40B4-BE49-F238E27FC236}">
-                <a16:creationId xmlns:a16="http://schemas.microsoft.com/office/drawing/2014/main" id="{C2EA66CE-DA69-4369-9B98-DD4BAE9F2758}"/>
+                <a16:creationId xmlns:a16="http://schemas.microsoft.com/office/drawing/2014/main" id="{29C3CE76-61A9-43A9-BDBB-85155BAEDEAA}"/>
               </a:ext>
             </a:extLst>
           </p:cNvPr>
@@ -4093,7 +4093,7 @@
           <p:cNvPr id="7" name="practice-number-0">
             <a:extLst xmlns:a="http://schemas.openxmlformats.org/drawingml/2006/main">
               <a:ext uri="{FF2B5EF4-FFF2-40B4-BE49-F238E27FC236}">
-                <a16:creationId xmlns:a16="http://schemas.microsoft.com/office/drawing/2014/main" id="{05F1AE4C-D811-480F-851C-BD0B3E6856FD}"/>
+                <a16:creationId xmlns:a16="http://schemas.microsoft.com/office/drawing/2014/main" id="{7AD16A00-AD4E-4BB9-BD50-ECDC85D4100B}"/>
               </a:ext>
             </a:extLst>
           </p:cNvPr>
@@ -4151,7 +4151,7 @@
           <p:cNvPr id="8" name="practice-item-0">
             <a:extLst xmlns:a="http://schemas.openxmlformats.org/drawingml/2006/main">
               <a:ext uri="{FF2B5EF4-FFF2-40B4-BE49-F238E27FC236}">
-                <a16:creationId xmlns:a16="http://schemas.microsoft.com/office/drawing/2014/main" id="{DE8F4EDC-49DA-4698-B129-30CD64627F93}"/>
+                <a16:creationId xmlns:a16="http://schemas.microsoft.com/office/drawing/2014/main" id="{736334A6-A00C-4B33-A54D-782AFC65DCF7}"/>
               </a:ext>
             </a:extLst>
           </p:cNvPr>
@@ -4215,7 +4215,7 @@
           <p:cNvPr id="9" name="practice-connector-0">
             <a:extLst xmlns:a="http://schemas.openxmlformats.org/drawingml/2006/main">
               <a:ext uri="{FF2B5EF4-FFF2-40B4-BE49-F238E27FC236}">
-                <a16:creationId xmlns:a16="http://schemas.microsoft.com/office/drawing/2014/main" id="{F90E345B-6476-4EBB-BF82-1B40348D141F}"/>
+                <a16:creationId xmlns:a16="http://schemas.microsoft.com/office/drawing/2014/main" id="{DD7EA59D-0994-4ECF-80EF-88CBE3ED2AFC}"/>
               </a:ext>
             </a:extLst>
           </p:cNvPr>
@@ -4246,7 +4246,7 @@
           <p:cNvPr id="10" name="practice-circle-1">
             <a:extLst xmlns:a="http://schemas.openxmlformats.org/drawingml/2006/main">
               <a:ext uri="{FF2B5EF4-FFF2-40B4-BE49-F238E27FC236}">
-                <a16:creationId xmlns:a16="http://schemas.microsoft.com/office/drawing/2014/main" id="{0CF5CCFC-CCB8-4415-8CDD-A39A852F9718}"/>
+                <a16:creationId xmlns:a16="http://schemas.microsoft.com/office/drawing/2014/main" id="{ED7D9D9C-4994-453B-9D58-D505B1889207}"/>
               </a:ext>
             </a:extLst>
           </p:cNvPr>
@@ -4279,7 +4279,7 @@
           <p:cNvPr id="11" name="practice-number-1">
             <a:extLst xmlns:a="http://schemas.openxmlformats.org/drawingml/2006/main">
               <a:ext uri="{FF2B5EF4-FFF2-40B4-BE49-F238E27FC236}">
-                <a16:creationId xmlns:a16="http://schemas.microsoft.com/office/drawing/2014/main" id="{A6DE4E98-88DA-4CB5-8A2A-FA4591C42014}"/>
+                <a16:creationId xmlns:a16="http://schemas.microsoft.com/office/drawing/2014/main" id="{A05222BF-5B13-4B57-9B34-667F160DE454}"/>
               </a:ext>
             </a:extLst>
           </p:cNvPr>
@@ -4337,7 +4337,7 @@
           <p:cNvPr id="12" name="practice-item-1">
             <a:extLst xmlns:a="http://schemas.openxmlformats.org/drawingml/2006/main">
               <a:ext uri="{FF2B5EF4-FFF2-40B4-BE49-F238E27FC236}">
-                <a16:creationId xmlns:a16="http://schemas.microsoft.com/office/drawing/2014/main" id="{6A44FB8C-4959-4A0E-8766-A49D8550142E}"/>
+                <a16:creationId xmlns:a16="http://schemas.microsoft.com/office/drawing/2014/main" id="{A74D3FB3-AED2-4B25-BE03-544FCA203DA6}"/>
               </a:ext>
             </a:extLst>
           </p:cNvPr>
@@ -4401,7 +4401,7 @@
           <p:cNvPr id="13" name="practice-connector-1">
             <a:extLst xmlns:a="http://schemas.openxmlformats.org/drawingml/2006/main">
               <a:ext uri="{FF2B5EF4-FFF2-40B4-BE49-F238E27FC236}">
-                <a16:creationId xmlns:a16="http://schemas.microsoft.com/office/drawing/2014/main" id="{453BBB18-B1F6-40C4-8A45-44631D76EA01}"/>
+                <a16:creationId xmlns:a16="http://schemas.microsoft.com/office/drawing/2014/main" id="{85DD61C0-7AF5-4167-A259-104D15B7F191}"/>
               </a:ext>
             </a:extLst>
           </p:cNvPr>
@@ -4432,7 +4432,7 @@
           <p:cNvPr id="14" name="practice-circle-2">
             <a:extLst xmlns:a="http://schemas.openxmlformats.org/drawingml/2006/main">
               <a:ext uri="{FF2B5EF4-FFF2-40B4-BE49-F238E27FC236}">
-                <a16:creationId xmlns:a16="http://schemas.microsoft.com/office/drawing/2014/main" id="{8D2F648F-FE59-48FC-9303-8BDD9B8C51A0}"/>
+                <a16:creationId xmlns:a16="http://schemas.microsoft.com/office/drawing/2014/main" id="{58F8F8ED-DDE5-4010-AD26-AE0322FFE15B}"/>
               </a:ext>
             </a:extLst>
           </p:cNvPr>
@@ -4465,7 +4465,7 @@
           <p:cNvPr id="15" name="practice-number-2">
             <a:extLst xmlns:a="http://schemas.openxmlformats.org/drawingml/2006/main">
               <a:ext uri="{FF2B5EF4-FFF2-40B4-BE49-F238E27FC236}">
-                <a16:creationId xmlns:a16="http://schemas.microsoft.com/office/drawing/2014/main" id="{F8A3D285-7723-4056-9FEF-851398C12F4E}"/>
+                <a16:creationId xmlns:a16="http://schemas.microsoft.com/office/drawing/2014/main" id="{CE90D018-26D7-4FDE-8325-F4927D75F565}"/>
               </a:ext>
             </a:extLst>
           </p:cNvPr>
@@ -4523,7 +4523,7 @@
           <p:cNvPr id="16" name="practice-item-2">
             <a:extLst xmlns:a="http://schemas.openxmlformats.org/drawingml/2006/main">
               <a:ext uri="{FF2B5EF4-FFF2-40B4-BE49-F238E27FC236}">
-                <a16:creationId xmlns:a16="http://schemas.microsoft.com/office/drawing/2014/main" id="{0BA8C7FB-459F-49F2-931B-4EAF9AAF9EBF}"/>
+                <a16:creationId xmlns:a16="http://schemas.microsoft.com/office/drawing/2014/main" id="{E9D649C4-EF25-4CA6-A08B-A2EC9F003C3E}"/>
               </a:ext>
             </a:extLst>
           </p:cNvPr>
@@ -4585,7 +4585,7 @@
     </p:spTree>
     <p:extLst>
       <p:ext uri="{BB962C8B-B14F-4D97-AF65-F5344CB8AC3E}">
-        <p14:creationId xmlns:p14="http://schemas.microsoft.com/office/powerpoint/2010/main" val="489342588"/>
+        <p14:creationId xmlns:p14="http://schemas.microsoft.com/office/powerpoint/2010/main" val="1418150537"/>
       </p:ext>
     </p:extLst>
   </p:cSld>
@@ -4616,7 +4616,7 @@
           <p:cNvPr id="1" name="s13-rule">
             <a:extLst xmlns:a="http://schemas.openxmlformats.org/drawingml/2006/main">
               <a:ext uri="{FF2B5EF4-FFF2-40B4-BE49-F238E27FC236}">
-                <a16:creationId xmlns:a16="http://schemas.microsoft.com/office/drawing/2014/main" id="{B67C0E12-B7A6-491F-A4C5-1D8374CAC007}"/>
+                <a16:creationId xmlns:a16="http://schemas.microsoft.com/office/drawing/2014/main" id="{7457F199-27A9-4DFC-A819-01700ED039A9}"/>
               </a:ext>
             </a:extLst>
           </p:cNvPr>
@@ -4649,7 +4649,7 @@
           <p:cNvPr id="2" name="s13-eyebrow">
             <a:extLst xmlns:a="http://schemas.openxmlformats.org/drawingml/2006/main">
               <a:ext uri="{FF2B5EF4-FFF2-40B4-BE49-F238E27FC236}">
-                <a16:creationId xmlns:a16="http://schemas.microsoft.com/office/drawing/2014/main" id="{8D3A56FD-A2C5-4CDC-80D9-1DFF97CDAF64}"/>
+                <a16:creationId xmlns:a16="http://schemas.microsoft.com/office/drawing/2014/main" id="{F58C190A-E2F5-43DB-935E-A78F86CC78EB}"/>
               </a:ext>
             </a:extLst>
           </p:cNvPr>
@@ -4707,7 +4707,7 @@
           <p:cNvPr id="3" name="s13-title">
             <a:extLst xmlns:a="http://schemas.openxmlformats.org/drawingml/2006/main">
               <a:ext uri="{FF2B5EF4-FFF2-40B4-BE49-F238E27FC236}">
-                <a16:creationId xmlns:a16="http://schemas.microsoft.com/office/drawing/2014/main" id="{2FE80738-3224-4AFC-AB3B-05F1BE98185D}"/>
+                <a16:creationId xmlns:a16="http://schemas.microsoft.com/office/drawing/2014/main" id="{E89A6B62-E694-49B0-8213-9D528A651923}"/>
               </a:ext>
             </a:extLst>
           </p:cNvPr>
@@ -4765,7 +4765,7 @@
           <p:cNvPr id="4" name="s13-footer">
             <a:extLst xmlns:a="http://schemas.openxmlformats.org/drawingml/2006/main">
               <a:ext uri="{FF2B5EF4-FFF2-40B4-BE49-F238E27FC236}">
-                <a16:creationId xmlns:a16="http://schemas.microsoft.com/office/drawing/2014/main" id="{410B3B24-BE9C-4D93-B0E4-FB8CE72F35C4}"/>
+                <a16:creationId xmlns:a16="http://schemas.microsoft.com/office/drawing/2014/main" id="{C0DD491E-D345-46B6-88A9-6B49CCB053DB}"/>
               </a:ext>
             </a:extLst>
           </p:cNvPr>
@@ -4796,7 +4796,7 @@
           <p:cNvPr id="5" name="s13-identity">
             <a:extLst xmlns:a="http://schemas.openxmlformats.org/drawingml/2006/main">
               <a:ext uri="{FF2B5EF4-FFF2-40B4-BE49-F238E27FC236}">
-                <a16:creationId xmlns:a16="http://schemas.microsoft.com/office/drawing/2014/main" id="{7F08BB73-30CF-4A82-8B7B-E5B598883D81}"/>
+                <a16:creationId xmlns:a16="http://schemas.microsoft.com/office/drawing/2014/main" id="{C2880EF7-0984-46D7-A87C-397809984AC1}"/>
               </a:ext>
             </a:extLst>
           </p:cNvPr>
@@ -4854,7 +4854,7 @@
           <p:cNvPr id="6" name="recap-circle-0">
             <a:extLst xmlns:a="http://schemas.openxmlformats.org/drawingml/2006/main">
               <a:ext uri="{FF2B5EF4-FFF2-40B4-BE49-F238E27FC236}">
-                <a16:creationId xmlns:a16="http://schemas.microsoft.com/office/drawing/2014/main" id="{E57D66CB-A04B-45EB-B241-2D624FC812EB}"/>
+                <a16:creationId xmlns:a16="http://schemas.microsoft.com/office/drawing/2014/main" id="{73856AEE-B566-4610-A829-808AE117F2A3}"/>
               </a:ext>
             </a:extLst>
           </p:cNvPr>
@@ -4887,7 +4887,7 @@
           <p:cNvPr id="7" name="recap-number-0">
             <a:extLst xmlns:a="http://schemas.openxmlformats.org/drawingml/2006/main">
               <a:ext uri="{FF2B5EF4-FFF2-40B4-BE49-F238E27FC236}">
-                <a16:creationId xmlns:a16="http://schemas.microsoft.com/office/drawing/2014/main" id="{0B9D5635-7B0E-4929-BF0C-1C56F4704556}"/>
+                <a16:creationId xmlns:a16="http://schemas.microsoft.com/office/drawing/2014/main" id="{10B3F9C7-8716-481C-B70B-018FC3044D8F}"/>
               </a:ext>
             </a:extLst>
           </p:cNvPr>
@@ -4945,7 +4945,7 @@
           <p:cNvPr id="8" name="recap-item-0">
             <a:extLst xmlns:a="http://schemas.openxmlformats.org/drawingml/2006/main">
               <a:ext uri="{FF2B5EF4-FFF2-40B4-BE49-F238E27FC236}">
-                <a16:creationId xmlns:a16="http://schemas.microsoft.com/office/drawing/2014/main" id="{5FAA98DF-79B6-4A3A-81CC-53C1C91EEBFE}"/>
+                <a16:creationId xmlns:a16="http://schemas.microsoft.com/office/drawing/2014/main" id="{017565AA-1A37-4CFE-8343-33C519120016}"/>
               </a:ext>
             </a:extLst>
           </p:cNvPr>
@@ -5009,7 +5009,7 @@
           <p:cNvPr id="9" name="recap-connector-0">
             <a:extLst xmlns:a="http://schemas.openxmlformats.org/drawingml/2006/main">
               <a:ext uri="{FF2B5EF4-FFF2-40B4-BE49-F238E27FC236}">
-                <a16:creationId xmlns:a16="http://schemas.microsoft.com/office/drawing/2014/main" id="{8352A2A5-07DD-4549-A342-E3EB0FECD516}"/>
+                <a16:creationId xmlns:a16="http://schemas.microsoft.com/office/drawing/2014/main" id="{C2E88A31-1616-4154-A2D5-383847207CEB}"/>
               </a:ext>
             </a:extLst>
           </p:cNvPr>
@@ -5040,7 +5040,7 @@
           <p:cNvPr id="10" name="recap-circle-1">
             <a:extLst xmlns:a="http://schemas.openxmlformats.org/drawingml/2006/main">
               <a:ext uri="{FF2B5EF4-FFF2-40B4-BE49-F238E27FC236}">
-                <a16:creationId xmlns:a16="http://schemas.microsoft.com/office/drawing/2014/main" id="{03FD7CFB-DC9F-43B5-8FA7-1B1BF762F269}"/>
+                <a16:creationId xmlns:a16="http://schemas.microsoft.com/office/drawing/2014/main" id="{49495B98-9472-4E78-AB09-283079289AA4}"/>
               </a:ext>
             </a:extLst>
           </p:cNvPr>
@@ -5073,7 +5073,7 @@
           <p:cNvPr id="11" name="recap-number-1">
             <a:extLst xmlns:a="http://schemas.openxmlformats.org/drawingml/2006/main">
               <a:ext uri="{FF2B5EF4-FFF2-40B4-BE49-F238E27FC236}">
-                <a16:creationId xmlns:a16="http://schemas.microsoft.com/office/drawing/2014/main" id="{B62049D1-DBBA-41EC-AF44-005BC51C664C}"/>
+                <a16:creationId xmlns:a16="http://schemas.microsoft.com/office/drawing/2014/main" id="{C4664BD5-A9AE-4103-9277-8E56930682AC}"/>
               </a:ext>
             </a:extLst>
           </p:cNvPr>
@@ -5131,7 +5131,7 @@
           <p:cNvPr id="12" name="recap-item-1">
             <a:extLst xmlns:a="http://schemas.openxmlformats.org/drawingml/2006/main">
               <a:ext uri="{FF2B5EF4-FFF2-40B4-BE49-F238E27FC236}">
-                <a16:creationId xmlns:a16="http://schemas.microsoft.com/office/drawing/2014/main" id="{7145DF55-1C3E-43D1-9540-6728EF110FAE}"/>
+                <a16:creationId xmlns:a16="http://schemas.microsoft.com/office/drawing/2014/main" id="{D8C462E5-9EC1-455F-ADCD-FF37574A17D9}"/>
               </a:ext>
             </a:extLst>
           </p:cNvPr>
@@ -5195,7 +5195,7 @@
           <p:cNvPr id="13" name="recap-connector-1">
             <a:extLst xmlns:a="http://schemas.openxmlformats.org/drawingml/2006/main">
               <a:ext uri="{FF2B5EF4-FFF2-40B4-BE49-F238E27FC236}">
-                <a16:creationId xmlns:a16="http://schemas.microsoft.com/office/drawing/2014/main" id="{4E558298-AB1E-459C-BCA1-9D61A2C9B3E0}"/>
+                <a16:creationId xmlns:a16="http://schemas.microsoft.com/office/drawing/2014/main" id="{77667C4E-24FC-45CB-9330-4AAC454E8FEA}"/>
               </a:ext>
             </a:extLst>
           </p:cNvPr>
@@ -5226,7 +5226,7 @@
           <p:cNvPr id="14" name="recap-circle-2">
             <a:extLst xmlns:a="http://schemas.openxmlformats.org/drawingml/2006/main">
               <a:ext uri="{FF2B5EF4-FFF2-40B4-BE49-F238E27FC236}">
-                <a16:creationId xmlns:a16="http://schemas.microsoft.com/office/drawing/2014/main" id="{395ECAA2-8429-49D9-9293-C6C7E81449F6}"/>
+                <a16:creationId xmlns:a16="http://schemas.microsoft.com/office/drawing/2014/main" id="{99C190C7-8E78-4A36-9915-7C833161D4BB}"/>
               </a:ext>
             </a:extLst>
           </p:cNvPr>
@@ -5259,7 +5259,7 @@
           <p:cNvPr id="15" name="recap-number-2">
             <a:extLst xmlns:a="http://schemas.openxmlformats.org/drawingml/2006/main">
               <a:ext uri="{FF2B5EF4-FFF2-40B4-BE49-F238E27FC236}">
-                <a16:creationId xmlns:a16="http://schemas.microsoft.com/office/drawing/2014/main" id="{8C908E7A-E0B2-4E8C-9381-5120010B3F3A}"/>
+                <a16:creationId xmlns:a16="http://schemas.microsoft.com/office/drawing/2014/main" id="{67D1DB73-125F-4D52-8559-19555DF85DD9}"/>
               </a:ext>
             </a:extLst>
           </p:cNvPr>
@@ -5317,7 +5317,7 @@
           <p:cNvPr id="16" name="recap-item-2">
             <a:extLst xmlns:a="http://schemas.openxmlformats.org/drawingml/2006/main">
               <a:ext uri="{FF2B5EF4-FFF2-40B4-BE49-F238E27FC236}">
-                <a16:creationId xmlns:a16="http://schemas.microsoft.com/office/drawing/2014/main" id="{F1BF39A4-B9FE-4B12-BBE2-58D721F0A45E}"/>
+                <a16:creationId xmlns:a16="http://schemas.microsoft.com/office/drawing/2014/main" id="{C4BA9224-5B04-44EC-929A-881379A24E0D}"/>
               </a:ext>
             </a:extLst>
           </p:cNvPr>
@@ -5379,7 +5379,7 @@
     </p:spTree>
     <p:extLst>
       <p:ext uri="{BB962C8B-B14F-4D97-AF65-F5344CB8AC3E}">
-        <p14:creationId xmlns:p14="http://schemas.microsoft.com/office/powerpoint/2010/main" val="2135509521"/>
+        <p14:creationId xmlns:p14="http://schemas.microsoft.com/office/powerpoint/2010/main" val="2055464244"/>
       </p:ext>
     </p:extLst>
   </p:cSld>
@@ -5410,7 +5410,7 @@
           <p:cNvPr id="1" name="s14-rule">
             <a:extLst xmlns:a="http://schemas.openxmlformats.org/drawingml/2006/main">
               <a:ext uri="{FF2B5EF4-FFF2-40B4-BE49-F238E27FC236}">
-                <a16:creationId xmlns:a16="http://schemas.microsoft.com/office/drawing/2014/main" id="{04DDD69F-A0CA-4D08-B04F-8346F4BF6EF6}"/>
+                <a16:creationId xmlns:a16="http://schemas.microsoft.com/office/drawing/2014/main" id="{C1BDE180-1C08-4DF7-A0C9-313D29A71F2B}"/>
               </a:ext>
             </a:extLst>
           </p:cNvPr>
@@ -5443,7 +5443,7 @@
           <p:cNvPr id="2" name="s14-eyebrow">
             <a:extLst xmlns:a="http://schemas.openxmlformats.org/drawingml/2006/main">
               <a:ext uri="{FF2B5EF4-FFF2-40B4-BE49-F238E27FC236}">
-                <a16:creationId xmlns:a16="http://schemas.microsoft.com/office/drawing/2014/main" id="{F8B24A82-2F1B-446C-83F5-90E1A20B3825}"/>
+                <a16:creationId xmlns:a16="http://schemas.microsoft.com/office/drawing/2014/main" id="{F45F93A5-0862-4044-A5D0-CB6312A4EAAF}"/>
               </a:ext>
             </a:extLst>
           </p:cNvPr>
@@ -5501,7 +5501,7 @@
           <p:cNvPr id="3" name="s14-title">
             <a:extLst xmlns:a="http://schemas.openxmlformats.org/drawingml/2006/main">
               <a:ext uri="{FF2B5EF4-FFF2-40B4-BE49-F238E27FC236}">
-                <a16:creationId xmlns:a16="http://schemas.microsoft.com/office/drawing/2014/main" id="{1CD6551A-1A26-465D-8AF2-2B5DA1DD4D58}"/>
+                <a16:creationId xmlns:a16="http://schemas.microsoft.com/office/drawing/2014/main" id="{2E8DC3BD-E55D-40C5-9AF3-09C9667461B7}"/>
               </a:ext>
             </a:extLst>
           </p:cNvPr>
@@ -5559,7 +5559,7 @@
           <p:cNvPr id="4" name="s14-footer">
             <a:extLst xmlns:a="http://schemas.openxmlformats.org/drawingml/2006/main">
               <a:ext uri="{FF2B5EF4-FFF2-40B4-BE49-F238E27FC236}">
-                <a16:creationId xmlns:a16="http://schemas.microsoft.com/office/drawing/2014/main" id="{0F5B71D6-6954-4307-8BE5-C5A81BF98276}"/>
+                <a16:creationId xmlns:a16="http://schemas.microsoft.com/office/drawing/2014/main" id="{A0E329E8-5783-46EA-A6D7-34E7D2A4D039}"/>
               </a:ext>
             </a:extLst>
           </p:cNvPr>
@@ -5590,7 +5590,7 @@
           <p:cNvPr id="5" name="s14-identity">
             <a:extLst xmlns:a="http://schemas.openxmlformats.org/drawingml/2006/main">
               <a:ext uri="{FF2B5EF4-FFF2-40B4-BE49-F238E27FC236}">
-                <a16:creationId xmlns:a16="http://schemas.microsoft.com/office/drawing/2014/main" id="{5DBF5D0B-8CA4-43A7-A7EF-535A13445490}"/>
+                <a16:creationId xmlns:a16="http://schemas.microsoft.com/office/drawing/2014/main" id="{865066FA-7D95-4E07-B53A-7905D6436757}"/>
               </a:ext>
             </a:extLst>
           </p:cNvPr>
@@ -5648,7 +5648,7 @@
           <p:cNvPr id="6" name="source-0">
             <a:extLst xmlns:a="http://schemas.openxmlformats.org/drawingml/2006/main">
               <a:ext uri="{FF2B5EF4-FFF2-40B4-BE49-F238E27FC236}">
-                <a16:creationId xmlns:a16="http://schemas.microsoft.com/office/drawing/2014/main" id="{6748E5AF-C698-4804-BAC0-144801F0A9D8}"/>
+                <a16:creationId xmlns:a16="http://schemas.microsoft.com/office/drawing/2014/main" id="{CB32CF06-EB5C-44BB-870B-AF3BB40C37E9}"/>
               </a:ext>
             </a:extLst>
           </p:cNvPr>
@@ -5712,7 +5712,7 @@
           <p:cNvPr id="7" name="source-1">
             <a:extLst xmlns:a="http://schemas.openxmlformats.org/drawingml/2006/main">
               <a:ext uri="{FF2B5EF4-FFF2-40B4-BE49-F238E27FC236}">
-                <a16:creationId xmlns:a16="http://schemas.microsoft.com/office/drawing/2014/main" id="{64949502-9852-490B-B0DD-8C8DA85838F7}"/>
+                <a16:creationId xmlns:a16="http://schemas.microsoft.com/office/drawing/2014/main" id="{BC410147-9603-4B26-A25C-23BF5F5018E5}"/>
               </a:ext>
             </a:extLst>
           </p:cNvPr>
@@ -5776,7 +5776,7 @@
           <p:cNvPr id="8" name="source-2">
             <a:extLst xmlns:a="http://schemas.openxmlformats.org/drawingml/2006/main">
               <a:ext uri="{FF2B5EF4-FFF2-40B4-BE49-F238E27FC236}">
-                <a16:creationId xmlns:a16="http://schemas.microsoft.com/office/drawing/2014/main" id="{6A8C7D78-74A4-4661-ABC7-33B95DCBF233}"/>
+                <a16:creationId xmlns:a16="http://schemas.microsoft.com/office/drawing/2014/main" id="{AA6624D8-16D7-4158-B776-BD027EDD10BD}"/>
               </a:ext>
             </a:extLst>
           </p:cNvPr>
@@ -5840,7 +5840,7 @@
           <p:cNvPr id="9" name="s14-takeaway-rule">
             <a:extLst xmlns:a="http://schemas.openxmlformats.org/drawingml/2006/main">
               <a:ext uri="{FF2B5EF4-FFF2-40B4-BE49-F238E27FC236}">
-                <a16:creationId xmlns:a16="http://schemas.microsoft.com/office/drawing/2014/main" id="{CE063D60-FA28-498F-873D-993B22C72B55}"/>
+                <a16:creationId xmlns:a16="http://schemas.microsoft.com/office/drawing/2014/main" id="{86DB3EF4-FB75-40E9-BAAB-DD65EF226301}"/>
               </a:ext>
             </a:extLst>
           </p:cNvPr>
@@ -5873,7 +5873,7 @@
           <p:cNvPr id="10" name="s14-takeaway">
             <a:extLst xmlns:a="http://schemas.openxmlformats.org/drawingml/2006/main">
               <a:ext uri="{FF2B5EF4-FFF2-40B4-BE49-F238E27FC236}">
-                <a16:creationId xmlns:a16="http://schemas.microsoft.com/office/drawing/2014/main" id="{0AE2BDEB-5645-420A-A87B-714D898A0E64}"/>
+                <a16:creationId xmlns:a16="http://schemas.microsoft.com/office/drawing/2014/main" id="{11E99468-BE2A-4CC1-A11B-78FB0D6E31A7}"/>
               </a:ext>
             </a:extLst>
           </p:cNvPr>
@@ -5898,7 +5898,7 @@
         </p:spPr>
         <p:txBody>
           <a:bodyPr xmlns:a="http://schemas.openxmlformats.org/drawingml/2006/main" lIns="0" tIns="0" rIns="0" bIns="0" anchor="ctr">
-            <a:normAutofit fontScale="95911"/>
+            <a:normAutofit fontScale="100000"/>
           </a:bodyPr>
           <a:lstStyle xmlns:a="http://schemas.openxmlformats.org/drawingml/2006/main"/>
           <a:p xmlns:a="http://schemas.openxmlformats.org/drawingml/2006/main">
@@ -5921,7 +5921,7 @@
                 <a:ea typeface="PingFang SC"/>
                 <a:cs typeface="PingFang SC"/>
               </a:rPr>
-              <a:t>课程精编页用于讲授主线；播放器中的“原课件”模式保留团队 PowerPoint 精选页、真实图片和可播放视频。</a:t>
+              <a:t>课程正文与幻灯片共享同一知识主线，图片和视频用于帮助理解本节概念与案例。</a:t>
             </a:r>
           </a:p>
         </p:txBody>
@@ -5929,7 +5929,7 @@
     </p:spTree>
     <p:extLst>
       <p:ext uri="{BB962C8B-B14F-4D97-AF65-F5344CB8AC3E}">
-        <p14:creationId xmlns:p14="http://schemas.microsoft.com/office/powerpoint/2010/main" val="1466803208"/>
+        <p14:creationId xmlns:p14="http://schemas.microsoft.com/office/powerpoint/2010/main" val="36301687"/>
       </p:ext>
     </p:extLst>
   </p:cSld>
@@ -5960,7 +5960,7 @@
           <p:cNvPr id="1" name="s2-rule">
             <a:extLst xmlns:a="http://schemas.openxmlformats.org/drawingml/2006/main">
               <a:ext uri="{FF2B5EF4-FFF2-40B4-BE49-F238E27FC236}">
-                <a16:creationId xmlns:a16="http://schemas.microsoft.com/office/drawing/2014/main" id="{B5C33ADF-5062-4053-8405-DD9067A4C7F9}"/>
+                <a16:creationId xmlns:a16="http://schemas.microsoft.com/office/drawing/2014/main" id="{D40BD739-EA6D-4033-AC12-A9673F937087}"/>
               </a:ext>
             </a:extLst>
           </p:cNvPr>
@@ -5993,7 +5993,7 @@
           <p:cNvPr id="2" name="s2-eyebrow">
             <a:extLst xmlns:a="http://schemas.openxmlformats.org/drawingml/2006/main">
               <a:ext uri="{FF2B5EF4-FFF2-40B4-BE49-F238E27FC236}">
-                <a16:creationId xmlns:a16="http://schemas.microsoft.com/office/drawing/2014/main" id="{297929BB-0430-47A6-A87F-915834DB0FCA}"/>
+                <a16:creationId xmlns:a16="http://schemas.microsoft.com/office/drawing/2014/main" id="{A3F613AA-E79B-4910-B607-3FA6E774BCD2}"/>
               </a:ext>
             </a:extLst>
           </p:cNvPr>
@@ -6051,7 +6051,7 @@
           <p:cNvPr id="3" name="s2-title">
             <a:extLst xmlns:a="http://schemas.openxmlformats.org/drawingml/2006/main">
               <a:ext uri="{FF2B5EF4-FFF2-40B4-BE49-F238E27FC236}">
-                <a16:creationId xmlns:a16="http://schemas.microsoft.com/office/drawing/2014/main" id="{F0E8F7D3-BA51-4D9D-9C8F-3241549EBE52}"/>
+                <a16:creationId xmlns:a16="http://schemas.microsoft.com/office/drawing/2014/main" id="{E4CCCC6B-D3FC-44AA-9454-B5046E6DFDAA}"/>
               </a:ext>
             </a:extLst>
           </p:cNvPr>
@@ -6109,7 +6109,7 @@
           <p:cNvPr id="4" name="s2-footer">
             <a:extLst xmlns:a="http://schemas.openxmlformats.org/drawingml/2006/main">
               <a:ext uri="{FF2B5EF4-FFF2-40B4-BE49-F238E27FC236}">
-                <a16:creationId xmlns:a16="http://schemas.microsoft.com/office/drawing/2014/main" id="{67884F81-E1BB-4D34-B57A-DF4ED71F6620}"/>
+                <a16:creationId xmlns:a16="http://schemas.microsoft.com/office/drawing/2014/main" id="{87C3484D-E577-4F33-BDA0-5F5B00FDCAD6}"/>
               </a:ext>
             </a:extLst>
           </p:cNvPr>
@@ -6140,7 +6140,7 @@
           <p:cNvPr id="5" name="s2-identity">
             <a:extLst xmlns:a="http://schemas.openxmlformats.org/drawingml/2006/main">
               <a:ext uri="{FF2B5EF4-FFF2-40B4-BE49-F238E27FC236}">
-                <a16:creationId xmlns:a16="http://schemas.microsoft.com/office/drawing/2014/main" id="{A4AEA6D2-2B78-47E7-857A-D6D5D84D8D57}"/>
+                <a16:creationId xmlns:a16="http://schemas.microsoft.com/office/drawing/2014/main" id="{A944C89D-7F64-4C30-A035-287D249610FD}"/>
               </a:ext>
             </a:extLst>
           </p:cNvPr>
@@ -6198,7 +6198,7 @@
           <p:cNvPr id="6" name="objective-1">
             <a:extLst xmlns:a="http://schemas.openxmlformats.org/drawingml/2006/main">
               <a:ext uri="{FF2B5EF4-FFF2-40B4-BE49-F238E27FC236}">
-                <a16:creationId xmlns:a16="http://schemas.microsoft.com/office/drawing/2014/main" id="{E8595B12-BA17-47AB-9597-A7A43F344F84}"/>
+                <a16:creationId xmlns:a16="http://schemas.microsoft.com/office/drawing/2014/main" id="{F0504862-FE48-428B-805E-60A2ACB24A41}"/>
               </a:ext>
             </a:extLst>
           </p:cNvPr>
@@ -6285,7 +6285,7 @@
           <p:cNvPr id="7" name="objective-2">
             <a:extLst xmlns:a="http://schemas.openxmlformats.org/drawingml/2006/main">
               <a:ext uri="{FF2B5EF4-FFF2-40B4-BE49-F238E27FC236}">
-                <a16:creationId xmlns:a16="http://schemas.microsoft.com/office/drawing/2014/main" id="{98B8760A-D96B-4130-9DF4-22E38B5202B5}"/>
+                <a16:creationId xmlns:a16="http://schemas.microsoft.com/office/drawing/2014/main" id="{5F9D4105-228C-41DF-8418-83DE45A61C73}"/>
               </a:ext>
             </a:extLst>
           </p:cNvPr>
@@ -6372,7 +6372,7 @@
           <p:cNvPr id="8" name="objective-3">
             <a:extLst xmlns:a="http://schemas.openxmlformats.org/drawingml/2006/main">
               <a:ext uri="{FF2B5EF4-FFF2-40B4-BE49-F238E27FC236}">
-                <a16:creationId xmlns:a16="http://schemas.microsoft.com/office/drawing/2014/main" id="{70F638C7-44B9-49C3-B58F-313CF53AC46B}"/>
+                <a16:creationId xmlns:a16="http://schemas.microsoft.com/office/drawing/2014/main" id="{14835286-6608-43CA-9B07-D382C9A8898D}"/>
               </a:ext>
             </a:extLst>
           </p:cNvPr>
@@ -6457,7 +6457,7 @@
     </p:spTree>
     <p:extLst>
       <p:ext uri="{BB962C8B-B14F-4D97-AF65-F5344CB8AC3E}">
-        <p14:creationId xmlns:p14="http://schemas.microsoft.com/office/powerpoint/2010/main" val="159831749"/>
+        <p14:creationId xmlns:p14="http://schemas.microsoft.com/office/powerpoint/2010/main" val="769184718"/>
       </p:ext>
     </p:extLst>
   </p:cSld>
@@ -6488,7 +6488,7 @@
           <p:cNvPr id="1" name="s3-rule">
             <a:extLst xmlns:a="http://schemas.openxmlformats.org/drawingml/2006/main">
               <a:ext uri="{FF2B5EF4-FFF2-40B4-BE49-F238E27FC236}">
-                <a16:creationId xmlns:a16="http://schemas.microsoft.com/office/drawing/2014/main" id="{3C672C6B-ABB7-4953-BF07-707CCF2578AB}"/>
+                <a16:creationId xmlns:a16="http://schemas.microsoft.com/office/drawing/2014/main" id="{866E811F-3E4F-4932-AC5B-0E0EE96CBF6F}"/>
               </a:ext>
             </a:extLst>
           </p:cNvPr>
@@ -6521,7 +6521,7 @@
           <p:cNvPr id="2" name="s3-eyebrow">
             <a:extLst xmlns:a="http://schemas.openxmlformats.org/drawingml/2006/main">
               <a:ext uri="{FF2B5EF4-FFF2-40B4-BE49-F238E27FC236}">
-                <a16:creationId xmlns:a16="http://schemas.microsoft.com/office/drawing/2014/main" id="{DC33DFAB-D202-481B-A84F-2D1BD6B806C1}"/>
+                <a16:creationId xmlns:a16="http://schemas.microsoft.com/office/drawing/2014/main" id="{3EDD6347-C06C-4B85-9445-1DB6D0A9D626}"/>
               </a:ext>
             </a:extLst>
           </p:cNvPr>
@@ -6579,7 +6579,7 @@
           <p:cNvPr id="3" name="s3-title">
             <a:extLst xmlns:a="http://schemas.openxmlformats.org/drawingml/2006/main">
               <a:ext uri="{FF2B5EF4-FFF2-40B4-BE49-F238E27FC236}">
-                <a16:creationId xmlns:a16="http://schemas.microsoft.com/office/drawing/2014/main" id="{436CA3B4-9B7E-45EE-96A6-7D371A7DA8DD}"/>
+                <a16:creationId xmlns:a16="http://schemas.microsoft.com/office/drawing/2014/main" id="{9750CCBC-9517-4E58-BBD6-85F1A081D0A5}"/>
               </a:ext>
             </a:extLst>
           </p:cNvPr>
@@ -6637,7 +6637,7 @@
           <p:cNvPr id="4" name="s3-footer">
             <a:extLst xmlns:a="http://schemas.openxmlformats.org/drawingml/2006/main">
               <a:ext uri="{FF2B5EF4-FFF2-40B4-BE49-F238E27FC236}">
-                <a16:creationId xmlns:a16="http://schemas.microsoft.com/office/drawing/2014/main" id="{DE84AA64-F70A-4886-A3C6-C1E8E711A27D}"/>
+                <a16:creationId xmlns:a16="http://schemas.microsoft.com/office/drawing/2014/main" id="{2EF60CB9-09C5-4928-A026-B136C551D8E2}"/>
               </a:ext>
             </a:extLst>
           </p:cNvPr>
@@ -6668,7 +6668,7 @@
           <p:cNvPr id="5" name="s3-identity">
             <a:extLst xmlns:a="http://schemas.openxmlformats.org/drawingml/2006/main">
               <a:ext uri="{FF2B5EF4-FFF2-40B4-BE49-F238E27FC236}">
-                <a16:creationId xmlns:a16="http://schemas.microsoft.com/office/drawing/2014/main" id="{D656F491-2D2F-47DC-A5B6-D3538B7D3FFD}"/>
+                <a16:creationId xmlns:a16="http://schemas.microsoft.com/office/drawing/2014/main" id="{F5346FBC-E7CD-49D5-8BBA-05E517717B90}"/>
               </a:ext>
             </a:extLst>
           </p:cNvPr>
@@ -6726,7 +6726,7 @@
           <p:cNvPr id="6" name="core-no-0">
             <a:extLst xmlns:a="http://schemas.openxmlformats.org/drawingml/2006/main">
               <a:ext uri="{FF2B5EF4-FFF2-40B4-BE49-F238E27FC236}">
-                <a16:creationId xmlns:a16="http://schemas.microsoft.com/office/drawing/2014/main" id="{966B7E7F-A001-4EAD-A312-3D643D196A66}"/>
+                <a16:creationId xmlns:a16="http://schemas.microsoft.com/office/drawing/2014/main" id="{4961D495-A470-4EDF-BCDA-1A4AE3D67CE5}"/>
               </a:ext>
             </a:extLst>
           </p:cNvPr>
@@ -6784,7 +6784,7 @@
           <p:cNvPr id="7" name="core-label-0">
             <a:extLst xmlns:a="http://schemas.openxmlformats.org/drawingml/2006/main">
               <a:ext uri="{FF2B5EF4-FFF2-40B4-BE49-F238E27FC236}">
-                <a16:creationId xmlns:a16="http://schemas.microsoft.com/office/drawing/2014/main" id="{C2CDDE83-B42D-4133-9995-66FA848E881E}"/>
+                <a16:creationId xmlns:a16="http://schemas.microsoft.com/office/drawing/2014/main" id="{53B933D8-9406-4E20-87BC-4895B4D10FA8}"/>
               </a:ext>
             </a:extLst>
           </p:cNvPr>
@@ -6842,7 +6842,7 @@
           <p:cNvPr id="8" name="core-body-0">
             <a:extLst xmlns:a="http://schemas.openxmlformats.org/drawingml/2006/main">
               <a:ext uri="{FF2B5EF4-FFF2-40B4-BE49-F238E27FC236}">
-                <a16:creationId xmlns:a16="http://schemas.microsoft.com/office/drawing/2014/main" id="{6A638F8B-08AA-49AD-8072-9593DEB16C5F}"/>
+                <a16:creationId xmlns:a16="http://schemas.microsoft.com/office/drawing/2014/main" id="{E3D67E24-DA6F-438B-9954-01088B9A9FA8}"/>
               </a:ext>
             </a:extLst>
           </p:cNvPr>
@@ -6906,7 +6906,7 @@
           <p:cNvPr id="9" name="core-no-1">
             <a:extLst xmlns:a="http://schemas.openxmlformats.org/drawingml/2006/main">
               <a:ext uri="{FF2B5EF4-FFF2-40B4-BE49-F238E27FC236}">
-                <a16:creationId xmlns:a16="http://schemas.microsoft.com/office/drawing/2014/main" id="{2FAA817E-8B44-42F7-AA7E-0D71EF919483}"/>
+                <a16:creationId xmlns:a16="http://schemas.microsoft.com/office/drawing/2014/main" id="{770DB938-BDE2-437A-9372-F4637AF9F155}"/>
               </a:ext>
             </a:extLst>
           </p:cNvPr>
@@ -6964,7 +6964,7 @@
           <p:cNvPr id="10" name="core-body-1">
             <a:extLst xmlns:a="http://schemas.openxmlformats.org/drawingml/2006/main">
               <a:ext uri="{FF2B5EF4-FFF2-40B4-BE49-F238E27FC236}">
-                <a16:creationId xmlns:a16="http://schemas.microsoft.com/office/drawing/2014/main" id="{FD877425-D12A-4A2C-BCEF-7FA1465693D6}"/>
+                <a16:creationId xmlns:a16="http://schemas.microsoft.com/office/drawing/2014/main" id="{42DE2EB7-C3B0-4438-A335-6F38BB19C574}"/>
               </a:ext>
             </a:extLst>
           </p:cNvPr>
@@ -7028,7 +7028,7 @@
           <p:cNvPr id="11" name="core-no-2">
             <a:extLst xmlns:a="http://schemas.openxmlformats.org/drawingml/2006/main">
               <a:ext uri="{FF2B5EF4-FFF2-40B4-BE49-F238E27FC236}">
-                <a16:creationId xmlns:a16="http://schemas.microsoft.com/office/drawing/2014/main" id="{5D14E6AC-7375-45CF-AF2F-C9706BC06449}"/>
+                <a16:creationId xmlns:a16="http://schemas.microsoft.com/office/drawing/2014/main" id="{901E2158-9D9A-446B-88C8-4507EA05BB06}"/>
               </a:ext>
             </a:extLst>
           </p:cNvPr>
@@ -7086,7 +7086,7 @@
           <p:cNvPr id="12" name="core-body-2">
             <a:extLst xmlns:a="http://schemas.openxmlformats.org/drawingml/2006/main">
               <a:ext uri="{FF2B5EF4-FFF2-40B4-BE49-F238E27FC236}">
-                <a16:creationId xmlns:a16="http://schemas.microsoft.com/office/drawing/2014/main" id="{861A5374-378B-4231-90BE-6126CD8C5063}"/>
+                <a16:creationId xmlns:a16="http://schemas.microsoft.com/office/drawing/2014/main" id="{904853E1-56C5-4932-9A57-8B009EC09766}"/>
               </a:ext>
             </a:extLst>
           </p:cNvPr>
@@ -7150,7 +7150,7 @@
           <p:cNvPr id="13" name="s3-takeaway-rule">
             <a:extLst xmlns:a="http://schemas.openxmlformats.org/drawingml/2006/main">
               <a:ext uri="{FF2B5EF4-FFF2-40B4-BE49-F238E27FC236}">
-                <a16:creationId xmlns:a16="http://schemas.microsoft.com/office/drawing/2014/main" id="{81B1228D-3406-403E-86CD-5C256ED161B4}"/>
+                <a16:creationId xmlns:a16="http://schemas.microsoft.com/office/drawing/2014/main" id="{255E0B29-7DDC-4BBA-9012-954937281677}"/>
               </a:ext>
             </a:extLst>
           </p:cNvPr>
@@ -7183,7 +7183,7 @@
           <p:cNvPr id="14" name="s3-takeaway">
             <a:extLst xmlns:a="http://schemas.openxmlformats.org/drawingml/2006/main">
               <a:ext uri="{FF2B5EF4-FFF2-40B4-BE49-F238E27FC236}">
-                <a16:creationId xmlns:a16="http://schemas.microsoft.com/office/drawing/2014/main" id="{4F595A21-7083-4BE2-9D4C-B444974C61EB}"/>
+                <a16:creationId xmlns:a16="http://schemas.microsoft.com/office/drawing/2014/main" id="{EC5F6AC5-B323-495B-9C5A-CCD3808F4D23}"/>
               </a:ext>
             </a:extLst>
           </p:cNvPr>
@@ -7239,7 +7239,7 @@
     </p:spTree>
     <p:extLst>
       <p:ext uri="{BB962C8B-B14F-4D97-AF65-F5344CB8AC3E}">
-        <p14:creationId xmlns:p14="http://schemas.microsoft.com/office/powerpoint/2010/main" val="577170828"/>
+        <p14:creationId xmlns:p14="http://schemas.microsoft.com/office/powerpoint/2010/main" val="1845486400"/>
       </p:ext>
     </p:extLst>
   </p:cSld>
@@ -7270,7 +7270,7 @@
           <p:cNvPr id="1" name="s4-rule">
             <a:extLst xmlns:a="http://schemas.openxmlformats.org/drawingml/2006/main">
               <a:ext uri="{FF2B5EF4-FFF2-40B4-BE49-F238E27FC236}">
-                <a16:creationId xmlns:a16="http://schemas.microsoft.com/office/drawing/2014/main" id="{0737893F-5A87-49D9-A948-ED21903B4BFE}"/>
+                <a16:creationId xmlns:a16="http://schemas.microsoft.com/office/drawing/2014/main" id="{53FF5FDD-FCEE-4B94-B180-9CF6D873287F}"/>
               </a:ext>
             </a:extLst>
           </p:cNvPr>
@@ -7303,7 +7303,7 @@
           <p:cNvPr id="2" name="s4-eyebrow">
             <a:extLst xmlns:a="http://schemas.openxmlformats.org/drawingml/2006/main">
               <a:ext uri="{FF2B5EF4-FFF2-40B4-BE49-F238E27FC236}">
-                <a16:creationId xmlns:a16="http://schemas.microsoft.com/office/drawing/2014/main" id="{05A4B020-3621-4E0B-A95C-C5D9F7D8C37D}"/>
+                <a16:creationId xmlns:a16="http://schemas.microsoft.com/office/drawing/2014/main" id="{BC499934-CBE0-45BD-8EF1-0E235F483CB8}"/>
               </a:ext>
             </a:extLst>
           </p:cNvPr>
@@ -7361,7 +7361,7 @@
           <p:cNvPr id="3" name="s4-title">
             <a:extLst xmlns:a="http://schemas.openxmlformats.org/drawingml/2006/main">
               <a:ext uri="{FF2B5EF4-FFF2-40B4-BE49-F238E27FC236}">
-                <a16:creationId xmlns:a16="http://schemas.microsoft.com/office/drawing/2014/main" id="{48D7307B-2BDD-44B8-80F6-98F52616DBA2}"/>
+                <a16:creationId xmlns:a16="http://schemas.microsoft.com/office/drawing/2014/main" id="{D3E4565A-92CC-4C49-8E23-6C7543A06367}"/>
               </a:ext>
             </a:extLst>
           </p:cNvPr>
@@ -7419,7 +7419,7 @@
           <p:cNvPr id="4" name="s4-footer">
             <a:extLst xmlns:a="http://schemas.openxmlformats.org/drawingml/2006/main">
               <a:ext uri="{FF2B5EF4-FFF2-40B4-BE49-F238E27FC236}">
-                <a16:creationId xmlns:a16="http://schemas.microsoft.com/office/drawing/2014/main" id="{4719E1F1-B74E-4C06-AB21-D479A407147A}"/>
+                <a16:creationId xmlns:a16="http://schemas.microsoft.com/office/drawing/2014/main" id="{24193554-4DB3-4527-9D63-A35A793C6143}"/>
               </a:ext>
             </a:extLst>
           </p:cNvPr>
@@ -7450,7 +7450,7 @@
           <p:cNvPr id="5" name="s4-identity">
             <a:extLst xmlns:a="http://schemas.openxmlformats.org/drawingml/2006/main">
               <a:ext uri="{FF2B5EF4-FFF2-40B4-BE49-F238E27FC236}">
-                <a16:creationId xmlns:a16="http://schemas.microsoft.com/office/drawing/2014/main" id="{6708D2F3-EA48-43DB-BC4A-3FCDE8181711}"/>
+                <a16:creationId xmlns:a16="http://schemas.microsoft.com/office/drawing/2014/main" id="{D0DF2783-A9DE-4E9B-9B35-A8985C47E6FF}"/>
               </a:ext>
             </a:extLst>
           </p:cNvPr>
@@ -7508,7 +7508,7 @@
           <p:cNvPr id="6" name="core-no-0">
             <a:extLst xmlns:a="http://schemas.openxmlformats.org/drawingml/2006/main">
               <a:ext uri="{FF2B5EF4-FFF2-40B4-BE49-F238E27FC236}">
-                <a16:creationId xmlns:a16="http://schemas.microsoft.com/office/drawing/2014/main" id="{AAB43ABF-C2B9-481B-B249-9F1A2653E088}"/>
+                <a16:creationId xmlns:a16="http://schemas.microsoft.com/office/drawing/2014/main" id="{42A99BAD-5003-4B10-B4B6-0A26E7A3EC80}"/>
               </a:ext>
             </a:extLst>
           </p:cNvPr>
@@ -7566,7 +7566,7 @@
           <p:cNvPr id="7" name="core-label-0">
             <a:extLst xmlns:a="http://schemas.openxmlformats.org/drawingml/2006/main">
               <a:ext uri="{FF2B5EF4-FFF2-40B4-BE49-F238E27FC236}">
-                <a16:creationId xmlns:a16="http://schemas.microsoft.com/office/drawing/2014/main" id="{5B1DCC8E-1914-49EF-8706-3C6BCCEEBEF0}"/>
+                <a16:creationId xmlns:a16="http://schemas.microsoft.com/office/drawing/2014/main" id="{5E4E1286-7559-4870-A383-59240DC69D44}"/>
               </a:ext>
             </a:extLst>
           </p:cNvPr>
@@ -7624,7 +7624,7 @@
           <p:cNvPr id="8" name="core-body-0">
             <a:extLst xmlns:a="http://schemas.openxmlformats.org/drawingml/2006/main">
               <a:ext uri="{FF2B5EF4-FFF2-40B4-BE49-F238E27FC236}">
-                <a16:creationId xmlns:a16="http://schemas.microsoft.com/office/drawing/2014/main" id="{F3E4F6D3-F084-4262-A63C-7C6A4F5615A6}"/>
+                <a16:creationId xmlns:a16="http://schemas.microsoft.com/office/drawing/2014/main" id="{59B1104E-4865-4FC9-81C0-7D3F4DD5EAE2}"/>
               </a:ext>
             </a:extLst>
           </p:cNvPr>
@@ -7688,7 +7688,7 @@
           <p:cNvPr id="9" name="core-no-1">
             <a:extLst xmlns:a="http://schemas.openxmlformats.org/drawingml/2006/main">
               <a:ext uri="{FF2B5EF4-FFF2-40B4-BE49-F238E27FC236}">
-                <a16:creationId xmlns:a16="http://schemas.microsoft.com/office/drawing/2014/main" id="{6A89F401-A772-48FB-95CE-2B8451F30F7F}"/>
+                <a16:creationId xmlns:a16="http://schemas.microsoft.com/office/drawing/2014/main" id="{A15EBFF9-0E1D-437B-B660-14254229B9A5}"/>
               </a:ext>
             </a:extLst>
           </p:cNvPr>
@@ -7746,7 +7746,7 @@
           <p:cNvPr id="10" name="core-body-1">
             <a:extLst xmlns:a="http://schemas.openxmlformats.org/drawingml/2006/main">
               <a:ext uri="{FF2B5EF4-FFF2-40B4-BE49-F238E27FC236}">
-                <a16:creationId xmlns:a16="http://schemas.microsoft.com/office/drawing/2014/main" id="{9998F8B8-DEDD-4939-AFAC-044EC40CCF4B}"/>
+                <a16:creationId xmlns:a16="http://schemas.microsoft.com/office/drawing/2014/main" id="{CE5D8BB8-496B-48DF-91E8-A9A258CD3423}"/>
               </a:ext>
             </a:extLst>
           </p:cNvPr>
@@ -7810,7 +7810,7 @@
           <p:cNvPr id="11" name="s4-takeaway-rule">
             <a:extLst xmlns:a="http://schemas.openxmlformats.org/drawingml/2006/main">
               <a:ext uri="{FF2B5EF4-FFF2-40B4-BE49-F238E27FC236}">
-                <a16:creationId xmlns:a16="http://schemas.microsoft.com/office/drawing/2014/main" id="{A28C394A-DFDE-4EE6-9204-19E24090DB03}"/>
+                <a16:creationId xmlns:a16="http://schemas.microsoft.com/office/drawing/2014/main" id="{61511C00-84FF-49C8-9FB0-1410D4CEB3DD}"/>
               </a:ext>
             </a:extLst>
           </p:cNvPr>
@@ -7843,7 +7843,7 @@
           <p:cNvPr id="12" name="s4-takeaway">
             <a:extLst xmlns:a="http://schemas.openxmlformats.org/drawingml/2006/main">
               <a:ext uri="{FF2B5EF4-FFF2-40B4-BE49-F238E27FC236}">
-                <a16:creationId xmlns:a16="http://schemas.microsoft.com/office/drawing/2014/main" id="{8ED94E85-B9C9-49F2-BC69-32F2CF21A443}"/>
+                <a16:creationId xmlns:a16="http://schemas.microsoft.com/office/drawing/2014/main" id="{49209F92-70CD-4D90-8128-5440CB5E46ED}"/>
               </a:ext>
             </a:extLst>
           </p:cNvPr>
@@ -7899,7 +7899,7 @@
     </p:spTree>
     <p:extLst>
       <p:ext uri="{BB962C8B-B14F-4D97-AF65-F5344CB8AC3E}">
-        <p14:creationId xmlns:p14="http://schemas.microsoft.com/office/powerpoint/2010/main" val="932085324"/>
+        <p14:creationId xmlns:p14="http://schemas.microsoft.com/office/powerpoint/2010/main" val="271831967"/>
       </p:ext>
     </p:extLst>
   </p:cSld>
@@ -7930,7 +7930,7 @@
           <p:cNvPr id="1" name="s5-rule">
             <a:extLst xmlns:a="http://schemas.openxmlformats.org/drawingml/2006/main">
               <a:ext uri="{FF2B5EF4-FFF2-40B4-BE49-F238E27FC236}">
-                <a16:creationId xmlns:a16="http://schemas.microsoft.com/office/drawing/2014/main" id="{00B97421-7EEF-49D0-B400-701D79601182}"/>
+                <a16:creationId xmlns:a16="http://schemas.microsoft.com/office/drawing/2014/main" id="{C61BDFF5-A813-405B-8921-248118AA335E}"/>
               </a:ext>
             </a:extLst>
           </p:cNvPr>
@@ -7963,7 +7963,7 @@
           <p:cNvPr id="2" name="s5-eyebrow">
             <a:extLst xmlns:a="http://schemas.openxmlformats.org/drawingml/2006/main">
               <a:ext uri="{FF2B5EF4-FFF2-40B4-BE49-F238E27FC236}">
-                <a16:creationId xmlns:a16="http://schemas.microsoft.com/office/drawing/2014/main" id="{E57C863B-86FB-4057-AB52-40FBFB8444D3}"/>
+                <a16:creationId xmlns:a16="http://schemas.microsoft.com/office/drawing/2014/main" id="{50ACC70A-1C57-44E0-8116-B58E94E4FFB2}"/>
               </a:ext>
             </a:extLst>
           </p:cNvPr>
@@ -8021,7 +8021,7 @@
           <p:cNvPr id="3" name="s5-title">
             <a:extLst xmlns:a="http://schemas.openxmlformats.org/drawingml/2006/main">
               <a:ext uri="{FF2B5EF4-FFF2-40B4-BE49-F238E27FC236}">
-                <a16:creationId xmlns:a16="http://schemas.microsoft.com/office/drawing/2014/main" id="{FAE69209-4375-4E0B-9306-2421DD032258}"/>
+                <a16:creationId xmlns:a16="http://schemas.microsoft.com/office/drawing/2014/main" id="{46470A23-778D-42B8-8761-C9BBE74F5A16}"/>
               </a:ext>
             </a:extLst>
           </p:cNvPr>
@@ -8079,7 +8079,7 @@
           <p:cNvPr id="4" name="s5-footer">
             <a:extLst xmlns:a="http://schemas.openxmlformats.org/drawingml/2006/main">
               <a:ext uri="{FF2B5EF4-FFF2-40B4-BE49-F238E27FC236}">
-                <a16:creationId xmlns:a16="http://schemas.microsoft.com/office/drawing/2014/main" id="{0A901F7C-3600-42CA-AEE5-3BB6B8F164D6}"/>
+                <a16:creationId xmlns:a16="http://schemas.microsoft.com/office/drawing/2014/main" id="{D565CB94-1E7C-4BF7-B177-87B0A1231B59}"/>
               </a:ext>
             </a:extLst>
           </p:cNvPr>
@@ -8110,7 +8110,7 @@
           <p:cNvPr id="5" name="s5-identity">
             <a:extLst xmlns:a="http://schemas.openxmlformats.org/drawingml/2006/main">
               <a:ext uri="{FF2B5EF4-FFF2-40B4-BE49-F238E27FC236}">
-                <a16:creationId xmlns:a16="http://schemas.microsoft.com/office/drawing/2014/main" id="{C0A3D60B-E4D6-4150-9088-FE0BEA1523B1}"/>
+                <a16:creationId xmlns:a16="http://schemas.microsoft.com/office/drawing/2014/main" id="{A4402E09-DBCF-4B14-BEFF-87ED3CC09F91}"/>
               </a:ext>
             </a:extLst>
           </p:cNvPr>
@@ -8168,7 +8168,7 @@
           <p:cNvPr id="6" name="core-no-0">
             <a:extLst xmlns:a="http://schemas.openxmlformats.org/drawingml/2006/main">
               <a:ext uri="{FF2B5EF4-FFF2-40B4-BE49-F238E27FC236}">
-                <a16:creationId xmlns:a16="http://schemas.microsoft.com/office/drawing/2014/main" id="{40F1EDE3-E17B-4D36-9225-3D76D4CB133D}"/>
+                <a16:creationId xmlns:a16="http://schemas.microsoft.com/office/drawing/2014/main" id="{FFE0A221-3F2E-4D23-A434-347A5ED4A37D}"/>
               </a:ext>
             </a:extLst>
           </p:cNvPr>
@@ -8226,7 +8226,7 @@
           <p:cNvPr id="7" name="core-label-0">
             <a:extLst xmlns:a="http://schemas.openxmlformats.org/drawingml/2006/main">
               <a:ext uri="{FF2B5EF4-FFF2-40B4-BE49-F238E27FC236}">
-                <a16:creationId xmlns:a16="http://schemas.microsoft.com/office/drawing/2014/main" id="{A6C935A1-3DD1-4CA2-BA57-82D2442B3FFC}"/>
+                <a16:creationId xmlns:a16="http://schemas.microsoft.com/office/drawing/2014/main" id="{C9FA28FB-C60C-4549-8920-4B0081491EFA}"/>
               </a:ext>
             </a:extLst>
           </p:cNvPr>
@@ -8284,7 +8284,7 @@
           <p:cNvPr id="8" name="core-body-0">
             <a:extLst xmlns:a="http://schemas.openxmlformats.org/drawingml/2006/main">
               <a:ext uri="{FF2B5EF4-FFF2-40B4-BE49-F238E27FC236}">
-                <a16:creationId xmlns:a16="http://schemas.microsoft.com/office/drawing/2014/main" id="{A3699388-30B5-4C33-ABEB-D02EED036A7D}"/>
+                <a16:creationId xmlns:a16="http://schemas.microsoft.com/office/drawing/2014/main" id="{EBF2C202-113B-4B4D-AD92-7224A37D4A67}"/>
               </a:ext>
             </a:extLst>
           </p:cNvPr>
@@ -8348,7 +8348,7 @@
           <p:cNvPr id="9" name="core-no-1">
             <a:extLst xmlns:a="http://schemas.openxmlformats.org/drawingml/2006/main">
               <a:ext uri="{FF2B5EF4-FFF2-40B4-BE49-F238E27FC236}">
-                <a16:creationId xmlns:a16="http://schemas.microsoft.com/office/drawing/2014/main" id="{56C53CC3-17FC-4B56-B85E-7E1726CEBC36}"/>
+                <a16:creationId xmlns:a16="http://schemas.microsoft.com/office/drawing/2014/main" id="{45AFAAE5-7311-4BE2-9166-941B12A93E40}"/>
               </a:ext>
             </a:extLst>
           </p:cNvPr>
@@ -8406,7 +8406,7 @@
           <p:cNvPr id="10" name="core-body-1">
             <a:extLst xmlns:a="http://schemas.openxmlformats.org/drawingml/2006/main">
               <a:ext uri="{FF2B5EF4-FFF2-40B4-BE49-F238E27FC236}">
-                <a16:creationId xmlns:a16="http://schemas.microsoft.com/office/drawing/2014/main" id="{3EB94EDE-609D-4FDD-AF4F-086A6B3A6065}"/>
+                <a16:creationId xmlns:a16="http://schemas.microsoft.com/office/drawing/2014/main" id="{AF52E674-B67A-48BD-B7B4-8A70B4506A12}"/>
               </a:ext>
             </a:extLst>
           </p:cNvPr>
@@ -8470,7 +8470,7 @@
           <p:cNvPr id="11" name="s5-takeaway-rule">
             <a:extLst xmlns:a="http://schemas.openxmlformats.org/drawingml/2006/main">
               <a:ext uri="{FF2B5EF4-FFF2-40B4-BE49-F238E27FC236}">
-                <a16:creationId xmlns:a16="http://schemas.microsoft.com/office/drawing/2014/main" id="{0DCB6C72-4DE2-4AB4-8C89-FF8DCFE09C13}"/>
+                <a16:creationId xmlns:a16="http://schemas.microsoft.com/office/drawing/2014/main" id="{58A48D29-5C45-4427-B150-A9D2C7537C31}"/>
               </a:ext>
             </a:extLst>
           </p:cNvPr>
@@ -8503,7 +8503,7 @@
           <p:cNvPr id="12" name="s5-takeaway">
             <a:extLst xmlns:a="http://schemas.openxmlformats.org/drawingml/2006/main">
               <a:ext uri="{FF2B5EF4-FFF2-40B4-BE49-F238E27FC236}">
-                <a16:creationId xmlns:a16="http://schemas.microsoft.com/office/drawing/2014/main" id="{98495613-904A-4081-8A4F-A0B92847EB82}"/>
+                <a16:creationId xmlns:a16="http://schemas.microsoft.com/office/drawing/2014/main" id="{E1B7CB8F-DA91-4ABC-A366-6EFDC60DC3C1}"/>
               </a:ext>
             </a:extLst>
           </p:cNvPr>
@@ -8559,7 +8559,7 @@
     </p:spTree>
     <p:extLst>
       <p:ext uri="{BB962C8B-B14F-4D97-AF65-F5344CB8AC3E}">
-        <p14:creationId xmlns:p14="http://schemas.microsoft.com/office/powerpoint/2010/main" val="1521412010"/>
+        <p14:creationId xmlns:p14="http://schemas.microsoft.com/office/powerpoint/2010/main" val="803762218"/>
       </p:ext>
     </p:extLst>
   </p:cSld>
@@ -8590,7 +8590,7 @@
           <p:cNvPr id="1" name="s6-rule">
             <a:extLst xmlns:a="http://schemas.openxmlformats.org/drawingml/2006/main">
               <a:ext uri="{FF2B5EF4-FFF2-40B4-BE49-F238E27FC236}">
-                <a16:creationId xmlns:a16="http://schemas.microsoft.com/office/drawing/2014/main" id="{755A8744-8435-451F-BAEA-393C2DD52925}"/>
+                <a16:creationId xmlns:a16="http://schemas.microsoft.com/office/drawing/2014/main" id="{715E6615-29BA-45CF-871B-92F2C2BDF74C}"/>
               </a:ext>
             </a:extLst>
           </p:cNvPr>
@@ -8623,7 +8623,7 @@
           <p:cNvPr id="2" name="s6-eyebrow">
             <a:extLst xmlns:a="http://schemas.openxmlformats.org/drawingml/2006/main">
               <a:ext uri="{FF2B5EF4-FFF2-40B4-BE49-F238E27FC236}">
-                <a16:creationId xmlns:a16="http://schemas.microsoft.com/office/drawing/2014/main" id="{E6784C18-96D7-4ADA-B262-F012EE5EFF1B}"/>
+                <a16:creationId xmlns:a16="http://schemas.microsoft.com/office/drawing/2014/main" id="{39F0C198-B483-4D26-89A6-7B8734252151}"/>
               </a:ext>
             </a:extLst>
           </p:cNvPr>
@@ -8681,7 +8681,7 @@
           <p:cNvPr id="3" name="s6-title">
             <a:extLst xmlns:a="http://schemas.openxmlformats.org/drawingml/2006/main">
               <a:ext uri="{FF2B5EF4-FFF2-40B4-BE49-F238E27FC236}">
-                <a16:creationId xmlns:a16="http://schemas.microsoft.com/office/drawing/2014/main" id="{9C2B2E7C-46DD-49C1-96E3-D4F0ADBEE692}"/>
+                <a16:creationId xmlns:a16="http://schemas.microsoft.com/office/drawing/2014/main" id="{153FE55C-C2EB-4D83-BB07-35D08A4E565C}"/>
               </a:ext>
             </a:extLst>
           </p:cNvPr>
@@ -8739,7 +8739,7 @@
           <p:cNvPr id="4" name="s6-footer">
             <a:extLst xmlns:a="http://schemas.openxmlformats.org/drawingml/2006/main">
               <a:ext uri="{FF2B5EF4-FFF2-40B4-BE49-F238E27FC236}">
-                <a16:creationId xmlns:a16="http://schemas.microsoft.com/office/drawing/2014/main" id="{BE6C2C19-9802-4D92-80A1-3926D83C4AAE}"/>
+                <a16:creationId xmlns:a16="http://schemas.microsoft.com/office/drawing/2014/main" id="{BAD83DC2-4F07-4E1C-BC89-B25E077AA74C}"/>
               </a:ext>
             </a:extLst>
           </p:cNvPr>
@@ -8770,7 +8770,7 @@
           <p:cNvPr id="5" name="s6-identity">
             <a:extLst xmlns:a="http://schemas.openxmlformats.org/drawingml/2006/main">
               <a:ext uri="{FF2B5EF4-FFF2-40B4-BE49-F238E27FC236}">
-                <a16:creationId xmlns:a16="http://schemas.microsoft.com/office/drawing/2014/main" id="{E854D841-5BCD-43D0-ACEF-AB4B7FAE8E50}"/>
+                <a16:creationId xmlns:a16="http://schemas.microsoft.com/office/drawing/2014/main" id="{CA25EBCF-5DA0-4B8E-8F52-355F45AEA943}"/>
               </a:ext>
             </a:extLst>
           </p:cNvPr>
@@ -8828,7 +8828,7 @@
           <p:cNvPr id="6" name="core-no-0">
             <a:extLst xmlns:a="http://schemas.openxmlformats.org/drawingml/2006/main">
               <a:ext uri="{FF2B5EF4-FFF2-40B4-BE49-F238E27FC236}">
-                <a16:creationId xmlns:a16="http://schemas.microsoft.com/office/drawing/2014/main" id="{D93AA7F6-787C-4BDB-BD0A-3EED3CA7904B}"/>
+                <a16:creationId xmlns:a16="http://schemas.microsoft.com/office/drawing/2014/main" id="{741C0624-200D-4348-9B33-8BD9FFBAFCED}"/>
               </a:ext>
             </a:extLst>
           </p:cNvPr>
@@ -8886,7 +8886,7 @@
           <p:cNvPr id="7" name="core-label-0">
             <a:extLst xmlns:a="http://schemas.openxmlformats.org/drawingml/2006/main">
               <a:ext uri="{FF2B5EF4-FFF2-40B4-BE49-F238E27FC236}">
-                <a16:creationId xmlns:a16="http://schemas.microsoft.com/office/drawing/2014/main" id="{7BAAC68B-3567-4D7D-A8C3-319913690C02}"/>
+                <a16:creationId xmlns:a16="http://schemas.microsoft.com/office/drawing/2014/main" id="{3D1B4BF3-4362-4AF8-B28F-8A5E3E0316F3}"/>
               </a:ext>
             </a:extLst>
           </p:cNvPr>
@@ -8944,7 +8944,7 @@
           <p:cNvPr id="8" name="core-body-0">
             <a:extLst xmlns:a="http://schemas.openxmlformats.org/drawingml/2006/main">
               <a:ext uri="{FF2B5EF4-FFF2-40B4-BE49-F238E27FC236}">
-                <a16:creationId xmlns:a16="http://schemas.microsoft.com/office/drawing/2014/main" id="{9EDD99A6-4F03-46A5-90A4-B00C09D1DA98}"/>
+                <a16:creationId xmlns:a16="http://schemas.microsoft.com/office/drawing/2014/main" id="{564E5174-A794-4BBC-B1F4-EFB0A7A8F418}"/>
               </a:ext>
             </a:extLst>
           </p:cNvPr>
@@ -9008,7 +9008,7 @@
           <p:cNvPr id="9" name="core-no-1">
             <a:extLst xmlns:a="http://schemas.openxmlformats.org/drawingml/2006/main">
               <a:ext uri="{FF2B5EF4-FFF2-40B4-BE49-F238E27FC236}">
-                <a16:creationId xmlns:a16="http://schemas.microsoft.com/office/drawing/2014/main" id="{56AAF2A3-E844-4792-B56C-7F80F42C8CF1}"/>
+                <a16:creationId xmlns:a16="http://schemas.microsoft.com/office/drawing/2014/main" id="{7F14837F-E549-4EF5-8A5D-4355836701EC}"/>
               </a:ext>
             </a:extLst>
           </p:cNvPr>
@@ -9066,7 +9066,7 @@
           <p:cNvPr id="10" name="core-body-1">
             <a:extLst xmlns:a="http://schemas.openxmlformats.org/drawingml/2006/main">
               <a:ext uri="{FF2B5EF4-FFF2-40B4-BE49-F238E27FC236}">
-                <a16:creationId xmlns:a16="http://schemas.microsoft.com/office/drawing/2014/main" id="{D7C6BB8E-10BA-420C-8B92-466DEC6B3A68}"/>
+                <a16:creationId xmlns:a16="http://schemas.microsoft.com/office/drawing/2014/main" id="{DE03C108-1BF1-4A44-A22E-F9EAC65D90CD}"/>
               </a:ext>
             </a:extLst>
           </p:cNvPr>
@@ -9130,7 +9130,7 @@
           <p:cNvPr id="11" name="core-no-2">
             <a:extLst xmlns:a="http://schemas.openxmlformats.org/drawingml/2006/main">
               <a:ext uri="{FF2B5EF4-FFF2-40B4-BE49-F238E27FC236}">
-                <a16:creationId xmlns:a16="http://schemas.microsoft.com/office/drawing/2014/main" id="{51D04044-C3A8-4346-9052-1DFD7C08CEBE}"/>
+                <a16:creationId xmlns:a16="http://schemas.microsoft.com/office/drawing/2014/main" id="{13914CB4-6399-451A-8BF2-C9E8510AF476}"/>
               </a:ext>
             </a:extLst>
           </p:cNvPr>
@@ -9188,7 +9188,7 @@
           <p:cNvPr id="12" name="core-body-2">
             <a:extLst xmlns:a="http://schemas.openxmlformats.org/drawingml/2006/main">
               <a:ext uri="{FF2B5EF4-FFF2-40B4-BE49-F238E27FC236}">
-                <a16:creationId xmlns:a16="http://schemas.microsoft.com/office/drawing/2014/main" id="{D186E3F3-67DB-4185-87F0-190C6897897A}"/>
+                <a16:creationId xmlns:a16="http://schemas.microsoft.com/office/drawing/2014/main" id="{54FD1751-B689-41C6-9313-C63089289D7F}"/>
               </a:ext>
             </a:extLst>
           </p:cNvPr>
@@ -9252,7 +9252,7 @@
           <p:cNvPr id="13" name="s6-takeaway-rule">
             <a:extLst xmlns:a="http://schemas.openxmlformats.org/drawingml/2006/main">
               <a:ext uri="{FF2B5EF4-FFF2-40B4-BE49-F238E27FC236}">
-                <a16:creationId xmlns:a16="http://schemas.microsoft.com/office/drawing/2014/main" id="{6293B82A-220E-49D2-8C37-6F6A182D536A}"/>
+                <a16:creationId xmlns:a16="http://schemas.microsoft.com/office/drawing/2014/main" id="{8E906D02-73E2-4ED4-8506-F4F56F3164A0}"/>
               </a:ext>
             </a:extLst>
           </p:cNvPr>
@@ -9285,7 +9285,7 @@
           <p:cNvPr id="14" name="s6-takeaway">
             <a:extLst xmlns:a="http://schemas.openxmlformats.org/drawingml/2006/main">
               <a:ext uri="{FF2B5EF4-FFF2-40B4-BE49-F238E27FC236}">
-                <a16:creationId xmlns:a16="http://schemas.microsoft.com/office/drawing/2014/main" id="{4FABBDBA-A74E-43A0-A427-0E837C07C1C9}"/>
+                <a16:creationId xmlns:a16="http://schemas.microsoft.com/office/drawing/2014/main" id="{AEA446DE-90F1-4F66-8BE1-C0BFDE474D94}"/>
               </a:ext>
             </a:extLst>
           </p:cNvPr>
@@ -9341,7 +9341,7 @@
     </p:spTree>
     <p:extLst>
       <p:ext uri="{BB962C8B-B14F-4D97-AF65-F5344CB8AC3E}">
-        <p14:creationId xmlns:p14="http://schemas.microsoft.com/office/powerpoint/2010/main" val="582536619"/>
+        <p14:creationId xmlns:p14="http://schemas.microsoft.com/office/powerpoint/2010/main" val="1662975864"/>
       </p:ext>
     </p:extLst>
   </p:cSld>
@@ -9372,7 +9372,7 @@
           <p:cNvPr id="1" name="s7-rule">
             <a:extLst xmlns:a="http://schemas.openxmlformats.org/drawingml/2006/main">
               <a:ext uri="{FF2B5EF4-FFF2-40B4-BE49-F238E27FC236}">
-                <a16:creationId xmlns:a16="http://schemas.microsoft.com/office/drawing/2014/main" id="{66E888D2-C592-4834-BFEB-9BE6BFDF3B17}"/>
+                <a16:creationId xmlns:a16="http://schemas.microsoft.com/office/drawing/2014/main" id="{AA5DE1B5-7916-4C74-AE55-D40B5362F7C5}"/>
               </a:ext>
             </a:extLst>
           </p:cNvPr>
@@ -9405,7 +9405,7 @@
           <p:cNvPr id="2" name="s7-eyebrow">
             <a:extLst xmlns:a="http://schemas.openxmlformats.org/drawingml/2006/main">
               <a:ext uri="{FF2B5EF4-FFF2-40B4-BE49-F238E27FC236}">
-                <a16:creationId xmlns:a16="http://schemas.microsoft.com/office/drawing/2014/main" id="{118749B2-2793-49C1-8924-46562BFB22FE}"/>
+                <a16:creationId xmlns:a16="http://schemas.microsoft.com/office/drawing/2014/main" id="{85753D22-1A75-4996-8B9E-C5F13F773790}"/>
               </a:ext>
             </a:extLst>
           </p:cNvPr>
@@ -9463,7 +9463,7 @@
           <p:cNvPr id="3" name="s7-title">
             <a:extLst xmlns:a="http://schemas.openxmlformats.org/drawingml/2006/main">
               <a:ext uri="{FF2B5EF4-FFF2-40B4-BE49-F238E27FC236}">
-                <a16:creationId xmlns:a16="http://schemas.microsoft.com/office/drawing/2014/main" id="{25CAA764-BC8A-4C1D-B1B9-C60D9011CB21}"/>
+                <a16:creationId xmlns:a16="http://schemas.microsoft.com/office/drawing/2014/main" id="{71A391FD-69F6-43A6-BD08-96600978E222}"/>
               </a:ext>
             </a:extLst>
           </p:cNvPr>
@@ -9521,7 +9521,7 @@
           <p:cNvPr id="4" name="s7-footer">
             <a:extLst xmlns:a="http://schemas.openxmlformats.org/drawingml/2006/main">
               <a:ext uri="{FF2B5EF4-FFF2-40B4-BE49-F238E27FC236}">
-                <a16:creationId xmlns:a16="http://schemas.microsoft.com/office/drawing/2014/main" id="{E7A8785A-EC4B-4648-8933-5C4807A213A9}"/>
+                <a16:creationId xmlns:a16="http://schemas.microsoft.com/office/drawing/2014/main" id="{85719B76-1BFB-45E1-B58E-BEA93F59275E}"/>
               </a:ext>
             </a:extLst>
           </p:cNvPr>
@@ -9552,7 +9552,7 @@
           <p:cNvPr id="5" name="s7-identity">
             <a:extLst xmlns:a="http://schemas.openxmlformats.org/drawingml/2006/main">
               <a:ext uri="{FF2B5EF4-FFF2-40B4-BE49-F238E27FC236}">
-                <a16:creationId xmlns:a16="http://schemas.microsoft.com/office/drawing/2014/main" id="{CC39B944-A0ED-4E25-B762-034B0068AFB4}"/>
+                <a16:creationId xmlns:a16="http://schemas.microsoft.com/office/drawing/2014/main" id="{3FFCD3C5-890D-4D60-B706-28CF7EC40DB6}"/>
               </a:ext>
             </a:extLst>
           </p:cNvPr>
@@ -9610,7 +9610,7 @@
           <p:cNvPr id="6" name="core-no-0">
             <a:extLst xmlns:a="http://schemas.openxmlformats.org/drawingml/2006/main">
               <a:ext uri="{FF2B5EF4-FFF2-40B4-BE49-F238E27FC236}">
-                <a16:creationId xmlns:a16="http://schemas.microsoft.com/office/drawing/2014/main" id="{BE472A70-243B-43A9-8C22-619E6A6FB8F9}"/>
+                <a16:creationId xmlns:a16="http://schemas.microsoft.com/office/drawing/2014/main" id="{A9DE614F-5A83-4EED-8D24-1A87AACD8F86}"/>
               </a:ext>
             </a:extLst>
           </p:cNvPr>
@@ -9668,7 +9668,7 @@
           <p:cNvPr id="7" name="core-label-0">
             <a:extLst xmlns:a="http://schemas.openxmlformats.org/drawingml/2006/main">
               <a:ext uri="{FF2B5EF4-FFF2-40B4-BE49-F238E27FC236}">
-                <a16:creationId xmlns:a16="http://schemas.microsoft.com/office/drawing/2014/main" id="{A9F4DB4E-669D-4432-AF75-F255926EAB07}"/>
+                <a16:creationId xmlns:a16="http://schemas.microsoft.com/office/drawing/2014/main" id="{EA22BD9C-612E-4184-99E5-6FBF6533A0D8}"/>
               </a:ext>
             </a:extLst>
           </p:cNvPr>
@@ -9726,7 +9726,7 @@
           <p:cNvPr id="8" name="core-body-0">
             <a:extLst xmlns:a="http://schemas.openxmlformats.org/drawingml/2006/main">
               <a:ext uri="{FF2B5EF4-FFF2-40B4-BE49-F238E27FC236}">
-                <a16:creationId xmlns:a16="http://schemas.microsoft.com/office/drawing/2014/main" id="{E0149E21-CE4A-43C3-983A-0358E5ABEB21}"/>
+                <a16:creationId xmlns:a16="http://schemas.microsoft.com/office/drawing/2014/main" id="{CF77B310-2112-4176-8D86-A50DB28590A5}"/>
               </a:ext>
             </a:extLst>
           </p:cNvPr>
@@ -9790,7 +9790,7 @@
           <p:cNvPr id="9" name="s7-takeaway-rule">
             <a:extLst xmlns:a="http://schemas.openxmlformats.org/drawingml/2006/main">
               <a:ext uri="{FF2B5EF4-FFF2-40B4-BE49-F238E27FC236}">
-                <a16:creationId xmlns:a16="http://schemas.microsoft.com/office/drawing/2014/main" id="{7699BC5C-2269-4A3F-89EF-6A3413F63FB8}"/>
+                <a16:creationId xmlns:a16="http://schemas.microsoft.com/office/drawing/2014/main" id="{74640F6D-3EDE-483D-981E-E8E355BC60AA}"/>
               </a:ext>
             </a:extLst>
           </p:cNvPr>
@@ -9823,7 +9823,7 @@
           <p:cNvPr id="10" name="s7-takeaway">
             <a:extLst xmlns:a="http://schemas.openxmlformats.org/drawingml/2006/main">
               <a:ext uri="{FF2B5EF4-FFF2-40B4-BE49-F238E27FC236}">
-                <a16:creationId xmlns:a16="http://schemas.microsoft.com/office/drawing/2014/main" id="{B690B7E7-8AC1-4F38-A048-1D035C0B8340}"/>
+                <a16:creationId xmlns:a16="http://schemas.microsoft.com/office/drawing/2014/main" id="{ED161437-F0A0-425F-90DC-215FE3466989}"/>
               </a:ext>
             </a:extLst>
           </p:cNvPr>
@@ -9879,7 +9879,7 @@
     </p:spTree>
     <p:extLst>
       <p:ext uri="{BB962C8B-B14F-4D97-AF65-F5344CB8AC3E}">
-        <p14:creationId xmlns:p14="http://schemas.microsoft.com/office/powerpoint/2010/main" val="1600926682"/>
+        <p14:creationId xmlns:p14="http://schemas.microsoft.com/office/powerpoint/2010/main" val="979610321"/>
       </p:ext>
     </p:extLst>
   </p:cSld>
@@ -9910,7 +9910,7 @@
           <p:cNvPr id="1" name="s8-rule">
             <a:extLst xmlns:a="http://schemas.openxmlformats.org/drawingml/2006/main">
               <a:ext uri="{FF2B5EF4-FFF2-40B4-BE49-F238E27FC236}">
-                <a16:creationId xmlns:a16="http://schemas.microsoft.com/office/drawing/2014/main" id="{B58CAD5C-227B-452F-B831-738929606D1A}"/>
+                <a16:creationId xmlns:a16="http://schemas.microsoft.com/office/drawing/2014/main" id="{A4FB5F85-B349-4828-BDD6-C8AE2A782107}"/>
               </a:ext>
             </a:extLst>
           </p:cNvPr>
@@ -9943,7 +9943,7 @@
           <p:cNvPr id="2" name="s8-eyebrow">
             <a:extLst xmlns:a="http://schemas.openxmlformats.org/drawingml/2006/main">
               <a:ext uri="{FF2B5EF4-FFF2-40B4-BE49-F238E27FC236}">
-                <a16:creationId xmlns:a16="http://schemas.microsoft.com/office/drawing/2014/main" id="{FD960A2A-FE3D-4FD5-BB97-811920406125}"/>
+                <a16:creationId xmlns:a16="http://schemas.microsoft.com/office/drawing/2014/main" id="{42545A2A-B077-437E-95CA-1611A8FB0B85}"/>
               </a:ext>
             </a:extLst>
           </p:cNvPr>
@@ -10001,7 +10001,7 @@
           <p:cNvPr id="3" name="s8-title">
             <a:extLst xmlns:a="http://schemas.openxmlformats.org/drawingml/2006/main">
               <a:ext uri="{FF2B5EF4-FFF2-40B4-BE49-F238E27FC236}">
-                <a16:creationId xmlns:a16="http://schemas.microsoft.com/office/drawing/2014/main" id="{913C5C20-FE58-4EEA-9DED-BD5ED69E9698}"/>
+                <a16:creationId xmlns:a16="http://schemas.microsoft.com/office/drawing/2014/main" id="{7B3103C0-9BAF-40B8-98D0-1F6EA2250306}"/>
               </a:ext>
             </a:extLst>
           </p:cNvPr>
@@ -10059,7 +10059,7 @@
           <p:cNvPr id="4" name="s8-footer">
             <a:extLst xmlns:a="http://schemas.openxmlformats.org/drawingml/2006/main">
               <a:ext uri="{FF2B5EF4-FFF2-40B4-BE49-F238E27FC236}">
-                <a16:creationId xmlns:a16="http://schemas.microsoft.com/office/drawing/2014/main" id="{B0B050CC-0722-4414-B262-E3F8097136B7}"/>
+                <a16:creationId xmlns:a16="http://schemas.microsoft.com/office/drawing/2014/main" id="{4788D6FC-A8D4-421A-B627-CB7A3B41232C}"/>
               </a:ext>
             </a:extLst>
           </p:cNvPr>
@@ -10090,7 +10090,7 @@
           <p:cNvPr id="5" name="s8-identity">
             <a:extLst xmlns:a="http://schemas.openxmlformats.org/drawingml/2006/main">
               <a:ext uri="{FF2B5EF4-FFF2-40B4-BE49-F238E27FC236}">
-                <a16:creationId xmlns:a16="http://schemas.microsoft.com/office/drawing/2014/main" id="{0C9AE0E9-4AAD-454A-9E28-D049B51D7A90}"/>
+                <a16:creationId xmlns:a16="http://schemas.microsoft.com/office/drawing/2014/main" id="{10053A9D-72D9-44A7-8607-8DF2D3C2FB07}"/>
               </a:ext>
             </a:extLst>
           </p:cNvPr>
@@ -10148,7 +10148,7 @@
           <p:cNvPr id="6" name="core-no-0">
             <a:extLst xmlns:a="http://schemas.openxmlformats.org/drawingml/2006/main">
               <a:ext uri="{FF2B5EF4-FFF2-40B4-BE49-F238E27FC236}">
-                <a16:creationId xmlns:a16="http://schemas.microsoft.com/office/drawing/2014/main" id="{6D493F50-E226-413A-9EDB-2E802D0AB9F1}"/>
+                <a16:creationId xmlns:a16="http://schemas.microsoft.com/office/drawing/2014/main" id="{E0CB08E2-557F-453D-BEE2-B7FE7D585C10}"/>
               </a:ext>
             </a:extLst>
           </p:cNvPr>
@@ -10206,7 +10206,7 @@
           <p:cNvPr id="7" name="core-label-0">
             <a:extLst xmlns:a="http://schemas.openxmlformats.org/drawingml/2006/main">
               <a:ext uri="{FF2B5EF4-FFF2-40B4-BE49-F238E27FC236}">
-                <a16:creationId xmlns:a16="http://schemas.microsoft.com/office/drawing/2014/main" id="{B89F005E-ABE3-43E3-B38B-597D2E03C43B}"/>
+                <a16:creationId xmlns:a16="http://schemas.microsoft.com/office/drawing/2014/main" id="{A4702A66-6CD5-4FC1-962E-84EAF0D97459}"/>
               </a:ext>
             </a:extLst>
           </p:cNvPr>
@@ -10264,7 +10264,7 @@
           <p:cNvPr id="8" name="core-body-0">
             <a:extLst xmlns:a="http://schemas.openxmlformats.org/drawingml/2006/main">
               <a:ext uri="{FF2B5EF4-FFF2-40B4-BE49-F238E27FC236}">
-                <a16:creationId xmlns:a16="http://schemas.microsoft.com/office/drawing/2014/main" id="{D040D97A-71A4-41FF-8038-C955129BC4DF}"/>
+                <a16:creationId xmlns:a16="http://schemas.microsoft.com/office/drawing/2014/main" id="{C1745AB7-1052-4A29-BC73-8684878C680F}"/>
               </a:ext>
             </a:extLst>
           </p:cNvPr>
@@ -10328,7 +10328,7 @@
           <p:cNvPr id="9" name="core-no-1">
             <a:extLst xmlns:a="http://schemas.openxmlformats.org/drawingml/2006/main">
               <a:ext uri="{FF2B5EF4-FFF2-40B4-BE49-F238E27FC236}">
-                <a16:creationId xmlns:a16="http://schemas.microsoft.com/office/drawing/2014/main" id="{076F6DF3-A5CE-4455-87F9-CAA949DC6734}"/>
+                <a16:creationId xmlns:a16="http://schemas.microsoft.com/office/drawing/2014/main" id="{88DB8DDE-2A1A-4BD3-92B9-ECFE4EE0ACF6}"/>
               </a:ext>
             </a:extLst>
           </p:cNvPr>
@@ -10386,7 +10386,7 @@
           <p:cNvPr id="10" name="core-body-1">
             <a:extLst xmlns:a="http://schemas.openxmlformats.org/drawingml/2006/main">
               <a:ext uri="{FF2B5EF4-FFF2-40B4-BE49-F238E27FC236}">
-                <a16:creationId xmlns:a16="http://schemas.microsoft.com/office/drawing/2014/main" id="{3BEDE154-A826-4E6B-982F-83B7050862BC}"/>
+                <a16:creationId xmlns:a16="http://schemas.microsoft.com/office/drawing/2014/main" id="{005E9229-D394-42C5-B365-7EC192B94D26}"/>
               </a:ext>
             </a:extLst>
           </p:cNvPr>
@@ -10450,7 +10450,7 @@
           <p:cNvPr id="11" name="s8-takeaway-rule">
             <a:extLst xmlns:a="http://schemas.openxmlformats.org/drawingml/2006/main">
               <a:ext uri="{FF2B5EF4-FFF2-40B4-BE49-F238E27FC236}">
-                <a16:creationId xmlns:a16="http://schemas.microsoft.com/office/drawing/2014/main" id="{BB5E5FD4-F702-441C-904A-35F7582FCEF5}"/>
+                <a16:creationId xmlns:a16="http://schemas.microsoft.com/office/drawing/2014/main" id="{861DC70A-A27F-4EA5-8FC0-BF9914263586}"/>
               </a:ext>
             </a:extLst>
           </p:cNvPr>
@@ -10483,7 +10483,7 @@
           <p:cNvPr id="12" name="s8-takeaway">
             <a:extLst xmlns:a="http://schemas.openxmlformats.org/drawingml/2006/main">
               <a:ext uri="{FF2B5EF4-FFF2-40B4-BE49-F238E27FC236}">
-                <a16:creationId xmlns:a16="http://schemas.microsoft.com/office/drawing/2014/main" id="{5EB24002-ED3A-4BEB-9DC8-E162D9CE9D1A}"/>
+                <a16:creationId xmlns:a16="http://schemas.microsoft.com/office/drawing/2014/main" id="{E2448097-8492-43FD-8190-C691DB011E55}"/>
               </a:ext>
             </a:extLst>
           </p:cNvPr>
@@ -10539,7 +10539,7 @@
     </p:spTree>
     <p:extLst>
       <p:ext uri="{BB962C8B-B14F-4D97-AF65-F5344CB8AC3E}">
-        <p14:creationId xmlns:p14="http://schemas.microsoft.com/office/powerpoint/2010/main" val="2137213315"/>
+        <p14:creationId xmlns:p14="http://schemas.microsoft.com/office/powerpoint/2010/main" val="229504397"/>
       </p:ext>
     </p:extLst>
   </p:cSld>
@@ -10570,7 +10570,7 @@
           <p:cNvPr id="1" name="s9-rule">
             <a:extLst xmlns:a="http://schemas.openxmlformats.org/drawingml/2006/main">
               <a:ext uri="{FF2B5EF4-FFF2-40B4-BE49-F238E27FC236}">
-                <a16:creationId xmlns:a16="http://schemas.microsoft.com/office/drawing/2014/main" id="{4F5DF39B-5F07-492C-8AD4-10CF1B873C28}"/>
+                <a16:creationId xmlns:a16="http://schemas.microsoft.com/office/drawing/2014/main" id="{1B8BB58C-974A-4067-8D26-064AF5C43666}"/>
               </a:ext>
             </a:extLst>
           </p:cNvPr>
@@ -10603,7 +10603,7 @@
           <p:cNvPr id="2" name="s9-eyebrow">
             <a:extLst xmlns:a="http://schemas.openxmlformats.org/drawingml/2006/main">
               <a:ext uri="{FF2B5EF4-FFF2-40B4-BE49-F238E27FC236}">
-                <a16:creationId xmlns:a16="http://schemas.microsoft.com/office/drawing/2014/main" id="{0EFE127C-023F-4D20-9BD1-CE8B6A826C24}"/>
+                <a16:creationId xmlns:a16="http://schemas.microsoft.com/office/drawing/2014/main" id="{96F8AE14-DC0C-438F-A40E-081931ECAEC5}"/>
               </a:ext>
             </a:extLst>
           </p:cNvPr>
@@ -10661,7 +10661,7 @@
           <p:cNvPr id="3" name="s9-title">
             <a:extLst xmlns:a="http://schemas.openxmlformats.org/drawingml/2006/main">
               <a:ext uri="{FF2B5EF4-FFF2-40B4-BE49-F238E27FC236}">
-                <a16:creationId xmlns:a16="http://schemas.microsoft.com/office/drawing/2014/main" id="{F6BE5B32-4EF4-4246-B549-39865C03ED40}"/>
+                <a16:creationId xmlns:a16="http://schemas.microsoft.com/office/drawing/2014/main" id="{94FAD31A-47EE-4049-856C-D48A4A928DE1}"/>
               </a:ext>
             </a:extLst>
           </p:cNvPr>
@@ -10719,7 +10719,7 @@
           <p:cNvPr id="4" name="s9-footer">
             <a:extLst xmlns:a="http://schemas.openxmlformats.org/drawingml/2006/main">
               <a:ext uri="{FF2B5EF4-FFF2-40B4-BE49-F238E27FC236}">
-                <a16:creationId xmlns:a16="http://schemas.microsoft.com/office/drawing/2014/main" id="{06F12793-829C-4549-B87C-F9D69E3ED56B}"/>
+                <a16:creationId xmlns:a16="http://schemas.microsoft.com/office/drawing/2014/main" id="{3DD938AF-DB7D-4EA1-BA04-D6156C7883B5}"/>
               </a:ext>
             </a:extLst>
           </p:cNvPr>
@@ -10750,7 +10750,7 @@
           <p:cNvPr id="5" name="s9-identity">
             <a:extLst xmlns:a="http://schemas.openxmlformats.org/drawingml/2006/main">
               <a:ext uri="{FF2B5EF4-FFF2-40B4-BE49-F238E27FC236}">
-                <a16:creationId xmlns:a16="http://schemas.microsoft.com/office/drawing/2014/main" id="{1DCAADD3-1359-46DB-9D2F-E12A8A9F9144}"/>
+                <a16:creationId xmlns:a16="http://schemas.microsoft.com/office/drawing/2014/main" id="{33FC557F-2F21-45B8-85E1-CF9074AA26F4}"/>
               </a:ext>
             </a:extLst>
           </p:cNvPr>
@@ -10808,7 +10808,7 @@
           <p:cNvPr id="6" name="core-no-0">
             <a:extLst xmlns:a="http://schemas.openxmlformats.org/drawingml/2006/main">
               <a:ext uri="{FF2B5EF4-FFF2-40B4-BE49-F238E27FC236}">
-                <a16:creationId xmlns:a16="http://schemas.microsoft.com/office/drawing/2014/main" id="{E0E7EA11-11D5-4F2F-BC62-685B27E20E17}"/>
+                <a16:creationId xmlns:a16="http://schemas.microsoft.com/office/drawing/2014/main" id="{D4B09FE5-6107-42C2-8D39-F9737308DF80}"/>
               </a:ext>
             </a:extLst>
           </p:cNvPr>
@@ -10866,7 +10866,7 @@
           <p:cNvPr id="7" name="core-label-0">
             <a:extLst xmlns:a="http://schemas.openxmlformats.org/drawingml/2006/main">
               <a:ext uri="{FF2B5EF4-FFF2-40B4-BE49-F238E27FC236}">
-                <a16:creationId xmlns:a16="http://schemas.microsoft.com/office/drawing/2014/main" id="{2BD8A11A-2DD4-4238-ADE5-6FD162862EED}"/>
+                <a16:creationId xmlns:a16="http://schemas.microsoft.com/office/drawing/2014/main" id="{969D16B7-D5D2-4A77-BB44-763D3F672B67}"/>
               </a:ext>
             </a:extLst>
           </p:cNvPr>
@@ -10924,7 +10924,7 @@
           <p:cNvPr id="8" name="core-body-0">
             <a:extLst xmlns:a="http://schemas.openxmlformats.org/drawingml/2006/main">
               <a:ext uri="{FF2B5EF4-FFF2-40B4-BE49-F238E27FC236}">
-                <a16:creationId xmlns:a16="http://schemas.microsoft.com/office/drawing/2014/main" id="{DF1DD74B-EDA0-4BBB-A111-79D7F31691F6}"/>
+                <a16:creationId xmlns:a16="http://schemas.microsoft.com/office/drawing/2014/main" id="{C81F23E8-D8A7-474A-BCDB-DC17736CAC0F}"/>
               </a:ext>
             </a:extLst>
           </p:cNvPr>
@@ -10988,7 +10988,7 @@
           <p:cNvPr id="9" name="s9-takeaway-rule">
             <a:extLst xmlns:a="http://schemas.openxmlformats.org/drawingml/2006/main">
               <a:ext uri="{FF2B5EF4-FFF2-40B4-BE49-F238E27FC236}">
-                <a16:creationId xmlns:a16="http://schemas.microsoft.com/office/drawing/2014/main" id="{5F6332E6-E638-49AD-A6DD-BCA2F71A622B}"/>
+                <a16:creationId xmlns:a16="http://schemas.microsoft.com/office/drawing/2014/main" id="{14DF7AB1-50C3-4CCE-8D51-744D27D00259}"/>
               </a:ext>
             </a:extLst>
           </p:cNvPr>
@@ -11021,7 +11021,7 @@
           <p:cNvPr id="10" name="s9-takeaway">
             <a:extLst xmlns:a="http://schemas.openxmlformats.org/drawingml/2006/main">
               <a:ext uri="{FF2B5EF4-FFF2-40B4-BE49-F238E27FC236}">
-                <a16:creationId xmlns:a16="http://schemas.microsoft.com/office/drawing/2014/main" id="{B21566BA-CA7F-47DE-A114-5BC5DDE96FBE}"/>
+                <a16:creationId xmlns:a16="http://schemas.microsoft.com/office/drawing/2014/main" id="{052C4FC4-DF29-4DE4-A3CB-745BCCE5BF15}"/>
               </a:ext>
             </a:extLst>
           </p:cNvPr>
@@ -11077,7 +11077,7 @@
     </p:spTree>
     <p:extLst>
       <p:ext uri="{BB962C8B-B14F-4D97-AF65-F5344CB8AC3E}">
-        <p14:creationId xmlns:p14="http://schemas.microsoft.com/office/powerpoint/2010/main" val="1971170730"/>
+        <p14:creationId xmlns:p14="http://schemas.microsoft.com/office/powerpoint/2010/main" val="874478398"/>
       </p:ext>
     </p:extLst>
   </p:cSld>
